--- a/plugins/gradient-cio/assets/examples/gradient-idd-manager-performance-single.pptx
+++ b/plugins/gradient-cio/assets/examples/gradient-idd-manager-performance-single.pptx
@@ -13,6 +13,7 @@
     <ns0:sldId id="261" ns1:id="rId12"/>
     <ns0:sldId id="262" ns1:id="rId13"/>
     <ns0:sldId id="263" ns1:id="rId14"/>
+    <ns0:sldId id="264" ns1:id="rId15"/>
   </ns0:sldIdLst>
   <ns0:sldSz cx="12191695" cy="6858000" type="screen16x9"/>
   <ns0:notesSz cx="6858000" cy="9144000"/>
@@ -8350,7 +8351,7 @@
               <a:rPr>
                 <a:latin typeface="Inter"/>
               </a:rPr>
-              <a:t>Appendix A — Sources and methods</a:t>
+              <a:t>Appendix — Sources and methods</a:t>
             </a:r>
           </a:p>
         </p:txBody>
@@ -8490,7 +8491,7 @@
               <a:rPr>
                 <a:latin typeface="Inter"/>
               </a:rPr>
-              <a:t>07</a:t>
+              <a:t>A</a:t>
             </a:r>
           </a:p>
         </p:txBody>
@@ -8515,8 +8516,14 @@
               </a:tblPr>
               <a:tblGrid>
                 <a:gridCol w="2011680"/>
-                <a:gridCol w="4448556"/>
-                <a:gridCol w="4448556"/>
+                <a:gridCol w="1112139"/>
+                <a:gridCol w="1112139"/>
+                <a:gridCol w="1112139"/>
+                <a:gridCol w="1112139"/>
+                <a:gridCol w="1112139"/>
+                <a:gridCol w="1112139"/>
+                <a:gridCol w="1112139"/>
+                <a:gridCol w="1112139"/>
               </a:tblGrid>
               <a:tr h="584831">
                 <a:tc>
@@ -8590,7 +8597,169 @@
                         <a:rPr>
                           <a:latin typeface="Inter"/>
                         </a:rPr>
-                        <a:t>Tool</a:t>
+                        <a:t>Basis</a:t>
+                      </a:r>
+                    </a:p>
+                  </a:txBody>
+                  <a:tcPr marL="54864" marR="54864" marT="27432" marB="27432" anchor="ctr">
+                    <a:solidFill>
+                      <a:srgbClr val="0D1117"/>
+                    </a:solidFill>
+                  </a:tcPr>
+                </a:tc>
+                <a:tc>
+                  <a:txBody>
+                    <a:bodyPr/>
+                    <a:lstStyle/>
+                    <a:p>
+                      <a:pPr>
+                        <a:defRPr sz="750" b="1">
+                          <a:solidFill>
+                            <a:srgbClr val="FFFFFF"/>
+                          </a:solidFill>
+                          <a:latin typeface="Inter"/>
+                        </a:defRPr>
+                      </a:pPr>
+                      <a:r>
+                        <a:rPr>
+                          <a:latin typeface="Inter"/>
+                        </a:rPr>
+                        <a:t>Tool / view</a:t>
+                      </a:r>
+                    </a:p>
+                  </a:txBody>
+                  <a:tcPr marL="54864" marR="54864" marT="27432" marB="27432" anchor="ctr">
+                    <a:solidFill>
+                      <a:srgbClr val="0D1117"/>
+                    </a:solidFill>
+                  </a:tcPr>
+                </a:tc>
+                <a:tc>
+                  <a:txBody>
+                    <a:bodyPr/>
+                    <a:lstStyle/>
+                    <a:p>
+                      <a:pPr>
+                        <a:defRPr sz="750" b="1">
+                          <a:solidFill>
+                            <a:srgbClr val="FFFFFF"/>
+                          </a:solidFill>
+                          <a:latin typeface="Inter"/>
+                        </a:defRPr>
+                      </a:pPr>
+                      <a:r>
+                        <a:rPr>
+                          <a:latin typeface="Inter"/>
+                        </a:rPr>
+                        <a:t>Key parameters</a:t>
+                      </a:r>
+                    </a:p>
+                  </a:txBody>
+                  <a:tcPr marL="54864" marR="54864" marT="27432" marB="27432" anchor="ctr">
+                    <a:solidFill>
+                      <a:srgbClr val="0D1117"/>
+                    </a:solidFill>
+                  </a:tcPr>
+                </a:tc>
+                <a:tc>
+                  <a:txBody>
+                    <a:bodyPr/>
+                    <a:lstStyle/>
+                    <a:p>
+                      <a:pPr>
+                        <a:defRPr sz="750" b="1">
+                          <a:solidFill>
+                            <a:srgbClr val="FFFFFF"/>
+                          </a:solidFill>
+                          <a:latin typeface="Inter"/>
+                        </a:defRPr>
+                      </a:pPr>
+                      <a:r>
+                        <a:rPr>
+                          <a:latin typeface="Inter"/>
+                        </a:rPr>
+                        <a:t>As of</a:t>
+                      </a:r>
+                    </a:p>
+                  </a:txBody>
+                  <a:tcPr marL="54864" marR="54864" marT="27432" marB="27432" anchor="ctr">
+                    <a:solidFill>
+                      <a:srgbClr val="0D1117"/>
+                    </a:solidFill>
+                  </a:tcPr>
+                </a:tc>
+                <a:tc>
+                  <a:txBody>
+                    <a:bodyPr/>
+                    <a:lstStyle/>
+                    <a:p>
+                      <a:pPr>
+                        <a:defRPr sz="750" b="1">
+                          <a:solidFill>
+                            <a:srgbClr val="FFFFFF"/>
+                          </a:solidFill>
+                          <a:latin typeface="Inter"/>
+                        </a:defRPr>
+                      </a:pPr>
+                      <a:r>
+                        <a:rPr>
+                          <a:latin typeface="Inter"/>
+                        </a:rPr>
+                        <a:t>Data scope</a:t>
+                      </a:r>
+                    </a:p>
+                  </a:txBody>
+                  <a:tcPr marL="54864" marR="54864" marT="27432" marB="27432" anchor="ctr">
+                    <a:solidFill>
+                      <a:srgbClr val="0D1117"/>
+                    </a:solidFill>
+                  </a:tcPr>
+                </a:tc>
+                <a:tc>
+                  <a:txBody>
+                    <a:bodyPr/>
+                    <a:lstStyle/>
+                    <a:p>
+                      <a:pPr>
+                        <a:defRPr sz="750" b="1">
+                          <a:solidFill>
+                            <a:srgbClr val="FFFFFF"/>
+                          </a:solidFill>
+                          <a:latin typeface="Inter"/>
+                        </a:defRPr>
+                      </a:pPr>
+                      <a:r>
+                        <a:rPr>
+                          <a:latin typeface="Inter"/>
+                        </a:rPr>
+                        <a:t>Validation</a:t>
+                      </a:r>
+                    </a:p>
+                  </a:txBody>
+                  <a:tcPr marL="54864" marR="54864" marT="27432" marB="27432" anchor="ctr">
+                    <a:solidFill>
+                      <a:srgbClr val="0D1117"/>
+                    </a:solidFill>
+                  </a:tcPr>
+                </a:tc>
+                <a:tc>
+                  <a:txBody>
+                    <a:bodyPr/>
+                    <a:lstStyle/>
+                    <a:p>
+                      <a:pPr>
+                        <a:defRPr sz="750" b="1">
+                          <a:solidFill>
+                            <a:srgbClr val="FFFFFF"/>
+                          </a:solidFill>
+                          <a:latin typeface="Inter"/>
+                        </a:defRPr>
+                      </a:pPr>
+                      <a:r>
+                        <a:rPr>
+                          <a:latin typeface="Inter"/>
+                        </a:rPr>
+                        <a:t>Digest</a:t>
                       </a:r>
                     </a:p>
                   </a:txBody>
@@ -8608,7 +8777,7 @@
                     <a:lstStyle/>
                     <a:p>
                       <a:pPr>
-                        <a:defRPr sz="800" b="1">
+                        <a:defRPr sz="650" b="1">
                           <a:solidFill>
                             <a:srgbClr val="0D1117"/>
                           </a:solidFill>
@@ -8635,7 +8804,7 @@
                     <a:lstStyle/>
                     <a:p>
                       <a:pPr>
-                        <a:defRPr sz="800" b="0">
+                        <a:defRPr sz="650" b="0">
                           <a:solidFill>
                             <a:srgbClr val="0D1117"/>
                           </a:solidFill>
@@ -8662,7 +8831,34 @@
                     <a:lstStyle/>
                     <a:p>
                       <a:pPr>
-                        <a:defRPr sz="800" b="0">
+                        <a:defRPr sz="650" b="0">
+                          <a:solidFill>
+                            <a:srgbClr val="0D1117"/>
+                          </a:solidFill>
+                          <a:latin typeface="Inter"/>
+                        </a:defRPr>
+                      </a:pPr>
+                      <a:r>
+                        <a:rPr>
+                          <a:latin typeface="Inter"/>
+                        </a:rPr>
+                        <a:t>gradient_tool</a:t>
+                      </a:r>
+                    </a:p>
+                  </a:txBody>
+                  <a:tcPr marL="54864" marR="54864" marT="27432" marB="27432" anchor="ctr">
+                    <a:solidFill>
+                      <a:srgbClr val="FFFFFF"/>
+                    </a:solidFill>
+                  </a:tcPr>
+                </a:tc>
+                <a:tc>
+                  <a:txBody>
+                    <a:bodyPr/>
+                    <a:lstStyle/>
+                    <a:p>
+                      <a:pPr>
+                        <a:defRPr sz="650" b="0">
                           <a:solidFill>
                             <a:srgbClr val="0D1117"/>
                           </a:solidFill>
@@ -8683,6 +8879,141 @@
                     </a:solidFill>
                   </a:tcPr>
                 </a:tc>
+                <a:tc>
+                  <a:txBody>
+                    <a:bodyPr/>
+                    <a:lstStyle/>
+                    <a:p>
+                      <a:pPr>
+                        <a:defRPr sz="650" b="0">
+                          <a:solidFill>
+                            <a:srgbClr val="0D1117"/>
+                          </a:solidFill>
+                          <a:latin typeface="Inter"/>
+                        </a:defRPr>
+                      </a:pPr>
+                      <a:r>
+                        <a:rPr>
+                          <a:latin typeface="Inter"/>
+                        </a:rPr>
+                        <a:t>fixture=true</a:t>
+                      </a:r>
+                    </a:p>
+                  </a:txBody>
+                  <a:tcPr marL="54864" marR="54864" marT="27432" marB="27432" anchor="ctr">
+                    <a:solidFill>
+                      <a:srgbClr val="FFFFFF"/>
+                    </a:solidFill>
+                  </a:tcPr>
+                </a:tc>
+                <a:tc>
+                  <a:txBody>
+                    <a:bodyPr/>
+                    <a:lstStyle/>
+                    <a:p>
+                      <a:pPr>
+                        <a:defRPr sz="650" b="0">
+                          <a:solidFill>
+                            <a:srgbClr val="0D1117"/>
+                          </a:solidFill>
+                          <a:latin typeface="Inter"/>
+                        </a:defRPr>
+                      </a:pPr>
+                      <a:r>
+                        <a:rPr>
+                          <a:latin typeface="Inter"/>
+                        </a:rPr>
+                        <a:t>2025-12-31</a:t>
+                      </a:r>
+                    </a:p>
+                  </a:txBody>
+                  <a:tcPr marL="54864" marR="54864" marT="27432" marB="27432" anchor="ctr">
+                    <a:solidFill>
+                      <a:srgbClr val="FFFFFF"/>
+                    </a:solidFill>
+                  </a:tcPr>
+                </a:tc>
+                <a:tc>
+                  <a:txBody>
+                    <a:bodyPr/>
+                    <a:lstStyle/>
+                    <a:p>
+                      <a:pPr>
+                        <a:defRPr sz="650" b="0">
+                          <a:solidFill>
+                            <a:srgbClr val="0D1117"/>
+                          </a:solidFill>
+                          <a:latin typeface="Inter"/>
+                        </a:defRPr>
+                      </a:pPr>
+                      <a:r>
+                        <a:rPr>
+                          <a:latin typeface="Inter"/>
+                        </a:rPr>
+                        <a:t>Gradient-governed TEST evidence</a:t>
+                      </a:r>
+                    </a:p>
+                  </a:txBody>
+                  <a:tcPr marL="54864" marR="54864" marT="27432" marB="27432" anchor="ctr">
+                    <a:solidFill>
+                      <a:srgbClr val="FFFFFF"/>
+                    </a:solidFill>
+                  </a:tcPr>
+                </a:tc>
+                <a:tc>
+                  <a:txBody>
+                    <a:bodyPr/>
+                    <a:lstStyle/>
+                    <a:p>
+                      <a:pPr>
+                        <a:defRPr sz="650" b="0">
+                          <a:solidFill>
+                            <a:srgbClr val="0D1117"/>
+                          </a:solidFill>
+                          <a:latin typeface="Inter"/>
+                        </a:defRPr>
+                      </a:pPr>
+                      <a:r>
+                        <a:rPr>
+                          <a:latin typeface="Inter"/>
+                        </a:rPr>
+                        <a:t>passed</a:t>
+                      </a:r>
+                    </a:p>
+                  </a:txBody>
+                  <a:tcPr marL="54864" marR="54864" marT="27432" marB="27432" anchor="ctr">
+                    <a:solidFill>
+                      <a:srgbClr val="FFFFFF"/>
+                    </a:solidFill>
+                  </a:tcPr>
+                </a:tc>
+                <a:tc>
+                  <a:txBody>
+                    <a:bodyPr/>
+                    <a:lstStyle/>
+                    <a:p>
+                      <a:pPr>
+                        <a:defRPr sz="650" b="0">
+                          <a:solidFill>
+                            <a:srgbClr val="0D1117"/>
+                          </a:solidFill>
+                          <a:latin typeface="Inter"/>
+                        </a:defRPr>
+                      </a:pPr>
+                      <a:r>
+                        <a:rPr>
+                          <a:latin typeface="Inter"/>
+                        </a:rPr>
+                        <a:t>sha256:aaaaaaaaaaaaaaaaaaaaaaaaaaaaaaaaaaaaaaaaaaaaaaaaaaaaaaaaaaaaaaaa</a:t>
+                      </a:r>
+                    </a:p>
+                  </a:txBody>
+                  <a:tcPr marL="54864" marR="54864" marT="27432" marB="27432" anchor="ctr">
+                    <a:solidFill>
+                      <a:srgbClr val="FFFFFF"/>
+                    </a:solidFill>
+                  </a:tcPr>
+                </a:tc>
               </a:tr>
             </a:tbl>
           </a:graphicData>
@@ -9223,6 +9554,654 @@
                 <a:latin typeface="Inter"/>
               </a:rPr>
               <a:t>8</a:t>
+            </a:r>
+          </a:p>
+        </p:txBody>
+      </p:sp>
+    </p:spTree>
+  </p:cSld>
+  <p:clrMapOvr>
+    <a:masterClrMapping/>
+  </p:clrMapOvr>
+</p:sld>
+</file>
+
+<file path=ppt/slides/slide9.xml><?xml version="1.0" encoding="utf-8"?>
+<p:sld xmlns:a="http://schemas.openxmlformats.org/drawingml/2006/main" xmlns:p="http://schemas.openxmlformats.org/presentationml/2006/main" xmlns:r="http://schemas.openxmlformats.org/officeDocument/2006/relationships">
+  <p:cSld>
+    <p:spTree>
+      <p:nvGrpSpPr>
+        <p:cNvPr id="1" name=""/>
+        <p:cNvGrpSpPr/>
+        <p:nvPr/>
+      </p:nvGrpSpPr>
+      <p:grpSpPr/>
+      <p:sp>
+        <p:nvSpPr>
+          <p:cNvPr id="2" name="Rectangle 1"/>
+          <p:cNvSpPr/>
+          <p:nvPr/>
+        </p:nvSpPr>
+        <p:spPr>
+          <a:xfrm>
+            <a:off x="0" y="0"/>
+            <a:ext cx="12191695" cy="6858000"/>
+          </a:xfrm>
+          <a:prstGeom prst="rect">
+            <a:avLst/>
+          </a:prstGeom>
+          <a:solidFill>
+            <a:srgbClr val="FFFFFF"/>
+          </a:solidFill>
+          <a:ln>
+            <a:solidFill>
+              <a:srgbClr val="FFFFFF"/>
+            </a:solidFill>
+          </a:ln>
+        </p:spPr>
+        <p:style>
+          <a:lnRef idx="1">
+            <a:schemeClr val="accent1"/>
+          </a:lnRef>
+          <a:fillRef idx="3">
+            <a:schemeClr val="accent1"/>
+          </a:fillRef>
+          <a:effectRef idx="2">
+            <a:schemeClr val="accent1"/>
+          </a:effectRef>
+          <a:fontRef idx="minor">
+            <a:schemeClr val="lt1"/>
+          </a:fontRef>
+        </p:style>
+        <p:txBody>
+          <a:bodyPr rtlCol="0" anchor="ctr"/>
+          <a:lstStyle/>
+          <a:p>
+            <a:pPr algn="ctr">
+              <a:defRPr>
+                <a:latin typeface="Inter"/>
+              </a:defRPr>
+            </a:pPr>
+          </a:p>
+        </p:txBody>
+      </p:sp>
+      <p:sp>
+        <p:nvSpPr>
+          <p:cNvPr id="3" name="TextBox 2"/>
+          <p:cNvSpPr txBox="1"/>
+          <p:nvPr/>
+        </p:nvSpPr>
+        <p:spPr>
+          <a:xfrm>
+            <a:off x="640080" y="329184"/>
+            <a:ext cx="9875520" cy="182880"/>
+          </a:xfrm>
+          <a:prstGeom prst="rect">
+            <a:avLst/>
+          </a:prstGeom>
+          <a:noFill/>
+        </p:spPr>
+        <p:txBody>
+          <a:bodyPr wrap="none" lIns="9144" rIns="9144" tIns="9144" bIns="9144" anchor="t">
+            <a:spAutoFit/>
+          </a:bodyPr>
+          <a:lstStyle/>
+          <a:p>
+            <a:pPr algn="l">
+              <a:spcAft>
+                <a:spcPts val="0"/>
+              </a:spcAft>
+              <a:defRPr sz="750" b="1">
+                <a:solidFill>
+                  <a:srgbClr val="4F6B00"/>
+                </a:solidFill>
+                <a:latin typeface="Inter"/>
+              </a:defRPr>
+            </a:pPr>
+            <a:r>
+              <a:rPr>
+                <a:latin typeface="Inter"/>
+              </a:rPr>
+              <a:t>SAVED FICTIONAL TEST EVIDENCE</a:t>
+            </a:r>
+          </a:p>
+        </p:txBody>
+      </p:sp>
+      <p:sp>
+        <p:nvSpPr>
+          <p:cNvPr id="4" name="TextBox 3"/>
+          <p:cNvSpPr txBox="1"/>
+          <p:nvPr/>
+        </p:nvSpPr>
+        <p:spPr>
+          <a:xfrm>
+            <a:off x="640080" y="566928"/>
+            <a:ext cx="10058400" cy="530352"/>
+          </a:xfrm>
+          <a:prstGeom prst="rect">
+            <a:avLst/>
+          </a:prstGeom>
+          <a:noFill/>
+        </p:spPr>
+        <p:txBody>
+          <a:bodyPr wrap="none" lIns="9144" rIns="9144" tIns="9144" bIns="9144" anchor="t">
+            <a:spAutoFit/>
+          </a:bodyPr>
+          <a:lstStyle/>
+          <a:p>
+            <a:pPr algn="l">
+              <a:spcAft>
+                <a:spcPts val="0"/>
+              </a:spcAft>
+              <a:defRPr sz="2300" b="1">
+                <a:solidFill>
+                  <a:srgbClr val="0D1117"/>
+                </a:solidFill>
+                <a:latin typeface="Inter"/>
+              </a:defRPr>
+            </a:pPr>
+            <a:r>
+              <a:rPr>
+                <a:latin typeface="Inter"/>
+              </a:rPr>
+              <a:t>Appendix — Sources and methods — continued</a:t>
+            </a:r>
+          </a:p>
+        </p:txBody>
+      </p:sp>
+      <p:sp>
+        <p:nvSpPr>
+          <p:cNvPr id="5" name="Rectangle 4"/>
+          <p:cNvSpPr/>
+          <p:nvPr/>
+        </p:nvSpPr>
+        <p:spPr>
+          <a:xfrm>
+            <a:off x="640080" y="1115568"/>
+            <a:ext cx="10908792" cy="18288"/>
+          </a:xfrm>
+          <a:prstGeom prst="rect">
+            <a:avLst/>
+          </a:prstGeom>
+          <a:solidFill>
+            <a:srgbClr val="0D1117"/>
+          </a:solidFill>
+          <a:ln>
+            <a:solidFill>
+              <a:srgbClr val="0D1117"/>
+            </a:solidFill>
+          </a:ln>
+        </p:spPr>
+        <p:style>
+          <a:lnRef idx="1">
+            <a:schemeClr val="accent1"/>
+          </a:lnRef>
+          <a:fillRef idx="3">
+            <a:schemeClr val="accent1"/>
+          </a:fillRef>
+          <a:effectRef idx="2">
+            <a:schemeClr val="accent1"/>
+          </a:effectRef>
+          <a:fontRef idx="minor">
+            <a:schemeClr val="lt1"/>
+          </a:fontRef>
+        </p:style>
+        <p:txBody>
+          <a:bodyPr rtlCol="0" anchor="ctr"/>
+          <a:lstStyle/>
+          <a:p>
+            <a:pPr algn="ctr">
+              <a:defRPr>
+                <a:latin typeface="Inter"/>
+              </a:defRPr>
+            </a:pPr>
+          </a:p>
+        </p:txBody>
+      </p:sp>
+      <p:sp>
+        <p:nvSpPr>
+          <p:cNvPr id="6" name="Rectangle 5"/>
+          <p:cNvSpPr/>
+          <p:nvPr/>
+        </p:nvSpPr>
+        <p:spPr>
+          <a:xfrm>
+            <a:off x="11018520" y="502920"/>
+            <a:ext cx="530352" cy="393192"/>
+          </a:xfrm>
+          <a:prstGeom prst="rect">
+            <a:avLst/>
+          </a:prstGeom>
+          <a:solidFill>
+            <a:srgbClr val="9AA5B1"/>
+          </a:solidFill>
+          <a:ln>
+            <a:solidFill>
+              <a:srgbClr val="9AA5B1"/>
+            </a:solidFill>
+          </a:ln>
+        </p:spPr>
+        <p:style>
+          <a:lnRef idx="1">
+            <a:schemeClr val="accent1"/>
+          </a:lnRef>
+          <a:fillRef idx="3">
+            <a:schemeClr val="accent1"/>
+          </a:fillRef>
+          <a:effectRef idx="2">
+            <a:schemeClr val="accent1"/>
+          </a:effectRef>
+          <a:fontRef idx="minor">
+            <a:schemeClr val="lt1"/>
+          </a:fontRef>
+        </p:style>
+        <p:txBody>
+          <a:bodyPr rtlCol="0" anchor="ctr"/>
+          <a:lstStyle/>
+          <a:p>
+            <a:pPr algn="ctr">
+              <a:defRPr>
+                <a:latin typeface="Inter"/>
+              </a:defRPr>
+            </a:pPr>
+          </a:p>
+        </p:txBody>
+      </p:sp>
+      <p:sp>
+        <p:nvSpPr>
+          <p:cNvPr id="7" name="TextBox 6"/>
+          <p:cNvSpPr txBox="1"/>
+          <p:nvPr/>
+        </p:nvSpPr>
+        <p:spPr>
+          <a:xfrm>
+            <a:off x="11045952" y="557784"/>
+            <a:ext cx="475488" cy="182880"/>
+          </a:xfrm>
+          <a:prstGeom prst="rect">
+            <a:avLst/>
+          </a:prstGeom>
+          <a:noFill/>
+        </p:spPr>
+        <p:txBody>
+          <a:bodyPr wrap="none" lIns="9144" rIns="9144" tIns="9144" bIns="9144" anchor="t">
+            <a:spAutoFit/>
+          </a:bodyPr>
+          <a:lstStyle/>
+          <a:p>
+            <a:pPr algn="ctr">
+              <a:spcAft>
+                <a:spcPts val="0"/>
+              </a:spcAft>
+              <a:defRPr sz="1000" b="1">
+                <a:solidFill>
+                  <a:srgbClr val="0D1117"/>
+                </a:solidFill>
+                <a:latin typeface="Inter"/>
+              </a:defRPr>
+            </a:pPr>
+            <a:r>
+              <a:rPr>
+                <a:latin typeface="Inter"/>
+              </a:rPr>
+              <a:t>A</a:t>
+            </a:r>
+          </a:p>
+        </p:txBody>
+      </p:sp>
+      <p:sp>
+        <p:nvSpPr>
+          <p:cNvPr id="8" name="Rectangle 7"/>
+          <p:cNvSpPr/>
+          <p:nvPr/>
+        </p:nvSpPr>
+        <p:spPr>
+          <a:xfrm>
+            <a:off x="640080" y="1325880"/>
+            <a:ext cx="10908792" cy="4892040"/>
+          </a:xfrm>
+          <a:prstGeom prst="rect">
+            <a:avLst/>
+          </a:prstGeom>
+          <a:solidFill>
+            <a:srgbClr val="F5F7F9"/>
+          </a:solidFill>
+          <a:ln>
+            <a:solidFill>
+              <a:srgbClr val="E3E7EC"/>
+            </a:solidFill>
+          </a:ln>
+        </p:spPr>
+        <p:style>
+          <a:lnRef idx="1">
+            <a:schemeClr val="accent1"/>
+          </a:lnRef>
+          <a:fillRef idx="3">
+            <a:schemeClr val="accent1"/>
+          </a:fillRef>
+          <a:effectRef idx="2">
+            <a:schemeClr val="accent1"/>
+          </a:effectRef>
+          <a:fontRef idx="minor">
+            <a:schemeClr val="lt1"/>
+          </a:fontRef>
+        </p:style>
+        <p:txBody>
+          <a:bodyPr rtlCol="0" anchor="ctr"/>
+          <a:lstStyle/>
+          <a:p>
+            <a:pPr algn="ctr">
+              <a:defRPr>
+                <a:latin typeface="Inter"/>
+              </a:defRPr>
+            </a:pPr>
+          </a:p>
+        </p:txBody>
+      </p:sp>
+      <p:sp>
+        <p:nvSpPr>
+          <p:cNvPr id="9" name="Rectangle 8"/>
+          <p:cNvSpPr/>
+          <p:nvPr/>
+        </p:nvSpPr>
+        <p:spPr>
+          <a:xfrm>
+            <a:off x="640080" y="1325880"/>
+            <a:ext cx="54864" cy="4892040"/>
+          </a:xfrm>
+          <a:prstGeom prst="rect">
+            <a:avLst/>
+          </a:prstGeom>
+          <a:solidFill>
+            <a:srgbClr val="0D1117"/>
+          </a:solidFill>
+          <a:ln>
+            <a:solidFill>
+              <a:srgbClr val="0D1117"/>
+            </a:solidFill>
+          </a:ln>
+        </p:spPr>
+        <p:style>
+          <a:lnRef idx="1">
+            <a:schemeClr val="accent1"/>
+          </a:lnRef>
+          <a:fillRef idx="3">
+            <a:schemeClr val="accent1"/>
+          </a:fillRef>
+          <a:effectRef idx="2">
+            <a:schemeClr val="accent1"/>
+          </a:effectRef>
+          <a:fontRef idx="minor">
+            <a:schemeClr val="lt1"/>
+          </a:fontRef>
+        </p:style>
+        <p:txBody>
+          <a:bodyPr rtlCol="0" anchor="ctr"/>
+          <a:lstStyle/>
+          <a:p>
+            <a:pPr algn="ctr">
+              <a:defRPr>
+                <a:latin typeface="Inter"/>
+              </a:defRPr>
+            </a:pPr>
+          </a:p>
+        </p:txBody>
+      </p:sp>
+      <p:sp>
+        <p:nvSpPr>
+          <p:cNvPr id="10" name="TextBox 9"/>
+          <p:cNvSpPr txBox="1"/>
+          <p:nvPr/>
+        </p:nvSpPr>
+        <p:spPr>
+          <a:xfrm>
+            <a:off x="804671" y="1435607"/>
+            <a:ext cx="10616184" cy="228600"/>
+          </a:xfrm>
+          <a:prstGeom prst="rect">
+            <a:avLst/>
+          </a:prstGeom>
+          <a:noFill/>
+        </p:spPr>
+        <p:txBody>
+          <a:bodyPr wrap="none" lIns="9144" rIns="9144" tIns="9144" bIns="9144" anchor="t">
+            <a:spAutoFit/>
+          </a:bodyPr>
+          <a:lstStyle/>
+          <a:p>
+            <a:pPr algn="l">
+              <a:spcAft>
+                <a:spcPts val="0"/>
+              </a:spcAft>
+              <a:defRPr sz="1000" b="1">
+                <a:solidFill>
+                  <a:srgbClr val="0D1117"/>
+                </a:solidFill>
+                <a:latin typeface="Inter"/>
+              </a:defRPr>
+            </a:pPr>
+            <a:r>
+              <a:rPr>
+                <a:latin typeface="Inter"/>
+              </a:rPr>
+              <a:t>Metric and digest interpretation</a:t>
+            </a:r>
+          </a:p>
+        </p:txBody>
+      </p:sp>
+      <p:sp>
+        <p:nvSpPr>
+          <p:cNvPr id="11" name="TextBox 10"/>
+          <p:cNvSpPr txBox="1"/>
+          <p:nvPr/>
+        </p:nvSpPr>
+        <p:spPr>
+          <a:xfrm>
+            <a:off x="804671" y="1719072"/>
+            <a:ext cx="10616184" cy="4407408"/>
+          </a:xfrm>
+          <a:prstGeom prst="rect">
+            <a:avLst/>
+          </a:prstGeom>
+          <a:noFill/>
+        </p:spPr>
+        <p:txBody>
+          <a:bodyPr wrap="none" lIns="9144" rIns="9144" tIns="9144" bIns="9144" anchor="t">
+            <a:spAutoFit/>
+          </a:bodyPr>
+          <a:lstStyle/>
+          <a:p>
+            <a:pPr algn="l">
+              <a:spcAft>
+                <a:spcPts val="0"/>
+              </a:spcAft>
+              <a:defRPr sz="950" b="0">
+                <a:solidFill>
+                  <a:srgbClr val="4A5563"/>
+                </a:solidFill>
+                <a:latin typeface="Inter"/>
+              </a:defRPr>
+            </a:pPr>
+            <a:r>
+              <a:rPr>
+                <a:latin typeface="Inter"/>
+              </a:rPr>
+              <a:t>Historical claims must use returned realized metrics with their exact periods, while path-distribution statistics must remain explicitly simulated [S1]. Successful tool evidence records the SHA-256 digest of the saved response; a failed call instead uses the typed no-payload sentinel and preserves its error code and request ID in the validation field. These controls prevent simulated statistics or request identifiers from being presented as observed evidence. The source row also retains the tool name, key parameters, as-of date and data scope so a reviewer can reproduce the evidence boundary without treating an unavailable payload as a successful observation. Advisory benchmark selections remain visibly advisory throughout the report and handoff. This distinction tells reviewers which comparisons are server-matched and which still require independent benchmark confirmation.</a:t>
+            </a:r>
+          </a:p>
+        </p:txBody>
+      </p:sp>
+      <p:sp>
+        <p:nvSpPr>
+          <p:cNvPr id="12" name="Rectangle 11"/>
+          <p:cNvSpPr/>
+          <p:nvPr/>
+        </p:nvSpPr>
+        <p:spPr>
+          <a:xfrm>
+            <a:off x="640080" y="6446520"/>
+            <a:ext cx="10908792" cy="9144"/>
+          </a:xfrm>
+          <a:prstGeom prst="rect">
+            <a:avLst/>
+          </a:prstGeom>
+          <a:solidFill>
+            <a:srgbClr val="E3E7EC"/>
+          </a:solidFill>
+          <a:ln>
+            <a:solidFill>
+              <a:srgbClr val="E3E7EC"/>
+            </a:solidFill>
+          </a:ln>
+        </p:spPr>
+        <p:style>
+          <a:lnRef idx="1">
+            <a:schemeClr val="accent1"/>
+          </a:lnRef>
+          <a:fillRef idx="3">
+            <a:schemeClr val="accent1"/>
+          </a:fillRef>
+          <a:effectRef idx="2">
+            <a:schemeClr val="accent1"/>
+          </a:effectRef>
+          <a:fontRef idx="minor">
+            <a:schemeClr val="lt1"/>
+          </a:fontRef>
+        </p:style>
+        <p:txBody>
+          <a:bodyPr rtlCol="0" anchor="ctr"/>
+          <a:lstStyle/>
+          <a:p>
+            <a:pPr algn="ctr">
+              <a:defRPr>
+                <a:latin typeface="Inter"/>
+              </a:defRPr>
+            </a:pPr>
+          </a:p>
+        </p:txBody>
+      </p:sp>
+      <p:sp>
+        <p:nvSpPr>
+          <p:cNvPr id="13" name="TextBox 12"/>
+          <p:cNvSpPr txBox="1"/>
+          <p:nvPr/>
+        </p:nvSpPr>
+        <p:spPr>
+          <a:xfrm>
+            <a:off x="640080" y="6501384"/>
+            <a:ext cx="4297680" cy="146304"/>
+          </a:xfrm>
+          <a:prstGeom prst="rect">
+            <a:avLst/>
+          </a:prstGeom>
+          <a:noFill/>
+        </p:spPr>
+        <p:txBody>
+          <a:bodyPr wrap="none" lIns="9144" rIns="9144" tIns="9144" bIns="9144" anchor="t">
+            <a:spAutoFit/>
+          </a:bodyPr>
+          <a:lstStyle/>
+          <a:p>
+            <a:pPr algn="l">
+              <a:spcAft>
+                <a:spcPts val="0"/>
+              </a:spcAft>
+              <a:defRPr sz="650" b="0">
+                <a:solidFill>
+                  <a:srgbClr val="8A94A1"/>
+                </a:solidFill>
+                <a:latin typeface="Inter"/>
+              </a:defRPr>
+            </a:pPr>
+            <a:r>
+              <a:rPr>
+                <a:latin typeface="Inter"/>
+              </a:rPr>
+              <a:t>Sources: S1</a:t>
+            </a:r>
+          </a:p>
+        </p:txBody>
+      </p:sp>
+      <p:sp>
+        <p:nvSpPr>
+          <p:cNvPr id="14" name="TextBox 13"/>
+          <p:cNvSpPr txBox="1"/>
+          <p:nvPr/>
+        </p:nvSpPr>
+        <p:spPr>
+          <a:xfrm>
+            <a:off x="4480560" y="6501384"/>
+            <a:ext cx="5303520" cy="146304"/>
+          </a:xfrm>
+          <a:prstGeom prst="rect">
+            <a:avLst/>
+          </a:prstGeom>
+          <a:noFill/>
+        </p:spPr>
+        <p:txBody>
+          <a:bodyPr wrap="none" lIns="9144" rIns="9144" tIns="9144" bIns="9144" anchor="t">
+            <a:spAutoFit/>
+          </a:bodyPr>
+          <a:lstStyle/>
+          <a:p>
+            <a:pPr algn="ctr">
+              <a:spcAft>
+                <a:spcPts val="0"/>
+              </a:spcAft>
+              <a:defRPr sz="650" b="0">
+                <a:solidFill>
+                  <a:srgbClr val="8A94A1"/>
+                </a:solidFill>
+                <a:latin typeface="Inter"/>
+              </a:defRPr>
+            </a:pPr>
+            <a:r>
+              <a:rPr>
+                <a:latin typeface="Inter"/>
+              </a:rPr>
+              <a:t>Confidential — prepared for internal investment use · Data as of 2025-12-31</a:t>
+            </a:r>
+          </a:p>
+        </p:txBody>
+      </p:sp>
+      <p:sp>
+        <p:nvSpPr>
+          <p:cNvPr id="15" name="TextBox 14"/>
+          <p:cNvSpPr txBox="1"/>
+          <p:nvPr/>
+        </p:nvSpPr>
+        <p:spPr>
+          <a:xfrm>
+            <a:off x="10287000" y="6501384"/>
+            <a:ext cx="1261872" cy="146304"/>
+          </a:xfrm>
+          <a:prstGeom prst="rect">
+            <a:avLst/>
+          </a:prstGeom>
+          <a:noFill/>
+        </p:spPr>
+        <p:txBody>
+          <a:bodyPr wrap="none" lIns="9144" rIns="9144" tIns="9144" bIns="9144" anchor="t">
+            <a:spAutoFit/>
+          </a:bodyPr>
+          <a:lstStyle/>
+          <a:p>
+            <a:pPr algn="r">
+              <a:spcAft>
+                <a:spcPts val="0"/>
+              </a:spcAft>
+              <a:defRPr sz="650" b="0">
+                <a:solidFill>
+                  <a:srgbClr val="8A94A1"/>
+                </a:solidFill>
+                <a:latin typeface="Inter"/>
+              </a:defRPr>
+            </a:pPr>
+            <a:r>
+              <a:rPr>
+                <a:latin typeface="Inter"/>
+              </a:rPr>
+              <a:t>9</a:t>
             </a:r>
           </a:p>
         </p:txBody>

--- a/plugins/gradient-cio/assets/examples/gradient-idd-manager-performance-single.pptx
+++ b/plugins/gradient-cio/assets/examples/gradient-idd-manager-performance-single.pptx
@@ -146,7 +146,7 @@
               <c:strCache>
                 <c:ptCount val="1"/>
                 <c:pt idx="0">
-                  <c:v>Northstar Select Equity Composite (TEST)</c:v>
+                  <c:v>Northstar Select Equity Composite</c:v>
                 </c:pt>
               </c:strCache>
             </c:strRef>
@@ -228,7 +228,7 @@
               <c:strCache>
                 <c:ptCount val="1"/>
                 <c:pt idx="0">
-                  <c:v>Northstar Core Equity Benchmark (TEST)</c:v>
+                  <c:v>Northstar Core Equity Benchmark</c:v>
                 </c:pt>
               </c:strCache>
             </c:strRef>
@@ -359,6 +359,15 @@
       <c:legendPos val="b"/>
       <c:layout/>
       <c:overlay val="0"/>
+      <c:txPr>
+        <a:bodyPr/>
+        <a:lstStyle/>
+        <a:p>
+          <a:pPr>
+            <a:defRPr sz="700"/>
+          </a:pPr>
+        </a:p>
+      </c:txPr>
     </c:legend>
     <c:plotVisOnly val="1"/>
     <c:dispBlanksAs val="gap"/>
@@ -659,6 +668,15 @@
       <c:legendPos val="b"/>
       <c:layout/>
       <c:overlay val="0"/>
+      <c:txPr>
+        <a:bodyPr/>
+        <a:lstStyle/>
+        <a:p>
+          <a:pPr>
+            <a:defRPr sz="700"/>
+          </a:pPr>
+        </a:p>
+      </c:txPr>
     </c:legend>
     <c:plotVisOnly val="1"/>
     <c:dispBlanksAs val="gap"/>
@@ -804,6 +822,279 @@
               </a:solidFill>
             </c:spPr>
           </c:dPt>
+          <c:dLbls>
+            <c:dLbl>
+              <c:idx val="0"/>
+              <c:tx>
+                <c:rich>
+                  <a:bodyPr/>
+                  <a:lstStyle/>
+                  <a:p>
+                    <a:r>
+                      <a:rPr lang="en-US" sz="800"/>
+                      <a:t>8.0%</a:t>
+                    </a:r>
+                  </a:p>
+                </c:rich>
+              </c:tx>
+              <c:dLblPos val="outEnd"/>
+              <c:showLegendKey val="0"/>
+              <c:showVal val="0"/>
+              <c:showCatName val="0"/>
+              <c:showSerName val="0"/>
+              <c:showPercent val="0"/>
+              <c:showBubbleSize val="0"/>
+            </c:dLbl>
+            <c:dLbl>
+              <c:idx val="1"/>
+              <c:tx>
+                <c:rich>
+                  <a:bodyPr/>
+                  <a:lstStyle/>
+                  <a:p>
+                    <a:r>
+                      <a:rPr lang="en-US" sz="800"/>
+                      <a:t>7.0%</a:t>
+                    </a:r>
+                  </a:p>
+                </c:rich>
+              </c:tx>
+              <c:dLblPos val="outEnd"/>
+              <c:showLegendKey val="0"/>
+              <c:showVal val="0"/>
+              <c:showCatName val="0"/>
+              <c:showSerName val="0"/>
+              <c:showPercent val="0"/>
+              <c:showBubbleSize val="0"/>
+            </c:dLbl>
+            <c:dLbl>
+              <c:idx val="2"/>
+              <c:tx>
+                <c:rich>
+                  <a:bodyPr/>
+                  <a:lstStyle/>
+                  <a:p>
+                    <a:r>
+                      <a:rPr lang="en-US" sz="800"/>
+                      <a:t>12.0%</a:t>
+                    </a:r>
+                  </a:p>
+                </c:rich>
+              </c:tx>
+              <c:dLblPos val="outEnd"/>
+              <c:showLegendKey val="0"/>
+              <c:showVal val="0"/>
+              <c:showCatName val="0"/>
+              <c:showSerName val="0"/>
+              <c:showPercent val="0"/>
+              <c:showBubbleSize val="0"/>
+            </c:dLbl>
+            <c:dLbl>
+              <c:idx val="3"/>
+              <c:tx>
+                <c:rich>
+                  <a:bodyPr/>
+                  <a:lstStyle/>
+                  <a:p>
+                    <a:r>
+                      <a:rPr lang="en-US" sz="800"/>
+                      <a:t>10.0%</a:t>
+                    </a:r>
+                  </a:p>
+                </c:rich>
+              </c:tx>
+              <c:dLblPos val="outEnd"/>
+              <c:showLegendKey val="0"/>
+              <c:showVal val="0"/>
+              <c:showCatName val="0"/>
+              <c:showSerName val="0"/>
+              <c:showPercent val="0"/>
+              <c:showBubbleSize val="0"/>
+            </c:dLbl>
+            <c:dLbl>
+              <c:idx val="4"/>
+              <c:tx>
+                <c:rich>
+                  <a:bodyPr/>
+                  <a:lstStyle/>
+                  <a:p>
+                    <a:r>
+                      <a:rPr lang="en-US" sz="800"/>
+                      <a:t>-14.0%</a:t>
+                    </a:r>
+                  </a:p>
+                </c:rich>
+              </c:tx>
+              <c:dLblPos val="outEnd"/>
+              <c:showLegendKey val="0"/>
+              <c:showVal val="0"/>
+              <c:showCatName val="0"/>
+              <c:showSerName val="0"/>
+              <c:showPercent val="0"/>
+              <c:showBubbleSize val="0"/>
+            </c:dLbl>
+            <c:dLbl>
+              <c:idx val="5"/>
+              <c:tx>
+                <c:rich>
+                  <a:bodyPr/>
+                  <a:lstStyle/>
+                  <a:p>
+                    <a:r>
+                      <a:rPr lang="en-US" sz="800"/>
+                      <a:t>-16.0%</a:t>
+                    </a:r>
+                  </a:p>
+                </c:rich>
+              </c:tx>
+              <c:dLblPos val="outEnd"/>
+              <c:showLegendKey val="0"/>
+              <c:showVal val="0"/>
+              <c:showCatName val="0"/>
+              <c:showSerName val="0"/>
+              <c:showPercent val="0"/>
+              <c:showBubbleSize val="0"/>
+            </c:dLbl>
+            <c:dLbl>
+              <c:idx val="6"/>
+              <c:tx>
+                <c:rich>
+                  <a:bodyPr/>
+                  <a:lstStyle/>
+                  <a:p>
+                    <a:r>
+                      <a:rPr lang="en-US" sz="800"/>
+                      <a:t>15.0%</a:t>
+                    </a:r>
+                  </a:p>
+                </c:rich>
+              </c:tx>
+              <c:dLblPos val="outEnd"/>
+              <c:showLegendKey val="0"/>
+              <c:showVal val="0"/>
+              <c:showCatName val="0"/>
+              <c:showSerName val="0"/>
+              <c:showPercent val="0"/>
+              <c:showBubbleSize val="0"/>
+            </c:dLbl>
+            <c:dLbl>
+              <c:idx val="7"/>
+              <c:tx>
+                <c:rich>
+                  <a:bodyPr/>
+                  <a:lstStyle/>
+                  <a:p>
+                    <a:r>
+                      <a:rPr lang="en-US" sz="800"/>
+                      <a:t>14.0%</a:t>
+                    </a:r>
+                  </a:p>
+                </c:rich>
+              </c:tx>
+              <c:dLblPos val="outEnd"/>
+              <c:showLegendKey val="0"/>
+              <c:showVal val="0"/>
+              <c:showCatName val="0"/>
+              <c:showSerName val="0"/>
+              <c:showPercent val="0"/>
+              <c:showBubbleSize val="0"/>
+            </c:dLbl>
+            <c:dLbl>
+              <c:idx val="8"/>
+              <c:tx>
+                <c:rich>
+                  <a:bodyPr/>
+                  <a:lstStyle/>
+                  <a:p>
+                    <a:r>
+                      <a:rPr lang="en-US" sz="800"/>
+                      <a:t>11.0%</a:t>
+                    </a:r>
+                  </a:p>
+                </c:rich>
+              </c:tx>
+              <c:dLblPos val="outEnd"/>
+              <c:showLegendKey val="0"/>
+              <c:showVal val="0"/>
+              <c:showCatName val="0"/>
+              <c:showSerName val="0"/>
+              <c:showPercent val="0"/>
+              <c:showBubbleSize val="0"/>
+            </c:dLbl>
+            <c:dLbl>
+              <c:idx val="9"/>
+              <c:tx>
+                <c:rich>
+                  <a:bodyPr/>
+                  <a:lstStyle/>
+                  <a:p>
+                    <a:r>
+                      <a:rPr lang="en-US" sz="800"/>
+                      <a:t>10.0%</a:t>
+                    </a:r>
+                  </a:p>
+                </c:rich>
+              </c:tx>
+              <c:dLblPos val="outEnd"/>
+              <c:showLegendKey val="0"/>
+              <c:showVal val="0"/>
+              <c:showCatName val="0"/>
+              <c:showSerName val="0"/>
+              <c:showPercent val="0"/>
+              <c:showBubbleSize val="0"/>
+            </c:dLbl>
+            <c:dLbl>
+              <c:idx val="10"/>
+              <c:tx>
+                <c:rich>
+                  <a:bodyPr/>
+                  <a:lstStyle/>
+                  <a:p>
+                    <a:r>
+                      <a:rPr lang="en-US" sz="800"/>
+                      <a:t>10.0%</a:t>
+                    </a:r>
+                  </a:p>
+                </c:rich>
+              </c:tx>
+              <c:dLblPos val="outEnd"/>
+              <c:showLegendKey val="0"/>
+              <c:showVal val="0"/>
+              <c:showCatName val="0"/>
+              <c:showSerName val="0"/>
+              <c:showPercent val="0"/>
+              <c:showBubbleSize val="0"/>
+            </c:dLbl>
+            <c:dLbl>
+              <c:idx val="11"/>
+              <c:tx>
+                <c:rich>
+                  <a:bodyPr/>
+                  <a:lstStyle/>
+                  <a:p>
+                    <a:r>
+                      <a:rPr lang="en-US" sz="800"/>
+                      <a:t>9.0%</a:t>
+                    </a:r>
+                  </a:p>
+                </c:rich>
+              </c:tx>
+              <c:dLblPos val="outEnd"/>
+              <c:showLegendKey val="0"/>
+              <c:showVal val="0"/>
+              <c:showCatName val="0"/>
+              <c:showSerName val="0"/>
+              <c:showPercent val="0"/>
+              <c:showBubbleSize val="0"/>
+            </c:dLbl>
+            <c:dLblPos val="outEnd"/>
+            <c:showLegendKey val="0"/>
+            <c:showVal val="0"/>
+            <c:showCatName val="0"/>
+            <c:showSerName val="0"/>
+            <c:showPercent val="0"/>
+            <c:showBubbleSize val="0"/>
+          </c:dLbls>
           <c:cat>
             <c:strRef>
               <c:f>Sheet1!$A$2:$A$13</c:f>
@@ -1043,6 +1334,103 @@
               </a:solidFill>
             </c:spPr>
           </c:dPt>
+          <c:dLbls>
+            <c:dLbl>
+              <c:idx val="0"/>
+              <c:tx>
+                <c:rich>
+                  <a:bodyPr/>
+                  <a:lstStyle/>
+                  <a:p>
+                    <a:r>
+                      <a:rPr lang="en-US" sz="800"/>
+                      <a:t>5 months</a:t>
+                    </a:r>
+                  </a:p>
+                </c:rich>
+              </c:tx>
+              <c:dLblPos val="outEnd"/>
+              <c:showLegendKey val="0"/>
+              <c:showVal val="0"/>
+              <c:showCatName val="0"/>
+              <c:showSerName val="0"/>
+              <c:showPercent val="0"/>
+              <c:showBubbleSize val="0"/>
+            </c:dLbl>
+            <c:dLbl>
+              <c:idx val="1"/>
+              <c:tx>
+                <c:rich>
+                  <a:bodyPr/>
+                  <a:lstStyle/>
+                  <a:p>
+                    <a:r>
+                      <a:rPr lang="en-US" sz="800"/>
+                      <a:t>20 months</a:t>
+                    </a:r>
+                  </a:p>
+                </c:rich>
+              </c:tx>
+              <c:dLblPos val="outEnd"/>
+              <c:showLegendKey val="0"/>
+              <c:showVal val="0"/>
+              <c:showCatName val="0"/>
+              <c:showSerName val="0"/>
+              <c:showPercent val="0"/>
+              <c:showBubbleSize val="0"/>
+            </c:dLbl>
+            <c:dLbl>
+              <c:idx val="2"/>
+              <c:tx>
+                <c:rich>
+                  <a:bodyPr/>
+                  <a:lstStyle/>
+                  <a:p>
+                    <a:r>
+                      <a:rPr lang="en-US" sz="800"/>
+                      <a:t>34 months</a:t>
+                    </a:r>
+                  </a:p>
+                </c:rich>
+              </c:tx>
+              <c:dLblPos val="outEnd"/>
+              <c:showLegendKey val="0"/>
+              <c:showVal val="0"/>
+              <c:showCatName val="0"/>
+              <c:showSerName val="0"/>
+              <c:showPercent val="0"/>
+              <c:showBubbleSize val="0"/>
+            </c:dLbl>
+            <c:dLbl>
+              <c:idx val="3"/>
+              <c:tx>
+                <c:rich>
+                  <a:bodyPr/>
+                  <a:lstStyle/>
+                  <a:p>
+                    <a:r>
+                      <a:rPr lang="en-US" sz="800"/>
+                      <a:t>13 months</a:t>
+                    </a:r>
+                  </a:p>
+                </c:rich>
+              </c:tx>
+              <c:dLblPos val="outEnd"/>
+              <c:showLegendKey val="0"/>
+              <c:showVal val="0"/>
+              <c:showCatName val="0"/>
+              <c:showSerName val="0"/>
+              <c:showPercent val="0"/>
+              <c:showBubbleSize val="0"/>
+            </c:dLbl>
+            <c:dLblPos val="outEnd"/>
+            <c:showLegendKey val="0"/>
+            <c:showVal val="0"/>
+            <c:showCatName val="0"/>
+            <c:showSerName val="0"/>
+            <c:showPercent val="0"/>
+            <c:showBubbleSize val="0"/>
+          </c:dLbls>
           <c:cat>
             <c:strRef>
               <c:f>Sheet1!$A$2:$A$5</c:f>
@@ -1218,6 +1606,59 @@
               </a:solidFill>
             </c:spPr>
           </c:dPt>
+          <c:dLbls>
+            <c:dLbl>
+              <c:idx val="0"/>
+              <c:tx>
+                <c:rich>
+                  <a:bodyPr/>
+                  <a:lstStyle/>
+                  <a:p>
+                    <a:r>
+                      <a:rPr lang="en-US" sz="800"/>
+                      <a:t>105%</a:t>
+                    </a:r>
+                  </a:p>
+                </c:rich>
+              </c:tx>
+              <c:dLblPos val="outEnd"/>
+              <c:showLegendKey val="0"/>
+              <c:showVal val="0"/>
+              <c:showCatName val="0"/>
+              <c:showSerName val="0"/>
+              <c:showPercent val="0"/>
+              <c:showBubbleSize val="0"/>
+            </c:dLbl>
+            <c:dLbl>
+              <c:idx val="1"/>
+              <c:tx>
+                <c:rich>
+                  <a:bodyPr/>
+                  <a:lstStyle/>
+                  <a:p>
+                    <a:r>
+                      <a:rPr lang="en-US" sz="800"/>
+                      <a:t>92%</a:t>
+                    </a:r>
+                  </a:p>
+                </c:rich>
+              </c:tx>
+              <c:dLblPos val="outEnd"/>
+              <c:showLegendKey val="0"/>
+              <c:showVal val="0"/>
+              <c:showCatName val="0"/>
+              <c:showSerName val="0"/>
+              <c:showPercent val="0"/>
+              <c:showBubbleSize val="0"/>
+            </c:dLbl>
+            <c:dLblPos val="outEnd"/>
+            <c:showLegendKey val="0"/>
+            <c:showVal val="0"/>
+            <c:showCatName val="0"/>
+            <c:showSerName val="0"/>
+            <c:showPercent val="0"/>
+            <c:showBubbleSize val="0"/>
+          </c:dLbls>
           <c:cat>
             <c:strRef>
               <c:f>Sheet1!$A$2:$A$3</c:f>
@@ -1733,6 +2174,15 @@
       <c:legendPos val="b"/>
       <c:layout/>
       <c:overlay val="0"/>
+      <c:txPr>
+        <a:bodyPr/>
+        <a:lstStyle/>
+        <a:p>
+          <a:pPr>
+            <a:defRPr sz="700"/>
+          </a:pPr>
+        </a:p>
+      </c:txPr>
     </c:legend>
     <c:plotVisOnly val="1"/>
     <c:dispBlanksAs val="gap"/>
@@ -4724,7 +5174,7 @@
         </p:nvSpPr>
         <p:spPr>
           <a:xfrm>
-            <a:off x="685800" y="1828800"/>
+            <a:off x="685800" y="1664208"/>
             <a:ext cx="9966960" cy="274320"/>
           </a:xfrm>
           <a:prstGeom prst="rect">
@@ -4742,7 +5192,7 @@
               <a:spcAft>
                 <a:spcPts val="0"/>
               </a:spcAft>
-              <a:defRPr sz="900" b="1">
+              <a:defRPr sz="850" b="1">
                 <a:solidFill>
                   <a:srgbClr val="C6F432"/>
                 </a:solidFill>
@@ -4766,7 +5216,7 @@
         </p:nvSpPr>
         <p:spPr>
           <a:xfrm>
-            <a:off x="685800" y="2176272"/>
+            <a:off x="685800" y="2011680"/>
             <a:ext cx="9966960" cy="1234440"/>
           </a:xfrm>
           <a:prstGeom prst="rect">
@@ -4784,7 +5234,7 @@
               <a:spcAft>
                 <a:spcPts val="0"/>
               </a:spcAft>
-              <a:defRPr sz="3400" b="1">
+              <a:defRPr sz="3300" b="1">
                 <a:solidFill>
                   <a:srgbClr val="FFFFFF"/>
                 </a:solidFill>
@@ -4795,7 +5245,7 @@
               <a:rPr>
                 <a:latin typeface="Inter"/>
               </a:rPr>
-              <a:t>Northstar Select Equity Composite (TEST)</a:t>
+              <a:t>Northstar Select Equity Composite</a:t>
             </a:r>
           </a:p>
         </p:txBody>
@@ -4808,8 +5258,8 @@
         </p:nvSpPr>
         <p:spPr>
           <a:xfrm>
-            <a:off x="685800" y="3456432"/>
-            <a:ext cx="9692640" cy="640080"/>
+            <a:off x="685800" y="3273552"/>
+            <a:ext cx="9692640" cy="594360"/>
           </a:xfrm>
           <a:prstGeom prst="rect">
             <a:avLst/>
@@ -4826,7 +5276,7 @@
               <a:spcAft>
                 <a:spcPts val="0"/>
               </a:spcAft>
-              <a:defRPr sz="1500" b="0">
+              <a:defRPr sz="1400" b="0">
                 <a:solidFill>
                   <a:srgbClr val="9AA5B1"/>
                 </a:solidFill>
@@ -4837,7 +5287,7 @@
               <a:rPr>
                 <a:latin typeface="Inter"/>
               </a:rPr>
-              <a:t>Single-manager performance assessment · fictional TEST data</a:t>
+              <a:t>Single-manager performance assessment · Investment Committee review</a:t>
             </a:r>
           </a:p>
         </p:txBody>
@@ -4850,8 +5300,8 @@
         </p:nvSpPr>
         <p:spPr>
           <a:xfrm>
-            <a:off x="685800" y="4251960"/>
-            <a:ext cx="1005840" cy="54864"/>
+            <a:off x="685800" y="4005072"/>
+            <a:ext cx="822960" cy="45720"/>
           </a:xfrm>
           <a:prstGeom prst="rect">
             <a:avLst/>
@@ -4899,8 +5349,8 @@
         </p:nvSpPr>
         <p:spPr>
           <a:xfrm>
-            <a:off x="685800" y="4572000"/>
-            <a:ext cx="3063240" cy="182880"/>
+            <a:off x="685800" y="4315968"/>
+            <a:ext cx="4709160" cy="182880"/>
           </a:xfrm>
           <a:prstGeom prst="rect">
             <a:avLst/>
@@ -4928,7 +5378,7 @@
               <a:rPr>
                 <a:latin typeface="Inter"/>
               </a:rPr>
-              <a:t>MODE</a:t>
+              <a:t>REVIEW</a:t>
             </a:r>
           </a:p>
         </p:txBody>
@@ -4941,8 +5391,8 @@
         </p:nvSpPr>
         <p:spPr>
           <a:xfrm>
-            <a:off x="685800" y="4773168"/>
-            <a:ext cx="3063240" cy="320040"/>
+            <a:off x="685800" y="4507992"/>
+            <a:ext cx="4709160" cy="310896"/>
           </a:xfrm>
           <a:prstGeom prst="rect">
             <a:avLst/>
@@ -4983,8 +5433,8 @@
         </p:nvSpPr>
         <p:spPr>
           <a:xfrm>
-            <a:off x="4160520" y="4572000"/>
-            <a:ext cx="3063240" cy="182880"/>
+            <a:off x="5852160" y="4315968"/>
+            <a:ext cx="4709160" cy="182880"/>
           </a:xfrm>
           <a:prstGeom prst="rect">
             <a:avLst/>
@@ -5025,8 +5475,8 @@
         </p:nvSpPr>
         <p:spPr>
           <a:xfrm>
-            <a:off x="4160520" y="4773168"/>
-            <a:ext cx="3063240" cy="320040"/>
+            <a:off x="5852160" y="4507992"/>
+            <a:ext cx="4709160" cy="310896"/>
           </a:xfrm>
           <a:prstGeom prst="rect">
             <a:avLst/>
@@ -5067,8 +5517,8 @@
         </p:nvSpPr>
         <p:spPr>
           <a:xfrm>
-            <a:off x="7635240" y="4572000"/>
-            <a:ext cx="3063240" cy="182880"/>
+            <a:off x="685800" y="4937759"/>
+            <a:ext cx="4709160" cy="182880"/>
           </a:xfrm>
           <a:prstGeom prst="rect">
             <a:avLst/>
@@ -5109,8 +5559,8 @@
         </p:nvSpPr>
         <p:spPr>
           <a:xfrm>
-            <a:off x="7635240" y="4773168"/>
-            <a:ext cx="3063240" cy="320040"/>
+            <a:off x="685800" y="5129783"/>
+            <a:ext cx="4709160" cy="310896"/>
           </a:xfrm>
           <a:prstGeom prst="rect">
             <a:avLst/>
@@ -5151,8 +5601,8 @@
         </p:nvSpPr>
         <p:spPr>
           <a:xfrm>
-            <a:off x="685800" y="5230368"/>
-            <a:ext cx="3063240" cy="182880"/>
+            <a:off x="5852160" y="4937759"/>
+            <a:ext cx="4709160" cy="182880"/>
           </a:xfrm>
           <a:prstGeom prst="rect">
             <a:avLst/>
@@ -5193,8 +5643,8 @@
         </p:nvSpPr>
         <p:spPr>
           <a:xfrm>
-            <a:off x="685800" y="5431536"/>
-            <a:ext cx="3063240" cy="320040"/>
+            <a:off x="5852160" y="5129783"/>
+            <a:ext cx="4709160" cy="310896"/>
           </a:xfrm>
           <a:prstGeom prst="rect">
             <a:avLst/>
@@ -5222,189 +5672,21 @@
               <a:rPr>
                 <a:latin typeface="Inter"/>
               </a:rPr>
-              <a:t>Northstar Core Equity Benchmark (TEST)</a:t>
+              <a:t>Northstar Core Equity Benchmark</a:t>
             </a:r>
           </a:p>
         </p:txBody>
       </p:sp>
       <p:sp>
         <p:nvSpPr>
-          <p:cNvPr id="17" name="TextBox 16"/>
-          <p:cNvSpPr txBox="1"/>
-          <p:nvPr/>
-        </p:nvSpPr>
-        <p:spPr>
-          <a:xfrm>
-            <a:off x="4160520" y="5230368"/>
-            <a:ext cx="3063240" cy="182880"/>
-          </a:xfrm>
-          <a:prstGeom prst="rect">
-            <a:avLst/>
-          </a:prstGeom>
-          <a:noFill/>
-        </p:spPr>
-        <p:txBody>
-          <a:bodyPr wrap="none" lIns="9144" rIns="9144" tIns="9144" bIns="9144" anchor="t">
-            <a:spAutoFit/>
-          </a:bodyPr>
-          <a:lstStyle/>
-          <a:p>
-            <a:pPr algn="l">
-              <a:spcAft>
-                <a:spcPts val="0"/>
-              </a:spcAft>
-              <a:defRPr sz="700" b="1">
-                <a:solidFill>
-                  <a:srgbClr val="8A94A1"/>
-                </a:solidFill>
-                <a:latin typeface="Inter"/>
-              </a:defRPr>
-            </a:pPr>
-            <a:r>
-              <a:rPr>
-                <a:latin typeface="Inter"/>
-              </a:rPr>
-              <a:t>BENCHMARK STATUS</a:t>
-            </a:r>
-          </a:p>
-        </p:txBody>
-      </p:sp>
-      <p:sp>
-        <p:nvSpPr>
-          <p:cNvPr id="18" name="TextBox 17"/>
-          <p:cNvSpPr txBox="1"/>
-          <p:nvPr/>
-        </p:nvSpPr>
-        <p:spPr>
-          <a:xfrm>
-            <a:off x="4160520" y="5431536"/>
-            <a:ext cx="3063240" cy="320040"/>
-          </a:xfrm>
-          <a:prstGeom prst="rect">
-            <a:avLst/>
-          </a:prstGeom>
-          <a:noFill/>
-        </p:spPr>
-        <p:txBody>
-          <a:bodyPr wrap="none" lIns="9144" rIns="9144" tIns="9144" bIns="9144" anchor="t">
-            <a:spAutoFit/>
-          </a:bodyPr>
-          <a:lstStyle/>
-          <a:p>
-            <a:pPr algn="l">
-              <a:spcAft>
-                <a:spcPts val="0"/>
-              </a:spcAft>
-              <a:defRPr sz="1000" b="1">
-                <a:solidFill>
-                  <a:srgbClr val="FFFFFF"/>
-                </a:solidFill>
-                <a:latin typeface="Inter"/>
-              </a:defRPr>
-            </a:pPr>
-            <a:r>
-              <a:rPr>
-                <a:latin typeface="Inter"/>
-              </a:rPr>
-              <a:t>Server matched</a:t>
-            </a:r>
-          </a:p>
-        </p:txBody>
-      </p:sp>
-      <p:sp>
-        <p:nvSpPr>
-          <p:cNvPr id="19" name="TextBox 18"/>
-          <p:cNvSpPr txBox="1"/>
-          <p:nvPr/>
-        </p:nvSpPr>
-        <p:spPr>
-          <a:xfrm>
-            <a:off x="7635240" y="5230368"/>
-            <a:ext cx="3063240" cy="182880"/>
-          </a:xfrm>
-          <a:prstGeom prst="rect">
-            <a:avLst/>
-          </a:prstGeom>
-          <a:noFill/>
-        </p:spPr>
-        <p:txBody>
-          <a:bodyPr wrap="none" lIns="9144" rIns="9144" tIns="9144" bIns="9144" anchor="t">
-            <a:spAutoFit/>
-          </a:bodyPr>
-          <a:lstStyle/>
-          <a:p>
-            <a:pPr algn="l">
-              <a:spcAft>
-                <a:spcPts val="0"/>
-              </a:spcAft>
-              <a:defRPr sz="700" b="1">
-                <a:solidFill>
-                  <a:srgbClr val="8A94A1"/>
-                </a:solidFill>
-                <a:latin typeface="Inter"/>
-              </a:defRPr>
-            </a:pPr>
-            <a:r>
-              <a:rPr>
-                <a:latin typeface="Inter"/>
-              </a:rPr>
-              <a:t>DATA SCOPE</a:t>
-            </a:r>
-          </a:p>
-        </p:txBody>
-      </p:sp>
-      <p:sp>
-        <p:nvSpPr>
-          <p:cNvPr id="20" name="TextBox 19"/>
-          <p:cNvSpPr txBox="1"/>
-          <p:nvPr/>
-        </p:nvSpPr>
-        <p:spPr>
-          <a:xfrm>
-            <a:off x="7635240" y="5431536"/>
-            <a:ext cx="3063240" cy="320040"/>
-          </a:xfrm>
-          <a:prstGeom prst="rect">
-            <a:avLst/>
-          </a:prstGeom>
-          <a:noFill/>
-        </p:spPr>
-        <p:txBody>
-          <a:bodyPr wrap="none" lIns="9144" rIns="9144" tIns="9144" bIns="9144" anchor="t">
-            <a:spAutoFit/>
-          </a:bodyPr>
-          <a:lstStyle/>
-          <a:p>
-            <a:pPr algn="l">
-              <a:spcAft>
-                <a:spcPts val="0"/>
-              </a:spcAft>
-              <a:defRPr sz="1000" b="1">
-                <a:solidFill>
-                  <a:srgbClr val="FFFFFF"/>
-                </a:solidFill>
-                <a:latin typeface="Inter"/>
-              </a:defRPr>
-            </a:pPr>
-            <a:r>
-              <a:rPr>
-                <a:latin typeface="Inter"/>
-              </a:rPr>
-              <a:t>Fictional Gradient-governed TEST evidence</a:t>
-            </a:r>
-          </a:p>
-        </p:txBody>
-      </p:sp>
-      <p:sp>
-        <p:nvSpPr>
-          <p:cNvPr id="21" name="Rectangle 20"/>
+          <p:cNvPr id="17" name="Rectangle 16"/>
           <p:cNvSpPr/>
           <p:nvPr/>
         </p:nvSpPr>
         <p:spPr>
           <a:xfrm>
-            <a:off x="685800" y="5833872"/>
-            <a:ext cx="3063240" cy="384048"/>
+            <a:off x="685800" y="5687568"/>
+            <a:ext cx="3337560" cy="530352"/>
           </a:xfrm>
           <a:prstGeom prst="rect">
             <a:avLst/>
@@ -5446,14 +5728,14 @@
       </p:sp>
       <p:sp>
         <p:nvSpPr>
-          <p:cNvPr id="22" name="TextBox 21"/>
+          <p:cNvPr id="18" name="TextBox 17"/>
           <p:cNvSpPr txBox="1"/>
           <p:nvPr/>
         </p:nvSpPr>
         <p:spPr>
           <a:xfrm>
-            <a:off x="822960" y="5934456"/>
-            <a:ext cx="2788920" cy="164592"/>
+            <a:off x="822960" y="5760720"/>
+            <a:ext cx="3063240" cy="128016"/>
           </a:xfrm>
           <a:prstGeom prst="rect">
             <a:avLst/>
@@ -5470,7 +5752,7 @@
               <a:spcAft>
                 <a:spcPts val="0"/>
               </a:spcAft>
-              <a:defRPr sz="800" b="1">
+              <a:defRPr sz="620" b="1">
                 <a:solidFill>
                   <a:srgbClr val="0D1117"/>
                 </a:solidFill>
@@ -5481,6 +5763,48 @@
               <a:rPr>
                 <a:latin typeface="Inter"/>
               </a:rPr>
+              <a:t>OVERALL VIEW</a:t>
+            </a:r>
+          </a:p>
+        </p:txBody>
+      </p:sp>
+      <p:sp>
+        <p:nvSpPr>
+          <p:cNvPr id="19" name="TextBox 18"/>
+          <p:cNvSpPr txBox="1"/>
+          <p:nvPr/>
+        </p:nvSpPr>
+        <p:spPr>
+          <a:xfrm>
+            <a:off x="822960" y="5916168"/>
+            <a:ext cx="3063240" cy="182880"/>
+          </a:xfrm>
+          <a:prstGeom prst="rect">
+            <a:avLst/>
+          </a:prstGeom>
+          <a:noFill/>
+        </p:spPr>
+        <p:txBody>
+          <a:bodyPr wrap="none" lIns="9144" rIns="9144" tIns="9144" bIns="9144" anchor="t">
+            <a:spAutoFit/>
+          </a:bodyPr>
+          <a:lstStyle/>
+          <a:p>
+            <a:pPr algn="l">
+              <a:spcAft>
+                <a:spcPts val="0"/>
+              </a:spcAft>
+              <a:defRPr sz="900" b="1">
+                <a:solidFill>
+                  <a:srgbClr val="0D1117"/>
+                </a:solidFill>
+                <a:latin typeface="Inter"/>
+              </a:defRPr>
+            </a:pPr>
+            <a:r>
+              <a:rPr>
+                <a:latin typeface="Inter"/>
+              </a:rPr>
               <a:t>Positive edge; moderate reliability</a:t>
             </a:r>
           </a:p>
@@ -5488,13 +5812,13 @@
       </p:sp>
       <p:sp>
         <p:nvSpPr>
-          <p:cNvPr id="23" name="TextBox 22"/>
+          <p:cNvPr id="20" name="TextBox 19"/>
           <p:cNvSpPr txBox="1"/>
           <p:nvPr/>
         </p:nvSpPr>
         <p:spPr>
           <a:xfrm>
-            <a:off x="3977639" y="5824728"/>
+            <a:off x="4297680" y="5733288"/>
             <a:ext cx="3108960" cy="164592"/>
           </a:xfrm>
           <a:prstGeom prst="rect">
@@ -5523,20 +5847,20 @@
               <a:rPr>
                 <a:latin typeface="Inter"/>
               </a:rPr>
-              <a:t>EVIDENCE COMPLETENESS</a:t>
+              <a:t>SCOPE REVIEWED</a:t>
             </a:r>
           </a:p>
         </p:txBody>
       </p:sp>
       <p:sp>
         <p:nvSpPr>
-          <p:cNvPr id="24" name="TextBox 23"/>
+          <p:cNvPr id="21" name="TextBox 20"/>
           <p:cNvSpPr txBox="1"/>
           <p:nvPr/>
         </p:nvSpPr>
         <p:spPr>
           <a:xfrm>
-            <a:off x="3977639" y="5998464"/>
+            <a:off x="4297680" y="5934456"/>
             <a:ext cx="3108960" cy="201168"/>
           </a:xfrm>
           <a:prstGeom prst="rect">
@@ -5572,14 +5896,14 @@
       </p:sp>
       <p:sp>
         <p:nvSpPr>
-          <p:cNvPr id="25" name="TextBox 24"/>
+          <p:cNvPr id="22" name="TextBox 21"/>
           <p:cNvSpPr txBox="1"/>
           <p:nvPr/>
         </p:nvSpPr>
         <p:spPr>
           <a:xfrm>
-            <a:off x="685800" y="6473952"/>
-            <a:ext cx="8046720" cy="182880"/>
+            <a:off x="685800" y="6400800"/>
+            <a:ext cx="8046720" cy="146304"/>
           </a:xfrm>
           <a:prstGeom prst="rect">
             <a:avLst/>
@@ -5607,14 +5931,56 @@
               <a:rPr>
                 <a:latin typeface="Inter"/>
               </a:rPr>
-              <a:t>TEST DATA — fictional manager and benchmarks for rendering tests only</a:t>
+              <a:t>Confidential — manager performance review</a:t>
             </a:r>
           </a:p>
         </p:txBody>
       </p:sp>
       <p:sp>
         <p:nvSpPr>
-          <p:cNvPr id="26" name="TextBox 25"/>
+          <p:cNvPr id="23" name="TextBox 22"/>
+          <p:cNvSpPr txBox="1"/>
+          <p:nvPr/>
+        </p:nvSpPr>
+        <p:spPr>
+          <a:xfrm>
+            <a:off x="685800" y="6556248"/>
+            <a:ext cx="8046720" cy="128016"/>
+          </a:xfrm>
+          <a:prstGeom prst="rect">
+            <a:avLst/>
+          </a:prstGeom>
+          <a:noFill/>
+        </p:spPr>
+        <p:txBody>
+          <a:bodyPr wrap="none" lIns="9144" rIns="9144" tIns="9144" bIns="9144" anchor="t">
+            <a:spAutoFit/>
+          </a:bodyPr>
+          <a:lstStyle/>
+          <a:p>
+            <a:pPr algn="l">
+              <a:spcAft>
+                <a:spcPts val="0"/>
+              </a:spcAft>
+              <a:defRPr sz="650" b="0">
+                <a:solidFill>
+                  <a:srgbClr val="8A94A1"/>
+                </a:solidFill>
+                <a:latin typeface="Inter"/>
+              </a:defRPr>
+            </a:pPr>
+            <a:r>
+              <a:rPr>
+                <a:latin typeface="Inter"/>
+              </a:rPr>
+              <a:t>Illustrative sample · not client data</a:t>
+            </a:r>
+          </a:p>
+        </p:txBody>
+      </p:sp>
+      <p:sp>
+        <p:nvSpPr>
+          <p:cNvPr id="24" name="TextBox 23"/>
           <p:cNvSpPr txBox="1"/>
           <p:nvPr/>
         </p:nvSpPr>
@@ -5730,7 +6096,7 @@
         <p:spPr>
           <a:xfrm>
             <a:off x="640080" y="329184"/>
-            <a:ext cx="9875520" cy="182880"/>
+            <a:ext cx="5303520" cy="182880"/>
           </a:xfrm>
           <a:prstGeom prst="rect">
             <a:avLst/>
@@ -5771,6 +6137,48 @@
         </p:nvSpPr>
         <p:spPr>
           <a:xfrm>
+            <a:off x="5897880" y="310896"/>
+            <a:ext cx="4800600" cy="256032"/>
+          </a:xfrm>
+          <a:prstGeom prst="rect">
+            <a:avLst/>
+          </a:prstGeom>
+          <a:noFill/>
+        </p:spPr>
+        <p:txBody>
+          <a:bodyPr wrap="none" lIns="9144" rIns="9144" tIns="9144" bIns="9144" anchor="t">
+            <a:spAutoFit/>
+          </a:bodyPr>
+          <a:lstStyle/>
+          <a:p>
+            <a:pPr algn="r">
+              <a:spcAft>
+                <a:spcPts val="0"/>
+              </a:spcAft>
+              <a:defRPr sz="680" b="1">
+                <a:solidFill>
+                  <a:srgbClr val="4F6B00"/>
+                </a:solidFill>
+                <a:latin typeface="Inter"/>
+              </a:defRPr>
+            </a:pPr>
+            <a:r>
+              <a:rPr>
+                <a:latin typeface="Inter"/>
+              </a:rPr>
+              <a:t>Illustrative, Gradient Maintained — demo data, not the client's holdings or managers</a:t>
+            </a:r>
+          </a:p>
+        </p:txBody>
+      </p:sp>
+      <p:sp>
+        <p:nvSpPr>
+          <p:cNvPr id="5" name="TextBox 4"/>
+          <p:cNvSpPr txBox="1"/>
+          <p:nvPr/>
+        </p:nvSpPr>
+        <p:spPr>
+          <a:xfrm>
             <a:off x="640080" y="566928"/>
             <a:ext cx="10058400" cy="530352"/>
           </a:xfrm>
@@ -5807,7 +6215,7 @@
       </p:sp>
       <p:sp>
         <p:nvSpPr>
-          <p:cNvPr id="5" name="Rectangle 4"/>
+          <p:cNvPr id="6" name="Rectangle 5"/>
           <p:cNvSpPr/>
           <p:nvPr/>
         </p:nvSpPr>
@@ -5856,7 +6264,7 @@
       </p:sp>
       <p:sp>
         <p:nvSpPr>
-          <p:cNvPr id="6" name="Rectangle 5"/>
+          <p:cNvPr id="7" name="Rectangle 6"/>
           <p:cNvSpPr/>
           <p:nvPr/>
         </p:nvSpPr>
@@ -5905,7 +6313,7 @@
       </p:sp>
       <p:sp>
         <p:nvSpPr>
-          <p:cNvPr id="7" name="TextBox 6"/>
+          <p:cNvPr id="8" name="TextBox 7"/>
           <p:cNvSpPr txBox="1"/>
           <p:nvPr/>
         </p:nvSpPr>
@@ -5947,7 +6355,7 @@
       </p:sp>
       <p:sp>
         <p:nvSpPr>
-          <p:cNvPr id="8" name="TextBox 7"/>
+          <p:cNvPr id="9" name="TextBox 8"/>
           <p:cNvSpPr txBox="1"/>
           <p:nvPr/>
         </p:nvSpPr>
@@ -5989,7 +6397,7 @@
       </p:sp>
       <p:graphicFrame>
         <p:nvGraphicFramePr>
-          <p:cNvPr id="9" name="Table 8"/>
+          <p:cNvPr id="10" name="Table 9"/>
           <p:cNvGraphicFramePr>
             <a:graphicFrameLocks noGrp="1"/>
           </p:cNvGraphicFramePr>
@@ -6977,7 +7385,7 @@
       </p:graphicFrame>
       <p:sp>
         <p:nvSpPr>
-          <p:cNvPr id="10" name="Rectangle 9"/>
+          <p:cNvPr id="11" name="Rectangle 10"/>
           <p:cNvSpPr/>
           <p:nvPr/>
         </p:nvSpPr>
@@ -7026,7 +7434,7 @@
       </p:sp>
       <p:sp>
         <p:nvSpPr>
-          <p:cNvPr id="11" name="TextBox 10"/>
+          <p:cNvPr id="12" name="TextBox 11"/>
           <p:cNvSpPr txBox="1"/>
           <p:nvPr/>
         </p:nvSpPr>
@@ -7068,7 +7476,7 @@
       </p:sp>
       <p:sp>
         <p:nvSpPr>
-          <p:cNvPr id="12" name="TextBox 11"/>
+          <p:cNvPr id="13" name="TextBox 12"/>
           <p:cNvSpPr txBox="1"/>
           <p:nvPr/>
         </p:nvSpPr>
@@ -7103,14 +7511,14 @@
               <a:rPr>
                 <a:latin typeface="Inter"/>
               </a:rPr>
-              <a:t>TEST DATA — fictional manager and benchmarks for rendering tests only · Data as of 2025-12-31</a:t>
+              <a:t>Confidential — manager performance review · Data as of 2025-12-31</a:t>
             </a:r>
           </a:p>
         </p:txBody>
       </p:sp>
       <p:sp>
         <p:nvSpPr>
-          <p:cNvPr id="13" name="TextBox 12"/>
+          <p:cNvPr id="14" name="TextBox 13"/>
           <p:cNvSpPr txBox="1"/>
           <p:nvPr/>
         </p:nvSpPr>
@@ -7226,7 +7634,7 @@
         <p:spPr>
           <a:xfrm>
             <a:off x="640080" y="329184"/>
-            <a:ext cx="9875520" cy="182880"/>
+            <a:ext cx="5303520" cy="182880"/>
           </a:xfrm>
           <a:prstGeom prst="rect">
             <a:avLst/>
@@ -7267,6 +7675,48 @@
         </p:nvSpPr>
         <p:spPr>
           <a:xfrm>
+            <a:off x="5897880" y="310896"/>
+            <a:ext cx="4800600" cy="256032"/>
+          </a:xfrm>
+          <a:prstGeom prst="rect">
+            <a:avLst/>
+          </a:prstGeom>
+          <a:noFill/>
+        </p:spPr>
+        <p:txBody>
+          <a:bodyPr wrap="none" lIns="9144" rIns="9144" tIns="9144" bIns="9144" anchor="t">
+            <a:spAutoFit/>
+          </a:bodyPr>
+          <a:lstStyle/>
+          <a:p>
+            <a:pPr algn="r">
+              <a:spcAft>
+                <a:spcPts val="0"/>
+              </a:spcAft>
+              <a:defRPr sz="680" b="1">
+                <a:solidFill>
+                  <a:srgbClr val="4F6B00"/>
+                </a:solidFill>
+                <a:latin typeface="Inter"/>
+              </a:defRPr>
+            </a:pPr>
+            <a:r>
+              <a:rPr>
+                <a:latin typeface="Inter"/>
+              </a:rPr>
+              <a:t>Illustrative, Gradient Maintained — demo data, not the client's holdings or managers</a:t>
+            </a:r>
+          </a:p>
+        </p:txBody>
+      </p:sp>
+      <p:sp>
+        <p:nvSpPr>
+          <p:cNvPr id="5" name="TextBox 4"/>
+          <p:cNvSpPr txBox="1"/>
+          <p:nvPr/>
+        </p:nvSpPr>
+        <p:spPr>
+          <a:xfrm>
             <a:off x="640080" y="566928"/>
             <a:ext cx="10058400" cy="530352"/>
           </a:xfrm>
@@ -7303,7 +7753,7 @@
       </p:sp>
       <p:sp>
         <p:nvSpPr>
-          <p:cNvPr id="5" name="Rectangle 4"/>
+          <p:cNvPr id="6" name="Rectangle 5"/>
           <p:cNvSpPr/>
           <p:nvPr/>
         </p:nvSpPr>
@@ -7352,7 +7802,7 @@
       </p:sp>
       <p:sp>
         <p:nvSpPr>
-          <p:cNvPr id="6" name="Rectangle 5"/>
+          <p:cNvPr id="7" name="Rectangle 6"/>
           <p:cNvSpPr/>
           <p:nvPr/>
         </p:nvSpPr>
@@ -7401,7 +7851,7 @@
       </p:sp>
       <p:sp>
         <p:nvSpPr>
-          <p:cNvPr id="7" name="TextBox 6"/>
+          <p:cNvPr id="8" name="TextBox 7"/>
           <p:cNvSpPr txBox="1"/>
           <p:nvPr/>
         </p:nvSpPr>
@@ -7443,7 +7893,7 @@
       </p:sp>
       <p:sp>
         <p:nvSpPr>
-          <p:cNvPr id="8" name="TextBox 7"/>
+          <p:cNvPr id="9" name="TextBox 8"/>
           <p:cNvSpPr txBox="1"/>
           <p:nvPr/>
         </p:nvSpPr>
@@ -7485,7 +7935,7 @@
       </p:sp>
       <p:graphicFrame>
         <p:nvGraphicFramePr>
-          <p:cNvPr id="9" name="Chart 8"/>
+          <p:cNvPr id="10" name="Chart 9"/>
           <p:cNvGraphicFramePr>
             <a:graphicFrameLocks noGrp="1"/>
           </p:cNvGraphicFramePr>
@@ -7503,7 +7953,7 @@
       </p:graphicFrame>
       <p:sp>
         <p:nvSpPr>
-          <p:cNvPr id="10" name="Rectangle 9"/>
+          <p:cNvPr id="11" name="Rectangle 10"/>
           <p:cNvSpPr/>
           <p:nvPr/>
         </p:nvSpPr>
@@ -7552,7 +8002,7 @@
       </p:sp>
       <p:sp>
         <p:nvSpPr>
-          <p:cNvPr id="11" name="TextBox 10"/>
+          <p:cNvPr id="12" name="TextBox 11"/>
           <p:cNvSpPr txBox="1"/>
           <p:nvPr/>
         </p:nvSpPr>
@@ -7594,7 +8044,7 @@
       </p:sp>
       <p:sp>
         <p:nvSpPr>
-          <p:cNvPr id="12" name="TextBox 11"/>
+          <p:cNvPr id="13" name="TextBox 12"/>
           <p:cNvSpPr txBox="1"/>
           <p:nvPr/>
         </p:nvSpPr>
@@ -7629,14 +8079,14 @@
               <a:rPr>
                 <a:latin typeface="Inter"/>
               </a:rPr>
-              <a:t>TEST DATA — fictional manager and benchmarks for rendering tests only · Data as of 2025-12-31</a:t>
+              <a:t>Confidential — manager performance review · Data as of 2025-12-31</a:t>
             </a:r>
           </a:p>
         </p:txBody>
       </p:sp>
       <p:sp>
         <p:nvSpPr>
-          <p:cNvPr id="13" name="TextBox 12"/>
+          <p:cNvPr id="14" name="TextBox 13"/>
           <p:cNvSpPr txBox="1"/>
           <p:nvPr/>
         </p:nvSpPr>
@@ -7752,7 +8202,7 @@
         <p:spPr>
           <a:xfrm>
             <a:off x="640080" y="329184"/>
-            <a:ext cx="9875520" cy="182880"/>
+            <a:ext cx="5303520" cy="182880"/>
           </a:xfrm>
           <a:prstGeom prst="rect">
             <a:avLst/>
@@ -7793,6 +8243,48 @@
         </p:nvSpPr>
         <p:spPr>
           <a:xfrm>
+            <a:off x="5897880" y="310896"/>
+            <a:ext cx="4800600" cy="256032"/>
+          </a:xfrm>
+          <a:prstGeom prst="rect">
+            <a:avLst/>
+          </a:prstGeom>
+          <a:noFill/>
+        </p:spPr>
+        <p:txBody>
+          <a:bodyPr wrap="none" lIns="9144" rIns="9144" tIns="9144" bIns="9144" anchor="t">
+            <a:spAutoFit/>
+          </a:bodyPr>
+          <a:lstStyle/>
+          <a:p>
+            <a:pPr algn="r">
+              <a:spcAft>
+                <a:spcPts val="0"/>
+              </a:spcAft>
+              <a:defRPr sz="680" b="1">
+                <a:solidFill>
+                  <a:srgbClr val="4F6B00"/>
+                </a:solidFill>
+                <a:latin typeface="Inter"/>
+              </a:defRPr>
+            </a:pPr>
+            <a:r>
+              <a:rPr>
+                <a:latin typeface="Inter"/>
+              </a:rPr>
+              <a:t>Illustrative, Gradient Maintained — demo data, not the client's holdings or managers</a:t>
+            </a:r>
+          </a:p>
+        </p:txBody>
+      </p:sp>
+      <p:sp>
+        <p:nvSpPr>
+          <p:cNvPr id="5" name="TextBox 4"/>
+          <p:cNvSpPr txBox="1"/>
+          <p:nvPr/>
+        </p:nvSpPr>
+        <p:spPr>
+          <a:xfrm>
             <a:off x="640080" y="566928"/>
             <a:ext cx="10058400" cy="530352"/>
           </a:xfrm>
@@ -7829,7 +8321,7 @@
       </p:sp>
       <p:sp>
         <p:nvSpPr>
-          <p:cNvPr id="5" name="Rectangle 4"/>
+          <p:cNvPr id="6" name="Rectangle 5"/>
           <p:cNvSpPr/>
           <p:nvPr/>
         </p:nvSpPr>
@@ -7878,7 +8370,7 @@
       </p:sp>
       <p:sp>
         <p:nvSpPr>
-          <p:cNvPr id="6" name="Rectangle 5"/>
+          <p:cNvPr id="7" name="Rectangle 6"/>
           <p:cNvSpPr/>
           <p:nvPr/>
         </p:nvSpPr>
@@ -7927,7 +8419,7 @@
       </p:sp>
       <p:sp>
         <p:nvSpPr>
-          <p:cNvPr id="7" name="TextBox 6"/>
+          <p:cNvPr id="8" name="TextBox 7"/>
           <p:cNvSpPr txBox="1"/>
           <p:nvPr/>
         </p:nvSpPr>
@@ -7969,7 +8461,7 @@
       </p:sp>
       <p:sp>
         <p:nvSpPr>
-          <p:cNvPr id="8" name="TextBox 7"/>
+          <p:cNvPr id="9" name="TextBox 8"/>
           <p:cNvSpPr txBox="1"/>
           <p:nvPr/>
         </p:nvSpPr>
@@ -8011,7 +8503,7 @@
       </p:sp>
       <p:graphicFrame>
         <p:nvGraphicFramePr>
-          <p:cNvPr id="9" name="Table 8"/>
+          <p:cNvPr id="10" name="Table 9"/>
           <p:cNvGraphicFramePr>
             <a:graphicFrameLocks noGrp="1"/>
           </p:cNvGraphicFramePr>
@@ -8370,7 +8862,7 @@
       </p:graphicFrame>
       <p:sp>
         <p:nvSpPr>
-          <p:cNvPr id="10" name="TextBox 9"/>
+          <p:cNvPr id="11" name="TextBox 10"/>
           <p:cNvSpPr txBox="1"/>
           <p:nvPr/>
         </p:nvSpPr>
@@ -8412,7 +8904,7 @@
       </p:sp>
       <p:sp>
         <p:nvSpPr>
-          <p:cNvPr id="11" name="TextBox 10"/>
+          <p:cNvPr id="12" name="TextBox 11"/>
           <p:cNvSpPr txBox="1"/>
           <p:nvPr/>
         </p:nvSpPr>
@@ -8454,7 +8946,7 @@
       </p:sp>
       <p:graphicFrame>
         <p:nvGraphicFramePr>
-          <p:cNvPr id="12" name="Table 11"/>
+          <p:cNvPr id="13" name="Table 12"/>
           <p:cNvGraphicFramePr>
             <a:graphicFrameLocks noGrp="1"/>
           </p:cNvGraphicFramePr>
@@ -9822,7 +10314,7 @@
       </p:graphicFrame>
       <p:sp>
         <p:nvSpPr>
-          <p:cNvPr id="13" name="Rectangle 12"/>
+          <p:cNvPr id="14" name="Rectangle 13"/>
           <p:cNvSpPr/>
           <p:nvPr/>
         </p:nvSpPr>
@@ -9871,7 +10363,7 @@
       </p:sp>
       <p:sp>
         <p:nvSpPr>
-          <p:cNvPr id="14" name="TextBox 13"/>
+          <p:cNvPr id="15" name="TextBox 14"/>
           <p:cNvSpPr txBox="1"/>
           <p:nvPr/>
         </p:nvSpPr>
@@ -9913,7 +10405,7 @@
       </p:sp>
       <p:sp>
         <p:nvSpPr>
-          <p:cNvPr id="15" name="TextBox 14"/>
+          <p:cNvPr id="16" name="TextBox 15"/>
           <p:cNvSpPr txBox="1"/>
           <p:nvPr/>
         </p:nvSpPr>
@@ -9948,14 +10440,14 @@
               <a:rPr>
                 <a:latin typeface="Inter"/>
               </a:rPr>
-              <a:t>TEST DATA — fictional manager and benchmarks for rendering tests only · Data as of 2025-12-31</a:t>
+              <a:t>Confidential — manager performance review · Data as of 2025-12-31</a:t>
             </a:r>
           </a:p>
         </p:txBody>
       </p:sp>
       <p:sp>
         <p:nvSpPr>
-          <p:cNvPr id="16" name="TextBox 15"/>
+          <p:cNvPr id="17" name="TextBox 16"/>
           <p:cNvSpPr txBox="1"/>
           <p:nvPr/>
         </p:nvSpPr>
@@ -10071,7 +10563,7 @@
         <p:spPr>
           <a:xfrm>
             <a:off x="640080" y="329184"/>
-            <a:ext cx="9875520" cy="182880"/>
+            <a:ext cx="5303520" cy="182880"/>
           </a:xfrm>
           <a:prstGeom prst="rect">
             <a:avLst/>
@@ -10112,6 +10604,48 @@
         </p:nvSpPr>
         <p:spPr>
           <a:xfrm>
+            <a:off x="5897880" y="310896"/>
+            <a:ext cx="4800600" cy="256032"/>
+          </a:xfrm>
+          <a:prstGeom prst="rect">
+            <a:avLst/>
+          </a:prstGeom>
+          <a:noFill/>
+        </p:spPr>
+        <p:txBody>
+          <a:bodyPr wrap="none" lIns="9144" rIns="9144" tIns="9144" bIns="9144" anchor="t">
+            <a:spAutoFit/>
+          </a:bodyPr>
+          <a:lstStyle/>
+          <a:p>
+            <a:pPr algn="r">
+              <a:spcAft>
+                <a:spcPts val="0"/>
+              </a:spcAft>
+              <a:defRPr sz="680" b="1">
+                <a:solidFill>
+                  <a:srgbClr val="4F6B00"/>
+                </a:solidFill>
+                <a:latin typeface="Inter"/>
+              </a:defRPr>
+            </a:pPr>
+            <a:r>
+              <a:rPr>
+                <a:latin typeface="Inter"/>
+              </a:rPr>
+              <a:t>Illustrative, Gradient Maintained — demo data, not the client's holdings or managers</a:t>
+            </a:r>
+          </a:p>
+        </p:txBody>
+      </p:sp>
+      <p:sp>
+        <p:nvSpPr>
+          <p:cNvPr id="5" name="TextBox 4"/>
+          <p:cNvSpPr txBox="1"/>
+          <p:nvPr/>
+        </p:nvSpPr>
+        <p:spPr>
+          <a:xfrm>
             <a:off x="640080" y="566928"/>
             <a:ext cx="10058400" cy="530352"/>
           </a:xfrm>
@@ -10148,7 +10682,7 @@
       </p:sp>
       <p:sp>
         <p:nvSpPr>
-          <p:cNvPr id="5" name="Rectangle 4"/>
+          <p:cNvPr id="6" name="Rectangle 5"/>
           <p:cNvSpPr/>
           <p:nvPr/>
         </p:nvSpPr>
@@ -10197,7 +10731,7 @@
       </p:sp>
       <p:sp>
         <p:nvSpPr>
-          <p:cNvPr id="6" name="Rectangle 5"/>
+          <p:cNvPr id="7" name="Rectangle 6"/>
           <p:cNvSpPr/>
           <p:nvPr/>
         </p:nvSpPr>
@@ -10246,7 +10780,7 @@
       </p:sp>
       <p:sp>
         <p:nvSpPr>
-          <p:cNvPr id="7" name="TextBox 6"/>
+          <p:cNvPr id="8" name="TextBox 7"/>
           <p:cNvSpPr txBox="1"/>
           <p:nvPr/>
         </p:nvSpPr>
@@ -10288,7 +10822,7 @@
       </p:sp>
       <p:sp>
         <p:nvSpPr>
-          <p:cNvPr id="8" name="Rectangle 7"/>
+          <p:cNvPr id="9" name="Rectangle 8"/>
           <p:cNvSpPr/>
           <p:nvPr/>
         </p:nvSpPr>
@@ -10337,7 +10871,7 @@
       </p:sp>
       <p:sp>
         <p:nvSpPr>
-          <p:cNvPr id="9" name="Rectangle 8"/>
+          <p:cNvPr id="10" name="Rectangle 9"/>
           <p:cNvSpPr/>
           <p:nvPr/>
         </p:nvSpPr>
@@ -10386,7 +10920,7 @@
       </p:sp>
       <p:sp>
         <p:nvSpPr>
-          <p:cNvPr id="10" name="TextBox 9"/>
+          <p:cNvPr id="11" name="TextBox 10"/>
           <p:cNvSpPr txBox="1"/>
           <p:nvPr/>
         </p:nvSpPr>
@@ -10428,7 +10962,7 @@
       </p:sp>
       <p:sp>
         <p:nvSpPr>
-          <p:cNvPr id="11" name="TextBox 10"/>
+          <p:cNvPr id="12" name="TextBox 11"/>
           <p:cNvSpPr txBox="1"/>
           <p:nvPr/>
         </p:nvSpPr>
@@ -10470,7 +11004,7 @@
       </p:sp>
       <p:sp>
         <p:nvSpPr>
-          <p:cNvPr id="12" name="Rectangle 11"/>
+          <p:cNvPr id="13" name="Rectangle 12"/>
           <p:cNvSpPr/>
           <p:nvPr/>
         </p:nvSpPr>
@@ -10519,7 +11053,7 @@
       </p:sp>
       <p:sp>
         <p:nvSpPr>
-          <p:cNvPr id="13" name="TextBox 12"/>
+          <p:cNvPr id="14" name="TextBox 13"/>
           <p:cNvSpPr txBox="1"/>
           <p:nvPr/>
         </p:nvSpPr>
@@ -10561,7 +11095,7 @@
       </p:sp>
       <p:sp>
         <p:nvSpPr>
-          <p:cNvPr id="14" name="TextBox 13"/>
+          <p:cNvPr id="15" name="TextBox 14"/>
           <p:cNvSpPr txBox="1"/>
           <p:nvPr/>
         </p:nvSpPr>
@@ -10596,14 +11130,14 @@
               <a:rPr>
                 <a:latin typeface="Inter"/>
               </a:rPr>
-              <a:t>TEST DATA — fictional manager and benchmarks for rendering tests only · Data as of 2025-12-31</a:t>
+              <a:t>Confidential — manager performance review · Data as of 2025-12-31</a:t>
             </a:r>
           </a:p>
         </p:txBody>
       </p:sp>
       <p:sp>
         <p:nvSpPr>
-          <p:cNvPr id="15" name="TextBox 14"/>
+          <p:cNvPr id="16" name="TextBox 15"/>
           <p:cNvSpPr txBox="1"/>
           <p:nvPr/>
         </p:nvSpPr>
@@ -10719,7 +11253,7 @@
         <p:spPr>
           <a:xfrm>
             <a:off x="640080" y="329184"/>
-            <a:ext cx="9875520" cy="182880"/>
+            <a:ext cx="5303520" cy="182880"/>
           </a:xfrm>
           <a:prstGeom prst="rect">
             <a:avLst/>
@@ -10760,6 +11294,48 @@
         </p:nvSpPr>
         <p:spPr>
           <a:xfrm>
+            <a:off x="5897880" y="310896"/>
+            <a:ext cx="4800600" cy="256032"/>
+          </a:xfrm>
+          <a:prstGeom prst="rect">
+            <a:avLst/>
+          </a:prstGeom>
+          <a:noFill/>
+        </p:spPr>
+        <p:txBody>
+          <a:bodyPr wrap="none" lIns="9144" rIns="9144" tIns="9144" bIns="9144" anchor="t">
+            <a:spAutoFit/>
+          </a:bodyPr>
+          <a:lstStyle/>
+          <a:p>
+            <a:pPr algn="r">
+              <a:spcAft>
+                <a:spcPts val="0"/>
+              </a:spcAft>
+              <a:defRPr sz="680" b="1">
+                <a:solidFill>
+                  <a:srgbClr val="4F6B00"/>
+                </a:solidFill>
+                <a:latin typeface="Inter"/>
+              </a:defRPr>
+            </a:pPr>
+            <a:r>
+              <a:rPr>
+                <a:latin typeface="Inter"/>
+              </a:rPr>
+              <a:t>Illustrative, Gradient Maintained — demo data, not the client's holdings or managers</a:t>
+            </a:r>
+          </a:p>
+        </p:txBody>
+      </p:sp>
+      <p:sp>
+        <p:nvSpPr>
+          <p:cNvPr id="5" name="TextBox 4"/>
+          <p:cNvSpPr txBox="1"/>
+          <p:nvPr/>
+        </p:nvSpPr>
+        <p:spPr>
+          <a:xfrm>
             <a:off x="640080" y="566928"/>
             <a:ext cx="10058400" cy="530352"/>
           </a:xfrm>
@@ -10796,7 +11372,7 @@
       </p:sp>
       <p:sp>
         <p:nvSpPr>
-          <p:cNvPr id="5" name="Rectangle 4"/>
+          <p:cNvPr id="6" name="Rectangle 5"/>
           <p:cNvSpPr/>
           <p:nvPr/>
         </p:nvSpPr>
@@ -10845,7 +11421,7 @@
       </p:sp>
       <p:sp>
         <p:nvSpPr>
-          <p:cNvPr id="6" name="Rectangle 5"/>
+          <p:cNvPr id="7" name="Rectangle 6"/>
           <p:cNvSpPr/>
           <p:nvPr/>
         </p:nvSpPr>
@@ -10894,7 +11470,7 @@
       </p:sp>
       <p:sp>
         <p:nvSpPr>
-          <p:cNvPr id="7" name="TextBox 6"/>
+          <p:cNvPr id="8" name="TextBox 7"/>
           <p:cNvSpPr txBox="1"/>
           <p:nvPr/>
         </p:nvSpPr>
@@ -10936,7 +11512,7 @@
       </p:sp>
       <p:sp>
         <p:nvSpPr>
-          <p:cNvPr id="8" name="TextBox 7"/>
+          <p:cNvPr id="9" name="TextBox 8"/>
           <p:cNvSpPr txBox="1"/>
           <p:nvPr/>
         </p:nvSpPr>
@@ -10978,7 +11554,7 @@
       </p:sp>
       <p:graphicFrame>
         <p:nvGraphicFramePr>
-          <p:cNvPr id="9" name="Chart 8"/>
+          <p:cNvPr id="10" name="Chart 9"/>
           <p:cNvGraphicFramePr>
             <a:graphicFrameLocks noGrp="1"/>
           </p:cNvGraphicFramePr>
@@ -10996,7 +11572,7 @@
       </p:graphicFrame>
       <p:sp>
         <p:nvSpPr>
-          <p:cNvPr id="10" name="Rectangle 9"/>
+          <p:cNvPr id="11" name="Rectangle 10"/>
           <p:cNvSpPr/>
           <p:nvPr/>
         </p:nvSpPr>
@@ -11045,7 +11621,7 @@
       </p:sp>
       <p:sp>
         <p:nvSpPr>
-          <p:cNvPr id="11" name="TextBox 10"/>
+          <p:cNvPr id="12" name="TextBox 11"/>
           <p:cNvSpPr txBox="1"/>
           <p:nvPr/>
         </p:nvSpPr>
@@ -11087,7 +11663,7 @@
       </p:sp>
       <p:sp>
         <p:nvSpPr>
-          <p:cNvPr id="12" name="TextBox 11"/>
+          <p:cNvPr id="13" name="TextBox 12"/>
           <p:cNvSpPr txBox="1"/>
           <p:nvPr/>
         </p:nvSpPr>
@@ -11122,14 +11698,14 @@
               <a:rPr>
                 <a:latin typeface="Inter"/>
               </a:rPr>
-              <a:t>TEST DATA — fictional manager and benchmarks for rendering tests only · Data as of 2025-12-31</a:t>
+              <a:t>Confidential — manager performance review · Data as of 2025-12-31</a:t>
             </a:r>
           </a:p>
         </p:txBody>
       </p:sp>
       <p:sp>
         <p:nvSpPr>
-          <p:cNvPr id="13" name="TextBox 12"/>
+          <p:cNvPr id="14" name="TextBox 13"/>
           <p:cNvSpPr txBox="1"/>
           <p:nvPr/>
         </p:nvSpPr>
@@ -11245,7 +11821,7 @@
         <p:spPr>
           <a:xfrm>
             <a:off x="640080" y="329184"/>
-            <a:ext cx="9875520" cy="182880"/>
+            <a:ext cx="5303520" cy="182880"/>
           </a:xfrm>
           <a:prstGeom prst="rect">
             <a:avLst/>
@@ -11286,6 +11862,48 @@
         </p:nvSpPr>
         <p:spPr>
           <a:xfrm>
+            <a:off x="5897880" y="310896"/>
+            <a:ext cx="4800600" cy="256032"/>
+          </a:xfrm>
+          <a:prstGeom prst="rect">
+            <a:avLst/>
+          </a:prstGeom>
+          <a:noFill/>
+        </p:spPr>
+        <p:txBody>
+          <a:bodyPr wrap="none" lIns="9144" rIns="9144" tIns="9144" bIns="9144" anchor="t">
+            <a:spAutoFit/>
+          </a:bodyPr>
+          <a:lstStyle/>
+          <a:p>
+            <a:pPr algn="r">
+              <a:spcAft>
+                <a:spcPts val="0"/>
+              </a:spcAft>
+              <a:defRPr sz="680" b="1">
+                <a:solidFill>
+                  <a:srgbClr val="4F6B00"/>
+                </a:solidFill>
+                <a:latin typeface="Inter"/>
+              </a:defRPr>
+            </a:pPr>
+            <a:r>
+              <a:rPr>
+                <a:latin typeface="Inter"/>
+              </a:rPr>
+              <a:t>Illustrative, Gradient Maintained — demo data, not the client's holdings or managers</a:t>
+            </a:r>
+          </a:p>
+        </p:txBody>
+      </p:sp>
+      <p:sp>
+        <p:nvSpPr>
+          <p:cNvPr id="5" name="TextBox 4"/>
+          <p:cNvSpPr txBox="1"/>
+          <p:nvPr/>
+        </p:nvSpPr>
+        <p:spPr>
+          <a:xfrm>
             <a:off x="640080" y="566928"/>
             <a:ext cx="10058400" cy="530352"/>
           </a:xfrm>
@@ -11322,7 +11940,7 @@
       </p:sp>
       <p:sp>
         <p:nvSpPr>
-          <p:cNvPr id="5" name="Rectangle 4"/>
+          <p:cNvPr id="6" name="Rectangle 5"/>
           <p:cNvSpPr/>
           <p:nvPr/>
         </p:nvSpPr>
@@ -11371,7 +11989,7 @@
       </p:sp>
       <p:sp>
         <p:nvSpPr>
-          <p:cNvPr id="6" name="Rectangle 5"/>
+          <p:cNvPr id="7" name="Rectangle 6"/>
           <p:cNvSpPr/>
           <p:nvPr/>
         </p:nvSpPr>
@@ -11420,7 +12038,7 @@
       </p:sp>
       <p:sp>
         <p:nvSpPr>
-          <p:cNvPr id="7" name="TextBox 6"/>
+          <p:cNvPr id="8" name="TextBox 7"/>
           <p:cNvSpPr txBox="1"/>
           <p:nvPr/>
         </p:nvSpPr>
@@ -11462,7 +12080,7 @@
       </p:sp>
       <p:sp>
         <p:nvSpPr>
-          <p:cNvPr id="8" name="TextBox 7"/>
+          <p:cNvPr id="9" name="TextBox 8"/>
           <p:cNvSpPr txBox="1"/>
           <p:nvPr/>
         </p:nvSpPr>
@@ -11504,7 +12122,7 @@
       </p:sp>
       <p:graphicFrame>
         <p:nvGraphicFramePr>
-          <p:cNvPr id="9" name="Chart 8"/>
+          <p:cNvPr id="10" name="Chart 9"/>
           <p:cNvGraphicFramePr>
             <a:graphicFrameLocks noGrp="1"/>
           </p:cNvGraphicFramePr>
@@ -11522,7 +12140,7 @@
       </p:graphicFrame>
       <p:sp>
         <p:nvSpPr>
-          <p:cNvPr id="10" name="Rectangle 9"/>
+          <p:cNvPr id="11" name="Rectangle 10"/>
           <p:cNvSpPr/>
           <p:nvPr/>
         </p:nvSpPr>
@@ -11571,7 +12189,7 @@
       </p:sp>
       <p:sp>
         <p:nvSpPr>
-          <p:cNvPr id="11" name="TextBox 10"/>
+          <p:cNvPr id="12" name="TextBox 11"/>
           <p:cNvSpPr txBox="1"/>
           <p:nvPr/>
         </p:nvSpPr>
@@ -11613,7 +12231,7 @@
       </p:sp>
       <p:sp>
         <p:nvSpPr>
-          <p:cNvPr id="12" name="TextBox 11"/>
+          <p:cNvPr id="13" name="TextBox 12"/>
           <p:cNvSpPr txBox="1"/>
           <p:nvPr/>
         </p:nvSpPr>
@@ -11648,14 +12266,14 @@
               <a:rPr>
                 <a:latin typeface="Inter"/>
               </a:rPr>
-              <a:t>TEST DATA — fictional manager and benchmarks for rendering tests only · Data as of 2025-12-31</a:t>
+              <a:t>Confidential — manager performance review · Data as of 2025-12-31</a:t>
             </a:r>
           </a:p>
         </p:txBody>
       </p:sp>
       <p:sp>
         <p:nvSpPr>
-          <p:cNvPr id="13" name="TextBox 12"/>
+          <p:cNvPr id="14" name="TextBox 13"/>
           <p:cNvSpPr txBox="1"/>
           <p:nvPr/>
         </p:nvSpPr>
@@ -11771,7 +12389,7 @@
         <p:spPr>
           <a:xfrm>
             <a:off x="640080" y="329184"/>
-            <a:ext cx="9875520" cy="182880"/>
+            <a:ext cx="5303520" cy="182880"/>
           </a:xfrm>
           <a:prstGeom prst="rect">
             <a:avLst/>
@@ -11812,6 +12430,48 @@
         </p:nvSpPr>
         <p:spPr>
           <a:xfrm>
+            <a:off x="5897880" y="310896"/>
+            <a:ext cx="4800600" cy="256032"/>
+          </a:xfrm>
+          <a:prstGeom prst="rect">
+            <a:avLst/>
+          </a:prstGeom>
+          <a:noFill/>
+        </p:spPr>
+        <p:txBody>
+          <a:bodyPr wrap="none" lIns="9144" rIns="9144" tIns="9144" bIns="9144" anchor="t">
+            <a:spAutoFit/>
+          </a:bodyPr>
+          <a:lstStyle/>
+          <a:p>
+            <a:pPr algn="r">
+              <a:spcAft>
+                <a:spcPts val="0"/>
+              </a:spcAft>
+              <a:defRPr sz="680" b="1">
+                <a:solidFill>
+                  <a:srgbClr val="4F6B00"/>
+                </a:solidFill>
+                <a:latin typeface="Inter"/>
+              </a:defRPr>
+            </a:pPr>
+            <a:r>
+              <a:rPr>
+                <a:latin typeface="Inter"/>
+              </a:rPr>
+              <a:t>Illustrative, Gradient Maintained — demo data, not the client's holdings or managers</a:t>
+            </a:r>
+          </a:p>
+        </p:txBody>
+      </p:sp>
+      <p:sp>
+        <p:nvSpPr>
+          <p:cNvPr id="5" name="TextBox 4"/>
+          <p:cNvSpPr txBox="1"/>
+          <p:nvPr/>
+        </p:nvSpPr>
+        <p:spPr>
+          <a:xfrm>
             <a:off x="640080" y="566928"/>
             <a:ext cx="10058400" cy="530352"/>
           </a:xfrm>
@@ -11848,7 +12508,7 @@
       </p:sp>
       <p:sp>
         <p:nvSpPr>
-          <p:cNvPr id="5" name="Rectangle 4"/>
+          <p:cNvPr id="6" name="Rectangle 5"/>
           <p:cNvSpPr/>
           <p:nvPr/>
         </p:nvSpPr>
@@ -11897,7 +12557,7 @@
       </p:sp>
       <p:sp>
         <p:nvSpPr>
-          <p:cNvPr id="6" name="Rectangle 5"/>
+          <p:cNvPr id="7" name="Rectangle 6"/>
           <p:cNvSpPr/>
           <p:nvPr/>
         </p:nvSpPr>
@@ -11946,7 +12606,7 @@
       </p:sp>
       <p:sp>
         <p:nvSpPr>
-          <p:cNvPr id="7" name="TextBox 6"/>
+          <p:cNvPr id="8" name="TextBox 7"/>
           <p:cNvSpPr txBox="1"/>
           <p:nvPr/>
         </p:nvSpPr>
@@ -11988,7 +12648,7 @@
       </p:sp>
       <p:sp>
         <p:nvSpPr>
-          <p:cNvPr id="8" name="TextBox 7"/>
+          <p:cNvPr id="9" name="TextBox 8"/>
           <p:cNvSpPr txBox="1"/>
           <p:nvPr/>
         </p:nvSpPr>
@@ -12030,7 +12690,7 @@
       </p:sp>
       <p:graphicFrame>
         <p:nvGraphicFramePr>
-          <p:cNvPr id="9" name="Table 8"/>
+          <p:cNvPr id="10" name="Table 9"/>
           <p:cNvGraphicFramePr>
             <a:graphicFrameLocks noGrp="1"/>
           </p:cNvGraphicFramePr>
@@ -12825,7 +13485,7 @@
       </p:graphicFrame>
       <p:sp>
         <p:nvSpPr>
-          <p:cNvPr id="10" name="Rectangle 9"/>
+          <p:cNvPr id="11" name="Rectangle 10"/>
           <p:cNvSpPr/>
           <p:nvPr/>
         </p:nvSpPr>
@@ -12874,7 +13534,7 @@
       </p:sp>
       <p:sp>
         <p:nvSpPr>
-          <p:cNvPr id="11" name="Rectangle 10"/>
+          <p:cNvPr id="12" name="Rectangle 11"/>
           <p:cNvSpPr/>
           <p:nvPr/>
         </p:nvSpPr>
@@ -12923,7 +13583,7 @@
       </p:sp>
       <p:sp>
         <p:nvSpPr>
-          <p:cNvPr id="12" name="TextBox 11"/>
+          <p:cNvPr id="13" name="TextBox 12"/>
           <p:cNvSpPr txBox="1"/>
           <p:nvPr/>
         </p:nvSpPr>
@@ -12965,7 +13625,7 @@
       </p:sp>
       <p:sp>
         <p:nvSpPr>
-          <p:cNvPr id="13" name="TextBox 12"/>
+          <p:cNvPr id="14" name="TextBox 13"/>
           <p:cNvSpPr txBox="1"/>
           <p:nvPr/>
         </p:nvSpPr>
@@ -13007,7 +13667,7 @@
       </p:sp>
       <p:sp>
         <p:nvSpPr>
-          <p:cNvPr id="14" name="Rectangle 13"/>
+          <p:cNvPr id="15" name="Rectangle 14"/>
           <p:cNvSpPr/>
           <p:nvPr/>
         </p:nvSpPr>
@@ -13056,7 +13716,7 @@
       </p:sp>
       <p:sp>
         <p:nvSpPr>
-          <p:cNvPr id="15" name="TextBox 14"/>
+          <p:cNvPr id="16" name="TextBox 15"/>
           <p:cNvSpPr txBox="1"/>
           <p:nvPr/>
         </p:nvSpPr>
@@ -13098,7 +13758,7 @@
       </p:sp>
       <p:sp>
         <p:nvSpPr>
-          <p:cNvPr id="16" name="TextBox 15"/>
+          <p:cNvPr id="17" name="TextBox 16"/>
           <p:cNvSpPr txBox="1"/>
           <p:nvPr/>
         </p:nvSpPr>
@@ -13133,14 +13793,14 @@
               <a:rPr>
                 <a:latin typeface="Inter"/>
               </a:rPr>
-              <a:t>TEST DATA — fictional manager and benchmarks for rendering tests only · Data as of 2025-12-31</a:t>
+              <a:t>Confidential — manager performance review · Data as of 2025-12-31</a:t>
             </a:r>
           </a:p>
         </p:txBody>
       </p:sp>
       <p:sp>
         <p:nvSpPr>
-          <p:cNvPr id="17" name="TextBox 16"/>
+          <p:cNvPr id="18" name="TextBox 17"/>
           <p:cNvSpPr txBox="1"/>
           <p:nvPr/>
         </p:nvSpPr>
@@ -13256,7 +13916,7 @@
         <p:spPr>
           <a:xfrm>
             <a:off x="640080" y="329184"/>
-            <a:ext cx="9875520" cy="182880"/>
+            <a:ext cx="5303520" cy="182880"/>
           </a:xfrm>
           <a:prstGeom prst="rect">
             <a:avLst/>
@@ -13297,6 +13957,48 @@
         </p:nvSpPr>
         <p:spPr>
           <a:xfrm>
+            <a:off x="5897880" y="310896"/>
+            <a:ext cx="4800600" cy="256032"/>
+          </a:xfrm>
+          <a:prstGeom prst="rect">
+            <a:avLst/>
+          </a:prstGeom>
+          <a:noFill/>
+        </p:spPr>
+        <p:txBody>
+          <a:bodyPr wrap="none" lIns="9144" rIns="9144" tIns="9144" bIns="9144" anchor="t">
+            <a:spAutoFit/>
+          </a:bodyPr>
+          <a:lstStyle/>
+          <a:p>
+            <a:pPr algn="r">
+              <a:spcAft>
+                <a:spcPts val="0"/>
+              </a:spcAft>
+              <a:defRPr sz="680" b="1">
+                <a:solidFill>
+                  <a:srgbClr val="4F6B00"/>
+                </a:solidFill>
+                <a:latin typeface="Inter"/>
+              </a:defRPr>
+            </a:pPr>
+            <a:r>
+              <a:rPr>
+                <a:latin typeface="Inter"/>
+              </a:rPr>
+              <a:t>Illustrative, Gradient Maintained — demo data, not the client's holdings or managers</a:t>
+            </a:r>
+          </a:p>
+        </p:txBody>
+      </p:sp>
+      <p:sp>
+        <p:nvSpPr>
+          <p:cNvPr id="5" name="TextBox 4"/>
+          <p:cNvSpPr txBox="1"/>
+          <p:nvPr/>
+        </p:nvSpPr>
+        <p:spPr>
+          <a:xfrm>
             <a:off x="640080" y="566928"/>
             <a:ext cx="10058400" cy="530352"/>
           </a:xfrm>
@@ -13333,7 +14035,7 @@
       </p:sp>
       <p:sp>
         <p:nvSpPr>
-          <p:cNvPr id="5" name="Rectangle 4"/>
+          <p:cNvPr id="6" name="Rectangle 5"/>
           <p:cNvSpPr/>
           <p:nvPr/>
         </p:nvSpPr>
@@ -13382,7 +14084,7 @@
       </p:sp>
       <p:sp>
         <p:nvSpPr>
-          <p:cNvPr id="6" name="Rectangle 5"/>
+          <p:cNvPr id="7" name="Rectangle 6"/>
           <p:cNvSpPr/>
           <p:nvPr/>
         </p:nvSpPr>
@@ -13431,7 +14133,7 @@
       </p:sp>
       <p:sp>
         <p:nvSpPr>
-          <p:cNvPr id="7" name="TextBox 6"/>
+          <p:cNvPr id="8" name="TextBox 7"/>
           <p:cNvSpPr txBox="1"/>
           <p:nvPr/>
         </p:nvSpPr>
@@ -13473,7 +14175,7 @@
       </p:sp>
       <p:sp>
         <p:nvSpPr>
-          <p:cNvPr id="8" name="TextBox 7"/>
+          <p:cNvPr id="9" name="TextBox 8"/>
           <p:cNvSpPr txBox="1"/>
           <p:nvPr/>
         </p:nvSpPr>
@@ -13515,7 +14217,7 @@
       </p:sp>
       <p:graphicFrame>
         <p:nvGraphicFramePr>
-          <p:cNvPr id="9" name="Chart 8"/>
+          <p:cNvPr id="10" name="Chart 9"/>
           <p:cNvGraphicFramePr>
             <a:graphicFrameLocks noGrp="1"/>
           </p:cNvGraphicFramePr>
@@ -13533,7 +14235,7 @@
       </p:graphicFrame>
       <p:sp>
         <p:nvSpPr>
-          <p:cNvPr id="10" name="Rectangle 9"/>
+          <p:cNvPr id="11" name="Rectangle 10"/>
           <p:cNvSpPr/>
           <p:nvPr/>
         </p:nvSpPr>
@@ -13582,7 +14284,7 @@
       </p:sp>
       <p:sp>
         <p:nvSpPr>
-          <p:cNvPr id="11" name="TextBox 10"/>
+          <p:cNvPr id="12" name="TextBox 11"/>
           <p:cNvSpPr txBox="1"/>
           <p:nvPr/>
         </p:nvSpPr>
@@ -13624,7 +14326,7 @@
       </p:sp>
       <p:sp>
         <p:nvSpPr>
-          <p:cNvPr id="12" name="TextBox 11"/>
+          <p:cNvPr id="13" name="TextBox 12"/>
           <p:cNvSpPr txBox="1"/>
           <p:nvPr/>
         </p:nvSpPr>
@@ -13659,14 +14361,14 @@
               <a:rPr>
                 <a:latin typeface="Inter"/>
               </a:rPr>
-              <a:t>TEST DATA — fictional manager and benchmarks for rendering tests only · Data as of 2025-12-31</a:t>
+              <a:t>Confidential — manager performance review · Data as of 2025-12-31</a:t>
             </a:r>
           </a:p>
         </p:txBody>
       </p:sp>
       <p:sp>
         <p:nvSpPr>
-          <p:cNvPr id="13" name="TextBox 12"/>
+          <p:cNvPr id="14" name="TextBox 13"/>
           <p:cNvSpPr txBox="1"/>
           <p:nvPr/>
         </p:nvSpPr>
@@ -13782,7 +14484,7 @@
         <p:spPr>
           <a:xfrm>
             <a:off x="640080" y="329184"/>
-            <a:ext cx="9875520" cy="182880"/>
+            <a:ext cx="5303520" cy="182880"/>
           </a:xfrm>
           <a:prstGeom prst="rect">
             <a:avLst/>
@@ -13823,6 +14525,48 @@
         </p:nvSpPr>
         <p:spPr>
           <a:xfrm>
+            <a:off x="5897880" y="310896"/>
+            <a:ext cx="4800600" cy="256032"/>
+          </a:xfrm>
+          <a:prstGeom prst="rect">
+            <a:avLst/>
+          </a:prstGeom>
+          <a:noFill/>
+        </p:spPr>
+        <p:txBody>
+          <a:bodyPr wrap="none" lIns="9144" rIns="9144" tIns="9144" bIns="9144" anchor="t">
+            <a:spAutoFit/>
+          </a:bodyPr>
+          <a:lstStyle/>
+          <a:p>
+            <a:pPr algn="r">
+              <a:spcAft>
+                <a:spcPts val="0"/>
+              </a:spcAft>
+              <a:defRPr sz="680" b="1">
+                <a:solidFill>
+                  <a:srgbClr val="4F6B00"/>
+                </a:solidFill>
+                <a:latin typeface="Inter"/>
+              </a:defRPr>
+            </a:pPr>
+            <a:r>
+              <a:rPr>
+                <a:latin typeface="Inter"/>
+              </a:rPr>
+              <a:t>Illustrative, Gradient Maintained — demo data, not the client's holdings or managers</a:t>
+            </a:r>
+          </a:p>
+        </p:txBody>
+      </p:sp>
+      <p:sp>
+        <p:nvSpPr>
+          <p:cNvPr id="5" name="TextBox 4"/>
+          <p:cNvSpPr txBox="1"/>
+          <p:nvPr/>
+        </p:nvSpPr>
+        <p:spPr>
+          <a:xfrm>
             <a:off x="640080" y="566928"/>
             <a:ext cx="10058400" cy="530352"/>
           </a:xfrm>
@@ -13859,7 +14603,7 @@
       </p:sp>
       <p:sp>
         <p:nvSpPr>
-          <p:cNvPr id="5" name="Rectangle 4"/>
+          <p:cNvPr id="6" name="Rectangle 5"/>
           <p:cNvSpPr/>
           <p:nvPr/>
         </p:nvSpPr>
@@ -13908,7 +14652,7 @@
       </p:sp>
       <p:sp>
         <p:nvSpPr>
-          <p:cNvPr id="6" name="Rectangle 5"/>
+          <p:cNvPr id="7" name="Rectangle 6"/>
           <p:cNvSpPr/>
           <p:nvPr/>
         </p:nvSpPr>
@@ -13957,7 +14701,7 @@
       </p:sp>
       <p:sp>
         <p:nvSpPr>
-          <p:cNvPr id="7" name="TextBox 6"/>
+          <p:cNvPr id="8" name="TextBox 7"/>
           <p:cNvSpPr txBox="1"/>
           <p:nvPr/>
         </p:nvSpPr>
@@ -13999,7 +14743,7 @@
       </p:sp>
       <p:sp>
         <p:nvSpPr>
-          <p:cNvPr id="8" name="TextBox 7"/>
+          <p:cNvPr id="9" name="TextBox 8"/>
           <p:cNvSpPr txBox="1"/>
           <p:nvPr/>
         </p:nvSpPr>
@@ -14041,7 +14785,7 @@
       </p:sp>
       <p:graphicFrame>
         <p:nvGraphicFramePr>
-          <p:cNvPr id="9" name="Table 8"/>
+          <p:cNvPr id="10" name="Table 9"/>
           <p:cNvGraphicFramePr>
             <a:graphicFrameLocks noGrp="1"/>
           </p:cNvGraphicFramePr>
@@ -15027,7 +15771,7 @@
       </p:graphicFrame>
       <p:sp>
         <p:nvSpPr>
-          <p:cNvPr id="10" name="Rectangle 9"/>
+          <p:cNvPr id="11" name="Rectangle 10"/>
           <p:cNvSpPr/>
           <p:nvPr/>
         </p:nvSpPr>
@@ -15076,7 +15820,7 @@
       </p:sp>
       <p:sp>
         <p:nvSpPr>
-          <p:cNvPr id="11" name="Rectangle 10"/>
+          <p:cNvPr id="12" name="Rectangle 11"/>
           <p:cNvSpPr/>
           <p:nvPr/>
         </p:nvSpPr>
@@ -15125,7 +15869,7 @@
       </p:sp>
       <p:sp>
         <p:nvSpPr>
-          <p:cNvPr id="12" name="TextBox 11"/>
+          <p:cNvPr id="13" name="TextBox 12"/>
           <p:cNvSpPr txBox="1"/>
           <p:nvPr/>
         </p:nvSpPr>
@@ -15167,7 +15911,7 @@
       </p:sp>
       <p:sp>
         <p:nvSpPr>
-          <p:cNvPr id="13" name="TextBox 12"/>
+          <p:cNvPr id="14" name="TextBox 13"/>
           <p:cNvSpPr txBox="1"/>
           <p:nvPr/>
         </p:nvSpPr>
@@ -15209,7 +15953,7 @@
       </p:sp>
       <p:sp>
         <p:nvSpPr>
-          <p:cNvPr id="14" name="Rectangle 13"/>
+          <p:cNvPr id="15" name="Rectangle 14"/>
           <p:cNvSpPr/>
           <p:nvPr/>
         </p:nvSpPr>
@@ -15258,7 +16002,7 @@
       </p:sp>
       <p:sp>
         <p:nvSpPr>
-          <p:cNvPr id="15" name="TextBox 14"/>
+          <p:cNvPr id="16" name="TextBox 15"/>
           <p:cNvSpPr txBox="1"/>
           <p:nvPr/>
         </p:nvSpPr>
@@ -15300,7 +16044,7 @@
       </p:sp>
       <p:sp>
         <p:nvSpPr>
-          <p:cNvPr id="16" name="TextBox 15"/>
+          <p:cNvPr id="17" name="TextBox 16"/>
           <p:cNvSpPr txBox="1"/>
           <p:nvPr/>
         </p:nvSpPr>
@@ -15335,14 +16079,14 @@
               <a:rPr>
                 <a:latin typeface="Inter"/>
               </a:rPr>
-              <a:t>TEST DATA — fictional manager and benchmarks for rendering tests only · Data as of 2025-12-31</a:t>
+              <a:t>Confidential — manager performance review · Data as of 2025-12-31</a:t>
             </a:r>
           </a:p>
         </p:txBody>
       </p:sp>
       <p:sp>
         <p:nvSpPr>
-          <p:cNvPr id="17" name="TextBox 16"/>
+          <p:cNvPr id="18" name="TextBox 17"/>
           <p:cNvSpPr txBox="1"/>
           <p:nvPr/>
         </p:nvSpPr>
@@ -15458,7 +16202,7 @@
         <p:spPr>
           <a:xfrm>
             <a:off x="640080" y="329184"/>
-            <a:ext cx="9875520" cy="182880"/>
+            <a:ext cx="5303520" cy="182880"/>
           </a:xfrm>
           <a:prstGeom prst="rect">
             <a:avLst/>
@@ -15499,6 +16243,48 @@
         </p:nvSpPr>
         <p:spPr>
           <a:xfrm>
+            <a:off x="5897880" y="310896"/>
+            <a:ext cx="4800600" cy="256032"/>
+          </a:xfrm>
+          <a:prstGeom prst="rect">
+            <a:avLst/>
+          </a:prstGeom>
+          <a:noFill/>
+        </p:spPr>
+        <p:txBody>
+          <a:bodyPr wrap="none" lIns="9144" rIns="9144" tIns="9144" bIns="9144" anchor="t">
+            <a:spAutoFit/>
+          </a:bodyPr>
+          <a:lstStyle/>
+          <a:p>
+            <a:pPr algn="r">
+              <a:spcAft>
+                <a:spcPts val="0"/>
+              </a:spcAft>
+              <a:defRPr sz="680" b="1">
+                <a:solidFill>
+                  <a:srgbClr val="4F6B00"/>
+                </a:solidFill>
+                <a:latin typeface="Inter"/>
+              </a:defRPr>
+            </a:pPr>
+            <a:r>
+              <a:rPr>
+                <a:latin typeface="Inter"/>
+              </a:rPr>
+              <a:t>Illustrative, Gradient Maintained — demo data, not the client's holdings or managers</a:t>
+            </a:r>
+          </a:p>
+        </p:txBody>
+      </p:sp>
+      <p:sp>
+        <p:nvSpPr>
+          <p:cNvPr id="5" name="TextBox 4"/>
+          <p:cNvSpPr txBox="1"/>
+          <p:nvPr/>
+        </p:nvSpPr>
+        <p:spPr>
+          <a:xfrm>
             <a:off x="640080" y="566928"/>
             <a:ext cx="10058400" cy="530352"/>
           </a:xfrm>
@@ -15535,7 +16321,7 @@
       </p:sp>
       <p:sp>
         <p:nvSpPr>
-          <p:cNvPr id="5" name="Rectangle 4"/>
+          <p:cNvPr id="6" name="Rectangle 5"/>
           <p:cNvSpPr/>
           <p:nvPr/>
         </p:nvSpPr>
@@ -15584,7 +16370,7 @@
       </p:sp>
       <p:sp>
         <p:nvSpPr>
-          <p:cNvPr id="6" name="Rectangle 5"/>
+          <p:cNvPr id="7" name="Rectangle 6"/>
           <p:cNvSpPr/>
           <p:nvPr/>
         </p:nvSpPr>
@@ -15633,7 +16419,7 @@
       </p:sp>
       <p:sp>
         <p:nvSpPr>
-          <p:cNvPr id="7" name="TextBox 6"/>
+          <p:cNvPr id="8" name="TextBox 7"/>
           <p:cNvSpPr txBox="1"/>
           <p:nvPr/>
         </p:nvSpPr>
@@ -15675,7 +16461,7 @@
       </p:sp>
       <p:sp>
         <p:nvSpPr>
-          <p:cNvPr id="8" name="TextBox 7"/>
+          <p:cNvPr id="9" name="TextBox 8"/>
           <p:cNvSpPr txBox="1"/>
           <p:nvPr/>
         </p:nvSpPr>
@@ -15717,7 +16503,7 @@
       </p:sp>
       <p:graphicFrame>
         <p:nvGraphicFramePr>
-          <p:cNvPr id="9" name="Table 8"/>
+          <p:cNvPr id="10" name="Table 9"/>
           <p:cNvGraphicFramePr>
             <a:graphicFrameLocks noGrp="1"/>
           </p:cNvGraphicFramePr>
@@ -15923,7 +16709,7 @@
                         <a:rPr>
                           <a:latin typeface="Inter"/>
                         </a:rPr>
-                        <a:t>Northstar Core Equity Benchmark (TEST)</a:t>
+                        <a:t>Northstar Core Equity Benchmark</a:t>
                       </a:r>
                     </a:p>
                   </a:txBody>
@@ -16087,7 +16873,7 @@
                         <a:rPr>
                           <a:latin typeface="Inter"/>
                         </a:rPr>
-                        <a:t>Northstar Broad Equity Benchmark (TEST)</a:t>
+                        <a:t>Northstar Broad Equity Benchmark</a:t>
                       </a:r>
                     </a:p>
                   </a:txBody>
@@ -16239,7 +17025,7 @@
       </p:graphicFrame>
       <p:sp>
         <p:nvSpPr>
-          <p:cNvPr id="10" name="Rectangle 9"/>
+          <p:cNvPr id="11" name="Rectangle 10"/>
           <p:cNvSpPr/>
           <p:nvPr/>
         </p:nvSpPr>
@@ -16288,7 +17074,7 @@
       </p:sp>
       <p:sp>
         <p:nvSpPr>
-          <p:cNvPr id="11" name="Rectangle 10"/>
+          <p:cNvPr id="12" name="Rectangle 11"/>
           <p:cNvSpPr/>
           <p:nvPr/>
         </p:nvSpPr>
@@ -16337,7 +17123,7 @@
       </p:sp>
       <p:sp>
         <p:nvSpPr>
-          <p:cNvPr id="12" name="TextBox 11"/>
+          <p:cNvPr id="13" name="TextBox 12"/>
           <p:cNvSpPr txBox="1"/>
           <p:nvPr/>
         </p:nvSpPr>
@@ -16379,7 +17165,7 @@
       </p:sp>
       <p:sp>
         <p:nvSpPr>
-          <p:cNvPr id="13" name="TextBox 12"/>
+          <p:cNvPr id="14" name="TextBox 13"/>
           <p:cNvSpPr txBox="1"/>
           <p:nvPr/>
         </p:nvSpPr>
@@ -16421,7 +17207,7 @@
       </p:sp>
       <p:sp>
         <p:nvSpPr>
-          <p:cNvPr id="14" name="Rectangle 13"/>
+          <p:cNvPr id="15" name="Rectangle 14"/>
           <p:cNvSpPr/>
           <p:nvPr/>
         </p:nvSpPr>
@@ -16470,7 +17256,7 @@
       </p:sp>
       <p:sp>
         <p:nvSpPr>
-          <p:cNvPr id="15" name="TextBox 14"/>
+          <p:cNvPr id="16" name="TextBox 15"/>
           <p:cNvSpPr txBox="1"/>
           <p:nvPr/>
         </p:nvSpPr>
@@ -16512,7 +17298,7 @@
       </p:sp>
       <p:sp>
         <p:nvSpPr>
-          <p:cNvPr id="16" name="TextBox 15"/>
+          <p:cNvPr id="17" name="TextBox 16"/>
           <p:cNvSpPr txBox="1"/>
           <p:nvPr/>
         </p:nvSpPr>
@@ -16547,14 +17333,14 @@
               <a:rPr>
                 <a:latin typeface="Inter"/>
               </a:rPr>
-              <a:t>TEST DATA — fictional manager and benchmarks for rendering tests only · Data as of 2025-12-31</a:t>
+              <a:t>Confidential — manager performance review · Data as of 2025-12-31</a:t>
             </a:r>
           </a:p>
         </p:txBody>
       </p:sp>
       <p:sp>
         <p:nvSpPr>
-          <p:cNvPr id="17" name="TextBox 16"/>
+          <p:cNvPr id="18" name="TextBox 17"/>
           <p:cNvSpPr txBox="1"/>
           <p:nvPr/>
         </p:nvSpPr>
@@ -16670,7 +17456,7 @@
         <p:spPr>
           <a:xfrm>
             <a:off x="640080" y="329184"/>
-            <a:ext cx="9875520" cy="182880"/>
+            <a:ext cx="5303520" cy="182880"/>
           </a:xfrm>
           <a:prstGeom prst="rect">
             <a:avLst/>
@@ -16711,6 +17497,48 @@
         </p:nvSpPr>
         <p:spPr>
           <a:xfrm>
+            <a:off x="5897880" y="310896"/>
+            <a:ext cx="4800600" cy="256032"/>
+          </a:xfrm>
+          <a:prstGeom prst="rect">
+            <a:avLst/>
+          </a:prstGeom>
+          <a:noFill/>
+        </p:spPr>
+        <p:txBody>
+          <a:bodyPr wrap="none" lIns="9144" rIns="9144" tIns="9144" bIns="9144" anchor="t">
+            <a:spAutoFit/>
+          </a:bodyPr>
+          <a:lstStyle/>
+          <a:p>
+            <a:pPr algn="r">
+              <a:spcAft>
+                <a:spcPts val="0"/>
+              </a:spcAft>
+              <a:defRPr sz="680" b="1">
+                <a:solidFill>
+                  <a:srgbClr val="4F6B00"/>
+                </a:solidFill>
+                <a:latin typeface="Inter"/>
+              </a:defRPr>
+            </a:pPr>
+            <a:r>
+              <a:rPr>
+                <a:latin typeface="Inter"/>
+              </a:rPr>
+              <a:t>Illustrative, Gradient Maintained — demo data, not the client's holdings or managers</a:t>
+            </a:r>
+          </a:p>
+        </p:txBody>
+      </p:sp>
+      <p:sp>
+        <p:nvSpPr>
+          <p:cNvPr id="5" name="TextBox 4"/>
+          <p:cNvSpPr txBox="1"/>
+          <p:nvPr/>
+        </p:nvSpPr>
+        <p:spPr>
+          <a:xfrm>
             <a:off x="640080" y="566928"/>
             <a:ext cx="10058400" cy="530352"/>
           </a:xfrm>
@@ -16747,7 +17575,7 @@
       </p:sp>
       <p:sp>
         <p:nvSpPr>
-          <p:cNvPr id="5" name="Rectangle 4"/>
+          <p:cNvPr id="6" name="Rectangle 5"/>
           <p:cNvSpPr/>
           <p:nvPr/>
         </p:nvSpPr>
@@ -16796,7 +17624,7 @@
       </p:sp>
       <p:sp>
         <p:nvSpPr>
-          <p:cNvPr id="6" name="Rectangle 5"/>
+          <p:cNvPr id="7" name="Rectangle 6"/>
           <p:cNvSpPr/>
           <p:nvPr/>
         </p:nvSpPr>
@@ -16845,7 +17673,7 @@
       </p:sp>
       <p:sp>
         <p:nvSpPr>
-          <p:cNvPr id="7" name="TextBox 6"/>
+          <p:cNvPr id="8" name="TextBox 7"/>
           <p:cNvSpPr txBox="1"/>
           <p:nvPr/>
         </p:nvSpPr>
@@ -16887,7 +17715,7 @@
       </p:sp>
       <p:sp>
         <p:nvSpPr>
-          <p:cNvPr id="8" name="Rectangle 7"/>
+          <p:cNvPr id="9" name="Rectangle 8"/>
           <p:cNvSpPr/>
           <p:nvPr/>
         </p:nvSpPr>
@@ -16936,7 +17764,7 @@
       </p:sp>
       <p:sp>
         <p:nvSpPr>
-          <p:cNvPr id="9" name="Rectangle 8"/>
+          <p:cNvPr id="10" name="Rectangle 9"/>
           <p:cNvSpPr/>
           <p:nvPr/>
         </p:nvSpPr>
@@ -16985,7 +17813,7 @@
       </p:sp>
       <p:sp>
         <p:nvSpPr>
-          <p:cNvPr id="10" name="TextBox 9"/>
+          <p:cNvPr id="11" name="TextBox 10"/>
           <p:cNvSpPr txBox="1"/>
           <p:nvPr/>
         </p:nvSpPr>
@@ -17027,7 +17855,7 @@
       </p:sp>
       <p:sp>
         <p:nvSpPr>
-          <p:cNvPr id="11" name="TextBox 10"/>
+          <p:cNvPr id="12" name="TextBox 11"/>
           <p:cNvSpPr txBox="1"/>
           <p:nvPr/>
         </p:nvSpPr>
@@ -17069,7 +17897,7 @@
       </p:sp>
       <p:sp>
         <p:nvSpPr>
-          <p:cNvPr id="12" name="TextBox 11"/>
+          <p:cNvPr id="13" name="TextBox 12"/>
           <p:cNvSpPr txBox="1"/>
           <p:nvPr/>
         </p:nvSpPr>
@@ -17111,7 +17939,7 @@
       </p:sp>
       <p:sp>
         <p:nvSpPr>
-          <p:cNvPr id="13" name="Rectangle 12"/>
+          <p:cNvPr id="14" name="Rectangle 13"/>
           <p:cNvSpPr/>
           <p:nvPr/>
         </p:nvSpPr>
@@ -17160,7 +17988,7 @@
       </p:sp>
       <p:sp>
         <p:nvSpPr>
-          <p:cNvPr id="14" name="Rectangle 13"/>
+          <p:cNvPr id="15" name="Rectangle 14"/>
           <p:cNvSpPr/>
           <p:nvPr/>
         </p:nvSpPr>
@@ -17209,7 +18037,7 @@
       </p:sp>
       <p:sp>
         <p:nvSpPr>
-          <p:cNvPr id="15" name="TextBox 14"/>
+          <p:cNvPr id="16" name="TextBox 15"/>
           <p:cNvSpPr txBox="1"/>
           <p:nvPr/>
         </p:nvSpPr>
@@ -17251,7 +18079,7 @@
       </p:sp>
       <p:sp>
         <p:nvSpPr>
-          <p:cNvPr id="16" name="TextBox 15"/>
+          <p:cNvPr id="17" name="TextBox 16"/>
           <p:cNvSpPr txBox="1"/>
           <p:nvPr/>
         </p:nvSpPr>
@@ -17293,7 +18121,7 @@
       </p:sp>
       <p:sp>
         <p:nvSpPr>
-          <p:cNvPr id="17" name="TextBox 16"/>
+          <p:cNvPr id="18" name="TextBox 17"/>
           <p:cNvSpPr txBox="1"/>
           <p:nvPr/>
         </p:nvSpPr>
@@ -17335,7 +18163,7 @@
       </p:sp>
       <p:sp>
         <p:nvSpPr>
-          <p:cNvPr id="18" name="Rectangle 17"/>
+          <p:cNvPr id="19" name="Rectangle 18"/>
           <p:cNvSpPr/>
           <p:nvPr/>
         </p:nvSpPr>
@@ -17384,7 +18212,7 @@
       </p:sp>
       <p:sp>
         <p:nvSpPr>
-          <p:cNvPr id="19" name="Rectangle 18"/>
+          <p:cNvPr id="20" name="Rectangle 19"/>
           <p:cNvSpPr/>
           <p:nvPr/>
         </p:nvSpPr>
@@ -17433,7 +18261,7 @@
       </p:sp>
       <p:sp>
         <p:nvSpPr>
-          <p:cNvPr id="20" name="TextBox 19"/>
+          <p:cNvPr id="21" name="TextBox 20"/>
           <p:cNvSpPr txBox="1"/>
           <p:nvPr/>
         </p:nvSpPr>
@@ -17475,7 +18303,7 @@
       </p:sp>
       <p:sp>
         <p:nvSpPr>
-          <p:cNvPr id="21" name="TextBox 20"/>
+          <p:cNvPr id="22" name="TextBox 21"/>
           <p:cNvSpPr txBox="1"/>
           <p:nvPr/>
         </p:nvSpPr>
@@ -17517,7 +18345,7 @@
       </p:sp>
       <p:sp>
         <p:nvSpPr>
-          <p:cNvPr id="22" name="TextBox 21"/>
+          <p:cNvPr id="23" name="TextBox 22"/>
           <p:cNvSpPr txBox="1"/>
           <p:nvPr/>
         </p:nvSpPr>
@@ -17559,7 +18387,7 @@
       </p:sp>
       <p:sp>
         <p:nvSpPr>
-          <p:cNvPr id="23" name="Rectangle 22"/>
+          <p:cNvPr id="24" name="Rectangle 23"/>
           <p:cNvSpPr/>
           <p:nvPr/>
         </p:nvSpPr>
@@ -17608,7 +18436,7 @@
       </p:sp>
       <p:sp>
         <p:nvSpPr>
-          <p:cNvPr id="24" name="Rectangle 23"/>
+          <p:cNvPr id="25" name="Rectangle 24"/>
           <p:cNvSpPr/>
           <p:nvPr/>
         </p:nvSpPr>
@@ -17657,7 +18485,7 @@
       </p:sp>
       <p:sp>
         <p:nvSpPr>
-          <p:cNvPr id="25" name="TextBox 24"/>
+          <p:cNvPr id="26" name="TextBox 25"/>
           <p:cNvSpPr txBox="1"/>
           <p:nvPr/>
         </p:nvSpPr>
@@ -17699,7 +18527,7 @@
       </p:sp>
       <p:sp>
         <p:nvSpPr>
-          <p:cNvPr id="26" name="TextBox 25"/>
+          <p:cNvPr id="27" name="TextBox 26"/>
           <p:cNvSpPr txBox="1"/>
           <p:nvPr/>
         </p:nvSpPr>
@@ -17741,7 +18569,7 @@
       </p:sp>
       <p:sp>
         <p:nvSpPr>
-          <p:cNvPr id="27" name="TextBox 26"/>
+          <p:cNvPr id="28" name="TextBox 27"/>
           <p:cNvSpPr txBox="1"/>
           <p:nvPr/>
         </p:nvSpPr>
@@ -17783,7 +18611,7 @@
       </p:sp>
       <p:sp>
         <p:nvSpPr>
-          <p:cNvPr id="28" name="Rectangle 27"/>
+          <p:cNvPr id="29" name="Rectangle 28"/>
           <p:cNvSpPr/>
           <p:nvPr/>
         </p:nvSpPr>
@@ -17832,7 +18660,7 @@
       </p:sp>
       <p:sp>
         <p:nvSpPr>
-          <p:cNvPr id="29" name="TextBox 28"/>
+          <p:cNvPr id="30" name="TextBox 29"/>
           <p:cNvSpPr txBox="1"/>
           <p:nvPr/>
         </p:nvSpPr>
@@ -17874,7 +18702,7 @@
       </p:sp>
       <p:sp>
         <p:nvSpPr>
-          <p:cNvPr id="30" name="TextBox 29"/>
+          <p:cNvPr id="31" name="TextBox 30"/>
           <p:cNvSpPr txBox="1"/>
           <p:nvPr/>
         </p:nvSpPr>
@@ -17916,7 +18744,7 @@
       </p:sp>
       <p:sp>
         <p:nvSpPr>
-          <p:cNvPr id="31" name="Rectangle 30"/>
+          <p:cNvPr id="32" name="Rectangle 31"/>
           <p:cNvSpPr/>
           <p:nvPr/>
         </p:nvSpPr>
@@ -17965,7 +18793,7 @@
       </p:sp>
       <p:sp>
         <p:nvSpPr>
-          <p:cNvPr id="32" name="Rectangle 31"/>
+          <p:cNvPr id="33" name="Rectangle 32"/>
           <p:cNvSpPr/>
           <p:nvPr/>
         </p:nvSpPr>
@@ -18014,7 +18842,7 @@
       </p:sp>
       <p:sp>
         <p:nvSpPr>
-          <p:cNvPr id="33" name="TextBox 32"/>
+          <p:cNvPr id="34" name="TextBox 33"/>
           <p:cNvSpPr txBox="1"/>
           <p:nvPr/>
         </p:nvSpPr>
@@ -18056,7 +18884,7 @@
       </p:sp>
       <p:sp>
         <p:nvSpPr>
-          <p:cNvPr id="34" name="TextBox 33"/>
+          <p:cNvPr id="35" name="TextBox 34"/>
           <p:cNvSpPr txBox="1"/>
           <p:nvPr/>
         </p:nvSpPr>
@@ -18098,7 +18926,7 @@
       </p:sp>
       <p:sp>
         <p:nvSpPr>
-          <p:cNvPr id="35" name="Rectangle 34"/>
+          <p:cNvPr id="36" name="Rectangle 35"/>
           <p:cNvSpPr/>
           <p:nvPr/>
         </p:nvSpPr>
@@ -18147,7 +18975,7 @@
       </p:sp>
       <p:sp>
         <p:nvSpPr>
-          <p:cNvPr id="36" name="Rectangle 35"/>
+          <p:cNvPr id="37" name="Rectangle 36"/>
           <p:cNvSpPr/>
           <p:nvPr/>
         </p:nvSpPr>
@@ -18196,7 +19024,7 @@
       </p:sp>
       <p:sp>
         <p:nvSpPr>
-          <p:cNvPr id="37" name="TextBox 36"/>
+          <p:cNvPr id="38" name="TextBox 37"/>
           <p:cNvSpPr txBox="1"/>
           <p:nvPr/>
         </p:nvSpPr>
@@ -18238,7 +19066,7 @@
       </p:sp>
       <p:sp>
         <p:nvSpPr>
-          <p:cNvPr id="38" name="TextBox 37"/>
+          <p:cNvPr id="39" name="TextBox 38"/>
           <p:cNvSpPr txBox="1"/>
           <p:nvPr/>
         </p:nvSpPr>
@@ -18280,7 +19108,7 @@
       </p:sp>
       <p:sp>
         <p:nvSpPr>
-          <p:cNvPr id="39" name="Rectangle 38"/>
+          <p:cNvPr id="40" name="Rectangle 39"/>
           <p:cNvSpPr/>
           <p:nvPr/>
         </p:nvSpPr>
@@ -18329,7 +19157,7 @@
       </p:sp>
       <p:sp>
         <p:nvSpPr>
-          <p:cNvPr id="40" name="TextBox 39"/>
+          <p:cNvPr id="41" name="TextBox 40"/>
           <p:cNvSpPr txBox="1"/>
           <p:nvPr/>
         </p:nvSpPr>
@@ -18371,7 +19199,7 @@
       </p:sp>
       <p:sp>
         <p:nvSpPr>
-          <p:cNvPr id="41" name="TextBox 40"/>
+          <p:cNvPr id="42" name="TextBox 41"/>
           <p:cNvSpPr txBox="1"/>
           <p:nvPr/>
         </p:nvSpPr>
@@ -18406,14 +19234,14 @@
               <a:rPr>
                 <a:latin typeface="Inter"/>
               </a:rPr>
-              <a:t>TEST DATA — fictional manager and benchmarks for rendering tests only · Data as of 2025-12-31</a:t>
+              <a:t>Confidential — manager performance review · Data as of 2025-12-31</a:t>
             </a:r>
           </a:p>
         </p:txBody>
       </p:sp>
       <p:sp>
         <p:nvSpPr>
-          <p:cNvPr id="42" name="TextBox 41"/>
+          <p:cNvPr id="43" name="TextBox 42"/>
           <p:cNvSpPr txBox="1"/>
           <p:nvPr/>
         </p:nvSpPr>
@@ -18529,7 +19357,7 @@
         <p:spPr>
           <a:xfrm>
             <a:off x="640080" y="329184"/>
-            <a:ext cx="9875520" cy="182880"/>
+            <a:ext cx="5303520" cy="182880"/>
           </a:xfrm>
           <a:prstGeom prst="rect">
             <a:avLst/>
@@ -18570,6 +19398,48 @@
         </p:nvSpPr>
         <p:spPr>
           <a:xfrm>
+            <a:off x="5897880" y="310896"/>
+            <a:ext cx="4800600" cy="256032"/>
+          </a:xfrm>
+          <a:prstGeom prst="rect">
+            <a:avLst/>
+          </a:prstGeom>
+          <a:noFill/>
+        </p:spPr>
+        <p:txBody>
+          <a:bodyPr wrap="none" lIns="9144" rIns="9144" tIns="9144" bIns="9144" anchor="t">
+            <a:spAutoFit/>
+          </a:bodyPr>
+          <a:lstStyle/>
+          <a:p>
+            <a:pPr algn="r">
+              <a:spcAft>
+                <a:spcPts val="0"/>
+              </a:spcAft>
+              <a:defRPr sz="680" b="1">
+                <a:solidFill>
+                  <a:srgbClr val="4F6B00"/>
+                </a:solidFill>
+                <a:latin typeface="Inter"/>
+              </a:defRPr>
+            </a:pPr>
+            <a:r>
+              <a:rPr>
+                <a:latin typeface="Inter"/>
+              </a:rPr>
+              <a:t>Illustrative, Gradient Maintained — demo data, not the client's holdings or managers</a:t>
+            </a:r>
+          </a:p>
+        </p:txBody>
+      </p:sp>
+      <p:sp>
+        <p:nvSpPr>
+          <p:cNvPr id="5" name="TextBox 4"/>
+          <p:cNvSpPr txBox="1"/>
+          <p:nvPr/>
+        </p:nvSpPr>
+        <p:spPr>
+          <a:xfrm>
             <a:off x="640080" y="566928"/>
             <a:ext cx="10058400" cy="530352"/>
           </a:xfrm>
@@ -18606,7 +19476,7 @@
       </p:sp>
       <p:sp>
         <p:nvSpPr>
-          <p:cNvPr id="5" name="Rectangle 4"/>
+          <p:cNvPr id="6" name="Rectangle 5"/>
           <p:cNvSpPr/>
           <p:nvPr/>
         </p:nvSpPr>
@@ -18655,7 +19525,7 @@
       </p:sp>
       <p:sp>
         <p:nvSpPr>
-          <p:cNvPr id="6" name="Rectangle 5"/>
+          <p:cNvPr id="7" name="Rectangle 6"/>
           <p:cNvSpPr/>
           <p:nvPr/>
         </p:nvSpPr>
@@ -18704,7 +19574,7 @@
       </p:sp>
       <p:sp>
         <p:nvSpPr>
-          <p:cNvPr id="7" name="TextBox 6"/>
+          <p:cNvPr id="8" name="TextBox 7"/>
           <p:cNvSpPr txBox="1"/>
           <p:nvPr/>
         </p:nvSpPr>
@@ -18746,7 +19616,7 @@
       </p:sp>
       <p:sp>
         <p:nvSpPr>
-          <p:cNvPr id="8" name="TextBox 7"/>
+          <p:cNvPr id="9" name="TextBox 8"/>
           <p:cNvSpPr txBox="1"/>
           <p:nvPr/>
         </p:nvSpPr>
@@ -18788,7 +19658,7 @@
       </p:sp>
       <p:sp>
         <p:nvSpPr>
-          <p:cNvPr id="9" name="TextBox 8"/>
+          <p:cNvPr id="10" name="TextBox 9"/>
           <p:cNvSpPr txBox="1"/>
           <p:nvPr/>
         </p:nvSpPr>
@@ -18887,7 +19757,7 @@
       </p:sp>
       <p:sp>
         <p:nvSpPr>
-          <p:cNvPr id="10" name="TextBox 9"/>
+          <p:cNvPr id="11" name="TextBox 10"/>
           <p:cNvSpPr txBox="1"/>
           <p:nvPr/>
         </p:nvSpPr>
@@ -19014,7 +19884,7 @@
       </p:sp>
       <p:sp>
         <p:nvSpPr>
-          <p:cNvPr id="11" name="Rectangle 10"/>
+          <p:cNvPr id="12" name="Rectangle 11"/>
           <p:cNvSpPr/>
           <p:nvPr/>
         </p:nvSpPr>
@@ -19063,7 +19933,7 @@
       </p:sp>
       <p:sp>
         <p:nvSpPr>
-          <p:cNvPr id="12" name="TextBox 11"/>
+          <p:cNvPr id="13" name="TextBox 12"/>
           <p:cNvSpPr txBox="1"/>
           <p:nvPr/>
         </p:nvSpPr>
@@ -19105,7 +19975,7 @@
       </p:sp>
       <p:sp>
         <p:nvSpPr>
-          <p:cNvPr id="13" name="TextBox 12"/>
+          <p:cNvPr id="14" name="TextBox 13"/>
           <p:cNvSpPr txBox="1"/>
           <p:nvPr/>
         </p:nvSpPr>
@@ -19140,14 +20010,14 @@
               <a:rPr>
                 <a:latin typeface="Inter"/>
               </a:rPr>
-              <a:t>TEST DATA — fictional manager and benchmarks for rendering tests only · Data as of 2025-12-31</a:t>
+              <a:t>Confidential — manager performance review · Data as of 2025-12-31</a:t>
             </a:r>
           </a:p>
         </p:txBody>
       </p:sp>
       <p:sp>
         <p:nvSpPr>
-          <p:cNvPr id="14" name="TextBox 13"/>
+          <p:cNvPr id="15" name="TextBox 14"/>
           <p:cNvSpPr txBox="1"/>
           <p:nvPr/>
         </p:nvSpPr>
@@ -19263,7 +20133,7 @@
         <p:spPr>
           <a:xfrm>
             <a:off x="640080" y="329184"/>
-            <a:ext cx="9875520" cy="182880"/>
+            <a:ext cx="5303520" cy="182880"/>
           </a:xfrm>
           <a:prstGeom prst="rect">
             <a:avLst/>
@@ -19291,7 +20161,7 @@
               <a:rPr>
                 <a:latin typeface="Inter"/>
               </a:rPr>
-              <a:t>SAVED FICTIONAL TEST RESPONSES AND REPRODUCIBILITY LINEAGE</a:t>
+              <a:t>SAVED SAMPLE RESPONSES AND REPRODUCIBILITY LINEAGE</a:t>
             </a:r>
           </a:p>
         </p:txBody>
@@ -19299,6 +20169,48 @@
       <p:sp>
         <p:nvSpPr>
           <p:cNvPr id="4" name="TextBox 3"/>
+          <p:cNvSpPr txBox="1"/>
+          <p:nvPr/>
+        </p:nvSpPr>
+        <p:spPr>
+          <a:xfrm>
+            <a:off x="5897880" y="310896"/>
+            <a:ext cx="4800600" cy="256032"/>
+          </a:xfrm>
+          <a:prstGeom prst="rect">
+            <a:avLst/>
+          </a:prstGeom>
+          <a:noFill/>
+        </p:spPr>
+        <p:txBody>
+          <a:bodyPr wrap="none" lIns="9144" rIns="9144" tIns="9144" bIns="9144" anchor="t">
+            <a:spAutoFit/>
+          </a:bodyPr>
+          <a:lstStyle/>
+          <a:p>
+            <a:pPr algn="r">
+              <a:spcAft>
+                <a:spcPts val="0"/>
+              </a:spcAft>
+              <a:defRPr sz="680" b="1">
+                <a:solidFill>
+                  <a:srgbClr val="4F6B00"/>
+                </a:solidFill>
+                <a:latin typeface="Inter"/>
+              </a:defRPr>
+            </a:pPr>
+            <a:r>
+              <a:rPr>
+                <a:latin typeface="Inter"/>
+              </a:rPr>
+              <a:t>Illustrative, Gradient Maintained — demo data, not the client's holdings or managers</a:t>
+            </a:r>
+          </a:p>
+        </p:txBody>
+      </p:sp>
+      <p:sp>
+        <p:nvSpPr>
+          <p:cNvPr id="5" name="TextBox 4"/>
           <p:cNvSpPr txBox="1"/>
           <p:nvPr/>
         </p:nvSpPr>
@@ -19340,7 +20252,7 @@
       </p:sp>
       <p:sp>
         <p:nvSpPr>
-          <p:cNvPr id="5" name="Rectangle 4"/>
+          <p:cNvPr id="6" name="Rectangle 5"/>
           <p:cNvSpPr/>
           <p:nvPr/>
         </p:nvSpPr>
@@ -19389,7 +20301,7 @@
       </p:sp>
       <p:sp>
         <p:nvSpPr>
-          <p:cNvPr id="6" name="Rectangle 5"/>
+          <p:cNvPr id="7" name="Rectangle 6"/>
           <p:cNvSpPr/>
           <p:nvPr/>
         </p:nvSpPr>
@@ -19438,7 +20350,7 @@
       </p:sp>
       <p:sp>
         <p:nvSpPr>
-          <p:cNvPr id="7" name="TextBox 6"/>
+          <p:cNvPr id="8" name="TextBox 7"/>
           <p:cNvSpPr txBox="1"/>
           <p:nvPr/>
         </p:nvSpPr>
@@ -19480,7 +20392,7 @@
       </p:sp>
       <p:sp>
         <p:nvSpPr>
-          <p:cNvPr id="8" name="TextBox 7"/>
+          <p:cNvPr id="9" name="TextBox 8"/>
           <p:cNvSpPr txBox="1"/>
           <p:nvPr/>
         </p:nvSpPr>
@@ -19522,7 +20434,7 @@
       </p:sp>
       <p:graphicFrame>
         <p:nvGraphicFramePr>
-          <p:cNvPr id="9" name="Table 8"/>
+          <p:cNvPr id="10" name="Table 9"/>
           <p:cNvGraphicFramePr>
             <a:graphicFrameLocks noGrp="1"/>
           </p:cNvGraphicFramePr>
@@ -19530,7 +20442,7 @@
         </p:nvGraphicFramePr>
         <p:xfrm>
           <a:off x="640080" y="1600200"/>
-          <a:ext cx="10908792" cy="4617720"/>
+          <a:ext cx="10908792" cy="4416552"/>
         </p:xfrm>
         <a:graphic>
           <a:graphicData uri="http://schemas.openxmlformats.org/drawingml/2006/table">
@@ -19543,7 +20455,7 @@
                 <a:gridCol w="4448556"/>
                 <a:gridCol w="4448556"/>
               </a:tblGrid>
-              <a:tr h="419792">
+              <a:tr h="401504">
                 <a:tc>
                   <a:txBody>
                     <a:bodyPr/>
@@ -19626,7 +20538,7 @@
                   </a:tcPr>
                 </a:tc>
               </a:tr>
-              <a:tr h="419792">
+              <a:tr h="401504">
                 <a:tc>
                   <a:txBody>
                     <a:bodyPr/>
@@ -19709,7 +20621,7 @@
                   </a:tcPr>
                 </a:tc>
               </a:tr>
-              <a:tr h="419792">
+              <a:tr h="401504">
                 <a:tc>
                   <a:txBody>
                     <a:bodyPr/>
@@ -19792,7 +20704,7 @@
                   </a:tcPr>
                 </a:tc>
               </a:tr>
-              <a:tr h="419792">
+              <a:tr h="401504">
                 <a:tc>
                   <a:txBody>
                     <a:bodyPr/>
@@ -19875,7 +20787,7 @@
                   </a:tcPr>
                 </a:tc>
               </a:tr>
-              <a:tr h="419792">
+              <a:tr h="401504">
                 <a:tc>
                   <a:txBody>
                     <a:bodyPr/>
@@ -19958,7 +20870,7 @@
                   </a:tcPr>
                 </a:tc>
               </a:tr>
-              <a:tr h="419792">
+              <a:tr h="401504">
                 <a:tc>
                   <a:txBody>
                     <a:bodyPr/>
@@ -20041,7 +20953,7 @@
                   </a:tcPr>
                 </a:tc>
               </a:tr>
-              <a:tr h="419792">
+              <a:tr h="401504">
                 <a:tc>
                   <a:txBody>
                     <a:bodyPr/>
@@ -20124,7 +21036,7 @@
                   </a:tcPr>
                 </a:tc>
               </a:tr>
-              <a:tr h="419792">
+              <a:tr h="401504">
                 <a:tc>
                   <a:txBody>
                     <a:bodyPr/>
@@ -20207,7 +21119,7 @@
                   </a:tcPr>
                 </a:tc>
               </a:tr>
-              <a:tr h="419792">
+              <a:tr h="401504">
                 <a:tc>
                   <a:txBody>
                     <a:bodyPr/>
@@ -20290,7 +21202,7 @@
                   </a:tcPr>
                 </a:tc>
               </a:tr>
-              <a:tr h="419792">
+              <a:tr h="401504">
                 <a:tc>
                   <a:txBody>
                     <a:bodyPr/>
@@ -20373,7 +21285,7 @@
                   </a:tcPr>
                 </a:tc>
               </a:tr>
-              <a:tr h="419800">
+              <a:tr h="401512">
                 <a:tc>
                   <a:txBody>
                     <a:bodyPr/>
@@ -20462,7 +21374,49 @@
       </p:graphicFrame>
       <p:sp>
         <p:nvSpPr>
-          <p:cNvPr id="10" name="Rectangle 9"/>
+          <p:cNvPr id="11" name="TextBox 10"/>
+          <p:cNvSpPr txBox="1"/>
+          <p:nvPr/>
+        </p:nvSpPr>
+        <p:spPr>
+          <a:xfrm>
+            <a:off x="640080" y="6035040"/>
+            <a:ext cx="10908792" cy="164592"/>
+          </a:xfrm>
+          <a:prstGeom prst="rect">
+            <a:avLst/>
+          </a:prstGeom>
+          <a:noFill/>
+        </p:spPr>
+        <p:txBody>
+          <a:bodyPr wrap="none" lIns="9144" rIns="9144" tIns="9144" bIns="9144" anchor="t">
+            <a:spAutoFit/>
+          </a:bodyPr>
+          <a:lstStyle/>
+          <a:p>
+            <a:pPr algn="l">
+              <a:spcAft>
+                <a:spcPts val="0"/>
+              </a:spcAft>
+              <a:defRPr sz="680" b="0">
+                <a:solidFill>
+                  <a:srgbClr val="8A94A1"/>
+                </a:solidFill>
+                <a:latin typeface="Inter"/>
+              </a:defRPr>
+            </a:pPr>
+            <a:r>
+              <a:rPr>
+                <a:latin typeface="Inter"/>
+              </a:rPr>
+              <a:t>Illustrative, Gradient Maintained — demo data, not the client's holdings or managers. All organizations, portfolios, managers and results in this public example are illustrative.</a:t>
+            </a:r>
+          </a:p>
+        </p:txBody>
+      </p:sp>
+      <p:sp>
+        <p:nvSpPr>
+          <p:cNvPr id="12" name="Rectangle 11"/>
           <p:cNvSpPr/>
           <p:nvPr/>
         </p:nvSpPr>
@@ -20511,7 +21465,7 @@
       </p:sp>
       <p:sp>
         <p:nvSpPr>
-          <p:cNvPr id="11" name="TextBox 10"/>
+          <p:cNvPr id="13" name="TextBox 12"/>
           <p:cNvSpPr txBox="1"/>
           <p:nvPr/>
         </p:nvSpPr>
@@ -20553,7 +21507,7 @@
       </p:sp>
       <p:sp>
         <p:nvSpPr>
-          <p:cNvPr id="12" name="TextBox 11"/>
+          <p:cNvPr id="14" name="TextBox 13"/>
           <p:cNvSpPr txBox="1"/>
           <p:nvPr/>
         </p:nvSpPr>
@@ -20588,14 +21542,14 @@
               <a:rPr>
                 <a:latin typeface="Inter"/>
               </a:rPr>
-              <a:t>TEST DATA — fictional manager and benchmarks for rendering tests only · Data as of 2025-12-31</a:t>
+              <a:t>Confidential — manager performance review · Data as of 2025-12-31</a:t>
             </a:r>
           </a:p>
         </p:txBody>
       </p:sp>
       <p:sp>
         <p:nvSpPr>
-          <p:cNvPr id="13" name="TextBox 12"/>
+          <p:cNvPr id="15" name="TextBox 14"/>
           <p:cNvSpPr txBox="1"/>
           <p:nvPr/>
         </p:nvSpPr>
@@ -20711,7 +21665,7 @@
         <p:spPr>
           <a:xfrm>
             <a:off x="640080" y="329184"/>
-            <a:ext cx="9875520" cy="182880"/>
+            <a:ext cx="5303520" cy="182880"/>
           </a:xfrm>
           <a:prstGeom prst="rect">
             <a:avLst/>
@@ -20739,7 +21693,7 @@
               <a:rPr>
                 <a:latin typeface="Inter"/>
               </a:rPr>
-              <a:t>SAVED FICTIONAL TEST RESPONSES AND REPRODUCIBILITY LINEAGE</a:t>
+              <a:t>SAVED SAMPLE RESPONSES AND REPRODUCIBILITY LINEAGE</a:t>
             </a:r>
           </a:p>
         </p:txBody>
@@ -20747,6 +21701,48 @@
       <p:sp>
         <p:nvSpPr>
           <p:cNvPr id="4" name="TextBox 3"/>
+          <p:cNvSpPr txBox="1"/>
+          <p:nvPr/>
+        </p:nvSpPr>
+        <p:spPr>
+          <a:xfrm>
+            <a:off x="5897880" y="310896"/>
+            <a:ext cx="4800600" cy="256032"/>
+          </a:xfrm>
+          <a:prstGeom prst="rect">
+            <a:avLst/>
+          </a:prstGeom>
+          <a:noFill/>
+        </p:spPr>
+        <p:txBody>
+          <a:bodyPr wrap="none" lIns="9144" rIns="9144" tIns="9144" bIns="9144" anchor="t">
+            <a:spAutoFit/>
+          </a:bodyPr>
+          <a:lstStyle/>
+          <a:p>
+            <a:pPr algn="r">
+              <a:spcAft>
+                <a:spcPts val="0"/>
+              </a:spcAft>
+              <a:defRPr sz="680" b="1">
+                <a:solidFill>
+                  <a:srgbClr val="4F6B00"/>
+                </a:solidFill>
+                <a:latin typeface="Inter"/>
+              </a:defRPr>
+            </a:pPr>
+            <a:r>
+              <a:rPr>
+                <a:latin typeface="Inter"/>
+              </a:rPr>
+              <a:t>Illustrative, Gradient Maintained — demo data, not the client's holdings or managers</a:t>
+            </a:r>
+          </a:p>
+        </p:txBody>
+      </p:sp>
+      <p:sp>
+        <p:nvSpPr>
+          <p:cNvPr id="5" name="TextBox 4"/>
           <p:cNvSpPr txBox="1"/>
           <p:nvPr/>
         </p:nvSpPr>
@@ -20788,7 +21784,7 @@
       </p:sp>
       <p:sp>
         <p:nvSpPr>
-          <p:cNvPr id="5" name="Rectangle 4"/>
+          <p:cNvPr id="6" name="Rectangle 5"/>
           <p:cNvSpPr/>
           <p:nvPr/>
         </p:nvSpPr>
@@ -20837,7 +21833,7 @@
       </p:sp>
       <p:sp>
         <p:nvSpPr>
-          <p:cNvPr id="6" name="Rectangle 5"/>
+          <p:cNvPr id="7" name="Rectangle 6"/>
           <p:cNvSpPr/>
           <p:nvPr/>
         </p:nvSpPr>
@@ -20886,7 +21882,7 @@
       </p:sp>
       <p:sp>
         <p:nvSpPr>
-          <p:cNvPr id="7" name="TextBox 6"/>
+          <p:cNvPr id="8" name="TextBox 7"/>
           <p:cNvSpPr txBox="1"/>
           <p:nvPr/>
         </p:nvSpPr>
@@ -20928,7 +21924,7 @@
       </p:sp>
       <p:sp>
         <p:nvSpPr>
-          <p:cNvPr id="8" name="TextBox 7"/>
+          <p:cNvPr id="9" name="TextBox 8"/>
           <p:cNvSpPr txBox="1"/>
           <p:nvPr/>
         </p:nvSpPr>
@@ -20970,7 +21966,7 @@
       </p:sp>
       <p:graphicFrame>
         <p:nvGraphicFramePr>
-          <p:cNvPr id="9" name="Table 8"/>
+          <p:cNvPr id="10" name="Table 9"/>
           <p:cNvGraphicFramePr>
             <a:graphicFrameLocks noGrp="1"/>
           </p:cNvGraphicFramePr>
@@ -21422,7 +22418,7 @@
                         <a:rPr>
                           <a:latin typeface="Inter"/>
                         </a:rPr>
-                        <a:t>72 monthly observations; USD total return; fictional TEST data</a:t>
+                        <a:t>72 monthly observations; USD total return; illustrative sample data</a:t>
                       </a:r>
                     </a:p>
                   </a:txBody>
@@ -21449,7 +22445,7 @@
                         <a:rPr>
                           <a:latin typeface="Inter"/>
                         </a:rPr>
-                        <a:t>passed; request_id=req-test-s1</a:t>
+                        <a:t>passed</a:t>
                       </a:r>
                     </a:p>
                   </a:txBody>
@@ -21667,7 +22663,7 @@
                         <a:rPr>
                           <a:latin typeface="Inter"/>
                         </a:rPr>
-                        <a:t>Common 72-month manager/benchmark window; fictional TEST data</a:t>
+                        <a:t>Common 72-month manager/benchmark window; illustrative sample data</a:t>
                       </a:r>
                     </a:p>
                   </a:txBody>
@@ -21694,7 +22690,7 @@
                         <a:rPr>
                           <a:latin typeface="Inter"/>
                         </a:rPr>
-                        <a:t>passed; request_id=req-test-s2</a:t>
+                        <a:t>passed</a:t>
                       </a:r>
                     </a:p>
                   </a:txBody>
@@ -21912,7 +22908,7 @@
                         <a:rPr>
                           <a:latin typeface="Inter"/>
                         </a:rPr>
-                        <a:t>Four returned start-date windows; fictional TEST data</a:t>
+                        <a:t>Four returned start-date windows; illustrative sample data</a:t>
                       </a:r>
                     </a:p>
                   </a:txBody>
@@ -21939,7 +22935,7 @@
                         <a:rPr>
                           <a:latin typeface="Inter"/>
                         </a:rPr>
-                        <a:t>passed; request_id=req-test-s3</a:t>
+                        <a:t>passed</a:t>
                       </a:r>
                     </a:p>
                   </a:txBody>
@@ -22157,7 +23153,7 @@
                         <a:rPr>
                           <a:latin typeface="Inter"/>
                         </a:rPr>
-                        <a:t>Server-returned model outputs; fictional TEST data</a:t>
+                        <a:t>Server-returned model outputs; illustrative sample data</a:t>
                       </a:r>
                     </a:p>
                   </a:txBody>
@@ -22184,7 +23180,7 @@
                         <a:rPr>
                           <a:latin typeface="Inter"/>
                         </a:rPr>
-                        <a:t>passed; request_id=req-test-s4</a:t>
+                        <a:t>passed</a:t>
                       </a:r>
                     </a:p>
                   </a:txBody>
@@ -22402,7 +23398,7 @@
                         <a:rPr>
                           <a:latin typeface="Inter"/>
                         </a:rPr>
-                        <a:t>Same 72-month window; fictional TEST data</a:t>
+                        <a:t>Same 72-month window; illustrative sample data</a:t>
                       </a:r>
                     </a:p>
                   </a:txBody>
@@ -22429,7 +23425,7 @@
                         <a:rPr>
                           <a:latin typeface="Inter"/>
                         </a:rPr>
-                        <a:t>passed; request_id=req-test-s5</a:t>
+                        <a:t>passed</a:t>
                       </a:r>
                     </a:p>
                   </a:txBody>
@@ -22473,7 +23469,7 @@
       </p:graphicFrame>
       <p:sp>
         <p:nvSpPr>
-          <p:cNvPr id="10" name="Rectangle 9"/>
+          <p:cNvPr id="11" name="Rectangle 10"/>
           <p:cNvSpPr/>
           <p:nvPr/>
         </p:nvSpPr>
@@ -22522,7 +23518,7 @@
       </p:sp>
       <p:sp>
         <p:nvSpPr>
-          <p:cNvPr id="11" name="TextBox 10"/>
+          <p:cNvPr id="12" name="TextBox 11"/>
           <p:cNvSpPr txBox="1"/>
           <p:nvPr/>
         </p:nvSpPr>
@@ -22564,7 +23560,7 @@
       </p:sp>
       <p:sp>
         <p:nvSpPr>
-          <p:cNvPr id="12" name="TextBox 11"/>
+          <p:cNvPr id="13" name="TextBox 12"/>
           <p:cNvSpPr txBox="1"/>
           <p:nvPr/>
         </p:nvSpPr>
@@ -22599,14 +23595,14 @@
               <a:rPr>
                 <a:latin typeface="Inter"/>
               </a:rPr>
-              <a:t>TEST DATA — fictional manager and benchmarks for rendering tests only · Data as of 2025-12-31</a:t>
+              <a:t>Confidential — manager performance review · Data as of 2025-12-31</a:t>
             </a:r>
           </a:p>
         </p:txBody>
       </p:sp>
       <p:sp>
         <p:nvSpPr>
-          <p:cNvPr id="13" name="TextBox 12"/>
+          <p:cNvPr id="14" name="TextBox 13"/>
           <p:cNvSpPr txBox="1"/>
           <p:nvPr/>
         </p:nvSpPr>
@@ -22722,7 +23718,7 @@
         <p:spPr>
           <a:xfrm>
             <a:off x="640080" y="329184"/>
-            <a:ext cx="9875520" cy="182880"/>
+            <a:ext cx="5303520" cy="182880"/>
           </a:xfrm>
           <a:prstGeom prst="rect">
             <a:avLst/>
@@ -22763,6 +23759,48 @@
         </p:nvSpPr>
         <p:spPr>
           <a:xfrm>
+            <a:off x="5897880" y="310896"/>
+            <a:ext cx="4800600" cy="256032"/>
+          </a:xfrm>
+          <a:prstGeom prst="rect">
+            <a:avLst/>
+          </a:prstGeom>
+          <a:noFill/>
+        </p:spPr>
+        <p:txBody>
+          <a:bodyPr wrap="none" lIns="9144" rIns="9144" tIns="9144" bIns="9144" anchor="t">
+            <a:spAutoFit/>
+          </a:bodyPr>
+          <a:lstStyle/>
+          <a:p>
+            <a:pPr algn="r">
+              <a:spcAft>
+                <a:spcPts val="0"/>
+              </a:spcAft>
+              <a:defRPr sz="680" b="1">
+                <a:solidFill>
+                  <a:srgbClr val="4F6B00"/>
+                </a:solidFill>
+                <a:latin typeface="Inter"/>
+              </a:defRPr>
+            </a:pPr>
+            <a:r>
+              <a:rPr>
+                <a:latin typeface="Inter"/>
+              </a:rPr>
+              <a:t>Illustrative, Gradient Maintained — demo data, not the client's holdings or managers</a:t>
+            </a:r>
+          </a:p>
+        </p:txBody>
+      </p:sp>
+      <p:sp>
+        <p:nvSpPr>
+          <p:cNvPr id="5" name="TextBox 4"/>
+          <p:cNvSpPr txBox="1"/>
+          <p:nvPr/>
+        </p:nvSpPr>
+        <p:spPr>
+          <a:xfrm>
             <a:off x="640080" y="566928"/>
             <a:ext cx="10058400" cy="530352"/>
           </a:xfrm>
@@ -22799,7 +23837,7 @@
       </p:sp>
       <p:sp>
         <p:nvSpPr>
-          <p:cNvPr id="5" name="Rectangle 4"/>
+          <p:cNvPr id="6" name="Rectangle 5"/>
           <p:cNvSpPr/>
           <p:nvPr/>
         </p:nvSpPr>
@@ -22848,7 +23886,7 @@
       </p:sp>
       <p:sp>
         <p:nvSpPr>
-          <p:cNvPr id="6" name="Rectangle 5"/>
+          <p:cNvPr id="7" name="Rectangle 6"/>
           <p:cNvSpPr/>
           <p:nvPr/>
         </p:nvSpPr>
@@ -22897,7 +23935,7 @@
       </p:sp>
       <p:sp>
         <p:nvSpPr>
-          <p:cNvPr id="7" name="TextBox 6"/>
+          <p:cNvPr id="8" name="TextBox 7"/>
           <p:cNvSpPr txBox="1"/>
           <p:nvPr/>
         </p:nvSpPr>
@@ -22939,7 +23977,7 @@
       </p:sp>
       <p:sp>
         <p:nvSpPr>
-          <p:cNvPr id="8" name="Rectangle 7"/>
+          <p:cNvPr id="9" name="Rectangle 8"/>
           <p:cNvSpPr/>
           <p:nvPr/>
         </p:nvSpPr>
@@ -22988,7 +24026,7 @@
       </p:sp>
       <p:sp>
         <p:nvSpPr>
-          <p:cNvPr id="9" name="Rectangle 8"/>
+          <p:cNvPr id="10" name="Rectangle 9"/>
           <p:cNvSpPr/>
           <p:nvPr/>
         </p:nvSpPr>
@@ -23037,7 +24075,7 @@
       </p:sp>
       <p:sp>
         <p:nvSpPr>
-          <p:cNvPr id="10" name="TextBox 9"/>
+          <p:cNvPr id="11" name="TextBox 10"/>
           <p:cNvSpPr txBox="1"/>
           <p:nvPr/>
         </p:nvSpPr>
@@ -23079,7 +24117,7 @@
       </p:sp>
       <p:sp>
         <p:nvSpPr>
-          <p:cNvPr id="11" name="TextBox 10"/>
+          <p:cNvPr id="12" name="TextBox 11"/>
           <p:cNvSpPr txBox="1"/>
           <p:nvPr/>
         </p:nvSpPr>
@@ -23121,7 +24159,7 @@
       </p:sp>
       <p:sp>
         <p:nvSpPr>
-          <p:cNvPr id="12" name="Rectangle 11"/>
+          <p:cNvPr id="13" name="Rectangle 12"/>
           <p:cNvSpPr/>
           <p:nvPr/>
         </p:nvSpPr>
@@ -23170,7 +24208,7 @@
       </p:sp>
       <p:sp>
         <p:nvSpPr>
-          <p:cNvPr id="13" name="TextBox 12"/>
+          <p:cNvPr id="14" name="TextBox 13"/>
           <p:cNvSpPr txBox="1"/>
           <p:nvPr/>
         </p:nvSpPr>
@@ -23212,7 +24250,7 @@
       </p:sp>
       <p:sp>
         <p:nvSpPr>
-          <p:cNvPr id="14" name="TextBox 13"/>
+          <p:cNvPr id="15" name="TextBox 14"/>
           <p:cNvSpPr txBox="1"/>
           <p:nvPr/>
         </p:nvSpPr>
@@ -23247,14 +24285,14 @@
               <a:rPr>
                 <a:latin typeface="Inter"/>
               </a:rPr>
-              <a:t>TEST DATA — fictional manager and benchmarks for rendering tests only · Data as of 2025-12-31</a:t>
+              <a:t>Confidential — manager performance review · Data as of 2025-12-31</a:t>
             </a:r>
           </a:p>
         </p:txBody>
       </p:sp>
       <p:sp>
         <p:nvSpPr>
-          <p:cNvPr id="15" name="TextBox 14"/>
+          <p:cNvPr id="16" name="TextBox 15"/>
           <p:cNvSpPr txBox="1"/>
           <p:nvPr/>
         </p:nvSpPr>
@@ -23370,7 +24408,7 @@
         <p:spPr>
           <a:xfrm>
             <a:off x="640080" y="329184"/>
-            <a:ext cx="9875520" cy="182880"/>
+            <a:ext cx="5303520" cy="182880"/>
           </a:xfrm>
           <a:prstGeom prst="rect">
             <a:avLst/>
@@ -23411,6 +24449,48 @@
         </p:nvSpPr>
         <p:spPr>
           <a:xfrm>
+            <a:off x="5897880" y="310896"/>
+            <a:ext cx="4800600" cy="256032"/>
+          </a:xfrm>
+          <a:prstGeom prst="rect">
+            <a:avLst/>
+          </a:prstGeom>
+          <a:noFill/>
+        </p:spPr>
+        <p:txBody>
+          <a:bodyPr wrap="none" lIns="9144" rIns="9144" tIns="9144" bIns="9144" anchor="t">
+            <a:spAutoFit/>
+          </a:bodyPr>
+          <a:lstStyle/>
+          <a:p>
+            <a:pPr algn="r">
+              <a:spcAft>
+                <a:spcPts val="0"/>
+              </a:spcAft>
+              <a:defRPr sz="680" b="1">
+                <a:solidFill>
+                  <a:srgbClr val="4F6B00"/>
+                </a:solidFill>
+                <a:latin typeface="Inter"/>
+              </a:defRPr>
+            </a:pPr>
+            <a:r>
+              <a:rPr>
+                <a:latin typeface="Inter"/>
+              </a:rPr>
+              <a:t>Illustrative, Gradient Maintained — demo data, not the client's holdings or managers</a:t>
+            </a:r>
+          </a:p>
+        </p:txBody>
+      </p:sp>
+      <p:sp>
+        <p:nvSpPr>
+          <p:cNvPr id="5" name="TextBox 4"/>
+          <p:cNvSpPr txBox="1"/>
+          <p:nvPr/>
+        </p:nvSpPr>
+        <p:spPr>
+          <a:xfrm>
             <a:off x="640080" y="566928"/>
             <a:ext cx="10058400" cy="530352"/>
           </a:xfrm>
@@ -23447,7 +24527,7 @@
       </p:sp>
       <p:sp>
         <p:nvSpPr>
-          <p:cNvPr id="5" name="Rectangle 4"/>
+          <p:cNvPr id="6" name="Rectangle 5"/>
           <p:cNvSpPr/>
           <p:nvPr/>
         </p:nvSpPr>
@@ -23496,7 +24576,7 @@
       </p:sp>
       <p:sp>
         <p:nvSpPr>
-          <p:cNvPr id="6" name="Rectangle 5"/>
+          <p:cNvPr id="7" name="Rectangle 6"/>
           <p:cNvSpPr/>
           <p:nvPr/>
         </p:nvSpPr>
@@ -23545,7 +24625,7 @@
       </p:sp>
       <p:sp>
         <p:nvSpPr>
-          <p:cNvPr id="7" name="TextBox 6"/>
+          <p:cNvPr id="8" name="TextBox 7"/>
           <p:cNvSpPr txBox="1"/>
           <p:nvPr/>
         </p:nvSpPr>
@@ -23587,7 +24667,7 @@
       </p:sp>
       <p:sp>
         <p:nvSpPr>
-          <p:cNvPr id="8" name="TextBox 7"/>
+          <p:cNvPr id="9" name="TextBox 8"/>
           <p:cNvSpPr txBox="1"/>
           <p:nvPr/>
         </p:nvSpPr>
@@ -23629,7 +24709,7 @@
       </p:sp>
       <p:graphicFrame>
         <p:nvGraphicFramePr>
-          <p:cNvPr id="9" name="Chart 8"/>
+          <p:cNvPr id="10" name="Chart 9"/>
           <p:cNvGraphicFramePr>
             <a:graphicFrameLocks noGrp="1"/>
           </p:cNvGraphicFramePr>
@@ -23647,7 +24727,7 @@
       </p:graphicFrame>
       <p:sp>
         <p:nvSpPr>
-          <p:cNvPr id="10" name="Rectangle 9"/>
+          <p:cNvPr id="11" name="Rectangle 10"/>
           <p:cNvSpPr/>
           <p:nvPr/>
         </p:nvSpPr>
@@ -23696,7 +24776,7 @@
       </p:sp>
       <p:sp>
         <p:nvSpPr>
-          <p:cNvPr id="11" name="TextBox 10"/>
+          <p:cNvPr id="12" name="TextBox 11"/>
           <p:cNvSpPr txBox="1"/>
           <p:nvPr/>
         </p:nvSpPr>
@@ -23738,7 +24818,7 @@
       </p:sp>
       <p:sp>
         <p:nvSpPr>
-          <p:cNvPr id="12" name="TextBox 11"/>
+          <p:cNvPr id="13" name="TextBox 12"/>
           <p:cNvSpPr txBox="1"/>
           <p:nvPr/>
         </p:nvSpPr>
@@ -23773,14 +24853,14 @@
               <a:rPr>
                 <a:latin typeface="Inter"/>
               </a:rPr>
-              <a:t>TEST DATA — fictional manager and benchmarks for rendering tests only · Data as of 2025-12-31</a:t>
+              <a:t>Confidential — manager performance review · Data as of 2025-12-31</a:t>
             </a:r>
           </a:p>
         </p:txBody>
       </p:sp>
       <p:sp>
         <p:nvSpPr>
-          <p:cNvPr id="13" name="TextBox 12"/>
+          <p:cNvPr id="14" name="TextBox 13"/>
           <p:cNvSpPr txBox="1"/>
           <p:nvPr/>
         </p:nvSpPr>
@@ -23896,7 +24976,7 @@
         <p:spPr>
           <a:xfrm>
             <a:off x="640080" y="329184"/>
-            <a:ext cx="9875520" cy="182880"/>
+            <a:ext cx="5303520" cy="182880"/>
           </a:xfrm>
           <a:prstGeom prst="rect">
             <a:avLst/>
@@ -23937,6 +25017,48 @@
         </p:nvSpPr>
         <p:spPr>
           <a:xfrm>
+            <a:off x="5897880" y="310896"/>
+            <a:ext cx="4800600" cy="256032"/>
+          </a:xfrm>
+          <a:prstGeom prst="rect">
+            <a:avLst/>
+          </a:prstGeom>
+          <a:noFill/>
+        </p:spPr>
+        <p:txBody>
+          <a:bodyPr wrap="none" lIns="9144" rIns="9144" tIns="9144" bIns="9144" anchor="t">
+            <a:spAutoFit/>
+          </a:bodyPr>
+          <a:lstStyle/>
+          <a:p>
+            <a:pPr algn="r">
+              <a:spcAft>
+                <a:spcPts val="0"/>
+              </a:spcAft>
+              <a:defRPr sz="680" b="1">
+                <a:solidFill>
+                  <a:srgbClr val="4F6B00"/>
+                </a:solidFill>
+                <a:latin typeface="Inter"/>
+              </a:defRPr>
+            </a:pPr>
+            <a:r>
+              <a:rPr>
+                <a:latin typeface="Inter"/>
+              </a:rPr>
+              <a:t>Illustrative, Gradient Maintained — demo data, not the client's holdings or managers</a:t>
+            </a:r>
+          </a:p>
+        </p:txBody>
+      </p:sp>
+      <p:sp>
+        <p:nvSpPr>
+          <p:cNvPr id="5" name="TextBox 4"/>
+          <p:cNvSpPr txBox="1"/>
+          <p:nvPr/>
+        </p:nvSpPr>
+        <p:spPr>
+          <a:xfrm>
             <a:off x="640080" y="566928"/>
             <a:ext cx="10058400" cy="530352"/>
           </a:xfrm>
@@ -23973,7 +25095,7 @@
       </p:sp>
       <p:sp>
         <p:nvSpPr>
-          <p:cNvPr id="5" name="Rectangle 4"/>
+          <p:cNvPr id="6" name="Rectangle 5"/>
           <p:cNvSpPr/>
           <p:nvPr/>
         </p:nvSpPr>
@@ -24022,7 +25144,7 @@
       </p:sp>
       <p:sp>
         <p:nvSpPr>
-          <p:cNvPr id="6" name="Rectangle 5"/>
+          <p:cNvPr id="7" name="Rectangle 6"/>
           <p:cNvSpPr/>
           <p:nvPr/>
         </p:nvSpPr>
@@ -24071,7 +25193,7 @@
       </p:sp>
       <p:sp>
         <p:nvSpPr>
-          <p:cNvPr id="7" name="TextBox 6"/>
+          <p:cNvPr id="8" name="TextBox 7"/>
           <p:cNvSpPr txBox="1"/>
           <p:nvPr/>
         </p:nvSpPr>
@@ -24113,7 +25235,7 @@
       </p:sp>
       <p:sp>
         <p:nvSpPr>
-          <p:cNvPr id="8" name="TextBox 7"/>
+          <p:cNvPr id="9" name="TextBox 8"/>
           <p:cNvSpPr txBox="1"/>
           <p:nvPr/>
         </p:nvSpPr>
@@ -24155,7 +25277,7 @@
       </p:sp>
       <p:graphicFrame>
         <p:nvGraphicFramePr>
-          <p:cNvPr id="9" name="Chart 8"/>
+          <p:cNvPr id="10" name="Chart 9"/>
           <p:cNvGraphicFramePr>
             <a:graphicFrameLocks noGrp="1"/>
           </p:cNvGraphicFramePr>
@@ -24173,7 +25295,7 @@
       </p:graphicFrame>
       <p:sp>
         <p:nvSpPr>
-          <p:cNvPr id="10" name="Rectangle 9"/>
+          <p:cNvPr id="11" name="Rectangle 10"/>
           <p:cNvSpPr/>
           <p:nvPr/>
         </p:nvSpPr>
@@ -24222,7 +25344,7 @@
       </p:sp>
       <p:sp>
         <p:nvSpPr>
-          <p:cNvPr id="11" name="TextBox 10"/>
+          <p:cNvPr id="12" name="TextBox 11"/>
           <p:cNvSpPr txBox="1"/>
           <p:nvPr/>
         </p:nvSpPr>
@@ -24264,7 +25386,7 @@
       </p:sp>
       <p:sp>
         <p:nvSpPr>
-          <p:cNvPr id="12" name="TextBox 11"/>
+          <p:cNvPr id="13" name="TextBox 12"/>
           <p:cNvSpPr txBox="1"/>
           <p:nvPr/>
         </p:nvSpPr>
@@ -24299,14 +25421,14 @@
               <a:rPr>
                 <a:latin typeface="Inter"/>
               </a:rPr>
-              <a:t>TEST DATA — fictional manager and benchmarks for rendering tests only · Data as of 2025-12-31</a:t>
+              <a:t>Confidential — manager performance review · Data as of 2025-12-31</a:t>
             </a:r>
           </a:p>
         </p:txBody>
       </p:sp>
       <p:sp>
         <p:nvSpPr>
-          <p:cNvPr id="13" name="TextBox 12"/>
+          <p:cNvPr id="14" name="TextBox 13"/>
           <p:cNvSpPr txBox="1"/>
           <p:nvPr/>
         </p:nvSpPr>
@@ -24422,7 +25544,7 @@
         <p:spPr>
           <a:xfrm>
             <a:off x="640080" y="329184"/>
-            <a:ext cx="9875520" cy="182880"/>
+            <a:ext cx="5303520" cy="182880"/>
           </a:xfrm>
           <a:prstGeom prst="rect">
             <a:avLst/>
@@ -24463,6 +25585,48 @@
         </p:nvSpPr>
         <p:spPr>
           <a:xfrm>
+            <a:off x="5897880" y="310896"/>
+            <a:ext cx="4800600" cy="256032"/>
+          </a:xfrm>
+          <a:prstGeom prst="rect">
+            <a:avLst/>
+          </a:prstGeom>
+          <a:noFill/>
+        </p:spPr>
+        <p:txBody>
+          <a:bodyPr wrap="none" lIns="9144" rIns="9144" tIns="9144" bIns="9144" anchor="t">
+            <a:spAutoFit/>
+          </a:bodyPr>
+          <a:lstStyle/>
+          <a:p>
+            <a:pPr algn="r">
+              <a:spcAft>
+                <a:spcPts val="0"/>
+              </a:spcAft>
+              <a:defRPr sz="680" b="1">
+                <a:solidFill>
+                  <a:srgbClr val="4F6B00"/>
+                </a:solidFill>
+                <a:latin typeface="Inter"/>
+              </a:defRPr>
+            </a:pPr>
+            <a:r>
+              <a:rPr>
+                <a:latin typeface="Inter"/>
+              </a:rPr>
+              <a:t>Illustrative, Gradient Maintained — demo data, not the client's holdings or managers</a:t>
+            </a:r>
+          </a:p>
+        </p:txBody>
+      </p:sp>
+      <p:sp>
+        <p:nvSpPr>
+          <p:cNvPr id="5" name="TextBox 4"/>
+          <p:cNvSpPr txBox="1"/>
+          <p:nvPr/>
+        </p:nvSpPr>
+        <p:spPr>
+          <a:xfrm>
             <a:off x="640080" y="566928"/>
             <a:ext cx="10058400" cy="530352"/>
           </a:xfrm>
@@ -24499,7 +25663,7 @@
       </p:sp>
       <p:sp>
         <p:nvSpPr>
-          <p:cNvPr id="5" name="Rectangle 4"/>
+          <p:cNvPr id="6" name="Rectangle 5"/>
           <p:cNvSpPr/>
           <p:nvPr/>
         </p:nvSpPr>
@@ -24548,7 +25712,7 @@
       </p:sp>
       <p:sp>
         <p:nvSpPr>
-          <p:cNvPr id="6" name="Rectangle 5"/>
+          <p:cNvPr id="7" name="Rectangle 6"/>
           <p:cNvSpPr/>
           <p:nvPr/>
         </p:nvSpPr>
@@ -24597,7 +25761,7 @@
       </p:sp>
       <p:sp>
         <p:nvSpPr>
-          <p:cNvPr id="7" name="TextBox 6"/>
+          <p:cNvPr id="8" name="TextBox 7"/>
           <p:cNvSpPr txBox="1"/>
           <p:nvPr/>
         </p:nvSpPr>
@@ -24639,7 +25803,7 @@
       </p:sp>
       <p:sp>
         <p:nvSpPr>
-          <p:cNvPr id="8" name="Rectangle 7"/>
+          <p:cNvPr id="9" name="Rectangle 8"/>
           <p:cNvSpPr/>
           <p:nvPr/>
         </p:nvSpPr>
@@ -24688,7 +25852,7 @@
       </p:sp>
       <p:sp>
         <p:nvSpPr>
-          <p:cNvPr id="9" name="Rectangle 8"/>
+          <p:cNvPr id="10" name="Rectangle 9"/>
           <p:cNvSpPr/>
           <p:nvPr/>
         </p:nvSpPr>
@@ -24737,7 +25901,7 @@
       </p:sp>
       <p:sp>
         <p:nvSpPr>
-          <p:cNvPr id="10" name="TextBox 9"/>
+          <p:cNvPr id="11" name="TextBox 10"/>
           <p:cNvSpPr txBox="1"/>
           <p:nvPr/>
         </p:nvSpPr>
@@ -24779,7 +25943,7 @@
       </p:sp>
       <p:sp>
         <p:nvSpPr>
-          <p:cNvPr id="11" name="TextBox 10"/>
+          <p:cNvPr id="12" name="TextBox 11"/>
           <p:cNvSpPr txBox="1"/>
           <p:nvPr/>
         </p:nvSpPr>
@@ -24821,7 +25985,7 @@
       </p:sp>
       <p:sp>
         <p:nvSpPr>
-          <p:cNvPr id="12" name="Rectangle 11"/>
+          <p:cNvPr id="13" name="Rectangle 12"/>
           <p:cNvSpPr/>
           <p:nvPr/>
         </p:nvSpPr>
@@ -24870,7 +26034,7 @@
       </p:sp>
       <p:sp>
         <p:nvSpPr>
-          <p:cNvPr id="13" name="TextBox 12"/>
+          <p:cNvPr id="14" name="TextBox 13"/>
           <p:cNvSpPr txBox="1"/>
           <p:nvPr/>
         </p:nvSpPr>
@@ -24912,7 +26076,7 @@
       </p:sp>
       <p:sp>
         <p:nvSpPr>
-          <p:cNvPr id="14" name="TextBox 13"/>
+          <p:cNvPr id="15" name="TextBox 14"/>
           <p:cNvSpPr txBox="1"/>
           <p:nvPr/>
         </p:nvSpPr>
@@ -24947,14 +26111,14 @@
               <a:rPr>
                 <a:latin typeface="Inter"/>
               </a:rPr>
-              <a:t>TEST DATA — fictional manager and benchmarks for rendering tests only · Data as of 2025-12-31</a:t>
+              <a:t>Confidential — manager performance review · Data as of 2025-12-31</a:t>
             </a:r>
           </a:p>
         </p:txBody>
       </p:sp>
       <p:sp>
         <p:nvSpPr>
-          <p:cNvPr id="15" name="TextBox 14"/>
+          <p:cNvPr id="16" name="TextBox 15"/>
           <p:cNvSpPr txBox="1"/>
           <p:nvPr/>
         </p:nvSpPr>
@@ -25070,7 +26234,7 @@
         <p:spPr>
           <a:xfrm>
             <a:off x="640080" y="329184"/>
-            <a:ext cx="9875520" cy="182880"/>
+            <a:ext cx="5303520" cy="182880"/>
           </a:xfrm>
           <a:prstGeom prst="rect">
             <a:avLst/>
@@ -25111,6 +26275,48 @@
         </p:nvSpPr>
         <p:spPr>
           <a:xfrm>
+            <a:off x="5897880" y="310896"/>
+            <a:ext cx="4800600" cy="256032"/>
+          </a:xfrm>
+          <a:prstGeom prst="rect">
+            <a:avLst/>
+          </a:prstGeom>
+          <a:noFill/>
+        </p:spPr>
+        <p:txBody>
+          <a:bodyPr wrap="none" lIns="9144" rIns="9144" tIns="9144" bIns="9144" anchor="t">
+            <a:spAutoFit/>
+          </a:bodyPr>
+          <a:lstStyle/>
+          <a:p>
+            <a:pPr algn="r">
+              <a:spcAft>
+                <a:spcPts val="0"/>
+              </a:spcAft>
+              <a:defRPr sz="680" b="1">
+                <a:solidFill>
+                  <a:srgbClr val="4F6B00"/>
+                </a:solidFill>
+                <a:latin typeface="Inter"/>
+              </a:defRPr>
+            </a:pPr>
+            <a:r>
+              <a:rPr>
+                <a:latin typeface="Inter"/>
+              </a:rPr>
+              <a:t>Illustrative, Gradient Maintained — demo data, not the client's holdings or managers</a:t>
+            </a:r>
+          </a:p>
+        </p:txBody>
+      </p:sp>
+      <p:sp>
+        <p:nvSpPr>
+          <p:cNvPr id="5" name="TextBox 4"/>
+          <p:cNvSpPr txBox="1"/>
+          <p:nvPr/>
+        </p:nvSpPr>
+        <p:spPr>
+          <a:xfrm>
             <a:off x="640080" y="566928"/>
             <a:ext cx="10058400" cy="530352"/>
           </a:xfrm>
@@ -25147,7 +26353,7 @@
       </p:sp>
       <p:sp>
         <p:nvSpPr>
-          <p:cNvPr id="5" name="Rectangle 4"/>
+          <p:cNvPr id="6" name="Rectangle 5"/>
           <p:cNvSpPr/>
           <p:nvPr/>
         </p:nvSpPr>
@@ -25196,7 +26402,7 @@
       </p:sp>
       <p:sp>
         <p:nvSpPr>
-          <p:cNvPr id="6" name="Rectangle 5"/>
+          <p:cNvPr id="7" name="Rectangle 6"/>
           <p:cNvSpPr/>
           <p:nvPr/>
         </p:nvSpPr>
@@ -25245,7 +26451,7 @@
       </p:sp>
       <p:sp>
         <p:nvSpPr>
-          <p:cNvPr id="7" name="TextBox 6"/>
+          <p:cNvPr id="8" name="TextBox 7"/>
           <p:cNvSpPr txBox="1"/>
           <p:nvPr/>
         </p:nvSpPr>
@@ -25287,7 +26493,7 @@
       </p:sp>
       <p:sp>
         <p:nvSpPr>
-          <p:cNvPr id="8" name="TextBox 7"/>
+          <p:cNvPr id="9" name="TextBox 8"/>
           <p:cNvSpPr txBox="1"/>
           <p:nvPr/>
         </p:nvSpPr>
@@ -25329,7 +26535,7 @@
       </p:sp>
       <p:graphicFrame>
         <p:nvGraphicFramePr>
-          <p:cNvPr id="9" name="Table 8"/>
+          <p:cNvPr id="10" name="Table 9"/>
           <p:cNvGraphicFramePr>
             <a:graphicFrameLocks noGrp="1"/>
           </p:cNvGraphicFramePr>
@@ -25588,7 +26794,7 @@
                         <a:rPr>
                           <a:latin typeface="Inter"/>
                         </a:rPr>
-                        <a:t>Northstar Core Equity Benchmark (TEST), server matched [S1]</a:t>
+                        <a:t>Northstar Core Equity Benchmark, server matched [S1]</a:t>
                       </a:r>
                     </a:p>
                   </a:txBody>
@@ -25854,7 +27060,7 @@
       </p:graphicFrame>
       <p:sp>
         <p:nvSpPr>
-          <p:cNvPr id="10" name="Rectangle 9"/>
+          <p:cNvPr id="11" name="Rectangle 10"/>
           <p:cNvSpPr/>
           <p:nvPr/>
         </p:nvSpPr>
@@ -25903,7 +27109,7 @@
       </p:sp>
       <p:sp>
         <p:nvSpPr>
-          <p:cNvPr id="11" name="TextBox 10"/>
+          <p:cNvPr id="12" name="TextBox 11"/>
           <p:cNvSpPr txBox="1"/>
           <p:nvPr/>
         </p:nvSpPr>
@@ -25945,7 +27151,7 @@
       </p:sp>
       <p:sp>
         <p:nvSpPr>
-          <p:cNvPr id="12" name="TextBox 11"/>
+          <p:cNvPr id="13" name="TextBox 12"/>
           <p:cNvSpPr txBox="1"/>
           <p:nvPr/>
         </p:nvSpPr>
@@ -25980,14 +27186,14 @@
               <a:rPr>
                 <a:latin typeface="Inter"/>
               </a:rPr>
-              <a:t>TEST DATA — fictional manager and benchmarks for rendering tests only · Data as of 2025-12-31</a:t>
+              <a:t>Confidential — manager performance review · Data as of 2025-12-31</a:t>
             </a:r>
           </a:p>
         </p:txBody>
       </p:sp>
       <p:sp>
         <p:nvSpPr>
-          <p:cNvPr id="13" name="TextBox 12"/>
+          <p:cNvPr id="14" name="TextBox 13"/>
           <p:cNvSpPr txBox="1"/>
           <p:nvPr/>
         </p:nvSpPr>
@@ -26103,7 +27309,7 @@
         <p:spPr>
           <a:xfrm>
             <a:off x="640080" y="329184"/>
-            <a:ext cx="9875520" cy="182880"/>
+            <a:ext cx="5303520" cy="182880"/>
           </a:xfrm>
           <a:prstGeom prst="rect">
             <a:avLst/>
@@ -26144,6 +27350,48 @@
         </p:nvSpPr>
         <p:spPr>
           <a:xfrm>
+            <a:off x="5897880" y="310896"/>
+            <a:ext cx="4800600" cy="256032"/>
+          </a:xfrm>
+          <a:prstGeom prst="rect">
+            <a:avLst/>
+          </a:prstGeom>
+          <a:noFill/>
+        </p:spPr>
+        <p:txBody>
+          <a:bodyPr wrap="none" lIns="9144" rIns="9144" tIns="9144" bIns="9144" anchor="t">
+            <a:spAutoFit/>
+          </a:bodyPr>
+          <a:lstStyle/>
+          <a:p>
+            <a:pPr algn="r">
+              <a:spcAft>
+                <a:spcPts val="0"/>
+              </a:spcAft>
+              <a:defRPr sz="680" b="1">
+                <a:solidFill>
+                  <a:srgbClr val="4F6B00"/>
+                </a:solidFill>
+                <a:latin typeface="Inter"/>
+              </a:defRPr>
+            </a:pPr>
+            <a:r>
+              <a:rPr>
+                <a:latin typeface="Inter"/>
+              </a:rPr>
+              <a:t>Illustrative, Gradient Maintained — demo data, not the client's holdings or managers</a:t>
+            </a:r>
+          </a:p>
+        </p:txBody>
+      </p:sp>
+      <p:sp>
+        <p:nvSpPr>
+          <p:cNvPr id="5" name="TextBox 4"/>
+          <p:cNvSpPr txBox="1"/>
+          <p:nvPr/>
+        </p:nvSpPr>
+        <p:spPr>
+          <a:xfrm>
             <a:off x="640080" y="566928"/>
             <a:ext cx="10058400" cy="530352"/>
           </a:xfrm>
@@ -26180,7 +27428,7 @@
       </p:sp>
       <p:sp>
         <p:nvSpPr>
-          <p:cNvPr id="5" name="Rectangle 4"/>
+          <p:cNvPr id="6" name="Rectangle 5"/>
           <p:cNvSpPr/>
           <p:nvPr/>
         </p:nvSpPr>
@@ -26229,7 +27477,7 @@
       </p:sp>
       <p:sp>
         <p:nvSpPr>
-          <p:cNvPr id="6" name="Rectangle 5"/>
+          <p:cNvPr id="7" name="Rectangle 6"/>
           <p:cNvSpPr/>
           <p:nvPr/>
         </p:nvSpPr>
@@ -26278,7 +27526,7 @@
       </p:sp>
       <p:sp>
         <p:nvSpPr>
-          <p:cNvPr id="7" name="TextBox 6"/>
+          <p:cNvPr id="8" name="TextBox 7"/>
           <p:cNvSpPr txBox="1"/>
           <p:nvPr/>
         </p:nvSpPr>
@@ -26320,7 +27568,7 @@
       </p:sp>
       <p:sp>
         <p:nvSpPr>
-          <p:cNvPr id="8" name="TextBox 7"/>
+          <p:cNvPr id="9" name="TextBox 8"/>
           <p:cNvSpPr txBox="1"/>
           <p:nvPr/>
         </p:nvSpPr>
@@ -26362,7 +27610,7 @@
       </p:sp>
       <p:graphicFrame>
         <p:nvGraphicFramePr>
-          <p:cNvPr id="9" name="Table 8"/>
+          <p:cNvPr id="10" name="Table 9"/>
           <p:cNvGraphicFramePr>
             <a:graphicFrameLocks noGrp="1"/>
           </p:cNvGraphicFramePr>
@@ -26707,7 +27955,7 @@
                         <a:rPr>
                           <a:latin typeface="Inter"/>
                         </a:rPr>
-                        <a:t>Northstar Broad Equity Benchmark (TEST), advisory [S5]</a:t>
+                        <a:t>Northstar Broad Equity Benchmark, advisory [S5]</a:t>
                       </a:r>
                     </a:p>
                   </a:txBody>
@@ -26724,7 +27972,7 @@
       </p:graphicFrame>
       <p:sp>
         <p:nvSpPr>
-          <p:cNvPr id="10" name="Rectangle 9"/>
+          <p:cNvPr id="11" name="Rectangle 10"/>
           <p:cNvSpPr/>
           <p:nvPr/>
         </p:nvSpPr>
@@ -26773,7 +28021,7 @@
       </p:sp>
       <p:sp>
         <p:nvSpPr>
-          <p:cNvPr id="11" name="Rectangle 10"/>
+          <p:cNvPr id="12" name="Rectangle 11"/>
           <p:cNvSpPr/>
           <p:nvPr/>
         </p:nvSpPr>
@@ -26822,7 +28070,7 @@
       </p:sp>
       <p:sp>
         <p:nvSpPr>
-          <p:cNvPr id="12" name="TextBox 11"/>
+          <p:cNvPr id="13" name="TextBox 12"/>
           <p:cNvSpPr txBox="1"/>
           <p:nvPr/>
         </p:nvSpPr>
@@ -26864,7 +28112,7 @@
       </p:sp>
       <p:sp>
         <p:nvSpPr>
-          <p:cNvPr id="13" name="TextBox 12"/>
+          <p:cNvPr id="14" name="TextBox 13"/>
           <p:cNvSpPr txBox="1"/>
           <p:nvPr/>
         </p:nvSpPr>
@@ -26906,7 +28154,7 @@
       </p:sp>
       <p:sp>
         <p:nvSpPr>
-          <p:cNvPr id="14" name="Rectangle 13"/>
+          <p:cNvPr id="15" name="Rectangle 14"/>
           <p:cNvSpPr/>
           <p:nvPr/>
         </p:nvSpPr>
@@ -26955,7 +28203,7 @@
       </p:sp>
       <p:sp>
         <p:nvSpPr>
-          <p:cNvPr id="15" name="TextBox 14"/>
+          <p:cNvPr id="16" name="TextBox 15"/>
           <p:cNvSpPr txBox="1"/>
           <p:nvPr/>
         </p:nvSpPr>
@@ -26997,7 +28245,7 @@
       </p:sp>
       <p:sp>
         <p:nvSpPr>
-          <p:cNvPr id="16" name="TextBox 15"/>
+          <p:cNvPr id="17" name="TextBox 16"/>
           <p:cNvSpPr txBox="1"/>
           <p:nvPr/>
         </p:nvSpPr>
@@ -27032,14 +28280,14 @@
               <a:rPr>
                 <a:latin typeface="Inter"/>
               </a:rPr>
-              <a:t>TEST DATA — fictional manager and benchmarks for rendering tests only · Data as of 2025-12-31</a:t>
+              <a:t>Confidential — manager performance review · Data as of 2025-12-31</a:t>
             </a:r>
           </a:p>
         </p:txBody>
       </p:sp>
       <p:sp>
         <p:nvSpPr>
-          <p:cNvPr id="17" name="TextBox 16"/>
+          <p:cNvPr id="18" name="TextBox 17"/>
           <p:cNvSpPr txBox="1"/>
           <p:nvPr/>
         </p:nvSpPr>
@@ -27155,7 +28403,7 @@
         <p:spPr>
           <a:xfrm>
             <a:off x="640080" y="329184"/>
-            <a:ext cx="9875520" cy="182880"/>
+            <a:ext cx="5303520" cy="182880"/>
           </a:xfrm>
           <a:prstGeom prst="rect">
             <a:avLst/>
@@ -27196,6 +28444,48 @@
         </p:nvSpPr>
         <p:spPr>
           <a:xfrm>
+            <a:off x="5897880" y="310896"/>
+            <a:ext cx="4800600" cy="256032"/>
+          </a:xfrm>
+          <a:prstGeom prst="rect">
+            <a:avLst/>
+          </a:prstGeom>
+          <a:noFill/>
+        </p:spPr>
+        <p:txBody>
+          <a:bodyPr wrap="none" lIns="9144" rIns="9144" tIns="9144" bIns="9144" anchor="t">
+            <a:spAutoFit/>
+          </a:bodyPr>
+          <a:lstStyle/>
+          <a:p>
+            <a:pPr algn="r">
+              <a:spcAft>
+                <a:spcPts val="0"/>
+              </a:spcAft>
+              <a:defRPr sz="680" b="1">
+                <a:solidFill>
+                  <a:srgbClr val="4F6B00"/>
+                </a:solidFill>
+                <a:latin typeface="Inter"/>
+              </a:defRPr>
+            </a:pPr>
+            <a:r>
+              <a:rPr>
+                <a:latin typeface="Inter"/>
+              </a:rPr>
+              <a:t>Illustrative, Gradient Maintained — demo data, not the client's holdings or managers</a:t>
+            </a:r>
+          </a:p>
+        </p:txBody>
+      </p:sp>
+      <p:sp>
+        <p:nvSpPr>
+          <p:cNvPr id="5" name="TextBox 4"/>
+          <p:cNvSpPr txBox="1"/>
+          <p:nvPr/>
+        </p:nvSpPr>
+        <p:spPr>
+          <a:xfrm>
             <a:off x="640080" y="566928"/>
             <a:ext cx="10058400" cy="530352"/>
           </a:xfrm>
@@ -27232,7 +28522,7 @@
       </p:sp>
       <p:sp>
         <p:nvSpPr>
-          <p:cNvPr id="5" name="Rectangle 4"/>
+          <p:cNvPr id="6" name="Rectangle 5"/>
           <p:cNvSpPr/>
           <p:nvPr/>
         </p:nvSpPr>
@@ -27281,7 +28571,7 @@
       </p:sp>
       <p:sp>
         <p:nvSpPr>
-          <p:cNvPr id="6" name="Rectangle 5"/>
+          <p:cNvPr id="7" name="Rectangle 6"/>
           <p:cNvSpPr/>
           <p:nvPr/>
         </p:nvSpPr>
@@ -27330,7 +28620,7 @@
       </p:sp>
       <p:sp>
         <p:nvSpPr>
-          <p:cNvPr id="7" name="TextBox 6"/>
+          <p:cNvPr id="8" name="TextBox 7"/>
           <p:cNvSpPr txBox="1"/>
           <p:nvPr/>
         </p:nvSpPr>
@@ -27372,7 +28662,7 @@
       </p:sp>
       <p:sp>
         <p:nvSpPr>
-          <p:cNvPr id="8" name="TextBox 7"/>
+          <p:cNvPr id="9" name="TextBox 8"/>
           <p:cNvSpPr txBox="1"/>
           <p:nvPr/>
         </p:nvSpPr>
@@ -27414,7 +28704,7 @@
       </p:sp>
       <p:graphicFrame>
         <p:nvGraphicFramePr>
-          <p:cNvPr id="9" name="Chart 8"/>
+          <p:cNvPr id="10" name="Chart 9"/>
           <p:cNvGraphicFramePr>
             <a:graphicFrameLocks noGrp="1"/>
           </p:cNvGraphicFramePr>
@@ -27432,7 +28722,7 @@
       </p:graphicFrame>
       <p:sp>
         <p:nvSpPr>
-          <p:cNvPr id="10" name="Rectangle 9"/>
+          <p:cNvPr id="11" name="Rectangle 10"/>
           <p:cNvSpPr/>
           <p:nvPr/>
         </p:nvSpPr>
@@ -27481,7 +28771,7 @@
       </p:sp>
       <p:sp>
         <p:nvSpPr>
-          <p:cNvPr id="11" name="TextBox 10"/>
+          <p:cNvPr id="12" name="TextBox 11"/>
           <p:cNvSpPr txBox="1"/>
           <p:nvPr/>
         </p:nvSpPr>
@@ -27523,7 +28813,7 @@
       </p:sp>
       <p:sp>
         <p:nvSpPr>
-          <p:cNvPr id="12" name="TextBox 11"/>
+          <p:cNvPr id="13" name="TextBox 12"/>
           <p:cNvSpPr txBox="1"/>
           <p:nvPr/>
         </p:nvSpPr>
@@ -27558,14 +28848,14 @@
               <a:rPr>
                 <a:latin typeface="Inter"/>
               </a:rPr>
-              <a:t>TEST DATA — fictional manager and benchmarks for rendering tests only · Data as of 2025-12-31</a:t>
+              <a:t>Confidential — manager performance review · Data as of 2025-12-31</a:t>
             </a:r>
           </a:p>
         </p:txBody>
       </p:sp>
       <p:sp>
         <p:nvSpPr>
-          <p:cNvPr id="13" name="TextBox 12"/>
+          <p:cNvPr id="14" name="TextBox 13"/>
           <p:cNvSpPr txBox="1"/>
           <p:nvPr/>
         </p:nvSpPr>

--- a/plugins/gradient-cio/assets/examples/gradient-idd-manager-performance-single.pptx
+++ b/plugins/gradient-cio/assets/examples/gradient-idd-manager-performance-single.pptx
@@ -5679,224 +5679,7 @@
       </p:sp>
       <p:sp>
         <p:nvSpPr>
-          <p:cNvPr id="17" name="Rectangle 16"/>
-          <p:cNvSpPr/>
-          <p:nvPr/>
-        </p:nvSpPr>
-        <p:spPr>
-          <a:xfrm>
-            <a:off x="685800" y="5687568"/>
-            <a:ext cx="3337560" cy="530352"/>
-          </a:xfrm>
-          <a:prstGeom prst="rect">
-            <a:avLst/>
-          </a:prstGeom>
-          <a:solidFill>
-            <a:srgbClr val="F2A93B"/>
-          </a:solidFill>
-          <a:ln>
-            <a:solidFill>
-              <a:srgbClr val="F2A93B"/>
-            </a:solidFill>
-          </a:ln>
-        </p:spPr>
-        <p:style>
-          <a:lnRef idx="1">
-            <a:schemeClr val="accent1"/>
-          </a:lnRef>
-          <a:fillRef idx="3">
-            <a:schemeClr val="accent1"/>
-          </a:fillRef>
-          <a:effectRef idx="2">
-            <a:schemeClr val="accent1"/>
-          </a:effectRef>
-          <a:fontRef idx="minor">
-            <a:schemeClr val="lt1"/>
-          </a:fontRef>
-        </p:style>
-        <p:txBody>
-          <a:bodyPr rtlCol="0" anchor="ctr"/>
-          <a:lstStyle/>
-          <a:p>
-            <a:pPr algn="ctr">
-              <a:defRPr>
-                <a:latin typeface="Inter"/>
-              </a:defRPr>
-            </a:pPr>
-          </a:p>
-        </p:txBody>
-      </p:sp>
-      <p:sp>
-        <p:nvSpPr>
-          <p:cNvPr id="18" name="TextBox 17"/>
-          <p:cNvSpPr txBox="1"/>
-          <p:nvPr/>
-        </p:nvSpPr>
-        <p:spPr>
-          <a:xfrm>
-            <a:off x="822960" y="5760720"/>
-            <a:ext cx="3063240" cy="128016"/>
-          </a:xfrm>
-          <a:prstGeom prst="rect">
-            <a:avLst/>
-          </a:prstGeom>
-          <a:noFill/>
-        </p:spPr>
-        <p:txBody>
-          <a:bodyPr wrap="none" lIns="9144" rIns="9144" tIns="9144" bIns="9144" anchor="t">
-            <a:spAutoFit/>
-          </a:bodyPr>
-          <a:lstStyle/>
-          <a:p>
-            <a:pPr algn="l">
-              <a:spcAft>
-                <a:spcPts val="0"/>
-              </a:spcAft>
-              <a:defRPr sz="620" b="1">
-                <a:solidFill>
-                  <a:srgbClr val="0D1117"/>
-                </a:solidFill>
-                <a:latin typeface="Inter"/>
-              </a:defRPr>
-            </a:pPr>
-            <a:r>
-              <a:rPr>
-                <a:latin typeface="Inter"/>
-              </a:rPr>
-              <a:t>OVERALL VIEW</a:t>
-            </a:r>
-          </a:p>
-        </p:txBody>
-      </p:sp>
-      <p:sp>
-        <p:nvSpPr>
-          <p:cNvPr id="19" name="TextBox 18"/>
-          <p:cNvSpPr txBox="1"/>
-          <p:nvPr/>
-        </p:nvSpPr>
-        <p:spPr>
-          <a:xfrm>
-            <a:off x="822960" y="5916168"/>
-            <a:ext cx="3063240" cy="182880"/>
-          </a:xfrm>
-          <a:prstGeom prst="rect">
-            <a:avLst/>
-          </a:prstGeom>
-          <a:noFill/>
-        </p:spPr>
-        <p:txBody>
-          <a:bodyPr wrap="none" lIns="9144" rIns="9144" tIns="9144" bIns="9144" anchor="t">
-            <a:spAutoFit/>
-          </a:bodyPr>
-          <a:lstStyle/>
-          <a:p>
-            <a:pPr algn="l">
-              <a:spcAft>
-                <a:spcPts val="0"/>
-              </a:spcAft>
-              <a:defRPr sz="900" b="1">
-                <a:solidFill>
-                  <a:srgbClr val="0D1117"/>
-                </a:solidFill>
-                <a:latin typeface="Inter"/>
-              </a:defRPr>
-            </a:pPr>
-            <a:r>
-              <a:rPr>
-                <a:latin typeface="Inter"/>
-              </a:rPr>
-              <a:t>Positive edge; moderate reliability</a:t>
-            </a:r>
-          </a:p>
-        </p:txBody>
-      </p:sp>
-      <p:sp>
-        <p:nvSpPr>
-          <p:cNvPr id="20" name="TextBox 19"/>
-          <p:cNvSpPr txBox="1"/>
-          <p:nvPr/>
-        </p:nvSpPr>
-        <p:spPr>
-          <a:xfrm>
-            <a:off x="4297680" y="5733288"/>
-            <a:ext cx="3108960" cy="164592"/>
-          </a:xfrm>
-          <a:prstGeom prst="rect">
-            <a:avLst/>
-          </a:prstGeom>
-          <a:noFill/>
-        </p:spPr>
-        <p:txBody>
-          <a:bodyPr wrap="none" lIns="9144" rIns="9144" tIns="9144" bIns="9144" anchor="t">
-            <a:spAutoFit/>
-          </a:bodyPr>
-          <a:lstStyle/>
-          <a:p>
-            <a:pPr algn="l">
-              <a:spcAft>
-                <a:spcPts val="0"/>
-              </a:spcAft>
-              <a:defRPr sz="650" b="1">
-                <a:solidFill>
-                  <a:srgbClr val="8A94A1"/>
-                </a:solidFill>
-                <a:latin typeface="Inter"/>
-              </a:defRPr>
-            </a:pPr>
-            <a:r>
-              <a:rPr>
-                <a:latin typeface="Inter"/>
-              </a:rPr>
-              <a:t>SCOPE REVIEWED</a:t>
-            </a:r>
-          </a:p>
-        </p:txBody>
-      </p:sp>
-      <p:sp>
-        <p:nvSpPr>
-          <p:cNvPr id="21" name="TextBox 20"/>
-          <p:cNvSpPr txBox="1"/>
-          <p:nvPr/>
-        </p:nvSpPr>
-        <p:spPr>
-          <a:xfrm>
-            <a:off x="4297680" y="5934456"/>
-            <a:ext cx="3108960" cy="201168"/>
-          </a:xfrm>
-          <a:prstGeom prst="rect">
-            <a:avLst/>
-          </a:prstGeom>
-          <a:noFill/>
-        </p:spPr>
-        <p:txBody>
-          <a:bodyPr wrap="none" lIns="9144" rIns="9144" tIns="9144" bIns="9144" anchor="t">
-            <a:spAutoFit/>
-          </a:bodyPr>
-          <a:lstStyle/>
-          <a:p>
-            <a:pPr algn="l">
-              <a:spcAft>
-                <a:spcPts val="0"/>
-              </a:spcAft>
-              <a:defRPr sz="800" b="1">
-                <a:solidFill>
-                  <a:srgbClr val="FFFFFF"/>
-                </a:solidFill>
-                <a:latin typeface="Inter"/>
-              </a:defRPr>
-            </a:pPr>
-            <a:r>
-              <a:rPr>
-                <a:latin typeface="Inter"/>
-              </a:rPr>
-              <a:t>5 of 5 · Complete</a:t>
-            </a:r>
-          </a:p>
-        </p:txBody>
-      </p:sp>
-      <p:sp>
-        <p:nvSpPr>
-          <p:cNvPr id="22" name="TextBox 21"/>
+          <p:cNvPr id="17" name="TextBox 16"/>
           <p:cNvSpPr txBox="1"/>
           <p:nvPr/>
         </p:nvSpPr>
@@ -5938,7 +5721,7 @@
       </p:sp>
       <p:sp>
         <p:nvSpPr>
-          <p:cNvPr id="23" name="TextBox 22"/>
+          <p:cNvPr id="18" name="TextBox 17"/>
           <p:cNvSpPr txBox="1"/>
           <p:nvPr/>
         </p:nvSpPr>
@@ -5980,7 +5763,7 @@
       </p:sp>
       <p:sp>
         <p:nvSpPr>
-          <p:cNvPr id="24" name="TextBox 23"/>
+          <p:cNvPr id="19" name="TextBox 18"/>
           <p:cNvSpPr txBox="1"/>
           <p:nvPr/>
         </p:nvSpPr>
@@ -6096,7 +5879,7 @@
         <p:spPr>
           <a:xfrm>
             <a:off x="640080" y="329184"/>
-            <a:ext cx="5303520" cy="182880"/>
+            <a:ext cx="9875520" cy="182880"/>
           </a:xfrm>
           <a:prstGeom prst="rect">
             <a:avLst/>
@@ -6137,48 +5920,6 @@
         </p:nvSpPr>
         <p:spPr>
           <a:xfrm>
-            <a:off x="5897880" y="310896"/>
-            <a:ext cx="4800600" cy="256032"/>
-          </a:xfrm>
-          <a:prstGeom prst="rect">
-            <a:avLst/>
-          </a:prstGeom>
-          <a:noFill/>
-        </p:spPr>
-        <p:txBody>
-          <a:bodyPr wrap="none" lIns="9144" rIns="9144" tIns="9144" bIns="9144" anchor="t">
-            <a:spAutoFit/>
-          </a:bodyPr>
-          <a:lstStyle/>
-          <a:p>
-            <a:pPr algn="r">
-              <a:spcAft>
-                <a:spcPts val="0"/>
-              </a:spcAft>
-              <a:defRPr sz="680" b="1">
-                <a:solidFill>
-                  <a:srgbClr val="4F6B00"/>
-                </a:solidFill>
-                <a:latin typeface="Inter"/>
-              </a:defRPr>
-            </a:pPr>
-            <a:r>
-              <a:rPr>
-                <a:latin typeface="Inter"/>
-              </a:rPr>
-              <a:t>Illustrative, Gradient Maintained — demo data, not the client's holdings or managers</a:t>
-            </a:r>
-          </a:p>
-        </p:txBody>
-      </p:sp>
-      <p:sp>
-        <p:nvSpPr>
-          <p:cNvPr id="5" name="TextBox 4"/>
-          <p:cNvSpPr txBox="1"/>
-          <p:nvPr/>
-        </p:nvSpPr>
-        <p:spPr>
-          <a:xfrm>
             <a:off x="640080" y="566928"/>
             <a:ext cx="10058400" cy="530352"/>
           </a:xfrm>
@@ -6215,7 +5956,7 @@
       </p:sp>
       <p:sp>
         <p:nvSpPr>
-          <p:cNvPr id="6" name="Rectangle 5"/>
+          <p:cNvPr id="5" name="Rectangle 4"/>
           <p:cNvSpPr/>
           <p:nvPr/>
         </p:nvSpPr>
@@ -6264,7 +6005,7 @@
       </p:sp>
       <p:sp>
         <p:nvSpPr>
-          <p:cNvPr id="7" name="Rectangle 6"/>
+          <p:cNvPr id="6" name="Rectangle 5"/>
           <p:cNvSpPr/>
           <p:nvPr/>
         </p:nvSpPr>
@@ -6313,7 +6054,7 @@
       </p:sp>
       <p:sp>
         <p:nvSpPr>
-          <p:cNvPr id="8" name="TextBox 7"/>
+          <p:cNvPr id="7" name="TextBox 6"/>
           <p:cNvSpPr txBox="1"/>
           <p:nvPr/>
         </p:nvSpPr>
@@ -6355,7 +6096,7 @@
       </p:sp>
       <p:sp>
         <p:nvSpPr>
-          <p:cNvPr id="9" name="TextBox 8"/>
+          <p:cNvPr id="8" name="TextBox 7"/>
           <p:cNvSpPr txBox="1"/>
           <p:nvPr/>
         </p:nvSpPr>
@@ -6397,7 +6138,7 @@
       </p:sp>
       <p:graphicFrame>
         <p:nvGraphicFramePr>
-          <p:cNvPr id="10" name="Table 9"/>
+          <p:cNvPr id="9" name="Table 8"/>
           <p:cNvGraphicFramePr>
             <a:graphicFrameLocks noGrp="1"/>
           </p:cNvGraphicFramePr>
@@ -7385,7 +7126,7 @@
       </p:graphicFrame>
       <p:sp>
         <p:nvSpPr>
-          <p:cNvPr id="11" name="Rectangle 10"/>
+          <p:cNvPr id="10" name="Rectangle 9"/>
           <p:cNvSpPr/>
           <p:nvPr/>
         </p:nvSpPr>
@@ -7434,7 +7175,7 @@
       </p:sp>
       <p:sp>
         <p:nvSpPr>
-          <p:cNvPr id="12" name="TextBox 11"/>
+          <p:cNvPr id="11" name="TextBox 10"/>
           <p:cNvSpPr txBox="1"/>
           <p:nvPr/>
         </p:nvSpPr>
@@ -7476,7 +7217,7 @@
       </p:sp>
       <p:sp>
         <p:nvSpPr>
-          <p:cNvPr id="13" name="TextBox 12"/>
+          <p:cNvPr id="12" name="TextBox 11"/>
           <p:cNvSpPr txBox="1"/>
           <p:nvPr/>
         </p:nvSpPr>
@@ -7518,7 +7259,7 @@
       </p:sp>
       <p:sp>
         <p:nvSpPr>
-          <p:cNvPr id="14" name="TextBox 13"/>
+          <p:cNvPr id="13" name="TextBox 12"/>
           <p:cNvSpPr txBox="1"/>
           <p:nvPr/>
         </p:nvSpPr>
@@ -7634,7 +7375,7 @@
         <p:spPr>
           <a:xfrm>
             <a:off x="640080" y="329184"/>
-            <a:ext cx="5303520" cy="182880"/>
+            <a:ext cx="9875520" cy="182880"/>
           </a:xfrm>
           <a:prstGeom prst="rect">
             <a:avLst/>
@@ -7675,48 +7416,6 @@
         </p:nvSpPr>
         <p:spPr>
           <a:xfrm>
-            <a:off x="5897880" y="310896"/>
-            <a:ext cx="4800600" cy="256032"/>
-          </a:xfrm>
-          <a:prstGeom prst="rect">
-            <a:avLst/>
-          </a:prstGeom>
-          <a:noFill/>
-        </p:spPr>
-        <p:txBody>
-          <a:bodyPr wrap="none" lIns="9144" rIns="9144" tIns="9144" bIns="9144" anchor="t">
-            <a:spAutoFit/>
-          </a:bodyPr>
-          <a:lstStyle/>
-          <a:p>
-            <a:pPr algn="r">
-              <a:spcAft>
-                <a:spcPts val="0"/>
-              </a:spcAft>
-              <a:defRPr sz="680" b="1">
-                <a:solidFill>
-                  <a:srgbClr val="4F6B00"/>
-                </a:solidFill>
-                <a:latin typeface="Inter"/>
-              </a:defRPr>
-            </a:pPr>
-            <a:r>
-              <a:rPr>
-                <a:latin typeface="Inter"/>
-              </a:rPr>
-              <a:t>Illustrative, Gradient Maintained — demo data, not the client's holdings or managers</a:t>
-            </a:r>
-          </a:p>
-        </p:txBody>
-      </p:sp>
-      <p:sp>
-        <p:nvSpPr>
-          <p:cNvPr id="5" name="TextBox 4"/>
-          <p:cNvSpPr txBox="1"/>
-          <p:nvPr/>
-        </p:nvSpPr>
-        <p:spPr>
-          <a:xfrm>
             <a:off x="640080" y="566928"/>
             <a:ext cx="10058400" cy="530352"/>
           </a:xfrm>
@@ -7753,7 +7452,7 @@
       </p:sp>
       <p:sp>
         <p:nvSpPr>
-          <p:cNvPr id="6" name="Rectangle 5"/>
+          <p:cNvPr id="5" name="Rectangle 4"/>
           <p:cNvSpPr/>
           <p:nvPr/>
         </p:nvSpPr>
@@ -7802,7 +7501,7 @@
       </p:sp>
       <p:sp>
         <p:nvSpPr>
-          <p:cNvPr id="7" name="Rectangle 6"/>
+          <p:cNvPr id="6" name="Rectangle 5"/>
           <p:cNvSpPr/>
           <p:nvPr/>
         </p:nvSpPr>
@@ -7851,7 +7550,7 @@
       </p:sp>
       <p:sp>
         <p:nvSpPr>
-          <p:cNvPr id="8" name="TextBox 7"/>
+          <p:cNvPr id="7" name="TextBox 6"/>
           <p:cNvSpPr txBox="1"/>
           <p:nvPr/>
         </p:nvSpPr>
@@ -7893,7 +7592,7 @@
       </p:sp>
       <p:sp>
         <p:nvSpPr>
-          <p:cNvPr id="9" name="TextBox 8"/>
+          <p:cNvPr id="8" name="TextBox 7"/>
           <p:cNvSpPr txBox="1"/>
           <p:nvPr/>
         </p:nvSpPr>
@@ -7935,7 +7634,7 @@
       </p:sp>
       <p:graphicFrame>
         <p:nvGraphicFramePr>
-          <p:cNvPr id="10" name="Chart 9"/>
+          <p:cNvPr id="9" name="Chart 8"/>
           <p:cNvGraphicFramePr>
             <a:graphicFrameLocks noGrp="1"/>
           </p:cNvGraphicFramePr>
@@ -7953,7 +7652,7 @@
       </p:graphicFrame>
       <p:sp>
         <p:nvSpPr>
-          <p:cNvPr id="11" name="Rectangle 10"/>
+          <p:cNvPr id="10" name="Rectangle 9"/>
           <p:cNvSpPr/>
           <p:nvPr/>
         </p:nvSpPr>
@@ -8002,7 +7701,7 @@
       </p:sp>
       <p:sp>
         <p:nvSpPr>
-          <p:cNvPr id="12" name="TextBox 11"/>
+          <p:cNvPr id="11" name="TextBox 10"/>
           <p:cNvSpPr txBox="1"/>
           <p:nvPr/>
         </p:nvSpPr>
@@ -8044,7 +7743,7 @@
       </p:sp>
       <p:sp>
         <p:nvSpPr>
-          <p:cNvPr id="13" name="TextBox 12"/>
+          <p:cNvPr id="12" name="TextBox 11"/>
           <p:cNvSpPr txBox="1"/>
           <p:nvPr/>
         </p:nvSpPr>
@@ -8086,7 +7785,7 @@
       </p:sp>
       <p:sp>
         <p:nvSpPr>
-          <p:cNvPr id="14" name="TextBox 13"/>
+          <p:cNvPr id="13" name="TextBox 12"/>
           <p:cNvSpPr txBox="1"/>
           <p:nvPr/>
         </p:nvSpPr>
@@ -8202,7 +7901,7 @@
         <p:spPr>
           <a:xfrm>
             <a:off x="640080" y="329184"/>
-            <a:ext cx="5303520" cy="182880"/>
+            <a:ext cx="9875520" cy="182880"/>
           </a:xfrm>
           <a:prstGeom prst="rect">
             <a:avLst/>
@@ -8243,48 +7942,6 @@
         </p:nvSpPr>
         <p:spPr>
           <a:xfrm>
-            <a:off x="5897880" y="310896"/>
-            <a:ext cx="4800600" cy="256032"/>
-          </a:xfrm>
-          <a:prstGeom prst="rect">
-            <a:avLst/>
-          </a:prstGeom>
-          <a:noFill/>
-        </p:spPr>
-        <p:txBody>
-          <a:bodyPr wrap="none" lIns="9144" rIns="9144" tIns="9144" bIns="9144" anchor="t">
-            <a:spAutoFit/>
-          </a:bodyPr>
-          <a:lstStyle/>
-          <a:p>
-            <a:pPr algn="r">
-              <a:spcAft>
-                <a:spcPts val="0"/>
-              </a:spcAft>
-              <a:defRPr sz="680" b="1">
-                <a:solidFill>
-                  <a:srgbClr val="4F6B00"/>
-                </a:solidFill>
-                <a:latin typeface="Inter"/>
-              </a:defRPr>
-            </a:pPr>
-            <a:r>
-              <a:rPr>
-                <a:latin typeface="Inter"/>
-              </a:rPr>
-              <a:t>Illustrative, Gradient Maintained — demo data, not the client's holdings or managers</a:t>
-            </a:r>
-          </a:p>
-        </p:txBody>
-      </p:sp>
-      <p:sp>
-        <p:nvSpPr>
-          <p:cNvPr id="5" name="TextBox 4"/>
-          <p:cNvSpPr txBox="1"/>
-          <p:nvPr/>
-        </p:nvSpPr>
-        <p:spPr>
-          <a:xfrm>
             <a:off x="640080" y="566928"/>
             <a:ext cx="10058400" cy="530352"/>
           </a:xfrm>
@@ -8321,7 +7978,7 @@
       </p:sp>
       <p:sp>
         <p:nvSpPr>
-          <p:cNvPr id="6" name="Rectangle 5"/>
+          <p:cNvPr id="5" name="Rectangle 4"/>
           <p:cNvSpPr/>
           <p:nvPr/>
         </p:nvSpPr>
@@ -8370,7 +8027,7 @@
       </p:sp>
       <p:sp>
         <p:nvSpPr>
-          <p:cNvPr id="7" name="Rectangle 6"/>
+          <p:cNvPr id="6" name="Rectangle 5"/>
           <p:cNvSpPr/>
           <p:nvPr/>
         </p:nvSpPr>
@@ -8419,7 +8076,7 @@
       </p:sp>
       <p:sp>
         <p:nvSpPr>
-          <p:cNvPr id="8" name="TextBox 7"/>
+          <p:cNvPr id="7" name="TextBox 6"/>
           <p:cNvSpPr txBox="1"/>
           <p:nvPr/>
         </p:nvSpPr>
@@ -8461,7 +8118,7 @@
       </p:sp>
       <p:sp>
         <p:nvSpPr>
-          <p:cNvPr id="9" name="TextBox 8"/>
+          <p:cNvPr id="8" name="TextBox 7"/>
           <p:cNvSpPr txBox="1"/>
           <p:nvPr/>
         </p:nvSpPr>
@@ -8503,7 +8160,7 @@
       </p:sp>
       <p:graphicFrame>
         <p:nvGraphicFramePr>
-          <p:cNvPr id="10" name="Table 9"/>
+          <p:cNvPr id="9" name="Table 8"/>
           <p:cNvGraphicFramePr>
             <a:graphicFrameLocks noGrp="1"/>
           </p:cNvGraphicFramePr>
@@ -8862,7 +8519,7 @@
       </p:graphicFrame>
       <p:sp>
         <p:nvSpPr>
-          <p:cNvPr id="11" name="TextBox 10"/>
+          <p:cNvPr id="10" name="TextBox 9"/>
           <p:cNvSpPr txBox="1"/>
           <p:nvPr/>
         </p:nvSpPr>
@@ -8904,7 +8561,7 @@
       </p:sp>
       <p:sp>
         <p:nvSpPr>
-          <p:cNvPr id="12" name="TextBox 11"/>
+          <p:cNvPr id="11" name="TextBox 10"/>
           <p:cNvSpPr txBox="1"/>
           <p:nvPr/>
         </p:nvSpPr>
@@ -8946,7 +8603,7 @@
       </p:sp>
       <p:graphicFrame>
         <p:nvGraphicFramePr>
-          <p:cNvPr id="13" name="Table 12"/>
+          <p:cNvPr id="12" name="Table 11"/>
           <p:cNvGraphicFramePr>
             <a:graphicFrameLocks noGrp="1"/>
           </p:cNvGraphicFramePr>
@@ -10314,7 +9971,7 @@
       </p:graphicFrame>
       <p:sp>
         <p:nvSpPr>
-          <p:cNvPr id="14" name="Rectangle 13"/>
+          <p:cNvPr id="13" name="Rectangle 12"/>
           <p:cNvSpPr/>
           <p:nvPr/>
         </p:nvSpPr>
@@ -10363,7 +10020,7 @@
       </p:sp>
       <p:sp>
         <p:nvSpPr>
-          <p:cNvPr id="15" name="TextBox 14"/>
+          <p:cNvPr id="14" name="TextBox 13"/>
           <p:cNvSpPr txBox="1"/>
           <p:nvPr/>
         </p:nvSpPr>
@@ -10405,7 +10062,7 @@
       </p:sp>
       <p:sp>
         <p:nvSpPr>
-          <p:cNvPr id="16" name="TextBox 15"/>
+          <p:cNvPr id="15" name="TextBox 14"/>
           <p:cNvSpPr txBox="1"/>
           <p:nvPr/>
         </p:nvSpPr>
@@ -10447,7 +10104,7 @@
       </p:sp>
       <p:sp>
         <p:nvSpPr>
-          <p:cNvPr id="17" name="TextBox 16"/>
+          <p:cNvPr id="16" name="TextBox 15"/>
           <p:cNvSpPr txBox="1"/>
           <p:nvPr/>
         </p:nvSpPr>
@@ -10563,7 +10220,7 @@
         <p:spPr>
           <a:xfrm>
             <a:off x="640080" y="329184"/>
-            <a:ext cx="5303520" cy="182880"/>
+            <a:ext cx="9875520" cy="182880"/>
           </a:xfrm>
           <a:prstGeom prst="rect">
             <a:avLst/>
@@ -10604,48 +10261,6 @@
         </p:nvSpPr>
         <p:spPr>
           <a:xfrm>
-            <a:off x="5897880" y="310896"/>
-            <a:ext cx="4800600" cy="256032"/>
-          </a:xfrm>
-          <a:prstGeom prst="rect">
-            <a:avLst/>
-          </a:prstGeom>
-          <a:noFill/>
-        </p:spPr>
-        <p:txBody>
-          <a:bodyPr wrap="none" lIns="9144" rIns="9144" tIns="9144" bIns="9144" anchor="t">
-            <a:spAutoFit/>
-          </a:bodyPr>
-          <a:lstStyle/>
-          <a:p>
-            <a:pPr algn="r">
-              <a:spcAft>
-                <a:spcPts val="0"/>
-              </a:spcAft>
-              <a:defRPr sz="680" b="1">
-                <a:solidFill>
-                  <a:srgbClr val="4F6B00"/>
-                </a:solidFill>
-                <a:latin typeface="Inter"/>
-              </a:defRPr>
-            </a:pPr>
-            <a:r>
-              <a:rPr>
-                <a:latin typeface="Inter"/>
-              </a:rPr>
-              <a:t>Illustrative, Gradient Maintained — demo data, not the client's holdings or managers</a:t>
-            </a:r>
-          </a:p>
-        </p:txBody>
-      </p:sp>
-      <p:sp>
-        <p:nvSpPr>
-          <p:cNvPr id="5" name="TextBox 4"/>
-          <p:cNvSpPr txBox="1"/>
-          <p:nvPr/>
-        </p:nvSpPr>
-        <p:spPr>
-          <a:xfrm>
             <a:off x="640080" y="566928"/>
             <a:ext cx="10058400" cy="530352"/>
           </a:xfrm>
@@ -10682,7 +10297,7 @@
       </p:sp>
       <p:sp>
         <p:nvSpPr>
-          <p:cNvPr id="6" name="Rectangle 5"/>
+          <p:cNvPr id="5" name="Rectangle 4"/>
           <p:cNvSpPr/>
           <p:nvPr/>
         </p:nvSpPr>
@@ -10731,7 +10346,7 @@
       </p:sp>
       <p:sp>
         <p:nvSpPr>
-          <p:cNvPr id="7" name="Rectangle 6"/>
+          <p:cNvPr id="6" name="Rectangle 5"/>
           <p:cNvSpPr/>
           <p:nvPr/>
         </p:nvSpPr>
@@ -10780,7 +10395,7 @@
       </p:sp>
       <p:sp>
         <p:nvSpPr>
-          <p:cNvPr id="8" name="TextBox 7"/>
+          <p:cNvPr id="7" name="TextBox 6"/>
           <p:cNvSpPr txBox="1"/>
           <p:nvPr/>
         </p:nvSpPr>
@@ -10822,7 +10437,7 @@
       </p:sp>
       <p:sp>
         <p:nvSpPr>
-          <p:cNvPr id="9" name="Rectangle 8"/>
+          <p:cNvPr id="8" name="Rectangle 7"/>
           <p:cNvSpPr/>
           <p:nvPr/>
         </p:nvSpPr>
@@ -10871,7 +10486,7 @@
       </p:sp>
       <p:sp>
         <p:nvSpPr>
-          <p:cNvPr id="10" name="Rectangle 9"/>
+          <p:cNvPr id="9" name="Rectangle 8"/>
           <p:cNvSpPr/>
           <p:nvPr/>
         </p:nvSpPr>
@@ -10920,7 +10535,7 @@
       </p:sp>
       <p:sp>
         <p:nvSpPr>
-          <p:cNvPr id="11" name="TextBox 10"/>
+          <p:cNvPr id="10" name="TextBox 9"/>
           <p:cNvSpPr txBox="1"/>
           <p:nvPr/>
         </p:nvSpPr>
@@ -10962,7 +10577,7 @@
       </p:sp>
       <p:sp>
         <p:nvSpPr>
-          <p:cNvPr id="12" name="TextBox 11"/>
+          <p:cNvPr id="11" name="TextBox 10"/>
           <p:cNvSpPr txBox="1"/>
           <p:nvPr/>
         </p:nvSpPr>
@@ -11004,7 +10619,7 @@
       </p:sp>
       <p:sp>
         <p:nvSpPr>
-          <p:cNvPr id="13" name="Rectangle 12"/>
+          <p:cNvPr id="12" name="Rectangle 11"/>
           <p:cNvSpPr/>
           <p:nvPr/>
         </p:nvSpPr>
@@ -11053,7 +10668,7 @@
       </p:sp>
       <p:sp>
         <p:nvSpPr>
-          <p:cNvPr id="14" name="TextBox 13"/>
+          <p:cNvPr id="13" name="TextBox 12"/>
           <p:cNvSpPr txBox="1"/>
           <p:nvPr/>
         </p:nvSpPr>
@@ -11095,7 +10710,7 @@
       </p:sp>
       <p:sp>
         <p:nvSpPr>
-          <p:cNvPr id="15" name="TextBox 14"/>
+          <p:cNvPr id="14" name="TextBox 13"/>
           <p:cNvSpPr txBox="1"/>
           <p:nvPr/>
         </p:nvSpPr>
@@ -11137,7 +10752,7 @@
       </p:sp>
       <p:sp>
         <p:nvSpPr>
-          <p:cNvPr id="16" name="TextBox 15"/>
+          <p:cNvPr id="15" name="TextBox 14"/>
           <p:cNvSpPr txBox="1"/>
           <p:nvPr/>
         </p:nvSpPr>
@@ -11253,7 +10868,7 @@
         <p:spPr>
           <a:xfrm>
             <a:off x="640080" y="329184"/>
-            <a:ext cx="5303520" cy="182880"/>
+            <a:ext cx="9875520" cy="182880"/>
           </a:xfrm>
           <a:prstGeom prst="rect">
             <a:avLst/>
@@ -11294,48 +10909,6 @@
         </p:nvSpPr>
         <p:spPr>
           <a:xfrm>
-            <a:off x="5897880" y="310896"/>
-            <a:ext cx="4800600" cy="256032"/>
-          </a:xfrm>
-          <a:prstGeom prst="rect">
-            <a:avLst/>
-          </a:prstGeom>
-          <a:noFill/>
-        </p:spPr>
-        <p:txBody>
-          <a:bodyPr wrap="none" lIns="9144" rIns="9144" tIns="9144" bIns="9144" anchor="t">
-            <a:spAutoFit/>
-          </a:bodyPr>
-          <a:lstStyle/>
-          <a:p>
-            <a:pPr algn="r">
-              <a:spcAft>
-                <a:spcPts val="0"/>
-              </a:spcAft>
-              <a:defRPr sz="680" b="1">
-                <a:solidFill>
-                  <a:srgbClr val="4F6B00"/>
-                </a:solidFill>
-                <a:latin typeface="Inter"/>
-              </a:defRPr>
-            </a:pPr>
-            <a:r>
-              <a:rPr>
-                <a:latin typeface="Inter"/>
-              </a:rPr>
-              <a:t>Illustrative, Gradient Maintained — demo data, not the client's holdings or managers</a:t>
-            </a:r>
-          </a:p>
-        </p:txBody>
-      </p:sp>
-      <p:sp>
-        <p:nvSpPr>
-          <p:cNvPr id="5" name="TextBox 4"/>
-          <p:cNvSpPr txBox="1"/>
-          <p:nvPr/>
-        </p:nvSpPr>
-        <p:spPr>
-          <a:xfrm>
             <a:off x="640080" y="566928"/>
             <a:ext cx="10058400" cy="530352"/>
           </a:xfrm>
@@ -11372,7 +10945,7 @@
       </p:sp>
       <p:sp>
         <p:nvSpPr>
-          <p:cNvPr id="6" name="Rectangle 5"/>
+          <p:cNvPr id="5" name="Rectangle 4"/>
           <p:cNvSpPr/>
           <p:nvPr/>
         </p:nvSpPr>
@@ -11421,7 +10994,7 @@
       </p:sp>
       <p:sp>
         <p:nvSpPr>
-          <p:cNvPr id="7" name="Rectangle 6"/>
+          <p:cNvPr id="6" name="Rectangle 5"/>
           <p:cNvSpPr/>
           <p:nvPr/>
         </p:nvSpPr>
@@ -11470,7 +11043,7 @@
       </p:sp>
       <p:sp>
         <p:nvSpPr>
-          <p:cNvPr id="8" name="TextBox 7"/>
+          <p:cNvPr id="7" name="TextBox 6"/>
           <p:cNvSpPr txBox="1"/>
           <p:nvPr/>
         </p:nvSpPr>
@@ -11512,7 +11085,7 @@
       </p:sp>
       <p:sp>
         <p:nvSpPr>
-          <p:cNvPr id="9" name="TextBox 8"/>
+          <p:cNvPr id="8" name="TextBox 7"/>
           <p:cNvSpPr txBox="1"/>
           <p:nvPr/>
         </p:nvSpPr>
@@ -11554,7 +11127,7 @@
       </p:sp>
       <p:graphicFrame>
         <p:nvGraphicFramePr>
-          <p:cNvPr id="10" name="Chart 9"/>
+          <p:cNvPr id="9" name="Chart 8"/>
           <p:cNvGraphicFramePr>
             <a:graphicFrameLocks noGrp="1"/>
           </p:cNvGraphicFramePr>
@@ -11572,7 +11145,7 @@
       </p:graphicFrame>
       <p:sp>
         <p:nvSpPr>
-          <p:cNvPr id="11" name="Rectangle 10"/>
+          <p:cNvPr id="10" name="Rectangle 9"/>
           <p:cNvSpPr/>
           <p:nvPr/>
         </p:nvSpPr>
@@ -11621,7 +11194,7 @@
       </p:sp>
       <p:sp>
         <p:nvSpPr>
-          <p:cNvPr id="12" name="TextBox 11"/>
+          <p:cNvPr id="11" name="TextBox 10"/>
           <p:cNvSpPr txBox="1"/>
           <p:nvPr/>
         </p:nvSpPr>
@@ -11663,7 +11236,7 @@
       </p:sp>
       <p:sp>
         <p:nvSpPr>
-          <p:cNvPr id="13" name="TextBox 12"/>
+          <p:cNvPr id="12" name="TextBox 11"/>
           <p:cNvSpPr txBox="1"/>
           <p:nvPr/>
         </p:nvSpPr>
@@ -11705,7 +11278,7 @@
       </p:sp>
       <p:sp>
         <p:nvSpPr>
-          <p:cNvPr id="14" name="TextBox 13"/>
+          <p:cNvPr id="13" name="TextBox 12"/>
           <p:cNvSpPr txBox="1"/>
           <p:nvPr/>
         </p:nvSpPr>
@@ -11821,7 +11394,7 @@
         <p:spPr>
           <a:xfrm>
             <a:off x="640080" y="329184"/>
-            <a:ext cx="5303520" cy="182880"/>
+            <a:ext cx="9875520" cy="182880"/>
           </a:xfrm>
           <a:prstGeom prst="rect">
             <a:avLst/>
@@ -11862,48 +11435,6 @@
         </p:nvSpPr>
         <p:spPr>
           <a:xfrm>
-            <a:off x="5897880" y="310896"/>
-            <a:ext cx="4800600" cy="256032"/>
-          </a:xfrm>
-          <a:prstGeom prst="rect">
-            <a:avLst/>
-          </a:prstGeom>
-          <a:noFill/>
-        </p:spPr>
-        <p:txBody>
-          <a:bodyPr wrap="none" lIns="9144" rIns="9144" tIns="9144" bIns="9144" anchor="t">
-            <a:spAutoFit/>
-          </a:bodyPr>
-          <a:lstStyle/>
-          <a:p>
-            <a:pPr algn="r">
-              <a:spcAft>
-                <a:spcPts val="0"/>
-              </a:spcAft>
-              <a:defRPr sz="680" b="1">
-                <a:solidFill>
-                  <a:srgbClr val="4F6B00"/>
-                </a:solidFill>
-                <a:latin typeface="Inter"/>
-              </a:defRPr>
-            </a:pPr>
-            <a:r>
-              <a:rPr>
-                <a:latin typeface="Inter"/>
-              </a:rPr>
-              <a:t>Illustrative, Gradient Maintained — demo data, not the client's holdings or managers</a:t>
-            </a:r>
-          </a:p>
-        </p:txBody>
-      </p:sp>
-      <p:sp>
-        <p:nvSpPr>
-          <p:cNvPr id="5" name="TextBox 4"/>
-          <p:cNvSpPr txBox="1"/>
-          <p:nvPr/>
-        </p:nvSpPr>
-        <p:spPr>
-          <a:xfrm>
             <a:off x="640080" y="566928"/>
             <a:ext cx="10058400" cy="530352"/>
           </a:xfrm>
@@ -11940,7 +11471,7 @@
       </p:sp>
       <p:sp>
         <p:nvSpPr>
-          <p:cNvPr id="6" name="Rectangle 5"/>
+          <p:cNvPr id="5" name="Rectangle 4"/>
           <p:cNvSpPr/>
           <p:nvPr/>
         </p:nvSpPr>
@@ -11989,7 +11520,7 @@
       </p:sp>
       <p:sp>
         <p:nvSpPr>
-          <p:cNvPr id="7" name="Rectangle 6"/>
+          <p:cNvPr id="6" name="Rectangle 5"/>
           <p:cNvSpPr/>
           <p:nvPr/>
         </p:nvSpPr>
@@ -12038,7 +11569,7 @@
       </p:sp>
       <p:sp>
         <p:nvSpPr>
-          <p:cNvPr id="8" name="TextBox 7"/>
+          <p:cNvPr id="7" name="TextBox 6"/>
           <p:cNvSpPr txBox="1"/>
           <p:nvPr/>
         </p:nvSpPr>
@@ -12080,7 +11611,7 @@
       </p:sp>
       <p:sp>
         <p:nvSpPr>
-          <p:cNvPr id="9" name="TextBox 8"/>
+          <p:cNvPr id="8" name="TextBox 7"/>
           <p:cNvSpPr txBox="1"/>
           <p:nvPr/>
         </p:nvSpPr>
@@ -12122,7 +11653,7 @@
       </p:sp>
       <p:graphicFrame>
         <p:nvGraphicFramePr>
-          <p:cNvPr id="10" name="Chart 9"/>
+          <p:cNvPr id="9" name="Chart 8"/>
           <p:cNvGraphicFramePr>
             <a:graphicFrameLocks noGrp="1"/>
           </p:cNvGraphicFramePr>
@@ -12140,7 +11671,7 @@
       </p:graphicFrame>
       <p:sp>
         <p:nvSpPr>
-          <p:cNvPr id="11" name="Rectangle 10"/>
+          <p:cNvPr id="10" name="Rectangle 9"/>
           <p:cNvSpPr/>
           <p:nvPr/>
         </p:nvSpPr>
@@ -12189,7 +11720,7 @@
       </p:sp>
       <p:sp>
         <p:nvSpPr>
-          <p:cNvPr id="12" name="TextBox 11"/>
+          <p:cNvPr id="11" name="TextBox 10"/>
           <p:cNvSpPr txBox="1"/>
           <p:nvPr/>
         </p:nvSpPr>
@@ -12231,7 +11762,7 @@
       </p:sp>
       <p:sp>
         <p:nvSpPr>
-          <p:cNvPr id="13" name="TextBox 12"/>
+          <p:cNvPr id="12" name="TextBox 11"/>
           <p:cNvSpPr txBox="1"/>
           <p:nvPr/>
         </p:nvSpPr>
@@ -12273,7 +11804,7 @@
       </p:sp>
       <p:sp>
         <p:nvSpPr>
-          <p:cNvPr id="14" name="TextBox 13"/>
+          <p:cNvPr id="13" name="TextBox 12"/>
           <p:cNvSpPr txBox="1"/>
           <p:nvPr/>
         </p:nvSpPr>
@@ -12389,7 +11920,7 @@
         <p:spPr>
           <a:xfrm>
             <a:off x="640080" y="329184"/>
-            <a:ext cx="5303520" cy="182880"/>
+            <a:ext cx="9875520" cy="182880"/>
           </a:xfrm>
           <a:prstGeom prst="rect">
             <a:avLst/>
@@ -12430,48 +11961,6 @@
         </p:nvSpPr>
         <p:spPr>
           <a:xfrm>
-            <a:off x="5897880" y="310896"/>
-            <a:ext cx="4800600" cy="256032"/>
-          </a:xfrm>
-          <a:prstGeom prst="rect">
-            <a:avLst/>
-          </a:prstGeom>
-          <a:noFill/>
-        </p:spPr>
-        <p:txBody>
-          <a:bodyPr wrap="none" lIns="9144" rIns="9144" tIns="9144" bIns="9144" anchor="t">
-            <a:spAutoFit/>
-          </a:bodyPr>
-          <a:lstStyle/>
-          <a:p>
-            <a:pPr algn="r">
-              <a:spcAft>
-                <a:spcPts val="0"/>
-              </a:spcAft>
-              <a:defRPr sz="680" b="1">
-                <a:solidFill>
-                  <a:srgbClr val="4F6B00"/>
-                </a:solidFill>
-                <a:latin typeface="Inter"/>
-              </a:defRPr>
-            </a:pPr>
-            <a:r>
-              <a:rPr>
-                <a:latin typeface="Inter"/>
-              </a:rPr>
-              <a:t>Illustrative, Gradient Maintained — demo data, not the client's holdings or managers</a:t>
-            </a:r>
-          </a:p>
-        </p:txBody>
-      </p:sp>
-      <p:sp>
-        <p:nvSpPr>
-          <p:cNvPr id="5" name="TextBox 4"/>
-          <p:cNvSpPr txBox="1"/>
-          <p:nvPr/>
-        </p:nvSpPr>
-        <p:spPr>
-          <a:xfrm>
             <a:off x="640080" y="566928"/>
             <a:ext cx="10058400" cy="530352"/>
           </a:xfrm>
@@ -12508,7 +11997,7 @@
       </p:sp>
       <p:sp>
         <p:nvSpPr>
-          <p:cNvPr id="6" name="Rectangle 5"/>
+          <p:cNvPr id="5" name="Rectangle 4"/>
           <p:cNvSpPr/>
           <p:nvPr/>
         </p:nvSpPr>
@@ -12557,7 +12046,7 @@
       </p:sp>
       <p:sp>
         <p:nvSpPr>
-          <p:cNvPr id="7" name="Rectangle 6"/>
+          <p:cNvPr id="6" name="Rectangle 5"/>
           <p:cNvSpPr/>
           <p:nvPr/>
         </p:nvSpPr>
@@ -12606,7 +12095,7 @@
       </p:sp>
       <p:sp>
         <p:nvSpPr>
-          <p:cNvPr id="8" name="TextBox 7"/>
+          <p:cNvPr id="7" name="TextBox 6"/>
           <p:cNvSpPr txBox="1"/>
           <p:nvPr/>
         </p:nvSpPr>
@@ -12648,7 +12137,7 @@
       </p:sp>
       <p:sp>
         <p:nvSpPr>
-          <p:cNvPr id="9" name="TextBox 8"/>
+          <p:cNvPr id="8" name="TextBox 7"/>
           <p:cNvSpPr txBox="1"/>
           <p:nvPr/>
         </p:nvSpPr>
@@ -12690,7 +12179,7 @@
       </p:sp>
       <p:graphicFrame>
         <p:nvGraphicFramePr>
-          <p:cNvPr id="10" name="Table 9"/>
+          <p:cNvPr id="9" name="Table 8"/>
           <p:cNvGraphicFramePr>
             <a:graphicFrameLocks noGrp="1"/>
           </p:cNvGraphicFramePr>
@@ -13485,7 +12974,7 @@
       </p:graphicFrame>
       <p:sp>
         <p:nvSpPr>
-          <p:cNvPr id="11" name="Rectangle 10"/>
+          <p:cNvPr id="10" name="Rectangle 9"/>
           <p:cNvSpPr/>
           <p:nvPr/>
         </p:nvSpPr>
@@ -13534,7 +13023,7 @@
       </p:sp>
       <p:sp>
         <p:nvSpPr>
-          <p:cNvPr id="12" name="Rectangle 11"/>
+          <p:cNvPr id="11" name="Rectangle 10"/>
           <p:cNvSpPr/>
           <p:nvPr/>
         </p:nvSpPr>
@@ -13583,7 +13072,7 @@
       </p:sp>
       <p:sp>
         <p:nvSpPr>
-          <p:cNvPr id="13" name="TextBox 12"/>
+          <p:cNvPr id="12" name="TextBox 11"/>
           <p:cNvSpPr txBox="1"/>
           <p:nvPr/>
         </p:nvSpPr>
@@ -13625,7 +13114,7 @@
       </p:sp>
       <p:sp>
         <p:nvSpPr>
-          <p:cNvPr id="14" name="TextBox 13"/>
+          <p:cNvPr id="13" name="TextBox 12"/>
           <p:cNvSpPr txBox="1"/>
           <p:nvPr/>
         </p:nvSpPr>
@@ -13667,7 +13156,7 @@
       </p:sp>
       <p:sp>
         <p:nvSpPr>
-          <p:cNvPr id="15" name="Rectangle 14"/>
+          <p:cNvPr id="14" name="Rectangle 13"/>
           <p:cNvSpPr/>
           <p:nvPr/>
         </p:nvSpPr>
@@ -13716,7 +13205,7 @@
       </p:sp>
       <p:sp>
         <p:nvSpPr>
-          <p:cNvPr id="16" name="TextBox 15"/>
+          <p:cNvPr id="15" name="TextBox 14"/>
           <p:cNvSpPr txBox="1"/>
           <p:nvPr/>
         </p:nvSpPr>
@@ -13758,7 +13247,7 @@
       </p:sp>
       <p:sp>
         <p:nvSpPr>
-          <p:cNvPr id="17" name="TextBox 16"/>
+          <p:cNvPr id="16" name="TextBox 15"/>
           <p:cNvSpPr txBox="1"/>
           <p:nvPr/>
         </p:nvSpPr>
@@ -13800,7 +13289,7 @@
       </p:sp>
       <p:sp>
         <p:nvSpPr>
-          <p:cNvPr id="18" name="TextBox 17"/>
+          <p:cNvPr id="17" name="TextBox 16"/>
           <p:cNvSpPr txBox="1"/>
           <p:nvPr/>
         </p:nvSpPr>
@@ -13916,7 +13405,7 @@
         <p:spPr>
           <a:xfrm>
             <a:off x="640080" y="329184"/>
-            <a:ext cx="5303520" cy="182880"/>
+            <a:ext cx="9875520" cy="182880"/>
           </a:xfrm>
           <a:prstGeom prst="rect">
             <a:avLst/>
@@ -13957,48 +13446,6 @@
         </p:nvSpPr>
         <p:spPr>
           <a:xfrm>
-            <a:off x="5897880" y="310896"/>
-            <a:ext cx="4800600" cy="256032"/>
-          </a:xfrm>
-          <a:prstGeom prst="rect">
-            <a:avLst/>
-          </a:prstGeom>
-          <a:noFill/>
-        </p:spPr>
-        <p:txBody>
-          <a:bodyPr wrap="none" lIns="9144" rIns="9144" tIns="9144" bIns="9144" anchor="t">
-            <a:spAutoFit/>
-          </a:bodyPr>
-          <a:lstStyle/>
-          <a:p>
-            <a:pPr algn="r">
-              <a:spcAft>
-                <a:spcPts val="0"/>
-              </a:spcAft>
-              <a:defRPr sz="680" b="1">
-                <a:solidFill>
-                  <a:srgbClr val="4F6B00"/>
-                </a:solidFill>
-                <a:latin typeface="Inter"/>
-              </a:defRPr>
-            </a:pPr>
-            <a:r>
-              <a:rPr>
-                <a:latin typeface="Inter"/>
-              </a:rPr>
-              <a:t>Illustrative, Gradient Maintained — demo data, not the client's holdings or managers</a:t>
-            </a:r>
-          </a:p>
-        </p:txBody>
-      </p:sp>
-      <p:sp>
-        <p:nvSpPr>
-          <p:cNvPr id="5" name="TextBox 4"/>
-          <p:cNvSpPr txBox="1"/>
-          <p:nvPr/>
-        </p:nvSpPr>
-        <p:spPr>
-          <a:xfrm>
             <a:off x="640080" y="566928"/>
             <a:ext cx="10058400" cy="530352"/>
           </a:xfrm>
@@ -14035,7 +13482,7 @@
       </p:sp>
       <p:sp>
         <p:nvSpPr>
-          <p:cNvPr id="6" name="Rectangle 5"/>
+          <p:cNvPr id="5" name="Rectangle 4"/>
           <p:cNvSpPr/>
           <p:nvPr/>
         </p:nvSpPr>
@@ -14084,7 +13531,7 @@
       </p:sp>
       <p:sp>
         <p:nvSpPr>
-          <p:cNvPr id="7" name="Rectangle 6"/>
+          <p:cNvPr id="6" name="Rectangle 5"/>
           <p:cNvSpPr/>
           <p:nvPr/>
         </p:nvSpPr>
@@ -14133,7 +13580,7 @@
       </p:sp>
       <p:sp>
         <p:nvSpPr>
-          <p:cNvPr id="8" name="TextBox 7"/>
+          <p:cNvPr id="7" name="TextBox 6"/>
           <p:cNvSpPr txBox="1"/>
           <p:nvPr/>
         </p:nvSpPr>
@@ -14175,7 +13622,7 @@
       </p:sp>
       <p:sp>
         <p:nvSpPr>
-          <p:cNvPr id="9" name="TextBox 8"/>
+          <p:cNvPr id="8" name="TextBox 7"/>
           <p:cNvSpPr txBox="1"/>
           <p:nvPr/>
         </p:nvSpPr>
@@ -14217,7 +13664,7 @@
       </p:sp>
       <p:graphicFrame>
         <p:nvGraphicFramePr>
-          <p:cNvPr id="10" name="Chart 9"/>
+          <p:cNvPr id="9" name="Chart 8"/>
           <p:cNvGraphicFramePr>
             <a:graphicFrameLocks noGrp="1"/>
           </p:cNvGraphicFramePr>
@@ -14235,7 +13682,7 @@
       </p:graphicFrame>
       <p:sp>
         <p:nvSpPr>
-          <p:cNvPr id="11" name="Rectangle 10"/>
+          <p:cNvPr id="10" name="Rectangle 9"/>
           <p:cNvSpPr/>
           <p:nvPr/>
         </p:nvSpPr>
@@ -14284,7 +13731,7 @@
       </p:sp>
       <p:sp>
         <p:nvSpPr>
-          <p:cNvPr id="12" name="TextBox 11"/>
+          <p:cNvPr id="11" name="TextBox 10"/>
           <p:cNvSpPr txBox="1"/>
           <p:nvPr/>
         </p:nvSpPr>
@@ -14326,7 +13773,7 @@
       </p:sp>
       <p:sp>
         <p:nvSpPr>
-          <p:cNvPr id="13" name="TextBox 12"/>
+          <p:cNvPr id="12" name="TextBox 11"/>
           <p:cNvSpPr txBox="1"/>
           <p:nvPr/>
         </p:nvSpPr>
@@ -14368,7 +13815,7 @@
       </p:sp>
       <p:sp>
         <p:nvSpPr>
-          <p:cNvPr id="14" name="TextBox 13"/>
+          <p:cNvPr id="13" name="TextBox 12"/>
           <p:cNvSpPr txBox="1"/>
           <p:nvPr/>
         </p:nvSpPr>
@@ -14484,7 +13931,7 @@
         <p:spPr>
           <a:xfrm>
             <a:off x="640080" y="329184"/>
-            <a:ext cx="5303520" cy="182880"/>
+            <a:ext cx="9875520" cy="182880"/>
           </a:xfrm>
           <a:prstGeom prst="rect">
             <a:avLst/>
@@ -14525,48 +13972,6 @@
         </p:nvSpPr>
         <p:spPr>
           <a:xfrm>
-            <a:off x="5897880" y="310896"/>
-            <a:ext cx="4800600" cy="256032"/>
-          </a:xfrm>
-          <a:prstGeom prst="rect">
-            <a:avLst/>
-          </a:prstGeom>
-          <a:noFill/>
-        </p:spPr>
-        <p:txBody>
-          <a:bodyPr wrap="none" lIns="9144" rIns="9144" tIns="9144" bIns="9144" anchor="t">
-            <a:spAutoFit/>
-          </a:bodyPr>
-          <a:lstStyle/>
-          <a:p>
-            <a:pPr algn="r">
-              <a:spcAft>
-                <a:spcPts val="0"/>
-              </a:spcAft>
-              <a:defRPr sz="680" b="1">
-                <a:solidFill>
-                  <a:srgbClr val="4F6B00"/>
-                </a:solidFill>
-                <a:latin typeface="Inter"/>
-              </a:defRPr>
-            </a:pPr>
-            <a:r>
-              <a:rPr>
-                <a:latin typeface="Inter"/>
-              </a:rPr>
-              <a:t>Illustrative, Gradient Maintained — demo data, not the client's holdings or managers</a:t>
-            </a:r>
-          </a:p>
-        </p:txBody>
-      </p:sp>
-      <p:sp>
-        <p:nvSpPr>
-          <p:cNvPr id="5" name="TextBox 4"/>
-          <p:cNvSpPr txBox="1"/>
-          <p:nvPr/>
-        </p:nvSpPr>
-        <p:spPr>
-          <a:xfrm>
             <a:off x="640080" y="566928"/>
             <a:ext cx="10058400" cy="530352"/>
           </a:xfrm>
@@ -14603,7 +14008,7 @@
       </p:sp>
       <p:sp>
         <p:nvSpPr>
-          <p:cNvPr id="6" name="Rectangle 5"/>
+          <p:cNvPr id="5" name="Rectangle 4"/>
           <p:cNvSpPr/>
           <p:nvPr/>
         </p:nvSpPr>
@@ -14652,7 +14057,7 @@
       </p:sp>
       <p:sp>
         <p:nvSpPr>
-          <p:cNvPr id="7" name="Rectangle 6"/>
+          <p:cNvPr id="6" name="Rectangle 5"/>
           <p:cNvSpPr/>
           <p:nvPr/>
         </p:nvSpPr>
@@ -14701,7 +14106,7 @@
       </p:sp>
       <p:sp>
         <p:nvSpPr>
-          <p:cNvPr id="8" name="TextBox 7"/>
+          <p:cNvPr id="7" name="TextBox 6"/>
           <p:cNvSpPr txBox="1"/>
           <p:nvPr/>
         </p:nvSpPr>
@@ -14743,7 +14148,7 @@
       </p:sp>
       <p:sp>
         <p:nvSpPr>
-          <p:cNvPr id="9" name="TextBox 8"/>
+          <p:cNvPr id="8" name="TextBox 7"/>
           <p:cNvSpPr txBox="1"/>
           <p:nvPr/>
         </p:nvSpPr>
@@ -14785,7 +14190,7 @@
       </p:sp>
       <p:graphicFrame>
         <p:nvGraphicFramePr>
-          <p:cNvPr id="10" name="Table 9"/>
+          <p:cNvPr id="9" name="Table 8"/>
           <p:cNvGraphicFramePr>
             <a:graphicFrameLocks noGrp="1"/>
           </p:cNvGraphicFramePr>
@@ -15771,7 +15176,7 @@
       </p:graphicFrame>
       <p:sp>
         <p:nvSpPr>
-          <p:cNvPr id="11" name="Rectangle 10"/>
+          <p:cNvPr id="10" name="Rectangle 9"/>
           <p:cNvSpPr/>
           <p:nvPr/>
         </p:nvSpPr>
@@ -15820,7 +15225,7 @@
       </p:sp>
       <p:sp>
         <p:nvSpPr>
-          <p:cNvPr id="12" name="Rectangle 11"/>
+          <p:cNvPr id="11" name="Rectangle 10"/>
           <p:cNvSpPr/>
           <p:nvPr/>
         </p:nvSpPr>
@@ -15869,7 +15274,7 @@
       </p:sp>
       <p:sp>
         <p:nvSpPr>
-          <p:cNvPr id="13" name="TextBox 12"/>
+          <p:cNvPr id="12" name="TextBox 11"/>
           <p:cNvSpPr txBox="1"/>
           <p:nvPr/>
         </p:nvSpPr>
@@ -15911,7 +15316,7 @@
       </p:sp>
       <p:sp>
         <p:nvSpPr>
-          <p:cNvPr id="14" name="TextBox 13"/>
+          <p:cNvPr id="13" name="TextBox 12"/>
           <p:cNvSpPr txBox="1"/>
           <p:nvPr/>
         </p:nvSpPr>
@@ -15953,7 +15358,7 @@
       </p:sp>
       <p:sp>
         <p:nvSpPr>
-          <p:cNvPr id="15" name="Rectangle 14"/>
+          <p:cNvPr id="14" name="Rectangle 13"/>
           <p:cNvSpPr/>
           <p:nvPr/>
         </p:nvSpPr>
@@ -16002,7 +15407,7 @@
       </p:sp>
       <p:sp>
         <p:nvSpPr>
-          <p:cNvPr id="16" name="TextBox 15"/>
+          <p:cNvPr id="15" name="TextBox 14"/>
           <p:cNvSpPr txBox="1"/>
           <p:nvPr/>
         </p:nvSpPr>
@@ -16044,7 +15449,7 @@
       </p:sp>
       <p:sp>
         <p:nvSpPr>
-          <p:cNvPr id="17" name="TextBox 16"/>
+          <p:cNvPr id="16" name="TextBox 15"/>
           <p:cNvSpPr txBox="1"/>
           <p:nvPr/>
         </p:nvSpPr>
@@ -16086,7 +15491,7 @@
       </p:sp>
       <p:sp>
         <p:nvSpPr>
-          <p:cNvPr id="18" name="TextBox 17"/>
+          <p:cNvPr id="17" name="TextBox 16"/>
           <p:cNvSpPr txBox="1"/>
           <p:nvPr/>
         </p:nvSpPr>
@@ -16202,7 +15607,7 @@
         <p:spPr>
           <a:xfrm>
             <a:off x="640080" y="329184"/>
-            <a:ext cx="5303520" cy="182880"/>
+            <a:ext cx="9875520" cy="182880"/>
           </a:xfrm>
           <a:prstGeom prst="rect">
             <a:avLst/>
@@ -16243,48 +15648,6 @@
         </p:nvSpPr>
         <p:spPr>
           <a:xfrm>
-            <a:off x="5897880" y="310896"/>
-            <a:ext cx="4800600" cy="256032"/>
-          </a:xfrm>
-          <a:prstGeom prst="rect">
-            <a:avLst/>
-          </a:prstGeom>
-          <a:noFill/>
-        </p:spPr>
-        <p:txBody>
-          <a:bodyPr wrap="none" lIns="9144" rIns="9144" tIns="9144" bIns="9144" anchor="t">
-            <a:spAutoFit/>
-          </a:bodyPr>
-          <a:lstStyle/>
-          <a:p>
-            <a:pPr algn="r">
-              <a:spcAft>
-                <a:spcPts val="0"/>
-              </a:spcAft>
-              <a:defRPr sz="680" b="1">
-                <a:solidFill>
-                  <a:srgbClr val="4F6B00"/>
-                </a:solidFill>
-                <a:latin typeface="Inter"/>
-              </a:defRPr>
-            </a:pPr>
-            <a:r>
-              <a:rPr>
-                <a:latin typeface="Inter"/>
-              </a:rPr>
-              <a:t>Illustrative, Gradient Maintained — demo data, not the client's holdings or managers</a:t>
-            </a:r>
-          </a:p>
-        </p:txBody>
-      </p:sp>
-      <p:sp>
-        <p:nvSpPr>
-          <p:cNvPr id="5" name="TextBox 4"/>
-          <p:cNvSpPr txBox="1"/>
-          <p:nvPr/>
-        </p:nvSpPr>
-        <p:spPr>
-          <a:xfrm>
             <a:off x="640080" y="566928"/>
             <a:ext cx="10058400" cy="530352"/>
           </a:xfrm>
@@ -16321,7 +15684,7 @@
       </p:sp>
       <p:sp>
         <p:nvSpPr>
-          <p:cNvPr id="6" name="Rectangle 5"/>
+          <p:cNvPr id="5" name="Rectangle 4"/>
           <p:cNvSpPr/>
           <p:nvPr/>
         </p:nvSpPr>
@@ -16370,7 +15733,7 @@
       </p:sp>
       <p:sp>
         <p:nvSpPr>
-          <p:cNvPr id="7" name="Rectangle 6"/>
+          <p:cNvPr id="6" name="Rectangle 5"/>
           <p:cNvSpPr/>
           <p:nvPr/>
         </p:nvSpPr>
@@ -16419,7 +15782,7 @@
       </p:sp>
       <p:sp>
         <p:nvSpPr>
-          <p:cNvPr id="8" name="TextBox 7"/>
+          <p:cNvPr id="7" name="TextBox 6"/>
           <p:cNvSpPr txBox="1"/>
           <p:nvPr/>
         </p:nvSpPr>
@@ -16461,7 +15824,7 @@
       </p:sp>
       <p:sp>
         <p:nvSpPr>
-          <p:cNvPr id="9" name="TextBox 8"/>
+          <p:cNvPr id="8" name="TextBox 7"/>
           <p:cNvSpPr txBox="1"/>
           <p:nvPr/>
         </p:nvSpPr>
@@ -16503,7 +15866,7 @@
       </p:sp>
       <p:graphicFrame>
         <p:nvGraphicFramePr>
-          <p:cNvPr id="10" name="Table 9"/>
+          <p:cNvPr id="9" name="Table 8"/>
           <p:cNvGraphicFramePr>
             <a:graphicFrameLocks noGrp="1"/>
           </p:cNvGraphicFramePr>
@@ -17025,7 +16388,7 @@
       </p:graphicFrame>
       <p:sp>
         <p:nvSpPr>
-          <p:cNvPr id="11" name="Rectangle 10"/>
+          <p:cNvPr id="10" name="Rectangle 9"/>
           <p:cNvSpPr/>
           <p:nvPr/>
         </p:nvSpPr>
@@ -17074,7 +16437,7 @@
       </p:sp>
       <p:sp>
         <p:nvSpPr>
-          <p:cNvPr id="12" name="Rectangle 11"/>
+          <p:cNvPr id="11" name="Rectangle 10"/>
           <p:cNvSpPr/>
           <p:nvPr/>
         </p:nvSpPr>
@@ -17123,7 +16486,7 @@
       </p:sp>
       <p:sp>
         <p:nvSpPr>
-          <p:cNvPr id="13" name="TextBox 12"/>
+          <p:cNvPr id="12" name="TextBox 11"/>
           <p:cNvSpPr txBox="1"/>
           <p:nvPr/>
         </p:nvSpPr>
@@ -17165,7 +16528,7 @@
       </p:sp>
       <p:sp>
         <p:nvSpPr>
-          <p:cNvPr id="14" name="TextBox 13"/>
+          <p:cNvPr id="13" name="TextBox 12"/>
           <p:cNvSpPr txBox="1"/>
           <p:nvPr/>
         </p:nvSpPr>
@@ -17207,7 +16570,7 @@
       </p:sp>
       <p:sp>
         <p:nvSpPr>
-          <p:cNvPr id="15" name="Rectangle 14"/>
+          <p:cNvPr id="14" name="Rectangle 13"/>
           <p:cNvSpPr/>
           <p:nvPr/>
         </p:nvSpPr>
@@ -17256,7 +16619,7 @@
       </p:sp>
       <p:sp>
         <p:nvSpPr>
-          <p:cNvPr id="16" name="TextBox 15"/>
+          <p:cNvPr id="15" name="TextBox 14"/>
           <p:cNvSpPr txBox="1"/>
           <p:nvPr/>
         </p:nvSpPr>
@@ -17298,7 +16661,7 @@
       </p:sp>
       <p:sp>
         <p:nvSpPr>
-          <p:cNvPr id="17" name="TextBox 16"/>
+          <p:cNvPr id="16" name="TextBox 15"/>
           <p:cNvSpPr txBox="1"/>
           <p:nvPr/>
         </p:nvSpPr>
@@ -17340,7 +16703,7 @@
       </p:sp>
       <p:sp>
         <p:nvSpPr>
-          <p:cNvPr id="18" name="TextBox 17"/>
+          <p:cNvPr id="17" name="TextBox 16"/>
           <p:cNvSpPr txBox="1"/>
           <p:nvPr/>
         </p:nvSpPr>
@@ -17456,7 +16819,7 @@
         <p:spPr>
           <a:xfrm>
             <a:off x="640080" y="329184"/>
-            <a:ext cx="5303520" cy="182880"/>
+            <a:ext cx="9875520" cy="182880"/>
           </a:xfrm>
           <a:prstGeom prst="rect">
             <a:avLst/>
@@ -17497,48 +16860,6 @@
         </p:nvSpPr>
         <p:spPr>
           <a:xfrm>
-            <a:off x="5897880" y="310896"/>
-            <a:ext cx="4800600" cy="256032"/>
-          </a:xfrm>
-          <a:prstGeom prst="rect">
-            <a:avLst/>
-          </a:prstGeom>
-          <a:noFill/>
-        </p:spPr>
-        <p:txBody>
-          <a:bodyPr wrap="none" lIns="9144" rIns="9144" tIns="9144" bIns="9144" anchor="t">
-            <a:spAutoFit/>
-          </a:bodyPr>
-          <a:lstStyle/>
-          <a:p>
-            <a:pPr algn="r">
-              <a:spcAft>
-                <a:spcPts val="0"/>
-              </a:spcAft>
-              <a:defRPr sz="680" b="1">
-                <a:solidFill>
-                  <a:srgbClr val="4F6B00"/>
-                </a:solidFill>
-                <a:latin typeface="Inter"/>
-              </a:defRPr>
-            </a:pPr>
-            <a:r>
-              <a:rPr>
-                <a:latin typeface="Inter"/>
-              </a:rPr>
-              <a:t>Illustrative, Gradient Maintained — demo data, not the client's holdings or managers</a:t>
-            </a:r>
-          </a:p>
-        </p:txBody>
-      </p:sp>
-      <p:sp>
-        <p:nvSpPr>
-          <p:cNvPr id="5" name="TextBox 4"/>
-          <p:cNvSpPr txBox="1"/>
-          <p:nvPr/>
-        </p:nvSpPr>
-        <p:spPr>
-          <a:xfrm>
             <a:off x="640080" y="566928"/>
             <a:ext cx="10058400" cy="530352"/>
           </a:xfrm>
@@ -17575,7 +16896,7 @@
       </p:sp>
       <p:sp>
         <p:nvSpPr>
-          <p:cNvPr id="6" name="Rectangle 5"/>
+          <p:cNvPr id="5" name="Rectangle 4"/>
           <p:cNvSpPr/>
           <p:nvPr/>
         </p:nvSpPr>
@@ -17624,7 +16945,7 @@
       </p:sp>
       <p:sp>
         <p:nvSpPr>
-          <p:cNvPr id="7" name="Rectangle 6"/>
+          <p:cNvPr id="6" name="Rectangle 5"/>
           <p:cNvSpPr/>
           <p:nvPr/>
         </p:nvSpPr>
@@ -17673,7 +16994,7 @@
       </p:sp>
       <p:sp>
         <p:nvSpPr>
-          <p:cNvPr id="8" name="TextBox 7"/>
+          <p:cNvPr id="7" name="TextBox 6"/>
           <p:cNvSpPr txBox="1"/>
           <p:nvPr/>
         </p:nvSpPr>
@@ -17715,7 +17036,7 @@
       </p:sp>
       <p:sp>
         <p:nvSpPr>
-          <p:cNvPr id="9" name="Rectangle 8"/>
+          <p:cNvPr id="8" name="Rectangle 7"/>
           <p:cNvSpPr/>
           <p:nvPr/>
         </p:nvSpPr>
@@ -17764,7 +17085,7 @@
       </p:sp>
       <p:sp>
         <p:nvSpPr>
-          <p:cNvPr id="10" name="Rectangle 9"/>
+          <p:cNvPr id="9" name="Rectangle 8"/>
           <p:cNvSpPr/>
           <p:nvPr/>
         </p:nvSpPr>
@@ -17813,7 +17134,7 @@
       </p:sp>
       <p:sp>
         <p:nvSpPr>
-          <p:cNvPr id="11" name="TextBox 10"/>
+          <p:cNvPr id="10" name="TextBox 9"/>
           <p:cNvSpPr txBox="1"/>
           <p:nvPr/>
         </p:nvSpPr>
@@ -17855,7 +17176,7 @@
       </p:sp>
       <p:sp>
         <p:nvSpPr>
-          <p:cNvPr id="12" name="TextBox 11"/>
+          <p:cNvPr id="11" name="TextBox 10"/>
           <p:cNvSpPr txBox="1"/>
           <p:nvPr/>
         </p:nvSpPr>
@@ -17897,7 +17218,7 @@
       </p:sp>
       <p:sp>
         <p:nvSpPr>
-          <p:cNvPr id="13" name="TextBox 12"/>
+          <p:cNvPr id="12" name="TextBox 11"/>
           <p:cNvSpPr txBox="1"/>
           <p:nvPr/>
         </p:nvSpPr>
@@ -17939,7 +17260,7 @@
       </p:sp>
       <p:sp>
         <p:nvSpPr>
-          <p:cNvPr id="14" name="Rectangle 13"/>
+          <p:cNvPr id="13" name="Rectangle 12"/>
           <p:cNvSpPr/>
           <p:nvPr/>
         </p:nvSpPr>
@@ -17988,7 +17309,7 @@
       </p:sp>
       <p:sp>
         <p:nvSpPr>
-          <p:cNvPr id="15" name="Rectangle 14"/>
+          <p:cNvPr id="14" name="Rectangle 13"/>
           <p:cNvSpPr/>
           <p:nvPr/>
         </p:nvSpPr>
@@ -18037,7 +17358,7 @@
       </p:sp>
       <p:sp>
         <p:nvSpPr>
-          <p:cNvPr id="16" name="TextBox 15"/>
+          <p:cNvPr id="15" name="TextBox 14"/>
           <p:cNvSpPr txBox="1"/>
           <p:nvPr/>
         </p:nvSpPr>
@@ -18079,7 +17400,7 @@
       </p:sp>
       <p:sp>
         <p:nvSpPr>
-          <p:cNvPr id="17" name="TextBox 16"/>
+          <p:cNvPr id="16" name="TextBox 15"/>
           <p:cNvSpPr txBox="1"/>
           <p:nvPr/>
         </p:nvSpPr>
@@ -18121,7 +17442,7 @@
       </p:sp>
       <p:sp>
         <p:nvSpPr>
-          <p:cNvPr id="18" name="TextBox 17"/>
+          <p:cNvPr id="17" name="TextBox 16"/>
           <p:cNvSpPr txBox="1"/>
           <p:nvPr/>
         </p:nvSpPr>
@@ -18163,7 +17484,7 @@
       </p:sp>
       <p:sp>
         <p:nvSpPr>
-          <p:cNvPr id="19" name="Rectangle 18"/>
+          <p:cNvPr id="18" name="Rectangle 17"/>
           <p:cNvSpPr/>
           <p:nvPr/>
         </p:nvSpPr>
@@ -18212,7 +17533,7 @@
       </p:sp>
       <p:sp>
         <p:nvSpPr>
-          <p:cNvPr id="20" name="Rectangle 19"/>
+          <p:cNvPr id="19" name="Rectangle 18"/>
           <p:cNvSpPr/>
           <p:nvPr/>
         </p:nvSpPr>
@@ -18261,7 +17582,7 @@
       </p:sp>
       <p:sp>
         <p:nvSpPr>
-          <p:cNvPr id="21" name="TextBox 20"/>
+          <p:cNvPr id="20" name="TextBox 19"/>
           <p:cNvSpPr txBox="1"/>
           <p:nvPr/>
         </p:nvSpPr>
@@ -18303,7 +17624,7 @@
       </p:sp>
       <p:sp>
         <p:nvSpPr>
-          <p:cNvPr id="22" name="TextBox 21"/>
+          <p:cNvPr id="21" name="TextBox 20"/>
           <p:cNvSpPr txBox="1"/>
           <p:nvPr/>
         </p:nvSpPr>
@@ -18345,7 +17666,7 @@
       </p:sp>
       <p:sp>
         <p:nvSpPr>
-          <p:cNvPr id="23" name="TextBox 22"/>
+          <p:cNvPr id="22" name="TextBox 21"/>
           <p:cNvSpPr txBox="1"/>
           <p:nvPr/>
         </p:nvSpPr>
@@ -18387,7 +17708,7 @@
       </p:sp>
       <p:sp>
         <p:nvSpPr>
-          <p:cNvPr id="24" name="Rectangle 23"/>
+          <p:cNvPr id="23" name="Rectangle 22"/>
           <p:cNvSpPr/>
           <p:nvPr/>
         </p:nvSpPr>
@@ -18436,7 +17757,7 @@
       </p:sp>
       <p:sp>
         <p:nvSpPr>
-          <p:cNvPr id="25" name="Rectangle 24"/>
+          <p:cNvPr id="24" name="Rectangle 23"/>
           <p:cNvSpPr/>
           <p:nvPr/>
         </p:nvSpPr>
@@ -18485,7 +17806,7 @@
       </p:sp>
       <p:sp>
         <p:nvSpPr>
-          <p:cNvPr id="26" name="TextBox 25"/>
+          <p:cNvPr id="25" name="TextBox 24"/>
           <p:cNvSpPr txBox="1"/>
           <p:nvPr/>
         </p:nvSpPr>
@@ -18527,7 +17848,7 @@
       </p:sp>
       <p:sp>
         <p:nvSpPr>
-          <p:cNvPr id="27" name="TextBox 26"/>
+          <p:cNvPr id="26" name="TextBox 25"/>
           <p:cNvSpPr txBox="1"/>
           <p:nvPr/>
         </p:nvSpPr>
@@ -18569,7 +17890,7 @@
       </p:sp>
       <p:sp>
         <p:nvSpPr>
-          <p:cNvPr id="28" name="TextBox 27"/>
+          <p:cNvPr id="27" name="TextBox 26"/>
           <p:cNvSpPr txBox="1"/>
           <p:nvPr/>
         </p:nvSpPr>
@@ -18611,7 +17932,7 @@
       </p:sp>
       <p:sp>
         <p:nvSpPr>
-          <p:cNvPr id="29" name="Rectangle 28"/>
+          <p:cNvPr id="28" name="Rectangle 27"/>
           <p:cNvSpPr/>
           <p:nvPr/>
         </p:nvSpPr>
@@ -18660,7 +17981,7 @@
       </p:sp>
       <p:sp>
         <p:nvSpPr>
-          <p:cNvPr id="30" name="TextBox 29"/>
+          <p:cNvPr id="29" name="TextBox 28"/>
           <p:cNvSpPr txBox="1"/>
           <p:nvPr/>
         </p:nvSpPr>
@@ -18702,7 +18023,7 @@
       </p:sp>
       <p:sp>
         <p:nvSpPr>
-          <p:cNvPr id="31" name="TextBox 30"/>
+          <p:cNvPr id="30" name="TextBox 29"/>
           <p:cNvSpPr txBox="1"/>
           <p:nvPr/>
         </p:nvSpPr>
@@ -18744,7 +18065,7 @@
       </p:sp>
       <p:sp>
         <p:nvSpPr>
-          <p:cNvPr id="32" name="Rectangle 31"/>
+          <p:cNvPr id="31" name="Rectangle 30"/>
           <p:cNvSpPr/>
           <p:nvPr/>
         </p:nvSpPr>
@@ -18793,7 +18114,7 @@
       </p:sp>
       <p:sp>
         <p:nvSpPr>
-          <p:cNvPr id="33" name="Rectangle 32"/>
+          <p:cNvPr id="32" name="Rectangle 31"/>
           <p:cNvSpPr/>
           <p:nvPr/>
         </p:nvSpPr>
@@ -18842,7 +18163,7 @@
       </p:sp>
       <p:sp>
         <p:nvSpPr>
-          <p:cNvPr id="34" name="TextBox 33"/>
+          <p:cNvPr id="33" name="TextBox 32"/>
           <p:cNvSpPr txBox="1"/>
           <p:nvPr/>
         </p:nvSpPr>
@@ -18884,7 +18205,7 @@
       </p:sp>
       <p:sp>
         <p:nvSpPr>
-          <p:cNvPr id="35" name="TextBox 34"/>
+          <p:cNvPr id="34" name="TextBox 33"/>
           <p:cNvSpPr txBox="1"/>
           <p:nvPr/>
         </p:nvSpPr>
@@ -18926,7 +18247,7 @@
       </p:sp>
       <p:sp>
         <p:nvSpPr>
-          <p:cNvPr id="36" name="Rectangle 35"/>
+          <p:cNvPr id="35" name="Rectangle 34"/>
           <p:cNvSpPr/>
           <p:nvPr/>
         </p:nvSpPr>
@@ -18975,7 +18296,7 @@
       </p:sp>
       <p:sp>
         <p:nvSpPr>
-          <p:cNvPr id="37" name="Rectangle 36"/>
+          <p:cNvPr id="36" name="Rectangle 35"/>
           <p:cNvSpPr/>
           <p:nvPr/>
         </p:nvSpPr>
@@ -19024,7 +18345,7 @@
       </p:sp>
       <p:sp>
         <p:nvSpPr>
-          <p:cNvPr id="38" name="TextBox 37"/>
+          <p:cNvPr id="37" name="TextBox 36"/>
           <p:cNvSpPr txBox="1"/>
           <p:nvPr/>
         </p:nvSpPr>
@@ -19066,7 +18387,7 @@
       </p:sp>
       <p:sp>
         <p:nvSpPr>
-          <p:cNvPr id="39" name="TextBox 38"/>
+          <p:cNvPr id="38" name="TextBox 37"/>
           <p:cNvSpPr txBox="1"/>
           <p:nvPr/>
         </p:nvSpPr>
@@ -19108,7 +18429,7 @@
       </p:sp>
       <p:sp>
         <p:nvSpPr>
-          <p:cNvPr id="40" name="Rectangle 39"/>
+          <p:cNvPr id="39" name="Rectangle 38"/>
           <p:cNvSpPr/>
           <p:nvPr/>
         </p:nvSpPr>
@@ -19157,7 +18478,7 @@
       </p:sp>
       <p:sp>
         <p:nvSpPr>
-          <p:cNvPr id="41" name="TextBox 40"/>
+          <p:cNvPr id="40" name="TextBox 39"/>
           <p:cNvSpPr txBox="1"/>
           <p:nvPr/>
         </p:nvSpPr>
@@ -19199,7 +18520,7 @@
       </p:sp>
       <p:sp>
         <p:nvSpPr>
-          <p:cNvPr id="42" name="TextBox 41"/>
+          <p:cNvPr id="41" name="TextBox 40"/>
           <p:cNvSpPr txBox="1"/>
           <p:nvPr/>
         </p:nvSpPr>
@@ -19241,7 +18562,7 @@
       </p:sp>
       <p:sp>
         <p:nvSpPr>
-          <p:cNvPr id="43" name="TextBox 42"/>
+          <p:cNvPr id="42" name="TextBox 41"/>
           <p:cNvSpPr txBox="1"/>
           <p:nvPr/>
         </p:nvSpPr>
@@ -19357,7 +18678,7 @@
         <p:spPr>
           <a:xfrm>
             <a:off x="640080" y="329184"/>
-            <a:ext cx="5303520" cy="182880"/>
+            <a:ext cx="9875520" cy="182880"/>
           </a:xfrm>
           <a:prstGeom prst="rect">
             <a:avLst/>
@@ -19398,48 +18719,6 @@
         </p:nvSpPr>
         <p:spPr>
           <a:xfrm>
-            <a:off x="5897880" y="310896"/>
-            <a:ext cx="4800600" cy="256032"/>
-          </a:xfrm>
-          <a:prstGeom prst="rect">
-            <a:avLst/>
-          </a:prstGeom>
-          <a:noFill/>
-        </p:spPr>
-        <p:txBody>
-          <a:bodyPr wrap="none" lIns="9144" rIns="9144" tIns="9144" bIns="9144" anchor="t">
-            <a:spAutoFit/>
-          </a:bodyPr>
-          <a:lstStyle/>
-          <a:p>
-            <a:pPr algn="r">
-              <a:spcAft>
-                <a:spcPts val="0"/>
-              </a:spcAft>
-              <a:defRPr sz="680" b="1">
-                <a:solidFill>
-                  <a:srgbClr val="4F6B00"/>
-                </a:solidFill>
-                <a:latin typeface="Inter"/>
-              </a:defRPr>
-            </a:pPr>
-            <a:r>
-              <a:rPr>
-                <a:latin typeface="Inter"/>
-              </a:rPr>
-              <a:t>Illustrative, Gradient Maintained — demo data, not the client's holdings or managers</a:t>
-            </a:r>
-          </a:p>
-        </p:txBody>
-      </p:sp>
-      <p:sp>
-        <p:nvSpPr>
-          <p:cNvPr id="5" name="TextBox 4"/>
-          <p:cNvSpPr txBox="1"/>
-          <p:nvPr/>
-        </p:nvSpPr>
-        <p:spPr>
-          <a:xfrm>
             <a:off x="640080" y="566928"/>
             <a:ext cx="10058400" cy="530352"/>
           </a:xfrm>
@@ -19476,7 +18755,7 @@
       </p:sp>
       <p:sp>
         <p:nvSpPr>
-          <p:cNvPr id="6" name="Rectangle 5"/>
+          <p:cNvPr id="5" name="Rectangle 4"/>
           <p:cNvSpPr/>
           <p:nvPr/>
         </p:nvSpPr>
@@ -19525,7 +18804,7 @@
       </p:sp>
       <p:sp>
         <p:nvSpPr>
-          <p:cNvPr id="7" name="Rectangle 6"/>
+          <p:cNvPr id="6" name="Rectangle 5"/>
           <p:cNvSpPr/>
           <p:nvPr/>
         </p:nvSpPr>
@@ -19574,7 +18853,7 @@
       </p:sp>
       <p:sp>
         <p:nvSpPr>
-          <p:cNvPr id="8" name="TextBox 7"/>
+          <p:cNvPr id="7" name="TextBox 6"/>
           <p:cNvSpPr txBox="1"/>
           <p:nvPr/>
         </p:nvSpPr>
@@ -19616,7 +18895,7 @@
       </p:sp>
       <p:sp>
         <p:nvSpPr>
-          <p:cNvPr id="9" name="TextBox 8"/>
+          <p:cNvPr id="8" name="TextBox 7"/>
           <p:cNvSpPr txBox="1"/>
           <p:nvPr/>
         </p:nvSpPr>
@@ -19658,7 +18937,7 @@
       </p:sp>
       <p:sp>
         <p:nvSpPr>
-          <p:cNvPr id="10" name="TextBox 9"/>
+          <p:cNvPr id="9" name="TextBox 8"/>
           <p:cNvSpPr txBox="1"/>
           <p:nvPr/>
         </p:nvSpPr>
@@ -19757,7 +19036,7 @@
       </p:sp>
       <p:sp>
         <p:nvSpPr>
-          <p:cNvPr id="11" name="TextBox 10"/>
+          <p:cNvPr id="10" name="TextBox 9"/>
           <p:cNvSpPr txBox="1"/>
           <p:nvPr/>
         </p:nvSpPr>
@@ -19884,7 +19163,7 @@
       </p:sp>
       <p:sp>
         <p:nvSpPr>
-          <p:cNvPr id="12" name="Rectangle 11"/>
+          <p:cNvPr id="11" name="Rectangle 10"/>
           <p:cNvSpPr/>
           <p:nvPr/>
         </p:nvSpPr>
@@ -19933,7 +19212,7 @@
       </p:sp>
       <p:sp>
         <p:nvSpPr>
-          <p:cNvPr id="13" name="TextBox 12"/>
+          <p:cNvPr id="12" name="TextBox 11"/>
           <p:cNvSpPr txBox="1"/>
           <p:nvPr/>
         </p:nvSpPr>
@@ -19975,7 +19254,7 @@
       </p:sp>
       <p:sp>
         <p:nvSpPr>
-          <p:cNvPr id="14" name="TextBox 13"/>
+          <p:cNvPr id="13" name="TextBox 12"/>
           <p:cNvSpPr txBox="1"/>
           <p:nvPr/>
         </p:nvSpPr>
@@ -20017,7 +19296,7 @@
       </p:sp>
       <p:sp>
         <p:nvSpPr>
-          <p:cNvPr id="15" name="TextBox 14"/>
+          <p:cNvPr id="14" name="TextBox 13"/>
           <p:cNvSpPr txBox="1"/>
           <p:nvPr/>
         </p:nvSpPr>
@@ -20133,7 +19412,7 @@
         <p:spPr>
           <a:xfrm>
             <a:off x="640080" y="329184"/>
-            <a:ext cx="5303520" cy="182880"/>
+            <a:ext cx="9875520" cy="182880"/>
           </a:xfrm>
           <a:prstGeom prst="rect">
             <a:avLst/>
@@ -20174,48 +19453,6 @@
         </p:nvSpPr>
         <p:spPr>
           <a:xfrm>
-            <a:off x="5897880" y="310896"/>
-            <a:ext cx="4800600" cy="256032"/>
-          </a:xfrm>
-          <a:prstGeom prst="rect">
-            <a:avLst/>
-          </a:prstGeom>
-          <a:noFill/>
-        </p:spPr>
-        <p:txBody>
-          <a:bodyPr wrap="none" lIns="9144" rIns="9144" tIns="9144" bIns="9144" anchor="t">
-            <a:spAutoFit/>
-          </a:bodyPr>
-          <a:lstStyle/>
-          <a:p>
-            <a:pPr algn="r">
-              <a:spcAft>
-                <a:spcPts val="0"/>
-              </a:spcAft>
-              <a:defRPr sz="680" b="1">
-                <a:solidFill>
-                  <a:srgbClr val="4F6B00"/>
-                </a:solidFill>
-                <a:latin typeface="Inter"/>
-              </a:defRPr>
-            </a:pPr>
-            <a:r>
-              <a:rPr>
-                <a:latin typeface="Inter"/>
-              </a:rPr>
-              <a:t>Illustrative, Gradient Maintained — demo data, not the client's holdings or managers</a:t>
-            </a:r>
-          </a:p>
-        </p:txBody>
-      </p:sp>
-      <p:sp>
-        <p:nvSpPr>
-          <p:cNvPr id="5" name="TextBox 4"/>
-          <p:cNvSpPr txBox="1"/>
-          <p:nvPr/>
-        </p:nvSpPr>
-        <p:spPr>
-          <a:xfrm>
             <a:off x="640080" y="566928"/>
             <a:ext cx="10058400" cy="530352"/>
           </a:xfrm>
@@ -20252,7 +19489,7 @@
       </p:sp>
       <p:sp>
         <p:nvSpPr>
-          <p:cNvPr id="6" name="Rectangle 5"/>
+          <p:cNvPr id="5" name="Rectangle 4"/>
           <p:cNvSpPr/>
           <p:nvPr/>
         </p:nvSpPr>
@@ -20301,7 +19538,7 @@
       </p:sp>
       <p:sp>
         <p:nvSpPr>
-          <p:cNvPr id="7" name="Rectangle 6"/>
+          <p:cNvPr id="6" name="Rectangle 5"/>
           <p:cNvSpPr/>
           <p:nvPr/>
         </p:nvSpPr>
@@ -20350,7 +19587,7 @@
       </p:sp>
       <p:sp>
         <p:nvSpPr>
-          <p:cNvPr id="8" name="TextBox 7"/>
+          <p:cNvPr id="7" name="TextBox 6"/>
           <p:cNvSpPr txBox="1"/>
           <p:nvPr/>
         </p:nvSpPr>
@@ -20392,7 +19629,7 @@
       </p:sp>
       <p:sp>
         <p:nvSpPr>
-          <p:cNvPr id="9" name="TextBox 8"/>
+          <p:cNvPr id="8" name="TextBox 7"/>
           <p:cNvSpPr txBox="1"/>
           <p:nvPr/>
         </p:nvSpPr>
@@ -20434,7 +19671,7 @@
       </p:sp>
       <p:graphicFrame>
         <p:nvGraphicFramePr>
-          <p:cNvPr id="10" name="Table 9"/>
+          <p:cNvPr id="9" name="Table 8"/>
           <p:cNvGraphicFramePr>
             <a:graphicFrameLocks noGrp="1"/>
           </p:cNvGraphicFramePr>
@@ -21374,7 +20611,7 @@
       </p:graphicFrame>
       <p:sp>
         <p:nvSpPr>
-          <p:cNvPr id="11" name="TextBox 10"/>
+          <p:cNvPr id="10" name="TextBox 9"/>
           <p:cNvSpPr txBox="1"/>
           <p:nvPr/>
         </p:nvSpPr>
@@ -21416,7 +20653,7 @@
       </p:sp>
       <p:sp>
         <p:nvSpPr>
-          <p:cNvPr id="12" name="Rectangle 11"/>
+          <p:cNvPr id="11" name="Rectangle 10"/>
           <p:cNvSpPr/>
           <p:nvPr/>
         </p:nvSpPr>
@@ -21465,7 +20702,7 @@
       </p:sp>
       <p:sp>
         <p:nvSpPr>
-          <p:cNvPr id="13" name="TextBox 12"/>
+          <p:cNvPr id="12" name="TextBox 11"/>
           <p:cNvSpPr txBox="1"/>
           <p:nvPr/>
         </p:nvSpPr>
@@ -21507,7 +20744,7 @@
       </p:sp>
       <p:sp>
         <p:nvSpPr>
-          <p:cNvPr id="14" name="TextBox 13"/>
+          <p:cNvPr id="13" name="TextBox 12"/>
           <p:cNvSpPr txBox="1"/>
           <p:nvPr/>
         </p:nvSpPr>
@@ -21549,7 +20786,7 @@
       </p:sp>
       <p:sp>
         <p:nvSpPr>
-          <p:cNvPr id="15" name="TextBox 14"/>
+          <p:cNvPr id="14" name="TextBox 13"/>
           <p:cNvSpPr txBox="1"/>
           <p:nvPr/>
         </p:nvSpPr>
@@ -21665,7 +20902,7 @@
         <p:spPr>
           <a:xfrm>
             <a:off x="640080" y="329184"/>
-            <a:ext cx="5303520" cy="182880"/>
+            <a:ext cx="9875520" cy="182880"/>
           </a:xfrm>
           <a:prstGeom prst="rect">
             <a:avLst/>
@@ -21706,48 +20943,6 @@
         </p:nvSpPr>
         <p:spPr>
           <a:xfrm>
-            <a:off x="5897880" y="310896"/>
-            <a:ext cx="4800600" cy="256032"/>
-          </a:xfrm>
-          <a:prstGeom prst="rect">
-            <a:avLst/>
-          </a:prstGeom>
-          <a:noFill/>
-        </p:spPr>
-        <p:txBody>
-          <a:bodyPr wrap="none" lIns="9144" rIns="9144" tIns="9144" bIns="9144" anchor="t">
-            <a:spAutoFit/>
-          </a:bodyPr>
-          <a:lstStyle/>
-          <a:p>
-            <a:pPr algn="r">
-              <a:spcAft>
-                <a:spcPts val="0"/>
-              </a:spcAft>
-              <a:defRPr sz="680" b="1">
-                <a:solidFill>
-                  <a:srgbClr val="4F6B00"/>
-                </a:solidFill>
-                <a:latin typeface="Inter"/>
-              </a:defRPr>
-            </a:pPr>
-            <a:r>
-              <a:rPr>
-                <a:latin typeface="Inter"/>
-              </a:rPr>
-              <a:t>Illustrative, Gradient Maintained — demo data, not the client's holdings or managers</a:t>
-            </a:r>
-          </a:p>
-        </p:txBody>
-      </p:sp>
-      <p:sp>
-        <p:nvSpPr>
-          <p:cNvPr id="5" name="TextBox 4"/>
-          <p:cNvSpPr txBox="1"/>
-          <p:nvPr/>
-        </p:nvSpPr>
-        <p:spPr>
-          <a:xfrm>
             <a:off x="640080" y="566928"/>
             <a:ext cx="10058400" cy="530352"/>
           </a:xfrm>
@@ -21784,7 +20979,7 @@
       </p:sp>
       <p:sp>
         <p:nvSpPr>
-          <p:cNvPr id="6" name="Rectangle 5"/>
+          <p:cNvPr id="5" name="Rectangle 4"/>
           <p:cNvSpPr/>
           <p:nvPr/>
         </p:nvSpPr>
@@ -21833,7 +21028,7 @@
       </p:sp>
       <p:sp>
         <p:nvSpPr>
-          <p:cNvPr id="7" name="Rectangle 6"/>
+          <p:cNvPr id="6" name="Rectangle 5"/>
           <p:cNvSpPr/>
           <p:nvPr/>
         </p:nvSpPr>
@@ -21882,7 +21077,7 @@
       </p:sp>
       <p:sp>
         <p:nvSpPr>
-          <p:cNvPr id="8" name="TextBox 7"/>
+          <p:cNvPr id="7" name="TextBox 6"/>
           <p:cNvSpPr txBox="1"/>
           <p:nvPr/>
         </p:nvSpPr>
@@ -21924,7 +21119,7 @@
       </p:sp>
       <p:sp>
         <p:nvSpPr>
-          <p:cNvPr id="9" name="TextBox 8"/>
+          <p:cNvPr id="8" name="TextBox 7"/>
           <p:cNvSpPr txBox="1"/>
           <p:nvPr/>
         </p:nvSpPr>
@@ -21966,7 +21161,7 @@
       </p:sp>
       <p:graphicFrame>
         <p:nvGraphicFramePr>
-          <p:cNvPr id="10" name="Table 9"/>
+          <p:cNvPr id="9" name="Table 8"/>
           <p:cNvGraphicFramePr>
             <a:graphicFrameLocks noGrp="1"/>
           </p:cNvGraphicFramePr>
@@ -21974,7 +21169,7 @@
         </p:nvGraphicFramePr>
         <p:xfrm>
           <a:off x="640080" y="1600200"/>
-          <a:ext cx="10908792" cy="4617720"/>
+          <a:ext cx="10908792" cy="2116836"/>
         </p:xfrm>
         <a:graphic>
           <a:graphicData uri="http://schemas.openxmlformats.org/drawingml/2006/table">
@@ -21984,16 +21179,12 @@
               </a:tblPr>
               <a:tblGrid>
                 <a:gridCol w="2011680"/>
-                <a:gridCol w="1112139"/>
-                <a:gridCol w="1112139"/>
-                <a:gridCol w="1112139"/>
-                <a:gridCol w="1112139"/>
-                <a:gridCol w="1112139"/>
-                <a:gridCol w="1112139"/>
-                <a:gridCol w="1112139"/>
-                <a:gridCol w="1112139"/>
+                <a:gridCol w="2224278"/>
+                <a:gridCol w="2224278"/>
+                <a:gridCol w="2224278"/>
+                <a:gridCol w="2224278"/>
               </a:tblGrid>
-              <a:tr h="769620">
+              <a:tr h="352806">
                 <a:tc>
                   <a:txBody>
                     <a:bodyPr/>
@@ -22065,7 +21256,7 @@
                         <a:rPr>
                           <a:latin typeface="Inter"/>
                         </a:rPr>
-                        <a:t>Basis</a:t>
+                        <a:t>Source</a:t>
                       </a:r>
                     </a:p>
                   </a:txBody>
@@ -22092,7 +21283,7 @@
                         <a:rPr>
                           <a:latin typeface="Inter"/>
                         </a:rPr>
-                        <a:t>Tool / view</a:t>
+                        <a:t>As of</a:t>
                       </a:r>
                     </a:p>
                   </a:txBody>
@@ -22119,7 +21310,7 @@
                         <a:rPr>
                           <a:latin typeface="Inter"/>
                         </a:rPr>
-                        <a:t>Key parameters</a:t>
+                        <a:t>Check</a:t>
                       </a:r>
                     </a:p>
                   </a:txBody>
@@ -22129,123 +21320,15 @@
                     </a:solidFill>
                   </a:tcPr>
                 </a:tc>
-                <a:tc>
-                  <a:txBody>
-                    <a:bodyPr/>
-                    <a:lstStyle/>
-                    <a:p>
-                      <a:pPr>
-                        <a:defRPr sz="750" b="1">
-                          <a:solidFill>
-                            <a:srgbClr val="FFFFFF"/>
-                          </a:solidFill>
-                          <a:latin typeface="Inter"/>
-                        </a:defRPr>
-                      </a:pPr>
-                      <a:r>
-                        <a:rPr>
-                          <a:latin typeface="Inter"/>
-                        </a:rPr>
-                        <a:t>As of</a:t>
-                      </a:r>
-                    </a:p>
-                  </a:txBody>
-                  <a:tcPr marL="54864" marR="54864" marT="27432" marB="27432" anchor="ctr">
-                    <a:solidFill>
-                      <a:srgbClr val="0D1117"/>
-                    </a:solidFill>
-                  </a:tcPr>
-                </a:tc>
-                <a:tc>
-                  <a:txBody>
-                    <a:bodyPr/>
-                    <a:lstStyle/>
-                    <a:p>
-                      <a:pPr>
-                        <a:defRPr sz="750" b="1">
-                          <a:solidFill>
-                            <a:srgbClr val="FFFFFF"/>
-                          </a:solidFill>
-                          <a:latin typeface="Inter"/>
-                        </a:defRPr>
-                      </a:pPr>
-                      <a:r>
-                        <a:rPr>
-                          <a:latin typeface="Inter"/>
-                        </a:rPr>
-                        <a:t>Data scope</a:t>
-                      </a:r>
-                    </a:p>
-                  </a:txBody>
-                  <a:tcPr marL="54864" marR="54864" marT="27432" marB="27432" anchor="ctr">
-                    <a:solidFill>
-                      <a:srgbClr val="0D1117"/>
-                    </a:solidFill>
-                  </a:tcPr>
-                </a:tc>
-                <a:tc>
-                  <a:txBody>
-                    <a:bodyPr/>
-                    <a:lstStyle/>
-                    <a:p>
-                      <a:pPr>
-                        <a:defRPr sz="750" b="1">
-                          <a:solidFill>
-                            <a:srgbClr val="FFFFFF"/>
-                          </a:solidFill>
-                          <a:latin typeface="Inter"/>
-                        </a:defRPr>
-                      </a:pPr>
-                      <a:r>
-                        <a:rPr>
-                          <a:latin typeface="Inter"/>
-                        </a:rPr>
-                        <a:t>Validation</a:t>
-                      </a:r>
-                    </a:p>
-                  </a:txBody>
-                  <a:tcPr marL="54864" marR="54864" marT="27432" marB="27432" anchor="ctr">
-                    <a:solidFill>
-                      <a:srgbClr val="0D1117"/>
-                    </a:solidFill>
-                  </a:tcPr>
-                </a:tc>
-                <a:tc>
-                  <a:txBody>
-                    <a:bodyPr/>
-                    <a:lstStyle/>
-                    <a:p>
-                      <a:pPr>
-                        <a:defRPr sz="750" b="1">
-                          <a:solidFill>
-                            <a:srgbClr val="FFFFFF"/>
-                          </a:solidFill>
-                          <a:latin typeface="Inter"/>
-                        </a:defRPr>
-                      </a:pPr>
-                      <a:r>
-                        <a:rPr>
-                          <a:latin typeface="Inter"/>
-                        </a:rPr>
-                        <a:t>Digest</a:t>
-                      </a:r>
-                    </a:p>
-                  </a:txBody>
-                  <a:tcPr marL="54864" marR="54864" marT="27432" marB="27432" anchor="ctr">
-                    <a:solidFill>
-                      <a:srgbClr val="0D1117"/>
-                    </a:solidFill>
-                  </a:tcPr>
-                </a:tc>
               </a:tr>
-              <a:tr h="769620">
-                <a:tc>
-                  <a:txBody>
-                    <a:bodyPr/>
-                    <a:lstStyle/>
-                    <a:p>
-                      <a:pPr>
-                        <a:defRPr sz="650" b="1">
+              <a:tr h="352806">
+                <a:tc>
+                  <a:txBody>
+                    <a:bodyPr/>
+                    <a:lstStyle/>
+                    <a:p>
+                      <a:pPr>
+                        <a:defRPr sz="720" b="1">
                           <a:solidFill>
                             <a:srgbClr val="0D1117"/>
                           </a:solidFill>
@@ -22272,7 +21355,7 @@
                     <a:lstStyle/>
                     <a:p>
                       <a:pPr>
-                        <a:defRPr sz="650" b="0">
+                        <a:defRPr sz="720" b="0">
                           <a:solidFill>
                             <a:srgbClr val="0D1117"/>
                           </a:solidFill>
@@ -22299,7 +21382,7 @@
                     <a:lstStyle/>
                     <a:p>
                       <a:pPr>
-                        <a:defRPr sz="650" b="0">
+                        <a:defRPr sz="720" b="0">
                           <a:solidFill>
                             <a:srgbClr val="0D1117"/>
                           </a:solidFill>
@@ -22310,7 +21393,7 @@
                         <a:rPr>
                           <a:latin typeface="Inter"/>
                         </a:rPr>
-                        <a:t>gradient_tool</a:t>
+                        <a:t>analyze_strategy_lab_compare</a:t>
                       </a:r>
                     </a:p>
                   </a:txBody>
@@ -22326,7 +21409,7 @@
                     <a:lstStyle/>
                     <a:p>
                       <a:pPr>
-                        <a:defRPr sz="650" b="0">
+                        <a:defRPr sz="720" b="0">
                           <a:solidFill>
                             <a:srgbClr val="0D1117"/>
                           </a:solidFill>
@@ -22337,6 +21420,527 @@
                         <a:rPr>
                           <a:latin typeface="Inter"/>
                         </a:rPr>
+                        <a:t>2025-12-31</a:t>
+                      </a:r>
+                    </a:p>
+                  </a:txBody>
+                  <a:tcPr marL="54864" marR="54864" marT="27432" marB="27432" anchor="ctr">
+                    <a:solidFill>
+                      <a:srgbClr val="FFFFFF"/>
+                    </a:solidFill>
+                  </a:tcPr>
+                </a:tc>
+                <a:tc>
+                  <a:txBody>
+                    <a:bodyPr/>
+                    <a:lstStyle/>
+                    <a:p>
+                      <a:pPr>
+                        <a:defRPr sz="720" b="1">
+                          <a:solidFill>
+                            <a:srgbClr val="C6F432"/>
+                          </a:solidFill>
+                          <a:latin typeface="Inter"/>
+                        </a:defRPr>
+                      </a:pPr>
+                      <a:r>
+                        <a:rPr>
+                          <a:latin typeface="Inter"/>
+                        </a:rPr>
+                        <a:t>● Passed</a:t>
+                      </a:r>
+                    </a:p>
+                  </a:txBody>
+                  <a:tcPr marL="54864" marR="54864" marT="27432" marB="27432" anchor="ctr">
+                    <a:solidFill>
+                      <a:srgbClr val="F5F7F9"/>
+                    </a:solidFill>
+                  </a:tcPr>
+                </a:tc>
+              </a:tr>
+              <a:tr h="352806">
+                <a:tc>
+                  <a:txBody>
+                    <a:bodyPr/>
+                    <a:lstStyle/>
+                    <a:p>
+                      <a:pPr>
+                        <a:defRPr sz="720" b="1">
+                          <a:solidFill>
+                            <a:srgbClr val="0D1117"/>
+                          </a:solidFill>
+                          <a:latin typeface="Inter"/>
+                        </a:defRPr>
+                      </a:pPr>
+                      <a:r>
+                        <a:rPr>
+                          <a:latin typeface="Inter"/>
+                        </a:rPr>
+                        <a:t>S2</a:t>
+                      </a:r>
+                    </a:p>
+                  </a:txBody>
+                  <a:tcPr marL="54864" marR="54864" marT="27432" marB="27432" anchor="ctr">
+                    <a:solidFill>
+                      <a:srgbClr val="F5F7F9"/>
+                    </a:solidFill>
+                  </a:tcPr>
+                </a:tc>
+                <a:tc>
+                  <a:txBody>
+                    <a:bodyPr/>
+                    <a:lstStyle/>
+                    <a:p>
+                      <a:pPr>
+                        <a:defRPr sz="720" b="0">
+                          <a:solidFill>
+                            <a:srgbClr val="0D1117"/>
+                          </a:solidFill>
+                          <a:latin typeface="Inter"/>
+                        </a:defRPr>
+                      </a:pPr>
+                      <a:r>
+                        <a:rPr>
+                          <a:latin typeface="Inter"/>
+                        </a:rPr>
+                        <a:t>Realized paths, rolling statistics, relative metrics, capture, and distribution</a:t>
+                      </a:r>
+                    </a:p>
+                  </a:txBody>
+                  <a:tcPr marL="54864" marR="54864" marT="27432" marB="27432" anchor="ctr">
+                    <a:solidFill>
+                      <a:srgbClr val="F5F7F9"/>
+                    </a:solidFill>
+                  </a:tcPr>
+                </a:tc>
+                <a:tc>
+                  <a:txBody>
+                    <a:bodyPr/>
+                    <a:lstStyle/>
+                    <a:p>
+                      <a:pPr>
+                        <a:defRPr sz="720" b="0">
+                          <a:solidFill>
+                            <a:srgbClr val="0D1117"/>
+                          </a:solidFill>
+                          <a:latin typeface="Inter"/>
+                        </a:defRPr>
+                      </a:pPr>
+                      <a:r>
+                        <a:rPr>
+                          <a:latin typeface="Inter"/>
+                        </a:rPr>
+                        <a:t>run_strategy_lab_relative_return</a:t>
+                      </a:r>
+                    </a:p>
+                  </a:txBody>
+                  <a:tcPr marL="54864" marR="54864" marT="27432" marB="27432" anchor="ctr">
+                    <a:solidFill>
+                      <a:srgbClr val="F5F7F9"/>
+                    </a:solidFill>
+                  </a:tcPr>
+                </a:tc>
+                <a:tc>
+                  <a:txBody>
+                    <a:bodyPr/>
+                    <a:lstStyle/>
+                    <a:p>
+                      <a:pPr>
+                        <a:defRPr sz="720" b="0">
+                          <a:solidFill>
+                            <a:srgbClr val="0D1117"/>
+                          </a:solidFill>
+                          <a:latin typeface="Inter"/>
+                        </a:defRPr>
+                      </a:pPr>
+                      <a:r>
+                        <a:rPr>
+                          <a:latin typeface="Inter"/>
+                        </a:rPr>
+                        <a:t>2025-12-31</a:t>
+                      </a:r>
+                    </a:p>
+                  </a:txBody>
+                  <a:tcPr marL="54864" marR="54864" marT="27432" marB="27432" anchor="ctr">
+                    <a:solidFill>
+                      <a:srgbClr val="F5F7F9"/>
+                    </a:solidFill>
+                  </a:tcPr>
+                </a:tc>
+                <a:tc>
+                  <a:txBody>
+                    <a:bodyPr/>
+                    <a:lstStyle/>
+                    <a:p>
+                      <a:pPr>
+                        <a:defRPr sz="720" b="1">
+                          <a:solidFill>
+                            <a:srgbClr val="C6F432"/>
+                          </a:solidFill>
+                          <a:latin typeface="Inter"/>
+                        </a:defRPr>
+                      </a:pPr>
+                      <a:r>
+                        <a:rPr>
+                          <a:latin typeface="Inter"/>
+                        </a:rPr>
+                        <a:t>● Passed</a:t>
+                      </a:r>
+                    </a:p>
+                  </a:txBody>
+                  <a:tcPr marL="54864" marR="54864" marT="27432" marB="27432" anchor="ctr">
+                    <a:solidFill>
+                      <a:srgbClr val="F5F7F9"/>
+                    </a:solidFill>
+                  </a:tcPr>
+                </a:tc>
+              </a:tr>
+              <a:tr h="352806">
+                <a:tc>
+                  <a:txBody>
+                    <a:bodyPr/>
+                    <a:lstStyle/>
+                    <a:p>
+                      <a:pPr>
+                        <a:defRPr sz="720" b="1">
+                          <a:solidFill>
+                            <a:srgbClr val="0D1117"/>
+                          </a:solidFill>
+                          <a:latin typeface="Inter"/>
+                        </a:defRPr>
+                      </a:pPr>
+                      <a:r>
+                        <a:rPr>
+                          <a:latin typeface="Inter"/>
+                        </a:rPr>
+                        <a:t>S3</a:t>
+                      </a:r>
+                    </a:p>
+                  </a:txBody>
+                  <a:tcPr marL="54864" marR="54864" marT="27432" marB="27432" anchor="ctr">
+                    <a:solidFill>
+                      <a:srgbClr val="FFFFFF"/>
+                    </a:solidFill>
+                  </a:tcPr>
+                </a:tc>
+                <a:tc>
+                  <a:txBody>
+                    <a:bodyPr/>
+                    <a:lstStyle/>
+                    <a:p>
+                      <a:pPr>
+                        <a:defRPr sz="720" b="0">
+                          <a:solidFill>
+                            <a:srgbClr val="0D1117"/>
+                          </a:solidFill>
+                          <a:latin typeface="Inter"/>
+                        </a:defRPr>
+                      </a:pPr>
+                      <a:r>
+                        <a:rPr>
+                          <a:latin typeface="Inter"/>
+                        </a:rPr>
+                        <a:t>Date-window robustness</a:t>
+                      </a:r>
+                    </a:p>
+                  </a:txBody>
+                  <a:tcPr marL="54864" marR="54864" marT="27432" marB="27432" anchor="ctr">
+                    <a:solidFill>
+                      <a:srgbClr val="FFFFFF"/>
+                    </a:solidFill>
+                  </a:tcPr>
+                </a:tc>
+                <a:tc>
+                  <a:txBody>
+                    <a:bodyPr/>
+                    <a:lstStyle/>
+                    <a:p>
+                      <a:pPr>
+                        <a:defRPr sz="720" b="0">
+                          <a:solidFill>
+                            <a:srgbClr val="0D1117"/>
+                          </a:solidFill>
+                          <a:latin typeface="Inter"/>
+                        </a:defRPr>
+                      </a:pPr>
+                      <a:r>
+                        <a:rPr>
+                          <a:latin typeface="Inter"/>
+                        </a:rPr>
+                        <a:t>run_strategy_lab_date_window_robustness</a:t>
+                      </a:r>
+                    </a:p>
+                  </a:txBody>
+                  <a:tcPr marL="54864" marR="54864" marT="27432" marB="27432" anchor="ctr">
+                    <a:solidFill>
+                      <a:srgbClr val="FFFFFF"/>
+                    </a:solidFill>
+                  </a:tcPr>
+                </a:tc>
+                <a:tc>
+                  <a:txBody>
+                    <a:bodyPr/>
+                    <a:lstStyle/>
+                    <a:p>
+                      <a:pPr>
+                        <a:defRPr sz="720" b="0">
+                          <a:solidFill>
+                            <a:srgbClr val="0D1117"/>
+                          </a:solidFill>
+                          <a:latin typeface="Inter"/>
+                        </a:defRPr>
+                      </a:pPr>
+                      <a:r>
+                        <a:rPr>
+                          <a:latin typeface="Inter"/>
+                        </a:rPr>
+                        <a:t>2025-12-31</a:t>
+                      </a:r>
+                    </a:p>
+                  </a:txBody>
+                  <a:tcPr marL="54864" marR="54864" marT="27432" marB="27432" anchor="ctr">
+                    <a:solidFill>
+                      <a:srgbClr val="FFFFFF"/>
+                    </a:solidFill>
+                  </a:tcPr>
+                </a:tc>
+                <a:tc>
+                  <a:txBody>
+                    <a:bodyPr/>
+                    <a:lstStyle/>
+                    <a:p>
+                      <a:pPr>
+                        <a:defRPr sz="720" b="1">
+                          <a:solidFill>
+                            <a:srgbClr val="C6F432"/>
+                          </a:solidFill>
+                          <a:latin typeface="Inter"/>
+                        </a:defRPr>
+                      </a:pPr>
+                      <a:r>
+                        <a:rPr>
+                          <a:latin typeface="Inter"/>
+                        </a:rPr>
+                        <a:t>● Passed</a:t>
+                      </a:r>
+                    </a:p>
+                  </a:txBody>
+                  <a:tcPr marL="54864" marR="54864" marT="27432" marB="27432" anchor="ctr">
+                    <a:solidFill>
+                      <a:srgbClr val="F5F7F9"/>
+                    </a:solidFill>
+                  </a:tcPr>
+                </a:tc>
+              </a:tr>
+              <a:tr h="352806">
+                <a:tc>
+                  <a:txBody>
+                    <a:bodyPr/>
+                    <a:lstStyle/>
+                    <a:p>
+                      <a:pPr>
+                        <a:defRPr sz="720" b="1">
+                          <a:solidFill>
+                            <a:srgbClr val="0D1117"/>
+                          </a:solidFill>
+                          <a:latin typeface="Inter"/>
+                        </a:defRPr>
+                      </a:pPr>
+                      <a:r>
+                        <a:rPr>
+                          <a:latin typeface="Inter"/>
+                        </a:rPr>
+                        <a:t>S4</a:t>
+                      </a:r>
+                    </a:p>
+                  </a:txBody>
+                  <a:tcPr marL="54864" marR="54864" marT="27432" marB="27432" anchor="ctr">
+                    <a:solidFill>
+                      <a:srgbClr val="F5F7F9"/>
+                    </a:solidFill>
+                  </a:tcPr>
+                </a:tc>
+                <a:tc>
+                  <a:txBody>
+                    <a:bodyPr/>
+                    <a:lstStyle/>
+                    <a:p>
+                      <a:pPr>
+                        <a:defRPr sz="720" b="0">
+                          <a:solidFill>
+                            <a:srgbClr val="0D1117"/>
+                          </a:solidFill>
+                          <a:latin typeface="Inter"/>
+                        </a:defRPr>
+                      </a:pPr>
+                      <a:r>
+                        <a:rPr>
+                          <a:latin typeface="Inter"/>
+                        </a:rPr>
+                        <a:t>10-year simulated expected-statistics outputs</a:t>
+                      </a:r>
+                    </a:p>
+                  </a:txBody>
+                  <a:tcPr marL="54864" marR="54864" marT="27432" marB="27432" anchor="ctr">
+                    <a:solidFill>
+                      <a:srgbClr val="F5F7F9"/>
+                    </a:solidFill>
+                  </a:tcPr>
+                </a:tc>
+                <a:tc>
+                  <a:txBody>
+                    <a:bodyPr/>
+                    <a:lstStyle/>
+                    <a:p>
+                      <a:pPr>
+                        <a:defRPr sz="720" b="0">
+                          <a:solidFill>
+                            <a:srgbClr val="0D1117"/>
+                          </a:solidFill>
+                          <a:latin typeface="Inter"/>
+                        </a:defRPr>
+                      </a:pPr>
+                      <a:r>
+                        <a:rPr>
+                          <a:latin typeface="Inter"/>
+                        </a:rPr>
+                        <a:t>run_strategy_lab_expected_statistics</a:t>
+                      </a:r>
+                    </a:p>
+                  </a:txBody>
+                  <a:tcPr marL="54864" marR="54864" marT="27432" marB="27432" anchor="ctr">
+                    <a:solidFill>
+                      <a:srgbClr val="F5F7F9"/>
+                    </a:solidFill>
+                  </a:tcPr>
+                </a:tc>
+                <a:tc>
+                  <a:txBody>
+                    <a:bodyPr/>
+                    <a:lstStyle/>
+                    <a:p>
+                      <a:pPr>
+                        <a:defRPr sz="720" b="0">
+                          <a:solidFill>
+                            <a:srgbClr val="0D1117"/>
+                          </a:solidFill>
+                          <a:latin typeface="Inter"/>
+                        </a:defRPr>
+                      </a:pPr>
+                      <a:r>
+                        <a:rPr>
+                          <a:latin typeface="Inter"/>
+                        </a:rPr>
+                        <a:t>2025-12-31</a:t>
+                      </a:r>
+                    </a:p>
+                  </a:txBody>
+                  <a:tcPr marL="54864" marR="54864" marT="27432" marB="27432" anchor="ctr">
+                    <a:solidFill>
+                      <a:srgbClr val="F5F7F9"/>
+                    </a:solidFill>
+                  </a:tcPr>
+                </a:tc>
+                <a:tc>
+                  <a:txBody>
+                    <a:bodyPr/>
+                    <a:lstStyle/>
+                    <a:p>
+                      <a:pPr>
+                        <a:defRPr sz="720" b="1">
+                          <a:solidFill>
+                            <a:srgbClr val="C6F432"/>
+                          </a:solidFill>
+                          <a:latin typeface="Inter"/>
+                        </a:defRPr>
+                      </a:pPr>
+                      <a:r>
+                        <a:rPr>
+                          <a:latin typeface="Inter"/>
+                        </a:rPr>
+                        <a:t>● Passed</a:t>
+                      </a:r>
+                    </a:p>
+                  </a:txBody>
+                  <a:tcPr marL="54864" marR="54864" marT="27432" marB="27432" anchor="ctr">
+                    <a:solidFill>
+                      <a:srgbClr val="F5F7F9"/>
+                    </a:solidFill>
+                  </a:tcPr>
+                </a:tc>
+              </a:tr>
+              <a:tr h="352806">
+                <a:tc>
+                  <a:txBody>
+                    <a:bodyPr/>
+                    <a:lstStyle/>
+                    <a:p>
+                      <a:pPr>
+                        <a:defRPr sz="720" b="1">
+                          <a:solidFill>
+                            <a:srgbClr val="0D1117"/>
+                          </a:solidFill>
+                          <a:latin typeface="Inter"/>
+                        </a:defRPr>
+                      </a:pPr>
+                      <a:r>
+                        <a:rPr>
+                          <a:latin typeface="Inter"/>
+                        </a:rPr>
+                        <a:t>S5</a:t>
+                      </a:r>
+                    </a:p>
+                  </a:txBody>
+                  <a:tcPr marL="54864" marR="54864" marT="27432" marB="27432" anchor="ctr">
+                    <a:solidFill>
+                      <a:srgbClr val="FFFFFF"/>
+                    </a:solidFill>
+                  </a:tcPr>
+                </a:tc>
+                <a:tc>
+                  <a:txBody>
+                    <a:bodyPr/>
+                    <a:lstStyle/>
+                    <a:p>
+                      <a:pPr>
+                        <a:defRPr sz="720" b="0">
+                          <a:solidFill>
+                            <a:srgbClr val="0D1117"/>
+                          </a:solidFill>
+                          <a:latin typeface="Inter"/>
+                        </a:defRPr>
+                      </a:pPr>
+                      <a:r>
+                        <a:rPr>
+                          <a:latin typeface="Inter"/>
+                        </a:rPr>
+                        <a:t>Alternative-benchmark sensitivity</a:t>
+                      </a:r>
+                    </a:p>
+                  </a:txBody>
+                  <a:tcPr marL="54864" marR="54864" marT="27432" marB="27432" anchor="ctr">
+                    <a:solidFill>
+                      <a:srgbClr val="FFFFFF"/>
+                    </a:solidFill>
+                  </a:tcPr>
+                </a:tc>
+                <a:tc>
+                  <a:txBody>
+                    <a:bodyPr/>
+                    <a:lstStyle/>
+                    <a:p>
+                      <a:pPr>
+                        <a:defRPr sz="720" b="0">
+                          <a:solidFill>
+                            <a:srgbClr val="0D1117"/>
+                          </a:solidFill>
+                          <a:latin typeface="Inter"/>
+                        </a:defRPr>
+                      </a:pPr>
+                      <a:r>
+                        <a:rPr>
+                          <a:latin typeface="Inter"/>
+                        </a:rPr>
                         <a:t>analyze_strategy_lab_compare</a:t>
                       </a:r>
                     </a:p>
@@ -22353,7 +21957,7 @@
                     <a:lstStyle/>
                     <a:p>
                       <a:pPr>
-                        <a:defRPr sz="650" b="0">
+                        <a:defRPr sz="720" b="0">
                           <a:solidFill>
                             <a:srgbClr val="0D1117"/>
                           </a:solidFill>
@@ -22364,7 +21968,7 @@
                         <a:rPr>
                           <a:latin typeface="Inter"/>
                         </a:rPr>
-                        <a:t>manager=returns-test-northstar-select; benchmark=benchmark-test-northstar-core-equity; start=2020-01-31; end=2025-12-31</a:t>
+                        <a:t>2025-12-31</a:t>
                       </a:r>
                     </a:p>
                   </a:txBody>
@@ -22380,1085 +21984,24 @@
                     <a:lstStyle/>
                     <a:p>
                       <a:pPr>
-                        <a:defRPr sz="650" b="0">
-                          <a:solidFill>
-                            <a:srgbClr val="0D1117"/>
-                          </a:solidFill>
-                          <a:latin typeface="Inter"/>
-                        </a:defRPr>
-                      </a:pPr>
-                      <a:r>
-                        <a:rPr>
-                          <a:latin typeface="Inter"/>
-                        </a:rPr>
-                        <a:t>2025-12-31</a:t>
-                      </a:r>
-                    </a:p>
-                  </a:txBody>
-                  <a:tcPr marL="54864" marR="54864" marT="27432" marB="27432" anchor="ctr">
-                    <a:solidFill>
-                      <a:srgbClr val="FFFFFF"/>
-                    </a:solidFill>
-                  </a:tcPr>
-                </a:tc>
-                <a:tc>
-                  <a:txBody>
-                    <a:bodyPr/>
-                    <a:lstStyle/>
-                    <a:p>
-                      <a:pPr>
-                        <a:defRPr sz="650" b="0">
-                          <a:solidFill>
-                            <a:srgbClr val="0D1117"/>
-                          </a:solidFill>
-                          <a:latin typeface="Inter"/>
-                        </a:defRPr>
-                      </a:pPr>
-                      <a:r>
-                        <a:rPr>
-                          <a:latin typeface="Inter"/>
-                        </a:rPr>
-                        <a:t>72 monthly observations; USD total return; illustrative sample data</a:t>
-                      </a:r>
-                    </a:p>
-                  </a:txBody>
-                  <a:tcPr marL="54864" marR="54864" marT="27432" marB="27432" anchor="ctr">
-                    <a:solidFill>
-                      <a:srgbClr val="FFFFFF"/>
-                    </a:solidFill>
-                  </a:tcPr>
-                </a:tc>
-                <a:tc>
-                  <a:txBody>
-                    <a:bodyPr/>
-                    <a:lstStyle/>
-                    <a:p>
-                      <a:pPr>
-                        <a:defRPr sz="650" b="0">
-                          <a:solidFill>
-                            <a:srgbClr val="0D1117"/>
-                          </a:solidFill>
-                          <a:latin typeface="Inter"/>
-                        </a:defRPr>
-                      </a:pPr>
-                      <a:r>
-                        <a:rPr>
-                          <a:latin typeface="Inter"/>
-                        </a:rPr>
-                        <a:t>passed</a:t>
-                      </a:r>
-                    </a:p>
-                  </a:txBody>
-                  <a:tcPr marL="54864" marR="54864" marT="27432" marB="27432" anchor="ctr">
-                    <a:solidFill>
-                      <a:srgbClr val="FFFFFF"/>
-                    </a:solidFill>
-                  </a:tcPr>
-                </a:tc>
-                <a:tc>
-                  <a:txBody>
-                    <a:bodyPr/>
-                    <a:lstStyle/>
-                    <a:p>
-                      <a:pPr>
-                        <a:defRPr sz="650" b="0">
-                          <a:solidFill>
-                            <a:srgbClr val="0D1117"/>
-                          </a:solidFill>
-                          <a:latin typeface="Inter"/>
-                        </a:defRPr>
-                      </a:pPr>
-                      <a:r>
-                        <a:rPr>
-                          <a:latin typeface="Inter"/>
-                        </a:rPr>
-                        <a:t>sha256:aaaaaaaaaaaaaaaaaaaaaaaaaaaaaaaaaaaaaaaaaaaaaaaaaaaaaaaaaaaaaaaa</a:t>
-                      </a:r>
-                    </a:p>
-                  </a:txBody>
-                  <a:tcPr marL="54864" marR="54864" marT="27432" marB="27432" anchor="ctr">
-                    <a:solidFill>
-                      <a:srgbClr val="FFFFFF"/>
-                    </a:solidFill>
-                  </a:tcPr>
-                </a:tc>
-              </a:tr>
-              <a:tr h="769620">
-                <a:tc>
-                  <a:txBody>
-                    <a:bodyPr/>
-                    <a:lstStyle/>
-                    <a:p>
-                      <a:pPr>
-                        <a:defRPr sz="650" b="1">
-                          <a:solidFill>
-                            <a:srgbClr val="0D1117"/>
-                          </a:solidFill>
-                          <a:latin typeface="Inter"/>
-                        </a:defRPr>
-                      </a:pPr>
-                      <a:r>
-                        <a:rPr>
-                          <a:latin typeface="Inter"/>
-                        </a:rPr>
-                        <a:t>S2</a:t>
+                        <a:defRPr sz="720" b="1">
+                          <a:solidFill>
+                            <a:srgbClr val="C6F432"/>
+                          </a:solidFill>
+                          <a:latin typeface="Inter"/>
+                        </a:defRPr>
+                      </a:pPr>
+                      <a:r>
+                        <a:rPr>
+                          <a:latin typeface="Inter"/>
+                        </a:rPr>
+                        <a:t>● Passed</a:t>
                       </a:r>
                     </a:p>
                   </a:txBody>
                   <a:tcPr marL="54864" marR="54864" marT="27432" marB="27432" anchor="ctr">
                     <a:solidFill>
                       <a:srgbClr val="F5F7F9"/>
-                    </a:solidFill>
-                  </a:tcPr>
-                </a:tc>
-                <a:tc>
-                  <a:txBody>
-                    <a:bodyPr/>
-                    <a:lstStyle/>
-                    <a:p>
-                      <a:pPr>
-                        <a:defRPr sz="650" b="0">
-                          <a:solidFill>
-                            <a:srgbClr val="0D1117"/>
-                          </a:solidFill>
-                          <a:latin typeface="Inter"/>
-                        </a:defRPr>
-                      </a:pPr>
-                      <a:r>
-                        <a:rPr>
-                          <a:latin typeface="Inter"/>
-                        </a:rPr>
-                        <a:t>Realized paths, rolling statistics, relative metrics, capture, and distribution</a:t>
-                      </a:r>
-                    </a:p>
-                  </a:txBody>
-                  <a:tcPr marL="54864" marR="54864" marT="27432" marB="27432" anchor="ctr">
-                    <a:solidFill>
-                      <a:srgbClr val="F5F7F9"/>
-                    </a:solidFill>
-                  </a:tcPr>
-                </a:tc>
-                <a:tc>
-                  <a:txBody>
-                    <a:bodyPr/>
-                    <a:lstStyle/>
-                    <a:p>
-                      <a:pPr>
-                        <a:defRPr sz="650" b="0">
-                          <a:solidFill>
-                            <a:srgbClr val="0D1117"/>
-                          </a:solidFill>
-                          <a:latin typeface="Inter"/>
-                        </a:defRPr>
-                      </a:pPr>
-                      <a:r>
-                        <a:rPr>
-                          <a:latin typeface="Inter"/>
-                        </a:rPr>
-                        <a:t>gradient_tool</a:t>
-                      </a:r>
-                    </a:p>
-                  </a:txBody>
-                  <a:tcPr marL="54864" marR="54864" marT="27432" marB="27432" anchor="ctr">
-                    <a:solidFill>
-                      <a:srgbClr val="F5F7F9"/>
-                    </a:solidFill>
-                  </a:tcPr>
-                </a:tc>
-                <a:tc>
-                  <a:txBody>
-                    <a:bodyPr/>
-                    <a:lstStyle/>
-                    <a:p>
-                      <a:pPr>
-                        <a:defRPr sz="650" b="0">
-                          <a:solidFill>
-                            <a:srgbClr val="0D1117"/>
-                          </a:solidFill>
-                          <a:latin typeface="Inter"/>
-                        </a:defRPr>
-                      </a:pPr>
-                      <a:r>
-                        <a:rPr>
-                          <a:latin typeface="Inter"/>
-                        </a:rPr>
-                        <a:t>run_strategy_lab_relative_return</a:t>
-                      </a:r>
-                    </a:p>
-                  </a:txBody>
-                  <a:tcPr marL="54864" marR="54864" marT="27432" marB="27432" anchor="ctr">
-                    <a:solidFill>
-                      <a:srgbClr val="F5F7F9"/>
-                    </a:solidFill>
-                  </a:tcPr>
-                </a:tc>
-                <a:tc>
-                  <a:txBody>
-                    <a:bodyPr/>
-                    <a:lstStyle/>
-                    <a:p>
-                      <a:pPr>
-                        <a:defRPr sz="650" b="0">
-                          <a:solidFill>
-                            <a:srgbClr val="0D1117"/>
-                          </a:solidFill>
-                          <a:latin typeface="Inter"/>
-                        </a:defRPr>
-                      </a:pPr>
-                      <a:r>
-                        <a:rPr>
-                          <a:latin typeface="Inter"/>
-                        </a:rPr>
-                        <a:t>manager=returns-test-northstar-select; benchmark=benchmark-test-northstar-core-equity; rolling_months=12,36</a:t>
-                      </a:r>
-                    </a:p>
-                  </a:txBody>
-                  <a:tcPr marL="54864" marR="54864" marT="27432" marB="27432" anchor="ctr">
-                    <a:solidFill>
-                      <a:srgbClr val="F5F7F9"/>
-                    </a:solidFill>
-                  </a:tcPr>
-                </a:tc>
-                <a:tc>
-                  <a:txBody>
-                    <a:bodyPr/>
-                    <a:lstStyle/>
-                    <a:p>
-                      <a:pPr>
-                        <a:defRPr sz="650" b="0">
-                          <a:solidFill>
-                            <a:srgbClr val="0D1117"/>
-                          </a:solidFill>
-                          <a:latin typeface="Inter"/>
-                        </a:defRPr>
-                      </a:pPr>
-                      <a:r>
-                        <a:rPr>
-                          <a:latin typeface="Inter"/>
-                        </a:rPr>
-                        <a:t>2025-12-31</a:t>
-                      </a:r>
-                    </a:p>
-                  </a:txBody>
-                  <a:tcPr marL="54864" marR="54864" marT="27432" marB="27432" anchor="ctr">
-                    <a:solidFill>
-                      <a:srgbClr val="F5F7F9"/>
-                    </a:solidFill>
-                  </a:tcPr>
-                </a:tc>
-                <a:tc>
-                  <a:txBody>
-                    <a:bodyPr/>
-                    <a:lstStyle/>
-                    <a:p>
-                      <a:pPr>
-                        <a:defRPr sz="650" b="0">
-                          <a:solidFill>
-                            <a:srgbClr val="0D1117"/>
-                          </a:solidFill>
-                          <a:latin typeface="Inter"/>
-                        </a:defRPr>
-                      </a:pPr>
-                      <a:r>
-                        <a:rPr>
-                          <a:latin typeface="Inter"/>
-                        </a:rPr>
-                        <a:t>Common 72-month manager/benchmark window; illustrative sample data</a:t>
-                      </a:r>
-                    </a:p>
-                  </a:txBody>
-                  <a:tcPr marL="54864" marR="54864" marT="27432" marB="27432" anchor="ctr">
-                    <a:solidFill>
-                      <a:srgbClr val="F5F7F9"/>
-                    </a:solidFill>
-                  </a:tcPr>
-                </a:tc>
-                <a:tc>
-                  <a:txBody>
-                    <a:bodyPr/>
-                    <a:lstStyle/>
-                    <a:p>
-                      <a:pPr>
-                        <a:defRPr sz="650" b="0">
-                          <a:solidFill>
-                            <a:srgbClr val="0D1117"/>
-                          </a:solidFill>
-                          <a:latin typeface="Inter"/>
-                        </a:defRPr>
-                      </a:pPr>
-                      <a:r>
-                        <a:rPr>
-                          <a:latin typeface="Inter"/>
-                        </a:rPr>
-                        <a:t>passed</a:t>
-                      </a:r>
-                    </a:p>
-                  </a:txBody>
-                  <a:tcPr marL="54864" marR="54864" marT="27432" marB="27432" anchor="ctr">
-                    <a:solidFill>
-                      <a:srgbClr val="F5F7F9"/>
-                    </a:solidFill>
-                  </a:tcPr>
-                </a:tc>
-                <a:tc>
-                  <a:txBody>
-                    <a:bodyPr/>
-                    <a:lstStyle/>
-                    <a:p>
-                      <a:pPr>
-                        <a:defRPr sz="650" b="0">
-                          <a:solidFill>
-                            <a:srgbClr val="0D1117"/>
-                          </a:solidFill>
-                          <a:latin typeface="Inter"/>
-                        </a:defRPr>
-                      </a:pPr>
-                      <a:r>
-                        <a:rPr>
-                          <a:latin typeface="Inter"/>
-                        </a:rPr>
-                        <a:t>sha256:bbbbbbbbbbbbbbbbbbbbbbbbbbbbbbbbbbbbbbbbbbbbbbbbbbbbbbbbbbbbbbbb</a:t>
-                      </a:r>
-                    </a:p>
-                  </a:txBody>
-                  <a:tcPr marL="54864" marR="54864" marT="27432" marB="27432" anchor="ctr">
-                    <a:solidFill>
-                      <a:srgbClr val="F5F7F9"/>
-                    </a:solidFill>
-                  </a:tcPr>
-                </a:tc>
-              </a:tr>
-              <a:tr h="769620">
-                <a:tc>
-                  <a:txBody>
-                    <a:bodyPr/>
-                    <a:lstStyle/>
-                    <a:p>
-                      <a:pPr>
-                        <a:defRPr sz="650" b="1">
-                          <a:solidFill>
-                            <a:srgbClr val="0D1117"/>
-                          </a:solidFill>
-                          <a:latin typeface="Inter"/>
-                        </a:defRPr>
-                      </a:pPr>
-                      <a:r>
-                        <a:rPr>
-                          <a:latin typeface="Inter"/>
-                        </a:rPr>
-                        <a:t>S3</a:t>
-                      </a:r>
-                    </a:p>
-                  </a:txBody>
-                  <a:tcPr marL="54864" marR="54864" marT="27432" marB="27432" anchor="ctr">
-                    <a:solidFill>
-                      <a:srgbClr val="FFFFFF"/>
-                    </a:solidFill>
-                  </a:tcPr>
-                </a:tc>
-                <a:tc>
-                  <a:txBody>
-                    <a:bodyPr/>
-                    <a:lstStyle/>
-                    <a:p>
-                      <a:pPr>
-                        <a:defRPr sz="650" b="0">
-                          <a:solidFill>
-                            <a:srgbClr val="0D1117"/>
-                          </a:solidFill>
-                          <a:latin typeface="Inter"/>
-                        </a:defRPr>
-                      </a:pPr>
-                      <a:r>
-                        <a:rPr>
-                          <a:latin typeface="Inter"/>
-                        </a:rPr>
-                        <a:t>Date-window robustness</a:t>
-                      </a:r>
-                    </a:p>
-                  </a:txBody>
-                  <a:tcPr marL="54864" marR="54864" marT="27432" marB="27432" anchor="ctr">
-                    <a:solidFill>
-                      <a:srgbClr val="FFFFFF"/>
-                    </a:solidFill>
-                  </a:tcPr>
-                </a:tc>
-                <a:tc>
-                  <a:txBody>
-                    <a:bodyPr/>
-                    <a:lstStyle/>
-                    <a:p>
-                      <a:pPr>
-                        <a:defRPr sz="650" b="0">
-                          <a:solidFill>
-                            <a:srgbClr val="0D1117"/>
-                          </a:solidFill>
-                          <a:latin typeface="Inter"/>
-                        </a:defRPr>
-                      </a:pPr>
-                      <a:r>
-                        <a:rPr>
-                          <a:latin typeface="Inter"/>
-                        </a:rPr>
-                        <a:t>gradient_tool</a:t>
-                      </a:r>
-                    </a:p>
-                  </a:txBody>
-                  <a:tcPr marL="54864" marR="54864" marT="27432" marB="27432" anchor="ctr">
-                    <a:solidFill>
-                      <a:srgbClr val="FFFFFF"/>
-                    </a:solidFill>
-                  </a:tcPr>
-                </a:tc>
-                <a:tc>
-                  <a:txBody>
-                    <a:bodyPr/>
-                    <a:lstStyle/>
-                    <a:p>
-                      <a:pPr>
-                        <a:defRPr sz="650" b="0">
-                          <a:solidFill>
-                            <a:srgbClr val="0D1117"/>
-                          </a:solidFill>
-                          <a:latin typeface="Inter"/>
-                        </a:defRPr>
-                      </a:pPr>
-                      <a:r>
-                        <a:rPr>
-                          <a:latin typeface="Inter"/>
-                        </a:rPr>
-                        <a:t>run_strategy_lab_date_window_robustness</a:t>
-                      </a:r>
-                    </a:p>
-                  </a:txBody>
-                  <a:tcPr marL="54864" marR="54864" marT="27432" marB="27432" anchor="ctr">
-                    <a:solidFill>
-                      <a:srgbClr val="FFFFFF"/>
-                    </a:solidFill>
-                  </a:tcPr>
-                </a:tc>
-                <a:tc>
-                  <a:txBody>
-                    <a:bodyPr/>
-                    <a:lstStyle/>
-                    <a:p>
-                      <a:pPr>
-                        <a:defRPr sz="650" b="0">
-                          <a:solidFill>
-                            <a:srgbClr val="0D1117"/>
-                          </a:solidFill>
-                          <a:latin typeface="Inter"/>
-                        </a:defRPr>
-                      </a:pPr>
-                      <a:r>
-                        <a:rPr>
-                          <a:latin typeface="Inter"/>
-                        </a:rPr>
-                        <a:t>starts=2020-01-31,2021-01-31,2022-01-31,2023-01-31; end=2025-12-31</a:t>
-                      </a:r>
-                    </a:p>
-                  </a:txBody>
-                  <a:tcPr marL="54864" marR="54864" marT="27432" marB="27432" anchor="ctr">
-                    <a:solidFill>
-                      <a:srgbClr val="FFFFFF"/>
-                    </a:solidFill>
-                  </a:tcPr>
-                </a:tc>
-                <a:tc>
-                  <a:txBody>
-                    <a:bodyPr/>
-                    <a:lstStyle/>
-                    <a:p>
-                      <a:pPr>
-                        <a:defRPr sz="650" b="0">
-                          <a:solidFill>
-                            <a:srgbClr val="0D1117"/>
-                          </a:solidFill>
-                          <a:latin typeface="Inter"/>
-                        </a:defRPr>
-                      </a:pPr>
-                      <a:r>
-                        <a:rPr>
-                          <a:latin typeface="Inter"/>
-                        </a:rPr>
-                        <a:t>2025-12-31</a:t>
-                      </a:r>
-                    </a:p>
-                  </a:txBody>
-                  <a:tcPr marL="54864" marR="54864" marT="27432" marB="27432" anchor="ctr">
-                    <a:solidFill>
-                      <a:srgbClr val="FFFFFF"/>
-                    </a:solidFill>
-                  </a:tcPr>
-                </a:tc>
-                <a:tc>
-                  <a:txBody>
-                    <a:bodyPr/>
-                    <a:lstStyle/>
-                    <a:p>
-                      <a:pPr>
-                        <a:defRPr sz="650" b="0">
-                          <a:solidFill>
-                            <a:srgbClr val="0D1117"/>
-                          </a:solidFill>
-                          <a:latin typeface="Inter"/>
-                        </a:defRPr>
-                      </a:pPr>
-                      <a:r>
-                        <a:rPr>
-                          <a:latin typeface="Inter"/>
-                        </a:rPr>
-                        <a:t>Four returned start-date windows; illustrative sample data</a:t>
-                      </a:r>
-                    </a:p>
-                  </a:txBody>
-                  <a:tcPr marL="54864" marR="54864" marT="27432" marB="27432" anchor="ctr">
-                    <a:solidFill>
-                      <a:srgbClr val="FFFFFF"/>
-                    </a:solidFill>
-                  </a:tcPr>
-                </a:tc>
-                <a:tc>
-                  <a:txBody>
-                    <a:bodyPr/>
-                    <a:lstStyle/>
-                    <a:p>
-                      <a:pPr>
-                        <a:defRPr sz="650" b="0">
-                          <a:solidFill>
-                            <a:srgbClr val="0D1117"/>
-                          </a:solidFill>
-                          <a:latin typeface="Inter"/>
-                        </a:defRPr>
-                      </a:pPr>
-                      <a:r>
-                        <a:rPr>
-                          <a:latin typeface="Inter"/>
-                        </a:rPr>
-                        <a:t>passed</a:t>
-                      </a:r>
-                    </a:p>
-                  </a:txBody>
-                  <a:tcPr marL="54864" marR="54864" marT="27432" marB="27432" anchor="ctr">
-                    <a:solidFill>
-                      <a:srgbClr val="FFFFFF"/>
-                    </a:solidFill>
-                  </a:tcPr>
-                </a:tc>
-                <a:tc>
-                  <a:txBody>
-                    <a:bodyPr/>
-                    <a:lstStyle/>
-                    <a:p>
-                      <a:pPr>
-                        <a:defRPr sz="650" b="0">
-                          <a:solidFill>
-                            <a:srgbClr val="0D1117"/>
-                          </a:solidFill>
-                          <a:latin typeface="Inter"/>
-                        </a:defRPr>
-                      </a:pPr>
-                      <a:r>
-                        <a:rPr>
-                          <a:latin typeface="Inter"/>
-                        </a:rPr>
-                        <a:t>sha256:cccccccccccccccccccccccccccccccccccccccccccccccccccccccccccccccc</a:t>
-                      </a:r>
-                    </a:p>
-                  </a:txBody>
-                  <a:tcPr marL="54864" marR="54864" marT="27432" marB="27432" anchor="ctr">
-                    <a:solidFill>
-                      <a:srgbClr val="FFFFFF"/>
-                    </a:solidFill>
-                  </a:tcPr>
-                </a:tc>
-              </a:tr>
-              <a:tr h="769620">
-                <a:tc>
-                  <a:txBody>
-                    <a:bodyPr/>
-                    <a:lstStyle/>
-                    <a:p>
-                      <a:pPr>
-                        <a:defRPr sz="650" b="1">
-                          <a:solidFill>
-                            <a:srgbClr val="0D1117"/>
-                          </a:solidFill>
-                          <a:latin typeface="Inter"/>
-                        </a:defRPr>
-                      </a:pPr>
-                      <a:r>
-                        <a:rPr>
-                          <a:latin typeface="Inter"/>
-                        </a:rPr>
-                        <a:t>S4</a:t>
-                      </a:r>
-                    </a:p>
-                  </a:txBody>
-                  <a:tcPr marL="54864" marR="54864" marT="27432" marB="27432" anchor="ctr">
-                    <a:solidFill>
-                      <a:srgbClr val="F5F7F9"/>
-                    </a:solidFill>
-                  </a:tcPr>
-                </a:tc>
-                <a:tc>
-                  <a:txBody>
-                    <a:bodyPr/>
-                    <a:lstStyle/>
-                    <a:p>
-                      <a:pPr>
-                        <a:defRPr sz="650" b="0">
-                          <a:solidFill>
-                            <a:srgbClr val="0D1117"/>
-                          </a:solidFill>
-                          <a:latin typeface="Inter"/>
-                        </a:defRPr>
-                      </a:pPr>
-                      <a:r>
-                        <a:rPr>
-                          <a:latin typeface="Inter"/>
-                        </a:rPr>
-                        <a:t>10-year simulated expected-statistics outputs</a:t>
-                      </a:r>
-                    </a:p>
-                  </a:txBody>
-                  <a:tcPr marL="54864" marR="54864" marT="27432" marB="27432" anchor="ctr">
-                    <a:solidFill>
-                      <a:srgbClr val="F5F7F9"/>
-                    </a:solidFill>
-                  </a:tcPr>
-                </a:tc>
-                <a:tc>
-                  <a:txBody>
-                    <a:bodyPr/>
-                    <a:lstStyle/>
-                    <a:p>
-                      <a:pPr>
-                        <a:defRPr sz="650" b="0">
-                          <a:solidFill>
-                            <a:srgbClr val="0D1117"/>
-                          </a:solidFill>
-                          <a:latin typeface="Inter"/>
-                        </a:defRPr>
-                      </a:pPr>
-                      <a:r>
-                        <a:rPr>
-                          <a:latin typeface="Inter"/>
-                        </a:rPr>
-                        <a:t>gradient_tool</a:t>
-                      </a:r>
-                    </a:p>
-                  </a:txBody>
-                  <a:tcPr marL="54864" marR="54864" marT="27432" marB="27432" anchor="ctr">
-                    <a:solidFill>
-                      <a:srgbClr val="F5F7F9"/>
-                    </a:solidFill>
-                  </a:tcPr>
-                </a:tc>
-                <a:tc>
-                  <a:txBody>
-                    <a:bodyPr/>
-                    <a:lstStyle/>
-                    <a:p>
-                      <a:pPr>
-                        <a:defRPr sz="650" b="0">
-                          <a:solidFill>
-                            <a:srgbClr val="0D1117"/>
-                          </a:solidFill>
-                          <a:latin typeface="Inter"/>
-                        </a:defRPr>
-                      </a:pPr>
-                      <a:r>
-                        <a:rPr>
-                          <a:latin typeface="Inter"/>
-                        </a:rPr>
-                        <a:t>run_strategy_lab_expected_statistics</a:t>
-                      </a:r>
-                    </a:p>
-                  </a:txBody>
-                  <a:tcPr marL="54864" marR="54864" marT="27432" marB="27432" anchor="ctr">
-                    <a:solidFill>
-                      <a:srgbClr val="F5F7F9"/>
-                    </a:solidFill>
-                  </a:tcPr>
-                </a:tc>
-                <a:tc>
-                  <a:txBody>
-                    <a:bodyPr/>
-                    <a:lstStyle/>
-                    <a:p>
-                      <a:pPr>
-                        <a:defRPr sz="650" b="0">
-                          <a:solidFill>
-                            <a:srgbClr val="0D1117"/>
-                          </a:solidFill>
-                          <a:latin typeface="Inter"/>
-                        </a:defRPr>
-                      </a:pPr>
-                      <a:r>
-                        <a:rPr>
-                          <a:latin typeface="Inter"/>
-                        </a:rPr>
-                        <a:t>horizon=10y; outputs=annualized_return,annualized_volatility,terminal_wealth_median</a:t>
-                      </a:r>
-                    </a:p>
-                  </a:txBody>
-                  <a:tcPr marL="54864" marR="54864" marT="27432" marB="27432" anchor="ctr">
-                    <a:solidFill>
-                      <a:srgbClr val="F5F7F9"/>
-                    </a:solidFill>
-                  </a:tcPr>
-                </a:tc>
-                <a:tc>
-                  <a:txBody>
-                    <a:bodyPr/>
-                    <a:lstStyle/>
-                    <a:p>
-                      <a:pPr>
-                        <a:defRPr sz="650" b="0">
-                          <a:solidFill>
-                            <a:srgbClr val="0D1117"/>
-                          </a:solidFill>
-                          <a:latin typeface="Inter"/>
-                        </a:defRPr>
-                      </a:pPr>
-                      <a:r>
-                        <a:rPr>
-                          <a:latin typeface="Inter"/>
-                        </a:rPr>
-                        <a:t>2025-12-31</a:t>
-                      </a:r>
-                    </a:p>
-                  </a:txBody>
-                  <a:tcPr marL="54864" marR="54864" marT="27432" marB="27432" anchor="ctr">
-                    <a:solidFill>
-                      <a:srgbClr val="F5F7F9"/>
-                    </a:solidFill>
-                  </a:tcPr>
-                </a:tc>
-                <a:tc>
-                  <a:txBody>
-                    <a:bodyPr/>
-                    <a:lstStyle/>
-                    <a:p>
-                      <a:pPr>
-                        <a:defRPr sz="650" b="0">
-                          <a:solidFill>
-                            <a:srgbClr val="0D1117"/>
-                          </a:solidFill>
-                          <a:latin typeface="Inter"/>
-                        </a:defRPr>
-                      </a:pPr>
-                      <a:r>
-                        <a:rPr>
-                          <a:latin typeface="Inter"/>
-                        </a:rPr>
-                        <a:t>Server-returned model outputs; illustrative sample data</a:t>
-                      </a:r>
-                    </a:p>
-                  </a:txBody>
-                  <a:tcPr marL="54864" marR="54864" marT="27432" marB="27432" anchor="ctr">
-                    <a:solidFill>
-                      <a:srgbClr val="F5F7F9"/>
-                    </a:solidFill>
-                  </a:tcPr>
-                </a:tc>
-                <a:tc>
-                  <a:txBody>
-                    <a:bodyPr/>
-                    <a:lstStyle/>
-                    <a:p>
-                      <a:pPr>
-                        <a:defRPr sz="650" b="0">
-                          <a:solidFill>
-                            <a:srgbClr val="0D1117"/>
-                          </a:solidFill>
-                          <a:latin typeface="Inter"/>
-                        </a:defRPr>
-                      </a:pPr>
-                      <a:r>
-                        <a:rPr>
-                          <a:latin typeface="Inter"/>
-                        </a:rPr>
-                        <a:t>passed</a:t>
-                      </a:r>
-                    </a:p>
-                  </a:txBody>
-                  <a:tcPr marL="54864" marR="54864" marT="27432" marB="27432" anchor="ctr">
-                    <a:solidFill>
-                      <a:srgbClr val="F5F7F9"/>
-                    </a:solidFill>
-                  </a:tcPr>
-                </a:tc>
-                <a:tc>
-                  <a:txBody>
-                    <a:bodyPr/>
-                    <a:lstStyle/>
-                    <a:p>
-                      <a:pPr>
-                        <a:defRPr sz="650" b="0">
-                          <a:solidFill>
-                            <a:srgbClr val="0D1117"/>
-                          </a:solidFill>
-                          <a:latin typeface="Inter"/>
-                        </a:defRPr>
-                      </a:pPr>
-                      <a:r>
-                        <a:rPr>
-                          <a:latin typeface="Inter"/>
-                        </a:rPr>
-                        <a:t>sha256:dddddddddddddddddddddddddddddddddddddddddddddddddddddddddddddddd</a:t>
-                      </a:r>
-                    </a:p>
-                  </a:txBody>
-                  <a:tcPr marL="54864" marR="54864" marT="27432" marB="27432" anchor="ctr">
-                    <a:solidFill>
-                      <a:srgbClr val="F5F7F9"/>
-                    </a:solidFill>
-                  </a:tcPr>
-                </a:tc>
-              </a:tr>
-              <a:tr h="769620">
-                <a:tc>
-                  <a:txBody>
-                    <a:bodyPr/>
-                    <a:lstStyle/>
-                    <a:p>
-                      <a:pPr>
-                        <a:defRPr sz="650" b="1">
-                          <a:solidFill>
-                            <a:srgbClr val="0D1117"/>
-                          </a:solidFill>
-                          <a:latin typeface="Inter"/>
-                        </a:defRPr>
-                      </a:pPr>
-                      <a:r>
-                        <a:rPr>
-                          <a:latin typeface="Inter"/>
-                        </a:rPr>
-                        <a:t>S5</a:t>
-                      </a:r>
-                    </a:p>
-                  </a:txBody>
-                  <a:tcPr marL="54864" marR="54864" marT="27432" marB="27432" anchor="ctr">
-                    <a:solidFill>
-                      <a:srgbClr val="FFFFFF"/>
-                    </a:solidFill>
-                  </a:tcPr>
-                </a:tc>
-                <a:tc>
-                  <a:txBody>
-                    <a:bodyPr/>
-                    <a:lstStyle/>
-                    <a:p>
-                      <a:pPr>
-                        <a:defRPr sz="650" b="0">
-                          <a:solidFill>
-                            <a:srgbClr val="0D1117"/>
-                          </a:solidFill>
-                          <a:latin typeface="Inter"/>
-                        </a:defRPr>
-                      </a:pPr>
-                      <a:r>
-                        <a:rPr>
-                          <a:latin typeface="Inter"/>
-                        </a:rPr>
-                        <a:t>Alternative-benchmark sensitivity</a:t>
-                      </a:r>
-                    </a:p>
-                  </a:txBody>
-                  <a:tcPr marL="54864" marR="54864" marT="27432" marB="27432" anchor="ctr">
-                    <a:solidFill>
-                      <a:srgbClr val="FFFFFF"/>
-                    </a:solidFill>
-                  </a:tcPr>
-                </a:tc>
-                <a:tc>
-                  <a:txBody>
-                    <a:bodyPr/>
-                    <a:lstStyle/>
-                    <a:p>
-                      <a:pPr>
-                        <a:defRPr sz="650" b="0">
-                          <a:solidFill>
-                            <a:srgbClr val="0D1117"/>
-                          </a:solidFill>
-                          <a:latin typeface="Inter"/>
-                        </a:defRPr>
-                      </a:pPr>
-                      <a:r>
-                        <a:rPr>
-                          <a:latin typeface="Inter"/>
-                        </a:rPr>
-                        <a:t>gradient_tool</a:t>
-                      </a:r>
-                    </a:p>
-                  </a:txBody>
-                  <a:tcPr marL="54864" marR="54864" marT="27432" marB="27432" anchor="ctr">
-                    <a:solidFill>
-                      <a:srgbClr val="FFFFFF"/>
-                    </a:solidFill>
-                  </a:tcPr>
-                </a:tc>
-                <a:tc>
-                  <a:txBody>
-                    <a:bodyPr/>
-                    <a:lstStyle/>
-                    <a:p>
-                      <a:pPr>
-                        <a:defRPr sz="650" b="0">
-                          <a:solidFill>
-                            <a:srgbClr val="0D1117"/>
-                          </a:solidFill>
-                          <a:latin typeface="Inter"/>
-                        </a:defRPr>
-                      </a:pPr>
-                      <a:r>
-                        <a:rPr>
-                          <a:latin typeface="Inter"/>
-                        </a:rPr>
-                        <a:t>analyze_strategy_lab_compare</a:t>
-                      </a:r>
-                    </a:p>
-                  </a:txBody>
-                  <a:tcPr marL="54864" marR="54864" marT="27432" marB="27432" anchor="ctr">
-                    <a:solidFill>
-                      <a:srgbClr val="FFFFFF"/>
-                    </a:solidFill>
-                  </a:tcPr>
-                </a:tc>
-                <a:tc>
-                  <a:txBody>
-                    <a:bodyPr/>
-                    <a:lstStyle/>
-                    <a:p>
-                      <a:pPr>
-                        <a:defRPr sz="650" b="0">
-                          <a:solidFill>
-                            <a:srgbClr val="0D1117"/>
-                          </a:solidFill>
-                          <a:latin typeface="Inter"/>
-                        </a:defRPr>
-                      </a:pPr>
-                      <a:r>
-                        <a:rPr>
-                          <a:latin typeface="Inter"/>
-                        </a:rPr>
-                        <a:t>manager=returns-test-northstar-select; benchmark=benchmark-test-northstar-broad-equity; status=advisory</a:t>
-                      </a:r>
-                    </a:p>
-                  </a:txBody>
-                  <a:tcPr marL="54864" marR="54864" marT="27432" marB="27432" anchor="ctr">
-                    <a:solidFill>
-                      <a:srgbClr val="FFFFFF"/>
-                    </a:solidFill>
-                  </a:tcPr>
-                </a:tc>
-                <a:tc>
-                  <a:txBody>
-                    <a:bodyPr/>
-                    <a:lstStyle/>
-                    <a:p>
-                      <a:pPr>
-                        <a:defRPr sz="650" b="0">
-                          <a:solidFill>
-                            <a:srgbClr val="0D1117"/>
-                          </a:solidFill>
-                          <a:latin typeface="Inter"/>
-                        </a:defRPr>
-                      </a:pPr>
-                      <a:r>
-                        <a:rPr>
-                          <a:latin typeface="Inter"/>
-                        </a:rPr>
-                        <a:t>2025-12-31</a:t>
-                      </a:r>
-                    </a:p>
-                  </a:txBody>
-                  <a:tcPr marL="54864" marR="54864" marT="27432" marB="27432" anchor="ctr">
-                    <a:solidFill>
-                      <a:srgbClr val="FFFFFF"/>
-                    </a:solidFill>
-                  </a:tcPr>
-                </a:tc>
-                <a:tc>
-                  <a:txBody>
-                    <a:bodyPr/>
-                    <a:lstStyle/>
-                    <a:p>
-                      <a:pPr>
-                        <a:defRPr sz="650" b="0">
-                          <a:solidFill>
-                            <a:srgbClr val="0D1117"/>
-                          </a:solidFill>
-                          <a:latin typeface="Inter"/>
-                        </a:defRPr>
-                      </a:pPr>
-                      <a:r>
-                        <a:rPr>
-                          <a:latin typeface="Inter"/>
-                        </a:rPr>
-                        <a:t>Same 72-month window; illustrative sample data</a:t>
-                      </a:r>
-                    </a:p>
-                  </a:txBody>
-                  <a:tcPr marL="54864" marR="54864" marT="27432" marB="27432" anchor="ctr">
-                    <a:solidFill>
-                      <a:srgbClr val="FFFFFF"/>
-                    </a:solidFill>
-                  </a:tcPr>
-                </a:tc>
-                <a:tc>
-                  <a:txBody>
-                    <a:bodyPr/>
-                    <a:lstStyle/>
-                    <a:p>
-                      <a:pPr>
-                        <a:defRPr sz="650" b="0">
-                          <a:solidFill>
-                            <a:srgbClr val="0D1117"/>
-                          </a:solidFill>
-                          <a:latin typeface="Inter"/>
-                        </a:defRPr>
-                      </a:pPr>
-                      <a:r>
-                        <a:rPr>
-                          <a:latin typeface="Inter"/>
-                        </a:rPr>
-                        <a:t>passed</a:t>
-                      </a:r>
-                    </a:p>
-                  </a:txBody>
-                  <a:tcPr marL="54864" marR="54864" marT="27432" marB="27432" anchor="ctr">
-                    <a:solidFill>
-                      <a:srgbClr val="FFFFFF"/>
-                    </a:solidFill>
-                  </a:tcPr>
-                </a:tc>
-                <a:tc>
-                  <a:txBody>
-                    <a:bodyPr/>
-                    <a:lstStyle/>
-                    <a:p>
-                      <a:pPr>
-                        <a:defRPr sz="650" b="0">
-                          <a:solidFill>
-                            <a:srgbClr val="0D1117"/>
-                          </a:solidFill>
-                          <a:latin typeface="Inter"/>
-                        </a:defRPr>
-                      </a:pPr>
-                      <a:r>
-                        <a:rPr>
-                          <a:latin typeface="Inter"/>
-                        </a:rPr>
-                        <a:t>sha256:eeeeeeeeeeeeeeeeeeeeeeeeeeeeeeeeeeeeeeeeeeeeeeeeeeeeeeeeeeeeeeee</a:t>
-                      </a:r>
-                    </a:p>
-                  </a:txBody>
-                  <a:tcPr marL="54864" marR="54864" marT="27432" marB="27432" anchor="ctr">
-                    <a:solidFill>
-                      <a:srgbClr val="FFFFFF"/>
                     </a:solidFill>
                   </a:tcPr>
                 </a:tc>
@@ -23469,7 +22012,779 @@
       </p:graphicFrame>
       <p:sp>
         <p:nvSpPr>
-          <p:cNvPr id="11" name="Rectangle 10"/>
+          <p:cNvPr id="10" name="TextBox 9"/>
+          <p:cNvSpPr txBox="1"/>
+          <p:nvPr/>
+        </p:nvSpPr>
+        <p:spPr>
+          <a:xfrm>
+            <a:off x="640080" y="3826763"/>
+            <a:ext cx="10908792" cy="201168"/>
+          </a:xfrm>
+          <a:prstGeom prst="rect">
+            <a:avLst/>
+          </a:prstGeom>
+          <a:noFill/>
+        </p:spPr>
+        <p:txBody>
+          <a:bodyPr wrap="none" lIns="9144" rIns="9144" tIns="9144" bIns="9144" anchor="t">
+            <a:spAutoFit/>
+          </a:bodyPr>
+          <a:lstStyle/>
+          <a:p>
+            <a:pPr algn="l">
+              <a:spcAft>
+                <a:spcPts val="0"/>
+              </a:spcAft>
+              <a:defRPr sz="720" b="1">
+                <a:solidFill>
+                  <a:srgbClr val="4A5563"/>
+                </a:solidFill>
+                <a:latin typeface="Inter"/>
+              </a:defRPr>
+            </a:pPr>
+            <a:r>
+              <a:rPr>
+                <a:latin typeface="Inter"/>
+              </a:rPr>
+              <a:t>SOURCE AUDIT TRAIL</a:t>
+            </a:r>
+          </a:p>
+        </p:txBody>
+      </p:sp>
+      <p:graphicFrame>
+        <p:nvGraphicFramePr>
+          <p:cNvPr id="11" name="Table 10"/>
+          <p:cNvGraphicFramePr>
+            <a:graphicFrameLocks noGrp="1"/>
+          </p:cNvGraphicFramePr>
+          <p:nvPr/>
+        </p:nvGraphicFramePr>
+        <p:xfrm>
+          <a:off x="640080" y="4101083"/>
+          <a:ext cx="10908792" cy="1915667"/>
+        </p:xfrm>
+        <a:graphic>
+          <a:graphicData uri="http://schemas.openxmlformats.org/drawingml/2006/table">
+            <a:tbl>
+              <a:tblPr firstRow="1" bandRow="1">
+                <a:tableStyleId>{5C22544A-7EE6-4342-B048-85BDC9FD1C3A}</a:tableStyleId>
+              </a:tblPr>
+              <a:tblGrid>
+                <a:gridCol w="2011680"/>
+                <a:gridCol w="2965704"/>
+                <a:gridCol w="2965704"/>
+                <a:gridCol w="2965704"/>
+              </a:tblGrid>
+              <a:tr h="319277">
+                <a:tc>
+                  <a:txBody>
+                    <a:bodyPr/>
+                    <a:lstStyle/>
+                    <a:p>
+                      <a:pPr>
+                        <a:defRPr sz="750" b="1">
+                          <a:solidFill>
+                            <a:srgbClr val="FFFFFF"/>
+                          </a:solidFill>
+                          <a:latin typeface="Inter"/>
+                        </a:defRPr>
+                      </a:pPr>
+                      <a:r>
+                        <a:rPr>
+                          <a:latin typeface="Inter"/>
+                        </a:rPr>
+                        <a:t>Tag</a:t>
+                      </a:r>
+                    </a:p>
+                  </a:txBody>
+                  <a:tcPr marL="54864" marR="54864" marT="27432" marB="27432" anchor="ctr">
+                    <a:solidFill>
+                      <a:srgbClr val="0D1117"/>
+                    </a:solidFill>
+                  </a:tcPr>
+                </a:tc>
+                <a:tc>
+                  <a:txBody>
+                    <a:bodyPr/>
+                    <a:lstStyle/>
+                    <a:p>
+                      <a:pPr>
+                        <a:defRPr sz="750" b="1">
+                          <a:solidFill>
+                            <a:srgbClr val="FFFFFF"/>
+                          </a:solidFill>
+                          <a:latin typeface="Inter"/>
+                        </a:defRPr>
+                      </a:pPr>
+                      <a:r>
+                        <a:rPr>
+                          <a:latin typeface="Inter"/>
+                        </a:rPr>
+                        <a:t>Key parameters</a:t>
+                      </a:r>
+                    </a:p>
+                  </a:txBody>
+                  <a:tcPr marL="54864" marR="54864" marT="27432" marB="27432" anchor="ctr">
+                    <a:solidFill>
+                      <a:srgbClr val="0D1117"/>
+                    </a:solidFill>
+                  </a:tcPr>
+                </a:tc>
+                <a:tc>
+                  <a:txBody>
+                    <a:bodyPr/>
+                    <a:lstStyle/>
+                    <a:p>
+                      <a:pPr>
+                        <a:defRPr sz="750" b="1">
+                          <a:solidFill>
+                            <a:srgbClr val="FFFFFF"/>
+                          </a:solidFill>
+                          <a:latin typeface="Inter"/>
+                        </a:defRPr>
+                      </a:pPr>
+                      <a:r>
+                        <a:rPr>
+                          <a:latin typeface="Inter"/>
+                        </a:rPr>
+                        <a:t>Data scope</a:t>
+                      </a:r>
+                    </a:p>
+                  </a:txBody>
+                  <a:tcPr marL="54864" marR="54864" marT="27432" marB="27432" anchor="ctr">
+                    <a:solidFill>
+                      <a:srgbClr val="0D1117"/>
+                    </a:solidFill>
+                  </a:tcPr>
+                </a:tc>
+                <a:tc>
+                  <a:txBody>
+                    <a:bodyPr/>
+                    <a:lstStyle/>
+                    <a:p>
+                      <a:pPr>
+                        <a:defRPr sz="750" b="1">
+                          <a:solidFill>
+                            <a:srgbClr val="FFFFFF"/>
+                          </a:solidFill>
+                          <a:latin typeface="Inter"/>
+                        </a:defRPr>
+                      </a:pPr>
+                      <a:r>
+                        <a:rPr>
+                          <a:latin typeface="Inter"/>
+                        </a:rPr>
+                        <a:t>Digest</a:t>
+                      </a:r>
+                    </a:p>
+                  </a:txBody>
+                  <a:tcPr marL="54864" marR="54864" marT="27432" marB="27432" anchor="ctr">
+                    <a:solidFill>
+                      <a:srgbClr val="0D1117"/>
+                    </a:solidFill>
+                  </a:tcPr>
+                </a:tc>
+              </a:tr>
+              <a:tr h="319277">
+                <a:tc>
+                  <a:txBody>
+                    <a:bodyPr/>
+                    <a:lstStyle/>
+                    <a:p>
+                      <a:pPr>
+                        <a:defRPr sz="800" b="1">
+                          <a:solidFill>
+                            <a:srgbClr val="0D1117"/>
+                          </a:solidFill>
+                          <a:latin typeface="Inter"/>
+                        </a:defRPr>
+                      </a:pPr>
+                      <a:r>
+                        <a:rPr>
+                          <a:latin typeface="Inter"/>
+                        </a:rPr>
+                        <a:t>S1</a:t>
+                      </a:r>
+                    </a:p>
+                  </a:txBody>
+                  <a:tcPr marL="54864" marR="54864" marT="27432" marB="27432" anchor="ctr">
+                    <a:solidFill>
+                      <a:srgbClr val="FFFFFF"/>
+                    </a:solidFill>
+                  </a:tcPr>
+                </a:tc>
+                <a:tc>
+                  <a:txBody>
+                    <a:bodyPr/>
+                    <a:lstStyle/>
+                    <a:p>
+                      <a:pPr>
+                        <a:defRPr sz="800" b="0">
+                          <a:solidFill>
+                            <a:srgbClr val="0D1117"/>
+                          </a:solidFill>
+                          <a:latin typeface="Inter"/>
+                        </a:defRPr>
+                      </a:pPr>
+                      <a:r>
+                        <a:rPr>
+                          <a:latin typeface="Inter"/>
+                        </a:rPr>
+                        <a:t>manager=returns-test-northstar-select; benchmark=benchmark-test-northstar-core-equity; start=2020-01-31; end=2025-12-31</a:t>
+                      </a:r>
+                    </a:p>
+                  </a:txBody>
+                  <a:tcPr marL="54864" marR="54864" marT="27432" marB="27432" anchor="ctr">
+                    <a:solidFill>
+                      <a:srgbClr val="FFFFFF"/>
+                    </a:solidFill>
+                  </a:tcPr>
+                </a:tc>
+                <a:tc>
+                  <a:txBody>
+                    <a:bodyPr/>
+                    <a:lstStyle/>
+                    <a:p>
+                      <a:pPr>
+                        <a:defRPr sz="800" b="0">
+                          <a:solidFill>
+                            <a:srgbClr val="0D1117"/>
+                          </a:solidFill>
+                          <a:latin typeface="Inter"/>
+                        </a:defRPr>
+                      </a:pPr>
+                      <a:r>
+                        <a:rPr>
+                          <a:latin typeface="Inter"/>
+                        </a:rPr>
+                        <a:t>72 monthly observations; USD total return; illustrative sample data</a:t>
+                      </a:r>
+                    </a:p>
+                  </a:txBody>
+                  <a:tcPr marL="54864" marR="54864" marT="27432" marB="27432" anchor="ctr">
+                    <a:solidFill>
+                      <a:srgbClr val="FFFFFF"/>
+                    </a:solidFill>
+                  </a:tcPr>
+                </a:tc>
+                <a:tc>
+                  <a:txBody>
+                    <a:bodyPr/>
+                    <a:lstStyle/>
+                    <a:p>
+                      <a:pPr>
+                        <a:defRPr sz="800" b="0">
+                          <a:solidFill>
+                            <a:srgbClr val="0D1117"/>
+                          </a:solidFill>
+                          <a:latin typeface="Inter"/>
+                        </a:defRPr>
+                      </a:pPr>
+                      <a:r>
+                        <a:rPr>
+                          <a:latin typeface="Inter"/>
+                        </a:rPr>
+                        <a:t>sha256:aaaaaaaaaaaaaaaaaaaaaaaaaaaaaaaaaaaaaaaaaaaaaaaaaaaaaaaaaaaaaaaa</a:t>
+                      </a:r>
+                    </a:p>
+                  </a:txBody>
+                  <a:tcPr marL="54864" marR="54864" marT="27432" marB="27432" anchor="ctr">
+                    <a:solidFill>
+                      <a:srgbClr val="FFFFFF"/>
+                    </a:solidFill>
+                  </a:tcPr>
+                </a:tc>
+              </a:tr>
+              <a:tr h="319277">
+                <a:tc>
+                  <a:txBody>
+                    <a:bodyPr/>
+                    <a:lstStyle/>
+                    <a:p>
+                      <a:pPr>
+                        <a:defRPr sz="800" b="1">
+                          <a:solidFill>
+                            <a:srgbClr val="0D1117"/>
+                          </a:solidFill>
+                          <a:latin typeface="Inter"/>
+                        </a:defRPr>
+                      </a:pPr>
+                      <a:r>
+                        <a:rPr>
+                          <a:latin typeface="Inter"/>
+                        </a:rPr>
+                        <a:t>S2</a:t>
+                      </a:r>
+                    </a:p>
+                  </a:txBody>
+                  <a:tcPr marL="54864" marR="54864" marT="27432" marB="27432" anchor="ctr">
+                    <a:solidFill>
+                      <a:srgbClr val="F5F7F9"/>
+                    </a:solidFill>
+                  </a:tcPr>
+                </a:tc>
+                <a:tc>
+                  <a:txBody>
+                    <a:bodyPr/>
+                    <a:lstStyle/>
+                    <a:p>
+                      <a:pPr>
+                        <a:defRPr sz="800" b="0">
+                          <a:solidFill>
+                            <a:srgbClr val="0D1117"/>
+                          </a:solidFill>
+                          <a:latin typeface="Inter"/>
+                        </a:defRPr>
+                      </a:pPr>
+                      <a:r>
+                        <a:rPr>
+                          <a:latin typeface="Inter"/>
+                        </a:rPr>
+                        <a:t>manager=returns-test-northstar-select; benchmark=benchmark-test-northstar-core-equity; rolling_months=12,36</a:t>
+                      </a:r>
+                    </a:p>
+                  </a:txBody>
+                  <a:tcPr marL="54864" marR="54864" marT="27432" marB="27432" anchor="ctr">
+                    <a:solidFill>
+                      <a:srgbClr val="F5F7F9"/>
+                    </a:solidFill>
+                  </a:tcPr>
+                </a:tc>
+                <a:tc>
+                  <a:txBody>
+                    <a:bodyPr/>
+                    <a:lstStyle/>
+                    <a:p>
+                      <a:pPr>
+                        <a:defRPr sz="800" b="0">
+                          <a:solidFill>
+                            <a:srgbClr val="0D1117"/>
+                          </a:solidFill>
+                          <a:latin typeface="Inter"/>
+                        </a:defRPr>
+                      </a:pPr>
+                      <a:r>
+                        <a:rPr>
+                          <a:latin typeface="Inter"/>
+                        </a:rPr>
+                        <a:t>Common 72-month manager/benchmark window; illustrative sample data</a:t>
+                      </a:r>
+                    </a:p>
+                  </a:txBody>
+                  <a:tcPr marL="54864" marR="54864" marT="27432" marB="27432" anchor="ctr">
+                    <a:solidFill>
+                      <a:srgbClr val="F5F7F9"/>
+                    </a:solidFill>
+                  </a:tcPr>
+                </a:tc>
+                <a:tc>
+                  <a:txBody>
+                    <a:bodyPr/>
+                    <a:lstStyle/>
+                    <a:p>
+                      <a:pPr>
+                        <a:defRPr sz="800" b="0">
+                          <a:solidFill>
+                            <a:srgbClr val="0D1117"/>
+                          </a:solidFill>
+                          <a:latin typeface="Inter"/>
+                        </a:defRPr>
+                      </a:pPr>
+                      <a:r>
+                        <a:rPr>
+                          <a:latin typeface="Inter"/>
+                        </a:rPr>
+                        <a:t>sha256:bbbbbbbbbbbbbbbbbbbbbbbbbbbbbbbbbbbbbbbbbbbbbbbbbbbbbbbbbbbbbbbb</a:t>
+                      </a:r>
+                    </a:p>
+                  </a:txBody>
+                  <a:tcPr marL="54864" marR="54864" marT="27432" marB="27432" anchor="ctr">
+                    <a:solidFill>
+                      <a:srgbClr val="F5F7F9"/>
+                    </a:solidFill>
+                  </a:tcPr>
+                </a:tc>
+              </a:tr>
+              <a:tr h="319277">
+                <a:tc>
+                  <a:txBody>
+                    <a:bodyPr/>
+                    <a:lstStyle/>
+                    <a:p>
+                      <a:pPr>
+                        <a:defRPr sz="800" b="1">
+                          <a:solidFill>
+                            <a:srgbClr val="0D1117"/>
+                          </a:solidFill>
+                          <a:latin typeface="Inter"/>
+                        </a:defRPr>
+                      </a:pPr>
+                      <a:r>
+                        <a:rPr>
+                          <a:latin typeface="Inter"/>
+                        </a:rPr>
+                        <a:t>S3</a:t>
+                      </a:r>
+                    </a:p>
+                  </a:txBody>
+                  <a:tcPr marL="54864" marR="54864" marT="27432" marB="27432" anchor="ctr">
+                    <a:solidFill>
+                      <a:srgbClr val="FFFFFF"/>
+                    </a:solidFill>
+                  </a:tcPr>
+                </a:tc>
+                <a:tc>
+                  <a:txBody>
+                    <a:bodyPr/>
+                    <a:lstStyle/>
+                    <a:p>
+                      <a:pPr>
+                        <a:defRPr sz="800" b="0">
+                          <a:solidFill>
+                            <a:srgbClr val="0D1117"/>
+                          </a:solidFill>
+                          <a:latin typeface="Inter"/>
+                        </a:defRPr>
+                      </a:pPr>
+                      <a:r>
+                        <a:rPr>
+                          <a:latin typeface="Inter"/>
+                        </a:rPr>
+                        <a:t>starts=2020-01-31,2021-01-31,2022-01-31,2023-01-31; end=2025-12-31</a:t>
+                      </a:r>
+                    </a:p>
+                  </a:txBody>
+                  <a:tcPr marL="54864" marR="54864" marT="27432" marB="27432" anchor="ctr">
+                    <a:solidFill>
+                      <a:srgbClr val="FFFFFF"/>
+                    </a:solidFill>
+                  </a:tcPr>
+                </a:tc>
+                <a:tc>
+                  <a:txBody>
+                    <a:bodyPr/>
+                    <a:lstStyle/>
+                    <a:p>
+                      <a:pPr>
+                        <a:defRPr sz="800" b="0">
+                          <a:solidFill>
+                            <a:srgbClr val="0D1117"/>
+                          </a:solidFill>
+                          <a:latin typeface="Inter"/>
+                        </a:defRPr>
+                      </a:pPr>
+                      <a:r>
+                        <a:rPr>
+                          <a:latin typeface="Inter"/>
+                        </a:rPr>
+                        <a:t>Four returned start-date windows; illustrative sample data</a:t>
+                      </a:r>
+                    </a:p>
+                  </a:txBody>
+                  <a:tcPr marL="54864" marR="54864" marT="27432" marB="27432" anchor="ctr">
+                    <a:solidFill>
+                      <a:srgbClr val="FFFFFF"/>
+                    </a:solidFill>
+                  </a:tcPr>
+                </a:tc>
+                <a:tc>
+                  <a:txBody>
+                    <a:bodyPr/>
+                    <a:lstStyle/>
+                    <a:p>
+                      <a:pPr>
+                        <a:defRPr sz="800" b="0">
+                          <a:solidFill>
+                            <a:srgbClr val="0D1117"/>
+                          </a:solidFill>
+                          <a:latin typeface="Inter"/>
+                        </a:defRPr>
+                      </a:pPr>
+                      <a:r>
+                        <a:rPr>
+                          <a:latin typeface="Inter"/>
+                        </a:rPr>
+                        <a:t>sha256:cccccccccccccccccccccccccccccccccccccccccccccccccccccccccccccccc</a:t>
+                      </a:r>
+                    </a:p>
+                  </a:txBody>
+                  <a:tcPr marL="54864" marR="54864" marT="27432" marB="27432" anchor="ctr">
+                    <a:solidFill>
+                      <a:srgbClr val="FFFFFF"/>
+                    </a:solidFill>
+                  </a:tcPr>
+                </a:tc>
+              </a:tr>
+              <a:tr h="319277">
+                <a:tc>
+                  <a:txBody>
+                    <a:bodyPr/>
+                    <a:lstStyle/>
+                    <a:p>
+                      <a:pPr>
+                        <a:defRPr sz="800" b="1">
+                          <a:solidFill>
+                            <a:srgbClr val="0D1117"/>
+                          </a:solidFill>
+                          <a:latin typeface="Inter"/>
+                        </a:defRPr>
+                      </a:pPr>
+                      <a:r>
+                        <a:rPr>
+                          <a:latin typeface="Inter"/>
+                        </a:rPr>
+                        <a:t>S4</a:t>
+                      </a:r>
+                    </a:p>
+                  </a:txBody>
+                  <a:tcPr marL="54864" marR="54864" marT="27432" marB="27432" anchor="ctr">
+                    <a:solidFill>
+                      <a:srgbClr val="F5F7F9"/>
+                    </a:solidFill>
+                  </a:tcPr>
+                </a:tc>
+                <a:tc>
+                  <a:txBody>
+                    <a:bodyPr/>
+                    <a:lstStyle/>
+                    <a:p>
+                      <a:pPr>
+                        <a:defRPr sz="800" b="0">
+                          <a:solidFill>
+                            <a:srgbClr val="0D1117"/>
+                          </a:solidFill>
+                          <a:latin typeface="Inter"/>
+                        </a:defRPr>
+                      </a:pPr>
+                      <a:r>
+                        <a:rPr>
+                          <a:latin typeface="Inter"/>
+                        </a:rPr>
+                        <a:t>horizon=10y; outputs=annualized_return,annualized_volatility,terminal_wealth_median</a:t>
+                      </a:r>
+                    </a:p>
+                  </a:txBody>
+                  <a:tcPr marL="54864" marR="54864" marT="27432" marB="27432" anchor="ctr">
+                    <a:solidFill>
+                      <a:srgbClr val="F5F7F9"/>
+                    </a:solidFill>
+                  </a:tcPr>
+                </a:tc>
+                <a:tc>
+                  <a:txBody>
+                    <a:bodyPr/>
+                    <a:lstStyle/>
+                    <a:p>
+                      <a:pPr>
+                        <a:defRPr sz="800" b="0">
+                          <a:solidFill>
+                            <a:srgbClr val="0D1117"/>
+                          </a:solidFill>
+                          <a:latin typeface="Inter"/>
+                        </a:defRPr>
+                      </a:pPr>
+                      <a:r>
+                        <a:rPr>
+                          <a:latin typeface="Inter"/>
+                        </a:rPr>
+                        <a:t>Server-returned model outputs; illustrative sample data</a:t>
+                      </a:r>
+                    </a:p>
+                  </a:txBody>
+                  <a:tcPr marL="54864" marR="54864" marT="27432" marB="27432" anchor="ctr">
+                    <a:solidFill>
+                      <a:srgbClr val="F5F7F9"/>
+                    </a:solidFill>
+                  </a:tcPr>
+                </a:tc>
+                <a:tc>
+                  <a:txBody>
+                    <a:bodyPr/>
+                    <a:lstStyle/>
+                    <a:p>
+                      <a:pPr>
+                        <a:defRPr sz="800" b="0">
+                          <a:solidFill>
+                            <a:srgbClr val="0D1117"/>
+                          </a:solidFill>
+                          <a:latin typeface="Inter"/>
+                        </a:defRPr>
+                      </a:pPr>
+                      <a:r>
+                        <a:rPr>
+                          <a:latin typeface="Inter"/>
+                        </a:rPr>
+                        <a:t>sha256:dddddddddddddddddddddddddddddddddddddddddddddddddddddddddddddddd</a:t>
+                      </a:r>
+                    </a:p>
+                  </a:txBody>
+                  <a:tcPr marL="54864" marR="54864" marT="27432" marB="27432" anchor="ctr">
+                    <a:solidFill>
+                      <a:srgbClr val="F5F7F9"/>
+                    </a:solidFill>
+                  </a:tcPr>
+                </a:tc>
+              </a:tr>
+              <a:tr h="319282">
+                <a:tc>
+                  <a:txBody>
+                    <a:bodyPr/>
+                    <a:lstStyle/>
+                    <a:p>
+                      <a:pPr>
+                        <a:defRPr sz="800" b="1">
+                          <a:solidFill>
+                            <a:srgbClr val="0D1117"/>
+                          </a:solidFill>
+                          <a:latin typeface="Inter"/>
+                        </a:defRPr>
+                      </a:pPr>
+                      <a:r>
+                        <a:rPr>
+                          <a:latin typeface="Inter"/>
+                        </a:rPr>
+                        <a:t>S5</a:t>
+                      </a:r>
+                    </a:p>
+                  </a:txBody>
+                  <a:tcPr marL="54864" marR="54864" marT="27432" marB="27432" anchor="ctr">
+                    <a:solidFill>
+                      <a:srgbClr val="FFFFFF"/>
+                    </a:solidFill>
+                  </a:tcPr>
+                </a:tc>
+                <a:tc>
+                  <a:txBody>
+                    <a:bodyPr/>
+                    <a:lstStyle/>
+                    <a:p>
+                      <a:pPr>
+                        <a:defRPr sz="800" b="0">
+                          <a:solidFill>
+                            <a:srgbClr val="0D1117"/>
+                          </a:solidFill>
+                          <a:latin typeface="Inter"/>
+                        </a:defRPr>
+                      </a:pPr>
+                      <a:r>
+                        <a:rPr>
+                          <a:latin typeface="Inter"/>
+                        </a:rPr>
+                        <a:t>manager=returns-test-northstar-select; benchmark=benchmark-test-northstar-broad-equity; status=advisory</a:t>
+                      </a:r>
+                    </a:p>
+                  </a:txBody>
+                  <a:tcPr marL="54864" marR="54864" marT="27432" marB="27432" anchor="ctr">
+                    <a:solidFill>
+                      <a:srgbClr val="FFFFFF"/>
+                    </a:solidFill>
+                  </a:tcPr>
+                </a:tc>
+                <a:tc>
+                  <a:txBody>
+                    <a:bodyPr/>
+                    <a:lstStyle/>
+                    <a:p>
+                      <a:pPr>
+                        <a:defRPr sz="800" b="0">
+                          <a:solidFill>
+                            <a:srgbClr val="0D1117"/>
+                          </a:solidFill>
+                          <a:latin typeface="Inter"/>
+                        </a:defRPr>
+                      </a:pPr>
+                      <a:r>
+                        <a:rPr>
+                          <a:latin typeface="Inter"/>
+                        </a:rPr>
+                        <a:t>Same 72-month window; illustrative sample data</a:t>
+                      </a:r>
+                    </a:p>
+                  </a:txBody>
+                  <a:tcPr marL="54864" marR="54864" marT="27432" marB="27432" anchor="ctr">
+                    <a:solidFill>
+                      <a:srgbClr val="FFFFFF"/>
+                    </a:solidFill>
+                  </a:tcPr>
+                </a:tc>
+                <a:tc>
+                  <a:txBody>
+                    <a:bodyPr/>
+                    <a:lstStyle/>
+                    <a:p>
+                      <a:pPr>
+                        <a:defRPr sz="800" b="0">
+                          <a:solidFill>
+                            <a:srgbClr val="0D1117"/>
+                          </a:solidFill>
+                          <a:latin typeface="Inter"/>
+                        </a:defRPr>
+                      </a:pPr>
+                      <a:r>
+                        <a:rPr>
+                          <a:latin typeface="Inter"/>
+                        </a:rPr>
+                        <a:t>sha256:eeeeeeeeeeeeeeeeeeeeeeeeeeeeeeeeeeeeeeeeeeeeeeeeeeeeeeeeeeeeeeee</a:t>
+                      </a:r>
+                    </a:p>
+                  </a:txBody>
+                  <a:tcPr marL="54864" marR="54864" marT="27432" marB="27432" anchor="ctr">
+                    <a:solidFill>
+                      <a:srgbClr val="FFFFFF"/>
+                    </a:solidFill>
+                  </a:tcPr>
+                </a:tc>
+              </a:tr>
+            </a:tbl>
+          </a:graphicData>
+        </a:graphic>
+      </p:graphicFrame>
+      <p:sp>
+        <p:nvSpPr>
+          <p:cNvPr id="12" name="TextBox 11"/>
+          <p:cNvSpPr txBox="1"/>
+          <p:nvPr/>
+        </p:nvSpPr>
+        <p:spPr>
+          <a:xfrm>
+            <a:off x="640080" y="6035039"/>
+            <a:ext cx="10908792" cy="164592"/>
+          </a:xfrm>
+          <a:prstGeom prst="rect">
+            <a:avLst/>
+          </a:prstGeom>
+          <a:noFill/>
+        </p:spPr>
+        <p:txBody>
+          <a:bodyPr wrap="none" lIns="9144" rIns="9144" tIns="9144" bIns="9144" anchor="t">
+            <a:spAutoFit/>
+          </a:bodyPr>
+          <a:lstStyle/>
+          <a:p>
+            <a:pPr algn="l">
+              <a:spcAft>
+                <a:spcPts val="0"/>
+              </a:spcAft>
+              <a:defRPr sz="680" b="0">
+                <a:solidFill>
+                  <a:srgbClr val="8A94A1"/>
+                </a:solidFill>
+                <a:latin typeface="Inter"/>
+              </a:defRPr>
+            </a:pPr>
+            <a:r>
+              <a:rPr>
+                <a:latin typeface="Inter"/>
+              </a:rPr>
+              <a:t>Each digest is the SHA-256 fingerprint of the exact data the report used.</a:t>
+            </a:r>
+          </a:p>
+        </p:txBody>
+      </p:sp>
+      <p:sp>
+        <p:nvSpPr>
+          <p:cNvPr id="13" name="Rectangle 12"/>
           <p:cNvSpPr/>
           <p:nvPr/>
         </p:nvSpPr>
@@ -23518,7 +22833,7 @@
       </p:sp>
       <p:sp>
         <p:nvSpPr>
-          <p:cNvPr id="12" name="TextBox 11"/>
+          <p:cNvPr id="14" name="TextBox 13"/>
           <p:cNvSpPr txBox="1"/>
           <p:nvPr/>
         </p:nvSpPr>
@@ -23560,7 +22875,7 @@
       </p:sp>
       <p:sp>
         <p:nvSpPr>
-          <p:cNvPr id="13" name="TextBox 12"/>
+          <p:cNvPr id="15" name="TextBox 14"/>
           <p:cNvSpPr txBox="1"/>
           <p:nvPr/>
         </p:nvSpPr>
@@ -23602,7 +22917,7 @@
       </p:sp>
       <p:sp>
         <p:nvSpPr>
-          <p:cNvPr id="14" name="TextBox 13"/>
+          <p:cNvPr id="16" name="TextBox 15"/>
           <p:cNvSpPr txBox="1"/>
           <p:nvPr/>
         </p:nvSpPr>
@@ -23718,7 +23033,7 @@
         <p:spPr>
           <a:xfrm>
             <a:off x="640080" y="329184"/>
-            <a:ext cx="5303520" cy="182880"/>
+            <a:ext cx="9875520" cy="182880"/>
           </a:xfrm>
           <a:prstGeom prst="rect">
             <a:avLst/>
@@ -23759,48 +23074,6 @@
         </p:nvSpPr>
         <p:spPr>
           <a:xfrm>
-            <a:off x="5897880" y="310896"/>
-            <a:ext cx="4800600" cy="256032"/>
-          </a:xfrm>
-          <a:prstGeom prst="rect">
-            <a:avLst/>
-          </a:prstGeom>
-          <a:noFill/>
-        </p:spPr>
-        <p:txBody>
-          <a:bodyPr wrap="none" lIns="9144" rIns="9144" tIns="9144" bIns="9144" anchor="t">
-            <a:spAutoFit/>
-          </a:bodyPr>
-          <a:lstStyle/>
-          <a:p>
-            <a:pPr algn="r">
-              <a:spcAft>
-                <a:spcPts val="0"/>
-              </a:spcAft>
-              <a:defRPr sz="680" b="1">
-                <a:solidFill>
-                  <a:srgbClr val="4F6B00"/>
-                </a:solidFill>
-                <a:latin typeface="Inter"/>
-              </a:defRPr>
-            </a:pPr>
-            <a:r>
-              <a:rPr>
-                <a:latin typeface="Inter"/>
-              </a:rPr>
-              <a:t>Illustrative, Gradient Maintained — demo data, not the client's holdings or managers</a:t>
-            </a:r>
-          </a:p>
-        </p:txBody>
-      </p:sp>
-      <p:sp>
-        <p:nvSpPr>
-          <p:cNvPr id="5" name="TextBox 4"/>
-          <p:cNvSpPr txBox="1"/>
-          <p:nvPr/>
-        </p:nvSpPr>
-        <p:spPr>
-          <a:xfrm>
             <a:off x="640080" y="566928"/>
             <a:ext cx="10058400" cy="530352"/>
           </a:xfrm>
@@ -23837,7 +23110,7 @@
       </p:sp>
       <p:sp>
         <p:nvSpPr>
-          <p:cNvPr id="6" name="Rectangle 5"/>
+          <p:cNvPr id="5" name="Rectangle 4"/>
           <p:cNvSpPr/>
           <p:nvPr/>
         </p:nvSpPr>
@@ -23886,7 +23159,7 @@
       </p:sp>
       <p:sp>
         <p:nvSpPr>
-          <p:cNvPr id="7" name="Rectangle 6"/>
+          <p:cNvPr id="6" name="Rectangle 5"/>
           <p:cNvSpPr/>
           <p:nvPr/>
         </p:nvSpPr>
@@ -23935,7 +23208,7 @@
       </p:sp>
       <p:sp>
         <p:nvSpPr>
-          <p:cNvPr id="8" name="TextBox 7"/>
+          <p:cNvPr id="7" name="TextBox 6"/>
           <p:cNvSpPr txBox="1"/>
           <p:nvPr/>
         </p:nvSpPr>
@@ -23977,7 +23250,7 @@
       </p:sp>
       <p:sp>
         <p:nvSpPr>
-          <p:cNvPr id="9" name="Rectangle 8"/>
+          <p:cNvPr id="8" name="Rectangle 7"/>
           <p:cNvSpPr/>
           <p:nvPr/>
         </p:nvSpPr>
@@ -24026,7 +23299,7 @@
       </p:sp>
       <p:sp>
         <p:nvSpPr>
-          <p:cNvPr id="10" name="Rectangle 9"/>
+          <p:cNvPr id="9" name="Rectangle 8"/>
           <p:cNvSpPr/>
           <p:nvPr/>
         </p:nvSpPr>
@@ -24075,7 +23348,7 @@
       </p:sp>
       <p:sp>
         <p:nvSpPr>
-          <p:cNvPr id="11" name="TextBox 10"/>
+          <p:cNvPr id="10" name="TextBox 9"/>
           <p:cNvSpPr txBox="1"/>
           <p:nvPr/>
         </p:nvSpPr>
@@ -24117,7 +23390,7 @@
       </p:sp>
       <p:sp>
         <p:nvSpPr>
-          <p:cNvPr id="12" name="TextBox 11"/>
+          <p:cNvPr id="11" name="TextBox 10"/>
           <p:cNvSpPr txBox="1"/>
           <p:nvPr/>
         </p:nvSpPr>
@@ -24159,7 +23432,7 @@
       </p:sp>
       <p:sp>
         <p:nvSpPr>
-          <p:cNvPr id="13" name="Rectangle 12"/>
+          <p:cNvPr id="12" name="Rectangle 11"/>
           <p:cNvSpPr/>
           <p:nvPr/>
         </p:nvSpPr>
@@ -24208,7 +23481,7 @@
       </p:sp>
       <p:sp>
         <p:nvSpPr>
-          <p:cNvPr id="14" name="TextBox 13"/>
+          <p:cNvPr id="13" name="TextBox 12"/>
           <p:cNvSpPr txBox="1"/>
           <p:nvPr/>
         </p:nvSpPr>
@@ -24250,7 +23523,7 @@
       </p:sp>
       <p:sp>
         <p:nvSpPr>
-          <p:cNvPr id="15" name="TextBox 14"/>
+          <p:cNvPr id="14" name="TextBox 13"/>
           <p:cNvSpPr txBox="1"/>
           <p:nvPr/>
         </p:nvSpPr>
@@ -24292,7 +23565,7 @@
       </p:sp>
       <p:sp>
         <p:nvSpPr>
-          <p:cNvPr id="16" name="TextBox 15"/>
+          <p:cNvPr id="15" name="TextBox 14"/>
           <p:cNvSpPr txBox="1"/>
           <p:nvPr/>
         </p:nvSpPr>
@@ -24408,7 +23681,7 @@
         <p:spPr>
           <a:xfrm>
             <a:off x="640080" y="329184"/>
-            <a:ext cx="5303520" cy="182880"/>
+            <a:ext cx="9875520" cy="182880"/>
           </a:xfrm>
           <a:prstGeom prst="rect">
             <a:avLst/>
@@ -24449,48 +23722,6 @@
         </p:nvSpPr>
         <p:spPr>
           <a:xfrm>
-            <a:off x="5897880" y="310896"/>
-            <a:ext cx="4800600" cy="256032"/>
-          </a:xfrm>
-          <a:prstGeom prst="rect">
-            <a:avLst/>
-          </a:prstGeom>
-          <a:noFill/>
-        </p:spPr>
-        <p:txBody>
-          <a:bodyPr wrap="none" lIns="9144" rIns="9144" tIns="9144" bIns="9144" anchor="t">
-            <a:spAutoFit/>
-          </a:bodyPr>
-          <a:lstStyle/>
-          <a:p>
-            <a:pPr algn="r">
-              <a:spcAft>
-                <a:spcPts val="0"/>
-              </a:spcAft>
-              <a:defRPr sz="680" b="1">
-                <a:solidFill>
-                  <a:srgbClr val="4F6B00"/>
-                </a:solidFill>
-                <a:latin typeface="Inter"/>
-              </a:defRPr>
-            </a:pPr>
-            <a:r>
-              <a:rPr>
-                <a:latin typeface="Inter"/>
-              </a:rPr>
-              <a:t>Illustrative, Gradient Maintained — demo data, not the client's holdings or managers</a:t>
-            </a:r>
-          </a:p>
-        </p:txBody>
-      </p:sp>
-      <p:sp>
-        <p:nvSpPr>
-          <p:cNvPr id="5" name="TextBox 4"/>
-          <p:cNvSpPr txBox="1"/>
-          <p:nvPr/>
-        </p:nvSpPr>
-        <p:spPr>
-          <a:xfrm>
             <a:off x="640080" y="566928"/>
             <a:ext cx="10058400" cy="530352"/>
           </a:xfrm>
@@ -24527,7 +23758,7 @@
       </p:sp>
       <p:sp>
         <p:nvSpPr>
-          <p:cNvPr id="6" name="Rectangle 5"/>
+          <p:cNvPr id="5" name="Rectangle 4"/>
           <p:cNvSpPr/>
           <p:nvPr/>
         </p:nvSpPr>
@@ -24576,7 +23807,7 @@
       </p:sp>
       <p:sp>
         <p:nvSpPr>
-          <p:cNvPr id="7" name="Rectangle 6"/>
+          <p:cNvPr id="6" name="Rectangle 5"/>
           <p:cNvSpPr/>
           <p:nvPr/>
         </p:nvSpPr>
@@ -24625,7 +23856,7 @@
       </p:sp>
       <p:sp>
         <p:nvSpPr>
-          <p:cNvPr id="8" name="TextBox 7"/>
+          <p:cNvPr id="7" name="TextBox 6"/>
           <p:cNvSpPr txBox="1"/>
           <p:nvPr/>
         </p:nvSpPr>
@@ -24667,7 +23898,7 @@
       </p:sp>
       <p:sp>
         <p:nvSpPr>
-          <p:cNvPr id="9" name="TextBox 8"/>
+          <p:cNvPr id="8" name="TextBox 7"/>
           <p:cNvSpPr txBox="1"/>
           <p:nvPr/>
         </p:nvSpPr>
@@ -24709,7 +23940,7 @@
       </p:sp>
       <p:graphicFrame>
         <p:nvGraphicFramePr>
-          <p:cNvPr id="10" name="Chart 9"/>
+          <p:cNvPr id="9" name="Chart 8"/>
           <p:cNvGraphicFramePr>
             <a:graphicFrameLocks noGrp="1"/>
           </p:cNvGraphicFramePr>
@@ -24727,7 +23958,7 @@
       </p:graphicFrame>
       <p:sp>
         <p:nvSpPr>
-          <p:cNvPr id="11" name="Rectangle 10"/>
+          <p:cNvPr id="10" name="Rectangle 9"/>
           <p:cNvSpPr/>
           <p:nvPr/>
         </p:nvSpPr>
@@ -24776,7 +24007,7 @@
       </p:sp>
       <p:sp>
         <p:nvSpPr>
-          <p:cNvPr id="12" name="TextBox 11"/>
+          <p:cNvPr id="11" name="TextBox 10"/>
           <p:cNvSpPr txBox="1"/>
           <p:nvPr/>
         </p:nvSpPr>
@@ -24818,7 +24049,7 @@
       </p:sp>
       <p:sp>
         <p:nvSpPr>
-          <p:cNvPr id="13" name="TextBox 12"/>
+          <p:cNvPr id="12" name="TextBox 11"/>
           <p:cNvSpPr txBox="1"/>
           <p:nvPr/>
         </p:nvSpPr>
@@ -24860,7 +24091,7 @@
       </p:sp>
       <p:sp>
         <p:nvSpPr>
-          <p:cNvPr id="14" name="TextBox 13"/>
+          <p:cNvPr id="13" name="TextBox 12"/>
           <p:cNvSpPr txBox="1"/>
           <p:nvPr/>
         </p:nvSpPr>
@@ -24976,7 +24207,7 @@
         <p:spPr>
           <a:xfrm>
             <a:off x="640080" y="329184"/>
-            <a:ext cx="5303520" cy="182880"/>
+            <a:ext cx="9875520" cy="182880"/>
           </a:xfrm>
           <a:prstGeom prst="rect">
             <a:avLst/>
@@ -25017,48 +24248,6 @@
         </p:nvSpPr>
         <p:spPr>
           <a:xfrm>
-            <a:off x="5897880" y="310896"/>
-            <a:ext cx="4800600" cy="256032"/>
-          </a:xfrm>
-          <a:prstGeom prst="rect">
-            <a:avLst/>
-          </a:prstGeom>
-          <a:noFill/>
-        </p:spPr>
-        <p:txBody>
-          <a:bodyPr wrap="none" lIns="9144" rIns="9144" tIns="9144" bIns="9144" anchor="t">
-            <a:spAutoFit/>
-          </a:bodyPr>
-          <a:lstStyle/>
-          <a:p>
-            <a:pPr algn="r">
-              <a:spcAft>
-                <a:spcPts val="0"/>
-              </a:spcAft>
-              <a:defRPr sz="680" b="1">
-                <a:solidFill>
-                  <a:srgbClr val="4F6B00"/>
-                </a:solidFill>
-                <a:latin typeface="Inter"/>
-              </a:defRPr>
-            </a:pPr>
-            <a:r>
-              <a:rPr>
-                <a:latin typeface="Inter"/>
-              </a:rPr>
-              <a:t>Illustrative, Gradient Maintained — demo data, not the client's holdings or managers</a:t>
-            </a:r>
-          </a:p>
-        </p:txBody>
-      </p:sp>
-      <p:sp>
-        <p:nvSpPr>
-          <p:cNvPr id="5" name="TextBox 4"/>
-          <p:cNvSpPr txBox="1"/>
-          <p:nvPr/>
-        </p:nvSpPr>
-        <p:spPr>
-          <a:xfrm>
             <a:off x="640080" y="566928"/>
             <a:ext cx="10058400" cy="530352"/>
           </a:xfrm>
@@ -25095,7 +24284,7 @@
       </p:sp>
       <p:sp>
         <p:nvSpPr>
-          <p:cNvPr id="6" name="Rectangle 5"/>
+          <p:cNvPr id="5" name="Rectangle 4"/>
           <p:cNvSpPr/>
           <p:nvPr/>
         </p:nvSpPr>
@@ -25144,7 +24333,7 @@
       </p:sp>
       <p:sp>
         <p:nvSpPr>
-          <p:cNvPr id="7" name="Rectangle 6"/>
+          <p:cNvPr id="6" name="Rectangle 5"/>
           <p:cNvSpPr/>
           <p:nvPr/>
         </p:nvSpPr>
@@ -25193,7 +24382,7 @@
       </p:sp>
       <p:sp>
         <p:nvSpPr>
-          <p:cNvPr id="8" name="TextBox 7"/>
+          <p:cNvPr id="7" name="TextBox 6"/>
           <p:cNvSpPr txBox="1"/>
           <p:nvPr/>
         </p:nvSpPr>
@@ -25235,7 +24424,7 @@
       </p:sp>
       <p:sp>
         <p:nvSpPr>
-          <p:cNvPr id="9" name="TextBox 8"/>
+          <p:cNvPr id="8" name="TextBox 7"/>
           <p:cNvSpPr txBox="1"/>
           <p:nvPr/>
         </p:nvSpPr>
@@ -25277,7 +24466,7 @@
       </p:sp>
       <p:graphicFrame>
         <p:nvGraphicFramePr>
-          <p:cNvPr id="10" name="Chart 9"/>
+          <p:cNvPr id="9" name="Chart 8"/>
           <p:cNvGraphicFramePr>
             <a:graphicFrameLocks noGrp="1"/>
           </p:cNvGraphicFramePr>
@@ -25295,7 +24484,7 @@
       </p:graphicFrame>
       <p:sp>
         <p:nvSpPr>
-          <p:cNvPr id="11" name="Rectangle 10"/>
+          <p:cNvPr id="10" name="Rectangle 9"/>
           <p:cNvSpPr/>
           <p:nvPr/>
         </p:nvSpPr>
@@ -25344,7 +24533,7 @@
       </p:sp>
       <p:sp>
         <p:nvSpPr>
-          <p:cNvPr id="12" name="TextBox 11"/>
+          <p:cNvPr id="11" name="TextBox 10"/>
           <p:cNvSpPr txBox="1"/>
           <p:nvPr/>
         </p:nvSpPr>
@@ -25386,7 +24575,7 @@
       </p:sp>
       <p:sp>
         <p:nvSpPr>
-          <p:cNvPr id="13" name="TextBox 12"/>
+          <p:cNvPr id="12" name="TextBox 11"/>
           <p:cNvSpPr txBox="1"/>
           <p:nvPr/>
         </p:nvSpPr>
@@ -25428,7 +24617,7 @@
       </p:sp>
       <p:sp>
         <p:nvSpPr>
-          <p:cNvPr id="14" name="TextBox 13"/>
+          <p:cNvPr id="13" name="TextBox 12"/>
           <p:cNvSpPr txBox="1"/>
           <p:nvPr/>
         </p:nvSpPr>
@@ -25544,7 +24733,7 @@
         <p:spPr>
           <a:xfrm>
             <a:off x="640080" y="329184"/>
-            <a:ext cx="5303520" cy="182880"/>
+            <a:ext cx="9875520" cy="182880"/>
           </a:xfrm>
           <a:prstGeom prst="rect">
             <a:avLst/>
@@ -25585,48 +24774,6 @@
         </p:nvSpPr>
         <p:spPr>
           <a:xfrm>
-            <a:off x="5897880" y="310896"/>
-            <a:ext cx="4800600" cy="256032"/>
-          </a:xfrm>
-          <a:prstGeom prst="rect">
-            <a:avLst/>
-          </a:prstGeom>
-          <a:noFill/>
-        </p:spPr>
-        <p:txBody>
-          <a:bodyPr wrap="none" lIns="9144" rIns="9144" tIns="9144" bIns="9144" anchor="t">
-            <a:spAutoFit/>
-          </a:bodyPr>
-          <a:lstStyle/>
-          <a:p>
-            <a:pPr algn="r">
-              <a:spcAft>
-                <a:spcPts val="0"/>
-              </a:spcAft>
-              <a:defRPr sz="680" b="1">
-                <a:solidFill>
-                  <a:srgbClr val="4F6B00"/>
-                </a:solidFill>
-                <a:latin typeface="Inter"/>
-              </a:defRPr>
-            </a:pPr>
-            <a:r>
-              <a:rPr>
-                <a:latin typeface="Inter"/>
-              </a:rPr>
-              <a:t>Illustrative, Gradient Maintained — demo data, not the client's holdings or managers</a:t>
-            </a:r>
-          </a:p>
-        </p:txBody>
-      </p:sp>
-      <p:sp>
-        <p:nvSpPr>
-          <p:cNvPr id="5" name="TextBox 4"/>
-          <p:cNvSpPr txBox="1"/>
-          <p:nvPr/>
-        </p:nvSpPr>
-        <p:spPr>
-          <a:xfrm>
             <a:off x="640080" y="566928"/>
             <a:ext cx="10058400" cy="530352"/>
           </a:xfrm>
@@ -25663,7 +24810,7 @@
       </p:sp>
       <p:sp>
         <p:nvSpPr>
-          <p:cNvPr id="6" name="Rectangle 5"/>
+          <p:cNvPr id="5" name="Rectangle 4"/>
           <p:cNvSpPr/>
           <p:nvPr/>
         </p:nvSpPr>
@@ -25712,7 +24859,7 @@
       </p:sp>
       <p:sp>
         <p:nvSpPr>
-          <p:cNvPr id="7" name="Rectangle 6"/>
+          <p:cNvPr id="6" name="Rectangle 5"/>
           <p:cNvSpPr/>
           <p:nvPr/>
         </p:nvSpPr>
@@ -25761,7 +24908,7 @@
       </p:sp>
       <p:sp>
         <p:nvSpPr>
-          <p:cNvPr id="8" name="TextBox 7"/>
+          <p:cNvPr id="7" name="TextBox 6"/>
           <p:cNvSpPr txBox="1"/>
           <p:nvPr/>
         </p:nvSpPr>
@@ -25803,7 +24950,7 @@
       </p:sp>
       <p:sp>
         <p:nvSpPr>
-          <p:cNvPr id="9" name="Rectangle 8"/>
+          <p:cNvPr id="8" name="Rectangle 7"/>
           <p:cNvSpPr/>
           <p:nvPr/>
         </p:nvSpPr>
@@ -25852,7 +24999,7 @@
       </p:sp>
       <p:sp>
         <p:nvSpPr>
-          <p:cNvPr id="10" name="Rectangle 9"/>
+          <p:cNvPr id="9" name="Rectangle 8"/>
           <p:cNvSpPr/>
           <p:nvPr/>
         </p:nvSpPr>
@@ -25901,7 +25048,7 @@
       </p:sp>
       <p:sp>
         <p:nvSpPr>
-          <p:cNvPr id="11" name="TextBox 10"/>
+          <p:cNvPr id="10" name="TextBox 9"/>
           <p:cNvSpPr txBox="1"/>
           <p:nvPr/>
         </p:nvSpPr>
@@ -25943,7 +25090,7 @@
       </p:sp>
       <p:sp>
         <p:nvSpPr>
-          <p:cNvPr id="12" name="TextBox 11"/>
+          <p:cNvPr id="11" name="TextBox 10"/>
           <p:cNvSpPr txBox="1"/>
           <p:nvPr/>
         </p:nvSpPr>
@@ -25985,7 +25132,7 @@
       </p:sp>
       <p:sp>
         <p:nvSpPr>
-          <p:cNvPr id="13" name="Rectangle 12"/>
+          <p:cNvPr id="12" name="Rectangle 11"/>
           <p:cNvSpPr/>
           <p:nvPr/>
         </p:nvSpPr>
@@ -26034,7 +25181,7 @@
       </p:sp>
       <p:sp>
         <p:nvSpPr>
-          <p:cNvPr id="14" name="TextBox 13"/>
+          <p:cNvPr id="13" name="TextBox 12"/>
           <p:cNvSpPr txBox="1"/>
           <p:nvPr/>
         </p:nvSpPr>
@@ -26076,7 +25223,7 @@
       </p:sp>
       <p:sp>
         <p:nvSpPr>
-          <p:cNvPr id="15" name="TextBox 14"/>
+          <p:cNvPr id="14" name="TextBox 13"/>
           <p:cNvSpPr txBox="1"/>
           <p:nvPr/>
         </p:nvSpPr>
@@ -26118,7 +25265,7 @@
       </p:sp>
       <p:sp>
         <p:nvSpPr>
-          <p:cNvPr id="16" name="TextBox 15"/>
+          <p:cNvPr id="15" name="TextBox 14"/>
           <p:cNvSpPr txBox="1"/>
           <p:nvPr/>
         </p:nvSpPr>
@@ -26234,7 +25381,7 @@
         <p:spPr>
           <a:xfrm>
             <a:off x="640080" y="329184"/>
-            <a:ext cx="5303520" cy="182880"/>
+            <a:ext cx="9875520" cy="182880"/>
           </a:xfrm>
           <a:prstGeom prst="rect">
             <a:avLst/>
@@ -26275,48 +25422,6 @@
         </p:nvSpPr>
         <p:spPr>
           <a:xfrm>
-            <a:off x="5897880" y="310896"/>
-            <a:ext cx="4800600" cy="256032"/>
-          </a:xfrm>
-          <a:prstGeom prst="rect">
-            <a:avLst/>
-          </a:prstGeom>
-          <a:noFill/>
-        </p:spPr>
-        <p:txBody>
-          <a:bodyPr wrap="none" lIns="9144" rIns="9144" tIns="9144" bIns="9144" anchor="t">
-            <a:spAutoFit/>
-          </a:bodyPr>
-          <a:lstStyle/>
-          <a:p>
-            <a:pPr algn="r">
-              <a:spcAft>
-                <a:spcPts val="0"/>
-              </a:spcAft>
-              <a:defRPr sz="680" b="1">
-                <a:solidFill>
-                  <a:srgbClr val="4F6B00"/>
-                </a:solidFill>
-                <a:latin typeface="Inter"/>
-              </a:defRPr>
-            </a:pPr>
-            <a:r>
-              <a:rPr>
-                <a:latin typeface="Inter"/>
-              </a:rPr>
-              <a:t>Illustrative, Gradient Maintained — demo data, not the client's holdings or managers</a:t>
-            </a:r>
-          </a:p>
-        </p:txBody>
-      </p:sp>
-      <p:sp>
-        <p:nvSpPr>
-          <p:cNvPr id="5" name="TextBox 4"/>
-          <p:cNvSpPr txBox="1"/>
-          <p:nvPr/>
-        </p:nvSpPr>
-        <p:spPr>
-          <a:xfrm>
             <a:off x="640080" y="566928"/>
             <a:ext cx="10058400" cy="530352"/>
           </a:xfrm>
@@ -26353,7 +25458,7 @@
       </p:sp>
       <p:sp>
         <p:nvSpPr>
-          <p:cNvPr id="6" name="Rectangle 5"/>
+          <p:cNvPr id="5" name="Rectangle 4"/>
           <p:cNvSpPr/>
           <p:nvPr/>
         </p:nvSpPr>
@@ -26402,7 +25507,7 @@
       </p:sp>
       <p:sp>
         <p:nvSpPr>
-          <p:cNvPr id="7" name="Rectangle 6"/>
+          <p:cNvPr id="6" name="Rectangle 5"/>
           <p:cNvSpPr/>
           <p:nvPr/>
         </p:nvSpPr>
@@ -26451,7 +25556,7 @@
       </p:sp>
       <p:sp>
         <p:nvSpPr>
-          <p:cNvPr id="8" name="TextBox 7"/>
+          <p:cNvPr id="7" name="TextBox 6"/>
           <p:cNvSpPr txBox="1"/>
           <p:nvPr/>
         </p:nvSpPr>
@@ -26493,7 +25598,7 @@
       </p:sp>
       <p:sp>
         <p:nvSpPr>
-          <p:cNvPr id="9" name="TextBox 8"/>
+          <p:cNvPr id="8" name="TextBox 7"/>
           <p:cNvSpPr txBox="1"/>
           <p:nvPr/>
         </p:nvSpPr>
@@ -26535,7 +25640,7 @@
       </p:sp>
       <p:graphicFrame>
         <p:nvGraphicFramePr>
-          <p:cNvPr id="10" name="Table 9"/>
+          <p:cNvPr id="9" name="Table 8"/>
           <p:cNvGraphicFramePr>
             <a:graphicFrameLocks noGrp="1"/>
           </p:cNvGraphicFramePr>
@@ -26684,7 +25789,7 @@
                         <a:rPr>
                           <a:latin typeface="Inter"/>
                         </a:rPr>
-                        <a:t>● complete</a:t>
+                        <a:t>● Complete</a:t>
                       </a:r>
                     </a:p>
                   </a:txBody>
@@ -26767,7 +25872,7 @@
                         <a:rPr>
                           <a:latin typeface="Inter"/>
                         </a:rPr>
-                        <a:t>● complete</a:t>
+                        <a:t>● Complete</a:t>
                       </a:r>
                     </a:p>
                   </a:txBody>
@@ -26850,7 +25955,7 @@
                         <a:rPr>
                           <a:latin typeface="Inter"/>
                         </a:rPr>
-                        <a:t>● complete</a:t>
+                        <a:t>● Complete</a:t>
                       </a:r>
                     </a:p>
                   </a:txBody>
@@ -26933,7 +26038,7 @@
                         <a:rPr>
                           <a:latin typeface="Inter"/>
                         </a:rPr>
-                        <a:t>● complete</a:t>
+                        <a:t>● Complete</a:t>
                       </a:r>
                     </a:p>
                   </a:txBody>
@@ -27016,7 +26121,7 @@
                         <a:rPr>
                           <a:latin typeface="Inter"/>
                         </a:rPr>
-                        <a:t>● partial</a:t>
+                        <a:t>● Partly available</a:t>
                       </a:r>
                     </a:p>
                   </a:txBody>
@@ -27060,7 +26165,7 @@
       </p:graphicFrame>
       <p:sp>
         <p:nvSpPr>
-          <p:cNvPr id="11" name="Rectangle 10"/>
+          <p:cNvPr id="10" name="Rectangle 9"/>
           <p:cNvSpPr/>
           <p:nvPr/>
         </p:nvSpPr>
@@ -27109,7 +26214,7 @@
       </p:sp>
       <p:sp>
         <p:nvSpPr>
-          <p:cNvPr id="12" name="TextBox 11"/>
+          <p:cNvPr id="11" name="TextBox 10"/>
           <p:cNvSpPr txBox="1"/>
           <p:nvPr/>
         </p:nvSpPr>
@@ -27151,7 +26256,7 @@
       </p:sp>
       <p:sp>
         <p:nvSpPr>
-          <p:cNvPr id="13" name="TextBox 12"/>
+          <p:cNvPr id="12" name="TextBox 11"/>
           <p:cNvSpPr txBox="1"/>
           <p:nvPr/>
         </p:nvSpPr>
@@ -27193,7 +26298,7 @@
       </p:sp>
       <p:sp>
         <p:nvSpPr>
-          <p:cNvPr id="14" name="TextBox 13"/>
+          <p:cNvPr id="13" name="TextBox 12"/>
           <p:cNvSpPr txBox="1"/>
           <p:nvPr/>
         </p:nvSpPr>
@@ -27309,7 +26414,7 @@
         <p:spPr>
           <a:xfrm>
             <a:off x="640080" y="329184"/>
-            <a:ext cx="5303520" cy="182880"/>
+            <a:ext cx="9875520" cy="182880"/>
           </a:xfrm>
           <a:prstGeom prst="rect">
             <a:avLst/>
@@ -27350,48 +26455,6 @@
         </p:nvSpPr>
         <p:spPr>
           <a:xfrm>
-            <a:off x="5897880" y="310896"/>
-            <a:ext cx="4800600" cy="256032"/>
-          </a:xfrm>
-          <a:prstGeom prst="rect">
-            <a:avLst/>
-          </a:prstGeom>
-          <a:noFill/>
-        </p:spPr>
-        <p:txBody>
-          <a:bodyPr wrap="none" lIns="9144" rIns="9144" tIns="9144" bIns="9144" anchor="t">
-            <a:spAutoFit/>
-          </a:bodyPr>
-          <a:lstStyle/>
-          <a:p>
-            <a:pPr algn="r">
-              <a:spcAft>
-                <a:spcPts val="0"/>
-              </a:spcAft>
-              <a:defRPr sz="680" b="1">
-                <a:solidFill>
-                  <a:srgbClr val="4F6B00"/>
-                </a:solidFill>
-                <a:latin typeface="Inter"/>
-              </a:defRPr>
-            </a:pPr>
-            <a:r>
-              <a:rPr>
-                <a:latin typeface="Inter"/>
-              </a:rPr>
-              <a:t>Illustrative, Gradient Maintained — demo data, not the client's holdings or managers</a:t>
-            </a:r>
-          </a:p>
-        </p:txBody>
-      </p:sp>
-      <p:sp>
-        <p:nvSpPr>
-          <p:cNvPr id="5" name="TextBox 4"/>
-          <p:cNvSpPr txBox="1"/>
-          <p:nvPr/>
-        </p:nvSpPr>
-        <p:spPr>
-          <a:xfrm>
             <a:off x="640080" y="566928"/>
             <a:ext cx="10058400" cy="530352"/>
           </a:xfrm>
@@ -27428,7 +26491,7 @@
       </p:sp>
       <p:sp>
         <p:nvSpPr>
-          <p:cNvPr id="6" name="Rectangle 5"/>
+          <p:cNvPr id="5" name="Rectangle 4"/>
           <p:cNvSpPr/>
           <p:nvPr/>
         </p:nvSpPr>
@@ -27477,7 +26540,7 @@
       </p:sp>
       <p:sp>
         <p:nvSpPr>
-          <p:cNvPr id="7" name="Rectangle 6"/>
+          <p:cNvPr id="6" name="Rectangle 5"/>
           <p:cNvSpPr/>
           <p:nvPr/>
         </p:nvSpPr>
@@ -27526,7 +26589,7 @@
       </p:sp>
       <p:sp>
         <p:nvSpPr>
-          <p:cNvPr id="8" name="TextBox 7"/>
+          <p:cNvPr id="7" name="TextBox 6"/>
           <p:cNvSpPr txBox="1"/>
           <p:nvPr/>
         </p:nvSpPr>
@@ -27568,7 +26631,7 @@
       </p:sp>
       <p:sp>
         <p:nvSpPr>
-          <p:cNvPr id="9" name="TextBox 8"/>
+          <p:cNvPr id="8" name="TextBox 7"/>
           <p:cNvSpPr txBox="1"/>
           <p:nvPr/>
         </p:nvSpPr>
@@ -27610,7 +26673,7 @@
       </p:sp>
       <p:graphicFrame>
         <p:nvGraphicFramePr>
-          <p:cNvPr id="10" name="Table 9"/>
+          <p:cNvPr id="9" name="Table 8"/>
           <p:cNvGraphicFramePr>
             <a:graphicFrameLocks noGrp="1"/>
           </p:cNvGraphicFramePr>
@@ -27972,7 +27035,7 @@
       </p:graphicFrame>
       <p:sp>
         <p:nvSpPr>
-          <p:cNvPr id="11" name="Rectangle 10"/>
+          <p:cNvPr id="10" name="Rectangle 9"/>
           <p:cNvSpPr/>
           <p:nvPr/>
         </p:nvSpPr>
@@ -28021,7 +27084,7 @@
       </p:sp>
       <p:sp>
         <p:nvSpPr>
-          <p:cNvPr id="12" name="Rectangle 11"/>
+          <p:cNvPr id="11" name="Rectangle 10"/>
           <p:cNvSpPr/>
           <p:nvPr/>
         </p:nvSpPr>
@@ -28070,7 +27133,7 @@
       </p:sp>
       <p:sp>
         <p:nvSpPr>
-          <p:cNvPr id="13" name="TextBox 12"/>
+          <p:cNvPr id="12" name="TextBox 11"/>
           <p:cNvSpPr txBox="1"/>
           <p:nvPr/>
         </p:nvSpPr>
@@ -28112,7 +27175,7 @@
       </p:sp>
       <p:sp>
         <p:nvSpPr>
-          <p:cNvPr id="14" name="TextBox 13"/>
+          <p:cNvPr id="13" name="TextBox 12"/>
           <p:cNvSpPr txBox="1"/>
           <p:nvPr/>
         </p:nvSpPr>
@@ -28154,7 +27217,7 @@
       </p:sp>
       <p:sp>
         <p:nvSpPr>
-          <p:cNvPr id="15" name="Rectangle 14"/>
+          <p:cNvPr id="14" name="Rectangle 13"/>
           <p:cNvSpPr/>
           <p:nvPr/>
         </p:nvSpPr>
@@ -28203,7 +27266,7 @@
       </p:sp>
       <p:sp>
         <p:nvSpPr>
-          <p:cNvPr id="16" name="TextBox 15"/>
+          <p:cNvPr id="15" name="TextBox 14"/>
           <p:cNvSpPr txBox="1"/>
           <p:nvPr/>
         </p:nvSpPr>
@@ -28245,7 +27308,7 @@
       </p:sp>
       <p:sp>
         <p:nvSpPr>
-          <p:cNvPr id="17" name="TextBox 16"/>
+          <p:cNvPr id="16" name="TextBox 15"/>
           <p:cNvSpPr txBox="1"/>
           <p:nvPr/>
         </p:nvSpPr>
@@ -28287,7 +27350,7 @@
       </p:sp>
       <p:sp>
         <p:nvSpPr>
-          <p:cNvPr id="18" name="TextBox 17"/>
+          <p:cNvPr id="17" name="TextBox 16"/>
           <p:cNvSpPr txBox="1"/>
           <p:nvPr/>
         </p:nvSpPr>
@@ -28403,7 +27466,7 @@
         <p:spPr>
           <a:xfrm>
             <a:off x="640080" y="329184"/>
-            <a:ext cx="5303520" cy="182880"/>
+            <a:ext cx="9875520" cy="182880"/>
           </a:xfrm>
           <a:prstGeom prst="rect">
             <a:avLst/>
@@ -28444,48 +27507,6 @@
         </p:nvSpPr>
         <p:spPr>
           <a:xfrm>
-            <a:off x="5897880" y="310896"/>
-            <a:ext cx="4800600" cy="256032"/>
-          </a:xfrm>
-          <a:prstGeom prst="rect">
-            <a:avLst/>
-          </a:prstGeom>
-          <a:noFill/>
-        </p:spPr>
-        <p:txBody>
-          <a:bodyPr wrap="none" lIns="9144" rIns="9144" tIns="9144" bIns="9144" anchor="t">
-            <a:spAutoFit/>
-          </a:bodyPr>
-          <a:lstStyle/>
-          <a:p>
-            <a:pPr algn="r">
-              <a:spcAft>
-                <a:spcPts val="0"/>
-              </a:spcAft>
-              <a:defRPr sz="680" b="1">
-                <a:solidFill>
-                  <a:srgbClr val="4F6B00"/>
-                </a:solidFill>
-                <a:latin typeface="Inter"/>
-              </a:defRPr>
-            </a:pPr>
-            <a:r>
-              <a:rPr>
-                <a:latin typeface="Inter"/>
-              </a:rPr>
-              <a:t>Illustrative, Gradient Maintained — demo data, not the client's holdings or managers</a:t>
-            </a:r>
-          </a:p>
-        </p:txBody>
-      </p:sp>
-      <p:sp>
-        <p:nvSpPr>
-          <p:cNvPr id="5" name="TextBox 4"/>
-          <p:cNvSpPr txBox="1"/>
-          <p:nvPr/>
-        </p:nvSpPr>
-        <p:spPr>
-          <a:xfrm>
             <a:off x="640080" y="566928"/>
             <a:ext cx="10058400" cy="530352"/>
           </a:xfrm>
@@ -28522,7 +27543,7 @@
       </p:sp>
       <p:sp>
         <p:nvSpPr>
-          <p:cNvPr id="6" name="Rectangle 5"/>
+          <p:cNvPr id="5" name="Rectangle 4"/>
           <p:cNvSpPr/>
           <p:nvPr/>
         </p:nvSpPr>
@@ -28571,7 +27592,7 @@
       </p:sp>
       <p:sp>
         <p:nvSpPr>
-          <p:cNvPr id="7" name="Rectangle 6"/>
+          <p:cNvPr id="6" name="Rectangle 5"/>
           <p:cNvSpPr/>
           <p:nvPr/>
         </p:nvSpPr>
@@ -28620,7 +27641,7 @@
       </p:sp>
       <p:sp>
         <p:nvSpPr>
-          <p:cNvPr id="8" name="TextBox 7"/>
+          <p:cNvPr id="7" name="TextBox 6"/>
           <p:cNvSpPr txBox="1"/>
           <p:nvPr/>
         </p:nvSpPr>
@@ -28662,7 +27683,7 @@
       </p:sp>
       <p:sp>
         <p:nvSpPr>
-          <p:cNvPr id="9" name="TextBox 8"/>
+          <p:cNvPr id="8" name="TextBox 7"/>
           <p:cNvSpPr txBox="1"/>
           <p:nvPr/>
         </p:nvSpPr>
@@ -28704,7 +27725,7 @@
       </p:sp>
       <p:graphicFrame>
         <p:nvGraphicFramePr>
-          <p:cNvPr id="10" name="Chart 9"/>
+          <p:cNvPr id="9" name="Chart 8"/>
           <p:cNvGraphicFramePr>
             <a:graphicFrameLocks noGrp="1"/>
           </p:cNvGraphicFramePr>
@@ -28722,7 +27743,7 @@
       </p:graphicFrame>
       <p:sp>
         <p:nvSpPr>
-          <p:cNvPr id="11" name="Rectangle 10"/>
+          <p:cNvPr id="10" name="Rectangle 9"/>
           <p:cNvSpPr/>
           <p:nvPr/>
         </p:nvSpPr>
@@ -28771,7 +27792,7 @@
       </p:sp>
       <p:sp>
         <p:nvSpPr>
-          <p:cNvPr id="12" name="TextBox 11"/>
+          <p:cNvPr id="11" name="TextBox 10"/>
           <p:cNvSpPr txBox="1"/>
           <p:nvPr/>
         </p:nvSpPr>
@@ -28813,7 +27834,7 @@
       </p:sp>
       <p:sp>
         <p:nvSpPr>
-          <p:cNvPr id="13" name="TextBox 12"/>
+          <p:cNvPr id="12" name="TextBox 11"/>
           <p:cNvSpPr txBox="1"/>
           <p:nvPr/>
         </p:nvSpPr>
@@ -28855,7 +27876,7 @@
       </p:sp>
       <p:sp>
         <p:nvSpPr>
-          <p:cNvPr id="14" name="TextBox 13"/>
+          <p:cNvPr id="13" name="TextBox 12"/>
           <p:cNvSpPr txBox="1"/>
           <p:nvPr/>
         </p:nvSpPr>

--- a/plugins/gradient-cio/assets/examples/gradient-idd-manager-performance-single.pptx
+++ b/plugins/gradient-cio/assets/examples/gradient-idd-manager-performance-single.pptx
@@ -5687,224 +5687,7 @@
       </p:sp>
       <p:sp>
         <p:nvSpPr>
-          <p:cNvPr id="17" name="Rectangle 16"/>
-          <p:cNvSpPr/>
-          <p:nvPr/>
-        </p:nvSpPr>
-        <p:spPr>
-          <a:xfrm>
-            <a:off x="685800" y="5687568"/>
-            <a:ext cx="3337560" cy="530352"/>
-          </a:xfrm>
-          <a:prstGeom prst="rect">
-            <a:avLst/>
-          </a:prstGeom>
-          <a:solidFill>
-            <a:srgbClr val="F2A93B"/>
-          </a:solidFill>
-          <a:ln>
-            <a:solidFill>
-              <a:srgbClr val="F2A93B"/>
-            </a:solidFill>
-          </a:ln>
-        </p:spPr>
-        <p:style>
-          <a:lnRef idx="1">
-            <a:schemeClr val="accent1"/>
-          </a:lnRef>
-          <a:fillRef idx="3">
-            <a:schemeClr val="accent1"/>
-          </a:fillRef>
-          <a:effectRef idx="2">
-            <a:schemeClr val="accent1"/>
-          </a:effectRef>
-          <a:fontRef idx="minor">
-            <a:schemeClr val="lt1"/>
-          </a:fontRef>
-        </p:style>
-        <p:txBody>
-          <a:bodyPr rtlCol="0" anchor="ctr"/>
-          <a:lstStyle/>
-          <a:p>
-            <a:pPr algn="ctr">
-              <a:defRPr>
-                <a:latin typeface="Inter"/>
-              </a:defRPr>
-            </a:pPr>
-          </a:p>
-        </p:txBody>
-      </p:sp>
-      <p:sp>
-        <p:nvSpPr>
-          <p:cNvPr id="18" name="TextBox 17"/>
-          <p:cNvSpPr txBox="1"/>
-          <p:nvPr/>
-        </p:nvSpPr>
-        <p:spPr>
-          <a:xfrm>
-            <a:off x="822960" y="5760720"/>
-            <a:ext cx="3063240" cy="128016"/>
-          </a:xfrm>
-          <a:prstGeom prst="rect">
-            <a:avLst/>
-          </a:prstGeom>
-          <a:noFill/>
-        </p:spPr>
-        <p:txBody>
-          <a:bodyPr wrap="none" lIns="9144" rIns="9144" tIns="9144" bIns="9144" anchor="t">
-            <a:spAutoFit/>
-          </a:bodyPr>
-          <a:lstStyle/>
-          <a:p>
-            <a:pPr algn="l">
-              <a:spcAft>
-                <a:spcPts val="0"/>
-              </a:spcAft>
-              <a:defRPr sz="620" b="1">
-                <a:solidFill>
-                  <a:srgbClr val="0D1117"/>
-                </a:solidFill>
-                <a:latin typeface="Inter"/>
-              </a:defRPr>
-            </a:pPr>
-            <a:r>
-              <a:rPr>
-                <a:latin typeface="Inter"/>
-              </a:rPr>
-              <a:t>OVERALL VIEW</a:t>
-            </a:r>
-          </a:p>
-        </p:txBody>
-      </p:sp>
-      <p:sp>
-        <p:nvSpPr>
-          <p:cNvPr id="19" name="TextBox 18"/>
-          <p:cNvSpPr txBox="1"/>
-          <p:nvPr/>
-        </p:nvSpPr>
-        <p:spPr>
-          <a:xfrm>
-            <a:off x="822960" y="5916168"/>
-            <a:ext cx="3063240" cy="182880"/>
-          </a:xfrm>
-          <a:prstGeom prst="rect">
-            <a:avLst/>
-          </a:prstGeom>
-          <a:noFill/>
-        </p:spPr>
-        <p:txBody>
-          <a:bodyPr wrap="none" lIns="9144" rIns="9144" tIns="9144" bIns="9144" anchor="t">
-            <a:spAutoFit/>
-          </a:bodyPr>
-          <a:lstStyle/>
-          <a:p>
-            <a:pPr algn="l">
-              <a:spcAft>
-                <a:spcPts val="0"/>
-              </a:spcAft>
-              <a:defRPr sz="900" b="1">
-                <a:solidFill>
-                  <a:srgbClr val="0D1117"/>
-                </a:solidFill>
-                <a:latin typeface="Inter"/>
-              </a:defRPr>
-            </a:pPr>
-            <a:r>
-              <a:rPr>
-                <a:latin typeface="Inter"/>
-              </a:rPr>
-              <a:t>Positive edge; moderate reliability</a:t>
-            </a:r>
-          </a:p>
-        </p:txBody>
-      </p:sp>
-      <p:sp>
-        <p:nvSpPr>
-          <p:cNvPr id="20" name="TextBox 19"/>
-          <p:cNvSpPr txBox="1"/>
-          <p:nvPr/>
-        </p:nvSpPr>
-        <p:spPr>
-          <a:xfrm>
-            <a:off x="4297680" y="5733288"/>
-            <a:ext cx="3108960" cy="164592"/>
-          </a:xfrm>
-          <a:prstGeom prst="rect">
-            <a:avLst/>
-          </a:prstGeom>
-          <a:noFill/>
-        </p:spPr>
-        <p:txBody>
-          <a:bodyPr wrap="none" lIns="9144" rIns="9144" tIns="9144" bIns="9144" anchor="t">
-            <a:spAutoFit/>
-          </a:bodyPr>
-          <a:lstStyle/>
-          <a:p>
-            <a:pPr algn="l">
-              <a:spcAft>
-                <a:spcPts val="0"/>
-              </a:spcAft>
-              <a:defRPr sz="650" b="1">
-                <a:solidFill>
-                  <a:srgbClr val="8A94A1"/>
-                </a:solidFill>
-                <a:latin typeface="Inter"/>
-              </a:defRPr>
-            </a:pPr>
-            <a:r>
-              <a:rPr>
-                <a:latin typeface="Inter"/>
-              </a:rPr>
-              <a:t>SCOPE REVIEWED</a:t>
-            </a:r>
-          </a:p>
-        </p:txBody>
-      </p:sp>
-      <p:sp>
-        <p:nvSpPr>
-          <p:cNvPr id="21" name="TextBox 20"/>
-          <p:cNvSpPr txBox="1"/>
-          <p:nvPr/>
-        </p:nvSpPr>
-        <p:spPr>
-          <a:xfrm>
-            <a:off x="4297680" y="5934456"/>
-            <a:ext cx="3108960" cy="201168"/>
-          </a:xfrm>
-          <a:prstGeom prst="rect">
-            <a:avLst/>
-          </a:prstGeom>
-          <a:noFill/>
-        </p:spPr>
-        <p:txBody>
-          <a:bodyPr wrap="none" lIns="9144" rIns="9144" tIns="9144" bIns="9144" anchor="t">
-            <a:spAutoFit/>
-          </a:bodyPr>
-          <a:lstStyle/>
-          <a:p>
-            <a:pPr algn="l">
-              <a:spcAft>
-                <a:spcPts val="0"/>
-              </a:spcAft>
-              <a:defRPr sz="800" b="1">
-                <a:solidFill>
-                  <a:srgbClr val="FFFFFF"/>
-                </a:solidFill>
-                <a:latin typeface="Inter"/>
-              </a:defRPr>
-            </a:pPr>
-            <a:r>
-              <a:rPr>
-                <a:latin typeface="Inter"/>
-              </a:rPr>
-              <a:t>5 of 5 · Complete</a:t>
-            </a:r>
-          </a:p>
-        </p:txBody>
-      </p:sp>
-      <p:sp>
-        <p:nvSpPr>
-          <p:cNvPr id="22" name="TextBox 21"/>
+          <p:cNvPr id="17" name="TextBox 16"/>
           <p:cNvSpPr txBox="1"/>
           <p:nvPr/>
         </p:nvSpPr>
@@ -5946,7 +5729,7 @@
       </p:sp>
       <p:sp>
         <p:nvSpPr>
-          <p:cNvPr id="23" name="TextBox 22"/>
+          <p:cNvPr id="18" name="TextBox 17"/>
           <p:cNvSpPr txBox="1"/>
           <p:nvPr/>
         </p:nvSpPr>
@@ -5988,7 +5771,7 @@
       </p:sp>
       <p:sp>
         <p:nvSpPr>
-          <p:cNvPr id="24" name="TextBox 23"/>
+          <p:cNvPr id="19" name="TextBox 18"/>
           <p:cNvSpPr txBox="1"/>
           <p:nvPr/>
         </p:nvSpPr>
@@ -6104,7 +5887,7 @@
         <p:spPr>
           <a:xfrm>
             <a:off x="640080" y="329184"/>
-            <a:ext cx="5303520" cy="182880"/>
+            <a:ext cx="9875520" cy="182880"/>
           </a:xfrm>
           <a:prstGeom prst="rect">
             <a:avLst/>
@@ -6145,48 +5928,6 @@
         </p:nvSpPr>
         <p:spPr>
           <a:xfrm>
-            <a:off x="5897880" y="310896"/>
-            <a:ext cx="4800600" cy="256032"/>
-          </a:xfrm>
-          <a:prstGeom prst="rect">
-            <a:avLst/>
-          </a:prstGeom>
-          <a:noFill/>
-        </p:spPr>
-        <p:txBody>
-          <a:bodyPr wrap="none" lIns="9144" rIns="9144" tIns="9144" bIns="9144" anchor="t">
-            <a:spAutoFit/>
-          </a:bodyPr>
-          <a:lstStyle/>
-          <a:p>
-            <a:pPr algn="r">
-              <a:spcAft>
-                <a:spcPts val="0"/>
-              </a:spcAft>
-              <a:defRPr sz="680" b="1">
-                <a:solidFill>
-                  <a:srgbClr val="4F6B00"/>
-                </a:solidFill>
-                <a:latin typeface="Inter"/>
-              </a:defRPr>
-            </a:pPr>
-            <a:r>
-              <a:rPr>
-                <a:latin typeface="Inter"/>
-              </a:rPr>
-              <a:t>Illustrative, Gradient Maintained — demo data, not the client's holdings or managers</a:t>
-            </a:r>
-          </a:p>
-        </p:txBody>
-      </p:sp>
-      <p:sp>
-        <p:nvSpPr>
-          <p:cNvPr id="5" name="TextBox 4"/>
-          <p:cNvSpPr txBox="1"/>
-          <p:nvPr/>
-        </p:nvSpPr>
-        <p:spPr>
-          <a:xfrm>
             <a:off x="640080" y="566928"/>
             <a:ext cx="10058400" cy="530352"/>
           </a:xfrm>
@@ -6223,7 +5964,7 @@
       </p:sp>
       <p:sp>
         <p:nvSpPr>
-          <p:cNvPr id="6" name="Rectangle 5"/>
+          <p:cNvPr id="5" name="Rectangle 4"/>
           <p:cNvSpPr/>
           <p:nvPr/>
         </p:nvSpPr>
@@ -6272,7 +6013,7 @@
       </p:sp>
       <p:sp>
         <p:nvSpPr>
-          <p:cNvPr id="7" name="Rectangle 6"/>
+          <p:cNvPr id="6" name="Rectangle 5"/>
           <p:cNvSpPr/>
           <p:nvPr/>
         </p:nvSpPr>
@@ -6321,7 +6062,7 @@
       </p:sp>
       <p:sp>
         <p:nvSpPr>
-          <p:cNvPr id="8" name="TextBox 7"/>
+          <p:cNvPr id="7" name="TextBox 6"/>
           <p:cNvSpPr txBox="1"/>
           <p:nvPr/>
         </p:nvSpPr>
@@ -6363,7 +6104,7 @@
       </p:sp>
       <p:sp>
         <p:nvSpPr>
-          <p:cNvPr id="9" name="TextBox 8"/>
+          <p:cNvPr id="8" name="TextBox 7"/>
           <p:cNvSpPr txBox="1"/>
           <p:nvPr/>
         </p:nvSpPr>
@@ -6405,7 +6146,7 @@
       </p:sp>
       <p:graphicFrame>
         <p:nvGraphicFramePr>
-          <p:cNvPr id="10" name="Table 9"/>
+          <p:cNvPr id="9" name="Table 8"/>
           <p:cNvGraphicFramePr>
             <a:graphicFrameLocks noGrp="1"/>
           </p:cNvGraphicFramePr>
@@ -6764,7 +6505,7 @@
       </p:graphicFrame>
       <p:sp>
         <p:nvSpPr>
-          <p:cNvPr id="11" name="TextBox 10"/>
+          <p:cNvPr id="10" name="TextBox 9"/>
           <p:cNvSpPr txBox="1"/>
           <p:nvPr/>
         </p:nvSpPr>
@@ -6806,7 +6547,7 @@
       </p:sp>
       <p:sp>
         <p:nvSpPr>
-          <p:cNvPr id="12" name="TextBox 11"/>
+          <p:cNvPr id="11" name="TextBox 10"/>
           <p:cNvSpPr txBox="1"/>
           <p:nvPr/>
         </p:nvSpPr>
@@ -6848,7 +6589,7 @@
       </p:sp>
       <p:graphicFrame>
         <p:nvGraphicFramePr>
-          <p:cNvPr id="13" name="Table 12"/>
+          <p:cNvPr id="12" name="Table 11"/>
           <p:cNvGraphicFramePr>
             <a:graphicFrameLocks noGrp="1"/>
           </p:cNvGraphicFramePr>
@@ -8216,7 +7957,7 @@
       </p:graphicFrame>
       <p:sp>
         <p:nvSpPr>
-          <p:cNvPr id="14" name="Rectangle 13"/>
+          <p:cNvPr id="13" name="Rectangle 12"/>
           <p:cNvSpPr/>
           <p:nvPr/>
         </p:nvSpPr>
@@ -8265,7 +8006,7 @@
       </p:sp>
       <p:sp>
         <p:nvSpPr>
-          <p:cNvPr id="15" name="Rectangle 14"/>
+          <p:cNvPr id="14" name="Rectangle 13"/>
           <p:cNvSpPr/>
           <p:nvPr/>
         </p:nvSpPr>
@@ -8314,7 +8055,7 @@
       </p:sp>
       <p:sp>
         <p:nvSpPr>
-          <p:cNvPr id="16" name="TextBox 15"/>
+          <p:cNvPr id="15" name="TextBox 14"/>
           <p:cNvSpPr txBox="1"/>
           <p:nvPr/>
         </p:nvSpPr>
@@ -8356,7 +8097,7 @@
       </p:sp>
       <p:sp>
         <p:nvSpPr>
-          <p:cNvPr id="17" name="TextBox 16"/>
+          <p:cNvPr id="16" name="TextBox 15"/>
           <p:cNvSpPr txBox="1"/>
           <p:nvPr/>
         </p:nvSpPr>
@@ -8398,7 +8139,7 @@
       </p:sp>
       <p:sp>
         <p:nvSpPr>
-          <p:cNvPr id="18" name="Rectangle 17"/>
+          <p:cNvPr id="17" name="Rectangle 16"/>
           <p:cNvSpPr/>
           <p:nvPr/>
         </p:nvSpPr>
@@ -8447,7 +8188,7 @@
       </p:sp>
       <p:sp>
         <p:nvSpPr>
-          <p:cNvPr id="19" name="TextBox 18"/>
+          <p:cNvPr id="18" name="TextBox 17"/>
           <p:cNvSpPr txBox="1"/>
           <p:nvPr/>
         </p:nvSpPr>
@@ -8489,7 +8230,7 @@
       </p:sp>
       <p:sp>
         <p:nvSpPr>
-          <p:cNvPr id="20" name="TextBox 19"/>
+          <p:cNvPr id="19" name="TextBox 18"/>
           <p:cNvSpPr txBox="1"/>
           <p:nvPr/>
         </p:nvSpPr>
@@ -8531,7 +8272,7 @@
       </p:sp>
       <p:sp>
         <p:nvSpPr>
-          <p:cNvPr id="21" name="TextBox 20"/>
+          <p:cNvPr id="20" name="TextBox 19"/>
           <p:cNvSpPr txBox="1"/>
           <p:nvPr/>
         </p:nvSpPr>
@@ -8647,7 +8388,7 @@
         <p:spPr>
           <a:xfrm>
             <a:off x="640080" y="329184"/>
-            <a:ext cx="5303520" cy="182880"/>
+            <a:ext cx="9875520" cy="182880"/>
           </a:xfrm>
           <a:prstGeom prst="rect">
             <a:avLst/>
@@ -8688,48 +8429,6 @@
         </p:nvSpPr>
         <p:spPr>
           <a:xfrm>
-            <a:off x="5897880" y="310896"/>
-            <a:ext cx="4800600" cy="256032"/>
-          </a:xfrm>
-          <a:prstGeom prst="rect">
-            <a:avLst/>
-          </a:prstGeom>
-          <a:noFill/>
-        </p:spPr>
-        <p:txBody>
-          <a:bodyPr wrap="none" lIns="9144" rIns="9144" tIns="9144" bIns="9144" anchor="t">
-            <a:spAutoFit/>
-          </a:bodyPr>
-          <a:lstStyle/>
-          <a:p>
-            <a:pPr algn="r">
-              <a:spcAft>
-                <a:spcPts val="0"/>
-              </a:spcAft>
-              <a:defRPr sz="680" b="1">
-                <a:solidFill>
-                  <a:srgbClr val="4F6B00"/>
-                </a:solidFill>
-                <a:latin typeface="Inter"/>
-              </a:defRPr>
-            </a:pPr>
-            <a:r>
-              <a:rPr>
-                <a:latin typeface="Inter"/>
-              </a:rPr>
-              <a:t>Illustrative, Gradient Maintained — demo data, not the client's holdings or managers</a:t>
-            </a:r>
-          </a:p>
-        </p:txBody>
-      </p:sp>
-      <p:sp>
-        <p:nvSpPr>
-          <p:cNvPr id="5" name="TextBox 4"/>
-          <p:cNvSpPr txBox="1"/>
-          <p:nvPr/>
-        </p:nvSpPr>
-        <p:spPr>
-          <a:xfrm>
             <a:off x="640080" y="566928"/>
             <a:ext cx="10058400" cy="530352"/>
           </a:xfrm>
@@ -8766,7 +8465,7 @@
       </p:sp>
       <p:sp>
         <p:nvSpPr>
-          <p:cNvPr id="6" name="Rectangle 5"/>
+          <p:cNvPr id="5" name="Rectangle 4"/>
           <p:cNvSpPr/>
           <p:nvPr/>
         </p:nvSpPr>
@@ -8815,7 +8514,7 @@
       </p:sp>
       <p:sp>
         <p:nvSpPr>
-          <p:cNvPr id="7" name="Rectangle 6"/>
+          <p:cNvPr id="6" name="Rectangle 5"/>
           <p:cNvSpPr/>
           <p:nvPr/>
         </p:nvSpPr>
@@ -8864,7 +8563,7 @@
       </p:sp>
       <p:sp>
         <p:nvSpPr>
-          <p:cNvPr id="8" name="TextBox 7"/>
+          <p:cNvPr id="7" name="TextBox 6"/>
           <p:cNvSpPr txBox="1"/>
           <p:nvPr/>
         </p:nvSpPr>
@@ -8906,7 +8605,7 @@
       </p:sp>
       <p:sp>
         <p:nvSpPr>
-          <p:cNvPr id="9" name="TextBox 8"/>
+          <p:cNvPr id="8" name="TextBox 7"/>
           <p:cNvSpPr txBox="1"/>
           <p:nvPr/>
         </p:nvSpPr>
@@ -8948,7 +8647,7 @@
       </p:sp>
       <p:graphicFrame>
         <p:nvGraphicFramePr>
-          <p:cNvPr id="10" name="Chart 9"/>
+          <p:cNvPr id="9" name="Chart 8"/>
           <p:cNvGraphicFramePr>
             <a:graphicFrameLocks noGrp="1"/>
           </p:cNvGraphicFramePr>
@@ -8966,7 +8665,7 @@
       </p:graphicFrame>
       <p:sp>
         <p:nvSpPr>
-          <p:cNvPr id="11" name="Rectangle 10"/>
+          <p:cNvPr id="10" name="Rectangle 9"/>
           <p:cNvSpPr/>
           <p:nvPr/>
         </p:nvSpPr>
@@ -9015,7 +8714,7 @@
       </p:sp>
       <p:sp>
         <p:nvSpPr>
-          <p:cNvPr id="12" name="TextBox 11"/>
+          <p:cNvPr id="11" name="TextBox 10"/>
           <p:cNvSpPr txBox="1"/>
           <p:nvPr/>
         </p:nvSpPr>
@@ -9057,7 +8756,7 @@
       </p:sp>
       <p:graphicFrame>
         <p:nvGraphicFramePr>
-          <p:cNvPr id="13" name="Chart 12"/>
+          <p:cNvPr id="12" name="Chart 11"/>
           <p:cNvGraphicFramePr>
             <a:graphicFrameLocks noGrp="1"/>
           </p:cNvGraphicFramePr>
@@ -9075,7 +8774,7 @@
       </p:graphicFrame>
       <p:sp>
         <p:nvSpPr>
-          <p:cNvPr id="14" name="Rectangle 13"/>
+          <p:cNvPr id="13" name="Rectangle 12"/>
           <p:cNvSpPr/>
           <p:nvPr/>
         </p:nvSpPr>
@@ -9124,7 +8823,7 @@
       </p:sp>
       <p:sp>
         <p:nvSpPr>
-          <p:cNvPr id="15" name="TextBox 14"/>
+          <p:cNvPr id="14" name="TextBox 13"/>
           <p:cNvSpPr txBox="1"/>
           <p:nvPr/>
         </p:nvSpPr>
@@ -9166,7 +8865,7 @@
       </p:sp>
       <p:sp>
         <p:nvSpPr>
-          <p:cNvPr id="16" name="TextBox 15"/>
+          <p:cNvPr id="15" name="TextBox 14"/>
           <p:cNvSpPr txBox="1"/>
           <p:nvPr/>
         </p:nvSpPr>
@@ -9208,7 +8907,7 @@
       </p:sp>
       <p:sp>
         <p:nvSpPr>
-          <p:cNvPr id="17" name="TextBox 16"/>
+          <p:cNvPr id="16" name="TextBox 15"/>
           <p:cNvSpPr txBox="1"/>
           <p:nvPr/>
         </p:nvSpPr>
@@ -9324,7 +9023,7 @@
         <p:spPr>
           <a:xfrm>
             <a:off x="640080" y="329184"/>
-            <a:ext cx="5303520" cy="182880"/>
+            <a:ext cx="9875520" cy="182880"/>
           </a:xfrm>
           <a:prstGeom prst="rect">
             <a:avLst/>
@@ -9365,48 +9064,6 @@
         </p:nvSpPr>
         <p:spPr>
           <a:xfrm>
-            <a:off x="5897880" y="310896"/>
-            <a:ext cx="4800600" cy="256032"/>
-          </a:xfrm>
-          <a:prstGeom prst="rect">
-            <a:avLst/>
-          </a:prstGeom>
-          <a:noFill/>
-        </p:spPr>
-        <p:txBody>
-          <a:bodyPr wrap="none" lIns="9144" rIns="9144" tIns="9144" bIns="9144" anchor="t">
-            <a:spAutoFit/>
-          </a:bodyPr>
-          <a:lstStyle/>
-          <a:p>
-            <a:pPr algn="r">
-              <a:spcAft>
-                <a:spcPts val="0"/>
-              </a:spcAft>
-              <a:defRPr sz="680" b="1">
-                <a:solidFill>
-                  <a:srgbClr val="4F6B00"/>
-                </a:solidFill>
-                <a:latin typeface="Inter"/>
-              </a:defRPr>
-            </a:pPr>
-            <a:r>
-              <a:rPr>
-                <a:latin typeface="Inter"/>
-              </a:rPr>
-              <a:t>Illustrative, Gradient Maintained — demo data, not the client's holdings or managers</a:t>
-            </a:r>
-          </a:p>
-        </p:txBody>
-      </p:sp>
-      <p:sp>
-        <p:nvSpPr>
-          <p:cNvPr id="5" name="TextBox 4"/>
-          <p:cNvSpPr txBox="1"/>
-          <p:nvPr/>
-        </p:nvSpPr>
-        <p:spPr>
-          <a:xfrm>
             <a:off x="640080" y="566928"/>
             <a:ext cx="10058400" cy="530352"/>
           </a:xfrm>
@@ -9443,7 +9100,7 @@
       </p:sp>
       <p:sp>
         <p:nvSpPr>
-          <p:cNvPr id="6" name="Rectangle 5"/>
+          <p:cNvPr id="5" name="Rectangle 4"/>
           <p:cNvSpPr/>
           <p:nvPr/>
         </p:nvSpPr>
@@ -9492,7 +9149,7 @@
       </p:sp>
       <p:sp>
         <p:nvSpPr>
-          <p:cNvPr id="7" name="Rectangle 6"/>
+          <p:cNvPr id="6" name="Rectangle 5"/>
           <p:cNvSpPr/>
           <p:nvPr/>
         </p:nvSpPr>
@@ -9541,7 +9198,7 @@
       </p:sp>
       <p:sp>
         <p:nvSpPr>
-          <p:cNvPr id="8" name="TextBox 7"/>
+          <p:cNvPr id="7" name="TextBox 6"/>
           <p:cNvSpPr txBox="1"/>
           <p:nvPr/>
         </p:nvSpPr>
@@ -9583,7 +9240,7 @@
       </p:sp>
       <p:sp>
         <p:nvSpPr>
-          <p:cNvPr id="9" name="TextBox 8"/>
+          <p:cNvPr id="8" name="TextBox 7"/>
           <p:cNvSpPr txBox="1"/>
           <p:nvPr/>
         </p:nvSpPr>
@@ -9625,7 +9282,7 @@
       </p:sp>
       <p:graphicFrame>
         <p:nvGraphicFramePr>
-          <p:cNvPr id="10" name="Table 9"/>
+          <p:cNvPr id="9" name="Table 8"/>
           <p:cNvGraphicFramePr>
             <a:graphicFrameLocks noGrp="1"/>
           </p:cNvGraphicFramePr>
@@ -10420,7 +10077,7 @@
       </p:graphicFrame>
       <p:sp>
         <p:nvSpPr>
-          <p:cNvPr id="11" name="Rectangle 10"/>
+          <p:cNvPr id="10" name="Rectangle 9"/>
           <p:cNvSpPr/>
           <p:nvPr/>
         </p:nvSpPr>
@@ -10469,7 +10126,7 @@
       </p:sp>
       <p:sp>
         <p:nvSpPr>
-          <p:cNvPr id="12" name="Rectangle 11"/>
+          <p:cNvPr id="11" name="Rectangle 10"/>
           <p:cNvSpPr/>
           <p:nvPr/>
         </p:nvSpPr>
@@ -10518,7 +10175,7 @@
       </p:sp>
       <p:sp>
         <p:nvSpPr>
-          <p:cNvPr id="13" name="TextBox 12"/>
+          <p:cNvPr id="12" name="TextBox 11"/>
           <p:cNvSpPr txBox="1"/>
           <p:nvPr/>
         </p:nvSpPr>
@@ -10560,7 +10217,7 @@
       </p:sp>
       <p:sp>
         <p:nvSpPr>
-          <p:cNvPr id="14" name="TextBox 13"/>
+          <p:cNvPr id="13" name="TextBox 12"/>
           <p:cNvSpPr txBox="1"/>
           <p:nvPr/>
         </p:nvSpPr>
@@ -10602,7 +10259,7 @@
       </p:sp>
       <p:sp>
         <p:nvSpPr>
-          <p:cNvPr id="15" name="Rectangle 14"/>
+          <p:cNvPr id="14" name="Rectangle 13"/>
           <p:cNvSpPr/>
           <p:nvPr/>
         </p:nvSpPr>
@@ -10651,7 +10308,7 @@
       </p:sp>
       <p:sp>
         <p:nvSpPr>
-          <p:cNvPr id="16" name="TextBox 15"/>
+          <p:cNvPr id="15" name="TextBox 14"/>
           <p:cNvSpPr txBox="1"/>
           <p:nvPr/>
         </p:nvSpPr>
@@ -10693,7 +10350,7 @@
       </p:sp>
       <p:sp>
         <p:nvSpPr>
-          <p:cNvPr id="17" name="TextBox 16"/>
+          <p:cNvPr id="16" name="TextBox 15"/>
           <p:cNvSpPr txBox="1"/>
           <p:nvPr/>
         </p:nvSpPr>
@@ -10735,7 +10392,7 @@
       </p:sp>
       <p:sp>
         <p:nvSpPr>
-          <p:cNvPr id="18" name="TextBox 17"/>
+          <p:cNvPr id="17" name="TextBox 16"/>
           <p:cNvSpPr txBox="1"/>
           <p:nvPr/>
         </p:nvSpPr>
@@ -10851,7 +10508,7 @@
         <p:spPr>
           <a:xfrm>
             <a:off x="640080" y="329184"/>
-            <a:ext cx="5303520" cy="182880"/>
+            <a:ext cx="9875520" cy="182880"/>
           </a:xfrm>
           <a:prstGeom prst="rect">
             <a:avLst/>
@@ -10892,48 +10549,6 @@
         </p:nvSpPr>
         <p:spPr>
           <a:xfrm>
-            <a:off x="5897880" y="310896"/>
-            <a:ext cx="4800600" cy="256032"/>
-          </a:xfrm>
-          <a:prstGeom prst="rect">
-            <a:avLst/>
-          </a:prstGeom>
-          <a:noFill/>
-        </p:spPr>
-        <p:txBody>
-          <a:bodyPr wrap="none" lIns="9144" rIns="9144" tIns="9144" bIns="9144" anchor="t">
-            <a:spAutoFit/>
-          </a:bodyPr>
-          <a:lstStyle/>
-          <a:p>
-            <a:pPr algn="r">
-              <a:spcAft>
-                <a:spcPts val="0"/>
-              </a:spcAft>
-              <a:defRPr sz="680" b="1">
-                <a:solidFill>
-                  <a:srgbClr val="4F6B00"/>
-                </a:solidFill>
-                <a:latin typeface="Inter"/>
-              </a:defRPr>
-            </a:pPr>
-            <a:r>
-              <a:rPr>
-                <a:latin typeface="Inter"/>
-              </a:rPr>
-              <a:t>Illustrative, Gradient Maintained — demo data, not the client's holdings or managers</a:t>
-            </a:r>
-          </a:p>
-        </p:txBody>
-      </p:sp>
-      <p:sp>
-        <p:nvSpPr>
-          <p:cNvPr id="5" name="TextBox 4"/>
-          <p:cNvSpPr txBox="1"/>
-          <p:nvPr/>
-        </p:nvSpPr>
-        <p:spPr>
-          <a:xfrm>
             <a:off x="640080" y="566928"/>
             <a:ext cx="10058400" cy="530352"/>
           </a:xfrm>
@@ -10970,7 +10585,7 @@
       </p:sp>
       <p:sp>
         <p:nvSpPr>
-          <p:cNvPr id="6" name="Rectangle 5"/>
+          <p:cNvPr id="5" name="Rectangle 4"/>
           <p:cNvSpPr/>
           <p:nvPr/>
         </p:nvSpPr>
@@ -11019,7 +10634,7 @@
       </p:sp>
       <p:sp>
         <p:nvSpPr>
-          <p:cNvPr id="7" name="Rectangle 6"/>
+          <p:cNvPr id="6" name="Rectangle 5"/>
           <p:cNvSpPr/>
           <p:nvPr/>
         </p:nvSpPr>
@@ -11068,7 +10683,7 @@
       </p:sp>
       <p:sp>
         <p:nvSpPr>
-          <p:cNvPr id="8" name="TextBox 7"/>
+          <p:cNvPr id="7" name="TextBox 6"/>
           <p:cNvSpPr txBox="1"/>
           <p:nvPr/>
         </p:nvSpPr>
@@ -11110,7 +10725,7 @@
       </p:sp>
       <p:sp>
         <p:nvSpPr>
-          <p:cNvPr id="9" name="TextBox 8"/>
+          <p:cNvPr id="8" name="TextBox 7"/>
           <p:cNvSpPr txBox="1"/>
           <p:nvPr/>
         </p:nvSpPr>
@@ -11152,7 +10767,7 @@
       </p:sp>
       <p:graphicFrame>
         <p:nvGraphicFramePr>
-          <p:cNvPr id="10" name="Chart 9"/>
+          <p:cNvPr id="9" name="Chart 8"/>
           <p:cNvGraphicFramePr>
             <a:graphicFrameLocks noGrp="1"/>
           </p:cNvGraphicFramePr>
@@ -11170,7 +10785,7 @@
       </p:graphicFrame>
       <p:sp>
         <p:nvSpPr>
-          <p:cNvPr id="11" name="Rectangle 10"/>
+          <p:cNvPr id="10" name="Rectangle 9"/>
           <p:cNvSpPr/>
           <p:nvPr/>
         </p:nvSpPr>
@@ -11219,7 +10834,7 @@
       </p:sp>
       <p:sp>
         <p:nvSpPr>
-          <p:cNvPr id="12" name="TextBox 11"/>
+          <p:cNvPr id="11" name="TextBox 10"/>
           <p:cNvSpPr txBox="1"/>
           <p:nvPr/>
         </p:nvSpPr>
@@ -11261,7 +10876,7 @@
       </p:sp>
       <p:sp>
         <p:nvSpPr>
-          <p:cNvPr id="13" name="TextBox 12"/>
+          <p:cNvPr id="12" name="TextBox 11"/>
           <p:cNvSpPr txBox="1"/>
           <p:nvPr/>
         </p:nvSpPr>
@@ -11303,7 +10918,7 @@
       </p:sp>
       <p:sp>
         <p:nvSpPr>
-          <p:cNvPr id="14" name="TextBox 13"/>
+          <p:cNvPr id="13" name="TextBox 12"/>
           <p:cNvSpPr txBox="1"/>
           <p:nvPr/>
         </p:nvSpPr>
@@ -11419,7 +11034,7 @@
         <p:spPr>
           <a:xfrm>
             <a:off x="640080" y="329184"/>
-            <a:ext cx="5303520" cy="182880"/>
+            <a:ext cx="9875520" cy="182880"/>
           </a:xfrm>
           <a:prstGeom prst="rect">
             <a:avLst/>
@@ -11460,48 +11075,6 @@
         </p:nvSpPr>
         <p:spPr>
           <a:xfrm>
-            <a:off x="5897880" y="310896"/>
-            <a:ext cx="4800600" cy="256032"/>
-          </a:xfrm>
-          <a:prstGeom prst="rect">
-            <a:avLst/>
-          </a:prstGeom>
-          <a:noFill/>
-        </p:spPr>
-        <p:txBody>
-          <a:bodyPr wrap="none" lIns="9144" rIns="9144" tIns="9144" bIns="9144" anchor="t">
-            <a:spAutoFit/>
-          </a:bodyPr>
-          <a:lstStyle/>
-          <a:p>
-            <a:pPr algn="r">
-              <a:spcAft>
-                <a:spcPts val="0"/>
-              </a:spcAft>
-              <a:defRPr sz="680" b="1">
-                <a:solidFill>
-                  <a:srgbClr val="4F6B00"/>
-                </a:solidFill>
-                <a:latin typeface="Inter"/>
-              </a:defRPr>
-            </a:pPr>
-            <a:r>
-              <a:rPr>
-                <a:latin typeface="Inter"/>
-              </a:rPr>
-              <a:t>Illustrative, Gradient Maintained — demo data, not the client's holdings or managers</a:t>
-            </a:r>
-          </a:p>
-        </p:txBody>
-      </p:sp>
-      <p:sp>
-        <p:nvSpPr>
-          <p:cNvPr id="5" name="TextBox 4"/>
-          <p:cNvSpPr txBox="1"/>
-          <p:nvPr/>
-        </p:nvSpPr>
-        <p:spPr>
-          <a:xfrm>
             <a:off x="640080" y="566928"/>
             <a:ext cx="10058400" cy="530352"/>
           </a:xfrm>
@@ -11538,7 +11111,7 @@
       </p:sp>
       <p:sp>
         <p:nvSpPr>
-          <p:cNvPr id="6" name="Rectangle 5"/>
+          <p:cNvPr id="5" name="Rectangle 4"/>
           <p:cNvSpPr/>
           <p:nvPr/>
         </p:nvSpPr>
@@ -11587,7 +11160,7 @@
       </p:sp>
       <p:sp>
         <p:nvSpPr>
-          <p:cNvPr id="7" name="Rectangle 6"/>
+          <p:cNvPr id="6" name="Rectangle 5"/>
           <p:cNvSpPr/>
           <p:nvPr/>
         </p:nvSpPr>
@@ -11636,7 +11209,7 @@
       </p:sp>
       <p:sp>
         <p:nvSpPr>
-          <p:cNvPr id="8" name="TextBox 7"/>
+          <p:cNvPr id="7" name="TextBox 6"/>
           <p:cNvSpPr txBox="1"/>
           <p:nvPr/>
         </p:nvSpPr>
@@ -11678,7 +11251,7 @@
       </p:sp>
       <p:sp>
         <p:nvSpPr>
-          <p:cNvPr id="9" name="TextBox 8"/>
+          <p:cNvPr id="8" name="TextBox 7"/>
           <p:cNvSpPr txBox="1"/>
           <p:nvPr/>
         </p:nvSpPr>
@@ -11720,7 +11293,7 @@
       </p:sp>
       <p:graphicFrame>
         <p:nvGraphicFramePr>
-          <p:cNvPr id="10" name="Table 9"/>
+          <p:cNvPr id="9" name="Table 8"/>
           <p:cNvGraphicFramePr>
             <a:graphicFrameLocks noGrp="1"/>
           </p:cNvGraphicFramePr>
@@ -12706,7 +12279,7 @@
       </p:graphicFrame>
       <p:sp>
         <p:nvSpPr>
-          <p:cNvPr id="11" name="Rectangle 10"/>
+          <p:cNvPr id="10" name="Rectangle 9"/>
           <p:cNvSpPr/>
           <p:nvPr/>
         </p:nvSpPr>
@@ -12755,7 +12328,7 @@
       </p:sp>
       <p:sp>
         <p:nvSpPr>
-          <p:cNvPr id="12" name="Rectangle 11"/>
+          <p:cNvPr id="11" name="Rectangle 10"/>
           <p:cNvSpPr/>
           <p:nvPr/>
         </p:nvSpPr>
@@ -12804,7 +12377,7 @@
       </p:sp>
       <p:sp>
         <p:nvSpPr>
-          <p:cNvPr id="13" name="TextBox 12"/>
+          <p:cNvPr id="12" name="TextBox 11"/>
           <p:cNvSpPr txBox="1"/>
           <p:nvPr/>
         </p:nvSpPr>
@@ -12846,7 +12419,7 @@
       </p:sp>
       <p:sp>
         <p:nvSpPr>
-          <p:cNvPr id="14" name="TextBox 13"/>
+          <p:cNvPr id="13" name="TextBox 12"/>
           <p:cNvSpPr txBox="1"/>
           <p:nvPr/>
         </p:nvSpPr>
@@ -12888,7 +12461,7 @@
       </p:sp>
       <p:sp>
         <p:nvSpPr>
-          <p:cNvPr id="15" name="Rectangle 14"/>
+          <p:cNvPr id="14" name="Rectangle 13"/>
           <p:cNvSpPr/>
           <p:nvPr/>
         </p:nvSpPr>
@@ -12937,7 +12510,7 @@
       </p:sp>
       <p:sp>
         <p:nvSpPr>
-          <p:cNvPr id="16" name="TextBox 15"/>
+          <p:cNvPr id="15" name="TextBox 14"/>
           <p:cNvSpPr txBox="1"/>
           <p:nvPr/>
         </p:nvSpPr>
@@ -12979,7 +12552,7 @@
       </p:sp>
       <p:sp>
         <p:nvSpPr>
-          <p:cNvPr id="17" name="TextBox 16"/>
+          <p:cNvPr id="16" name="TextBox 15"/>
           <p:cNvSpPr txBox="1"/>
           <p:nvPr/>
         </p:nvSpPr>
@@ -13021,7 +12594,7 @@
       </p:sp>
       <p:sp>
         <p:nvSpPr>
-          <p:cNvPr id="18" name="TextBox 17"/>
+          <p:cNvPr id="17" name="TextBox 16"/>
           <p:cNvSpPr txBox="1"/>
           <p:nvPr/>
         </p:nvSpPr>
@@ -13137,7 +12710,7 @@
         <p:spPr>
           <a:xfrm>
             <a:off x="640080" y="329184"/>
-            <a:ext cx="5303520" cy="182880"/>
+            <a:ext cx="9875520" cy="182880"/>
           </a:xfrm>
           <a:prstGeom prst="rect">
             <a:avLst/>
@@ -13178,48 +12751,6 @@
         </p:nvSpPr>
         <p:spPr>
           <a:xfrm>
-            <a:off x="5897880" y="310896"/>
-            <a:ext cx="4800600" cy="256032"/>
-          </a:xfrm>
-          <a:prstGeom prst="rect">
-            <a:avLst/>
-          </a:prstGeom>
-          <a:noFill/>
-        </p:spPr>
-        <p:txBody>
-          <a:bodyPr wrap="none" lIns="9144" rIns="9144" tIns="9144" bIns="9144" anchor="t">
-            <a:spAutoFit/>
-          </a:bodyPr>
-          <a:lstStyle/>
-          <a:p>
-            <a:pPr algn="r">
-              <a:spcAft>
-                <a:spcPts val="0"/>
-              </a:spcAft>
-              <a:defRPr sz="680" b="1">
-                <a:solidFill>
-                  <a:srgbClr val="4F6B00"/>
-                </a:solidFill>
-                <a:latin typeface="Inter"/>
-              </a:defRPr>
-            </a:pPr>
-            <a:r>
-              <a:rPr>
-                <a:latin typeface="Inter"/>
-              </a:rPr>
-              <a:t>Illustrative, Gradient Maintained — demo data, not the client's holdings or managers</a:t>
-            </a:r>
-          </a:p>
-        </p:txBody>
-      </p:sp>
-      <p:sp>
-        <p:nvSpPr>
-          <p:cNvPr id="5" name="TextBox 4"/>
-          <p:cNvSpPr txBox="1"/>
-          <p:nvPr/>
-        </p:nvSpPr>
-        <p:spPr>
-          <a:xfrm>
             <a:off x="640080" y="566928"/>
             <a:ext cx="10058400" cy="530352"/>
           </a:xfrm>
@@ -13256,7 +12787,7 @@
       </p:sp>
       <p:sp>
         <p:nvSpPr>
-          <p:cNvPr id="6" name="Rectangle 5"/>
+          <p:cNvPr id="5" name="Rectangle 4"/>
           <p:cNvSpPr/>
           <p:nvPr/>
         </p:nvSpPr>
@@ -13305,7 +12836,7 @@
       </p:sp>
       <p:sp>
         <p:nvSpPr>
-          <p:cNvPr id="7" name="Rectangle 6"/>
+          <p:cNvPr id="6" name="Rectangle 5"/>
           <p:cNvSpPr/>
           <p:nvPr/>
         </p:nvSpPr>
@@ -13354,7 +12885,7 @@
       </p:sp>
       <p:sp>
         <p:nvSpPr>
-          <p:cNvPr id="8" name="TextBox 7"/>
+          <p:cNvPr id="7" name="TextBox 6"/>
           <p:cNvSpPr txBox="1"/>
           <p:nvPr/>
         </p:nvSpPr>
@@ -13396,7 +12927,7 @@
       </p:sp>
       <p:sp>
         <p:nvSpPr>
-          <p:cNvPr id="9" name="TextBox 8"/>
+          <p:cNvPr id="8" name="TextBox 7"/>
           <p:cNvSpPr txBox="1"/>
           <p:nvPr/>
         </p:nvSpPr>
@@ -13438,7 +12969,7 @@
       </p:sp>
       <p:graphicFrame>
         <p:nvGraphicFramePr>
-          <p:cNvPr id="10" name="Table 9"/>
+          <p:cNvPr id="9" name="Table 8"/>
           <p:cNvGraphicFramePr>
             <a:graphicFrameLocks noGrp="1"/>
           </p:cNvGraphicFramePr>
@@ -13960,7 +13491,7 @@
       </p:graphicFrame>
       <p:sp>
         <p:nvSpPr>
-          <p:cNvPr id="11" name="Rectangle 10"/>
+          <p:cNvPr id="10" name="Rectangle 9"/>
           <p:cNvSpPr/>
           <p:nvPr/>
         </p:nvSpPr>
@@ -14009,7 +13540,7 @@
       </p:sp>
       <p:sp>
         <p:nvSpPr>
-          <p:cNvPr id="12" name="Rectangle 11"/>
+          <p:cNvPr id="11" name="Rectangle 10"/>
           <p:cNvSpPr/>
           <p:nvPr/>
         </p:nvSpPr>
@@ -14058,7 +13589,7 @@
       </p:sp>
       <p:sp>
         <p:nvSpPr>
-          <p:cNvPr id="13" name="TextBox 12"/>
+          <p:cNvPr id="12" name="TextBox 11"/>
           <p:cNvSpPr txBox="1"/>
           <p:nvPr/>
         </p:nvSpPr>
@@ -14100,7 +13631,7 @@
       </p:sp>
       <p:sp>
         <p:nvSpPr>
-          <p:cNvPr id="14" name="TextBox 13"/>
+          <p:cNvPr id="13" name="TextBox 12"/>
           <p:cNvSpPr txBox="1"/>
           <p:nvPr/>
         </p:nvSpPr>
@@ -14142,7 +13673,7 @@
       </p:sp>
       <p:sp>
         <p:nvSpPr>
-          <p:cNvPr id="15" name="Rectangle 14"/>
+          <p:cNvPr id="14" name="Rectangle 13"/>
           <p:cNvSpPr/>
           <p:nvPr/>
         </p:nvSpPr>
@@ -14191,7 +13722,7 @@
       </p:sp>
       <p:sp>
         <p:nvSpPr>
-          <p:cNvPr id="16" name="TextBox 15"/>
+          <p:cNvPr id="15" name="TextBox 14"/>
           <p:cNvSpPr txBox="1"/>
           <p:nvPr/>
         </p:nvSpPr>
@@ -14233,7 +13764,7 @@
       </p:sp>
       <p:sp>
         <p:nvSpPr>
-          <p:cNvPr id="17" name="TextBox 16"/>
+          <p:cNvPr id="16" name="TextBox 15"/>
           <p:cNvSpPr txBox="1"/>
           <p:nvPr/>
         </p:nvSpPr>
@@ -14275,7 +13806,7 @@
       </p:sp>
       <p:sp>
         <p:nvSpPr>
-          <p:cNvPr id="18" name="TextBox 17"/>
+          <p:cNvPr id="17" name="TextBox 16"/>
           <p:cNvSpPr txBox="1"/>
           <p:nvPr/>
         </p:nvSpPr>
@@ -14391,7 +13922,7 @@
         <p:spPr>
           <a:xfrm>
             <a:off x="640080" y="329184"/>
-            <a:ext cx="5303520" cy="182880"/>
+            <a:ext cx="9875520" cy="182880"/>
           </a:xfrm>
           <a:prstGeom prst="rect">
             <a:avLst/>
@@ -14432,48 +13963,6 @@
         </p:nvSpPr>
         <p:spPr>
           <a:xfrm>
-            <a:off x="5897880" y="310896"/>
-            <a:ext cx="4800600" cy="256032"/>
-          </a:xfrm>
-          <a:prstGeom prst="rect">
-            <a:avLst/>
-          </a:prstGeom>
-          <a:noFill/>
-        </p:spPr>
-        <p:txBody>
-          <a:bodyPr wrap="none" lIns="9144" rIns="9144" tIns="9144" bIns="9144" anchor="t">
-            <a:spAutoFit/>
-          </a:bodyPr>
-          <a:lstStyle/>
-          <a:p>
-            <a:pPr algn="r">
-              <a:spcAft>
-                <a:spcPts val="0"/>
-              </a:spcAft>
-              <a:defRPr sz="680" b="1">
-                <a:solidFill>
-                  <a:srgbClr val="4F6B00"/>
-                </a:solidFill>
-                <a:latin typeface="Inter"/>
-              </a:defRPr>
-            </a:pPr>
-            <a:r>
-              <a:rPr>
-                <a:latin typeface="Inter"/>
-              </a:rPr>
-              <a:t>Illustrative, Gradient Maintained — demo data, not the client's holdings or managers</a:t>
-            </a:r>
-          </a:p>
-        </p:txBody>
-      </p:sp>
-      <p:sp>
-        <p:nvSpPr>
-          <p:cNvPr id="5" name="TextBox 4"/>
-          <p:cNvSpPr txBox="1"/>
-          <p:nvPr/>
-        </p:nvSpPr>
-        <p:spPr>
-          <a:xfrm>
             <a:off x="640080" y="566928"/>
             <a:ext cx="10058400" cy="530352"/>
           </a:xfrm>
@@ -14510,7 +13999,7 @@
       </p:sp>
       <p:sp>
         <p:nvSpPr>
-          <p:cNvPr id="6" name="Rectangle 5"/>
+          <p:cNvPr id="5" name="Rectangle 4"/>
           <p:cNvSpPr/>
           <p:nvPr/>
         </p:nvSpPr>
@@ -14559,7 +14048,7 @@
       </p:sp>
       <p:sp>
         <p:nvSpPr>
-          <p:cNvPr id="7" name="Rectangle 6"/>
+          <p:cNvPr id="6" name="Rectangle 5"/>
           <p:cNvSpPr/>
           <p:nvPr/>
         </p:nvSpPr>
@@ -14608,7 +14097,7 @@
       </p:sp>
       <p:sp>
         <p:nvSpPr>
-          <p:cNvPr id="8" name="TextBox 7"/>
+          <p:cNvPr id="7" name="TextBox 6"/>
           <p:cNvSpPr txBox="1"/>
           <p:nvPr/>
         </p:nvSpPr>
@@ -14650,7 +14139,7 @@
       </p:sp>
       <p:sp>
         <p:nvSpPr>
-          <p:cNvPr id="9" name="TextBox 8"/>
+          <p:cNvPr id="8" name="TextBox 7"/>
           <p:cNvSpPr txBox="1"/>
           <p:nvPr/>
         </p:nvSpPr>
@@ -14692,7 +14181,7 @@
       </p:sp>
       <p:sp>
         <p:nvSpPr>
-          <p:cNvPr id="10" name="TextBox 9"/>
+          <p:cNvPr id="9" name="TextBox 8"/>
           <p:cNvSpPr txBox="1"/>
           <p:nvPr/>
         </p:nvSpPr>
@@ -14791,7 +14280,7 @@
       </p:sp>
       <p:sp>
         <p:nvSpPr>
-          <p:cNvPr id="11" name="TextBox 10"/>
+          <p:cNvPr id="10" name="TextBox 9"/>
           <p:cNvSpPr txBox="1"/>
           <p:nvPr/>
         </p:nvSpPr>
@@ -14918,7 +14407,7 @@
       </p:sp>
       <p:sp>
         <p:nvSpPr>
-          <p:cNvPr id="12" name="Rectangle 11"/>
+          <p:cNvPr id="11" name="Rectangle 10"/>
           <p:cNvSpPr/>
           <p:nvPr/>
         </p:nvSpPr>
@@ -14967,7 +14456,7 @@
       </p:sp>
       <p:sp>
         <p:nvSpPr>
-          <p:cNvPr id="13" name="TextBox 12"/>
+          <p:cNvPr id="12" name="TextBox 11"/>
           <p:cNvSpPr txBox="1"/>
           <p:nvPr/>
         </p:nvSpPr>
@@ -15009,7 +14498,7 @@
       </p:sp>
       <p:sp>
         <p:nvSpPr>
-          <p:cNvPr id="14" name="TextBox 13"/>
+          <p:cNvPr id="13" name="TextBox 12"/>
           <p:cNvSpPr txBox="1"/>
           <p:nvPr/>
         </p:nvSpPr>
@@ -15051,7 +14540,7 @@
       </p:sp>
       <p:sp>
         <p:nvSpPr>
-          <p:cNvPr id="15" name="TextBox 14"/>
+          <p:cNvPr id="14" name="TextBox 13"/>
           <p:cNvSpPr txBox="1"/>
           <p:nvPr/>
         </p:nvSpPr>
@@ -15167,7 +14656,7 @@
         <p:spPr>
           <a:xfrm>
             <a:off x="640080" y="329184"/>
-            <a:ext cx="5303520" cy="182880"/>
+            <a:ext cx="9875520" cy="182880"/>
           </a:xfrm>
           <a:prstGeom prst="rect">
             <a:avLst/>
@@ -15208,48 +14697,6 @@
         </p:nvSpPr>
         <p:spPr>
           <a:xfrm>
-            <a:off x="5897880" y="310896"/>
-            <a:ext cx="4800600" cy="256032"/>
-          </a:xfrm>
-          <a:prstGeom prst="rect">
-            <a:avLst/>
-          </a:prstGeom>
-          <a:noFill/>
-        </p:spPr>
-        <p:txBody>
-          <a:bodyPr wrap="none" lIns="9144" rIns="9144" tIns="9144" bIns="9144" anchor="t">
-            <a:spAutoFit/>
-          </a:bodyPr>
-          <a:lstStyle/>
-          <a:p>
-            <a:pPr algn="r">
-              <a:spcAft>
-                <a:spcPts val="0"/>
-              </a:spcAft>
-              <a:defRPr sz="680" b="1">
-                <a:solidFill>
-                  <a:srgbClr val="4F6B00"/>
-                </a:solidFill>
-                <a:latin typeface="Inter"/>
-              </a:defRPr>
-            </a:pPr>
-            <a:r>
-              <a:rPr>
-                <a:latin typeface="Inter"/>
-              </a:rPr>
-              <a:t>Illustrative, Gradient Maintained — demo data, not the client's holdings or managers</a:t>
-            </a:r>
-          </a:p>
-        </p:txBody>
-      </p:sp>
-      <p:sp>
-        <p:nvSpPr>
-          <p:cNvPr id="5" name="TextBox 4"/>
-          <p:cNvSpPr txBox="1"/>
-          <p:nvPr/>
-        </p:nvSpPr>
-        <p:spPr>
-          <a:xfrm>
             <a:off x="640080" y="566928"/>
             <a:ext cx="10058400" cy="530352"/>
           </a:xfrm>
@@ -15286,7 +14733,7 @@
       </p:sp>
       <p:sp>
         <p:nvSpPr>
-          <p:cNvPr id="6" name="Rectangle 5"/>
+          <p:cNvPr id="5" name="Rectangle 4"/>
           <p:cNvSpPr/>
           <p:nvPr/>
         </p:nvSpPr>
@@ -15335,7 +14782,7 @@
       </p:sp>
       <p:sp>
         <p:nvSpPr>
-          <p:cNvPr id="7" name="Rectangle 6"/>
+          <p:cNvPr id="6" name="Rectangle 5"/>
           <p:cNvSpPr/>
           <p:nvPr/>
         </p:nvSpPr>
@@ -15384,7 +14831,7 @@
       </p:sp>
       <p:sp>
         <p:nvSpPr>
-          <p:cNvPr id="8" name="TextBox 7"/>
+          <p:cNvPr id="7" name="TextBox 6"/>
           <p:cNvSpPr txBox="1"/>
           <p:nvPr/>
         </p:nvSpPr>
@@ -15426,7 +14873,7 @@
       </p:sp>
       <p:sp>
         <p:nvSpPr>
-          <p:cNvPr id="9" name="TextBox 8"/>
+          <p:cNvPr id="8" name="TextBox 7"/>
           <p:cNvSpPr txBox="1"/>
           <p:nvPr/>
         </p:nvSpPr>
@@ -15468,7 +14915,7 @@
       </p:sp>
       <p:graphicFrame>
         <p:nvGraphicFramePr>
-          <p:cNvPr id="10" name="Table 9"/>
+          <p:cNvPr id="9" name="Table 8"/>
           <p:cNvGraphicFramePr>
             <a:graphicFrameLocks noGrp="1"/>
           </p:cNvGraphicFramePr>
@@ -16408,7 +15855,7 @@
       </p:graphicFrame>
       <p:sp>
         <p:nvSpPr>
-          <p:cNvPr id="11" name="TextBox 10"/>
+          <p:cNvPr id="10" name="TextBox 9"/>
           <p:cNvSpPr txBox="1"/>
           <p:nvPr/>
         </p:nvSpPr>
@@ -16450,7 +15897,7 @@
       </p:sp>
       <p:sp>
         <p:nvSpPr>
-          <p:cNvPr id="12" name="Rectangle 11"/>
+          <p:cNvPr id="11" name="Rectangle 10"/>
           <p:cNvSpPr/>
           <p:nvPr/>
         </p:nvSpPr>
@@ -16499,7 +15946,7 @@
       </p:sp>
       <p:sp>
         <p:nvSpPr>
-          <p:cNvPr id="13" name="TextBox 12"/>
+          <p:cNvPr id="12" name="TextBox 11"/>
           <p:cNvSpPr txBox="1"/>
           <p:nvPr/>
         </p:nvSpPr>
@@ -16541,7 +15988,7 @@
       </p:sp>
       <p:sp>
         <p:nvSpPr>
-          <p:cNvPr id="14" name="TextBox 13"/>
+          <p:cNvPr id="13" name="TextBox 12"/>
           <p:cNvSpPr txBox="1"/>
           <p:nvPr/>
         </p:nvSpPr>
@@ -16583,7 +16030,7 @@
       </p:sp>
       <p:sp>
         <p:nvSpPr>
-          <p:cNvPr id="15" name="TextBox 14"/>
+          <p:cNvPr id="14" name="TextBox 13"/>
           <p:cNvSpPr txBox="1"/>
           <p:nvPr/>
         </p:nvSpPr>
@@ -16699,7 +16146,7 @@
         <p:spPr>
           <a:xfrm>
             <a:off x="640080" y="329184"/>
-            <a:ext cx="5303520" cy="182880"/>
+            <a:ext cx="9875520" cy="182880"/>
           </a:xfrm>
           <a:prstGeom prst="rect">
             <a:avLst/>
@@ -16740,48 +16187,6 @@
         </p:nvSpPr>
         <p:spPr>
           <a:xfrm>
-            <a:off x="5897880" y="310896"/>
-            <a:ext cx="4800600" cy="256032"/>
-          </a:xfrm>
-          <a:prstGeom prst="rect">
-            <a:avLst/>
-          </a:prstGeom>
-          <a:noFill/>
-        </p:spPr>
-        <p:txBody>
-          <a:bodyPr wrap="none" lIns="9144" rIns="9144" tIns="9144" bIns="9144" anchor="t">
-            <a:spAutoFit/>
-          </a:bodyPr>
-          <a:lstStyle/>
-          <a:p>
-            <a:pPr algn="r">
-              <a:spcAft>
-                <a:spcPts val="0"/>
-              </a:spcAft>
-              <a:defRPr sz="680" b="1">
-                <a:solidFill>
-                  <a:srgbClr val="4F6B00"/>
-                </a:solidFill>
-                <a:latin typeface="Inter"/>
-              </a:defRPr>
-            </a:pPr>
-            <a:r>
-              <a:rPr>
-                <a:latin typeface="Inter"/>
-              </a:rPr>
-              <a:t>Illustrative, Gradient Maintained — demo data, not the client's holdings or managers</a:t>
-            </a:r>
-          </a:p>
-        </p:txBody>
-      </p:sp>
-      <p:sp>
-        <p:nvSpPr>
-          <p:cNvPr id="5" name="TextBox 4"/>
-          <p:cNvSpPr txBox="1"/>
-          <p:nvPr/>
-        </p:nvSpPr>
-        <p:spPr>
-          <a:xfrm>
             <a:off x="640080" y="566928"/>
             <a:ext cx="10058400" cy="530352"/>
           </a:xfrm>
@@ -16818,7 +16223,7 @@
       </p:sp>
       <p:sp>
         <p:nvSpPr>
-          <p:cNvPr id="6" name="Rectangle 5"/>
+          <p:cNvPr id="5" name="Rectangle 4"/>
           <p:cNvSpPr/>
           <p:nvPr/>
         </p:nvSpPr>
@@ -16867,7 +16272,7 @@
       </p:sp>
       <p:sp>
         <p:nvSpPr>
-          <p:cNvPr id="7" name="Rectangle 6"/>
+          <p:cNvPr id="6" name="Rectangle 5"/>
           <p:cNvSpPr/>
           <p:nvPr/>
         </p:nvSpPr>
@@ -16916,7 +16321,7 @@
       </p:sp>
       <p:sp>
         <p:nvSpPr>
-          <p:cNvPr id="8" name="TextBox 7"/>
+          <p:cNvPr id="7" name="TextBox 6"/>
           <p:cNvSpPr txBox="1"/>
           <p:nvPr/>
         </p:nvSpPr>
@@ -16958,7 +16363,7 @@
       </p:sp>
       <p:sp>
         <p:nvSpPr>
-          <p:cNvPr id="9" name="TextBox 8"/>
+          <p:cNvPr id="8" name="TextBox 7"/>
           <p:cNvSpPr txBox="1"/>
           <p:nvPr/>
         </p:nvSpPr>
@@ -17000,7 +16405,7 @@
       </p:sp>
       <p:graphicFrame>
         <p:nvGraphicFramePr>
-          <p:cNvPr id="10" name="Table 9"/>
+          <p:cNvPr id="9" name="Table 8"/>
           <p:cNvGraphicFramePr>
             <a:graphicFrameLocks noGrp="1"/>
           </p:cNvGraphicFramePr>
@@ -17008,7 +16413,7 @@
         </p:nvGraphicFramePr>
         <p:xfrm>
           <a:off x="640080" y="1600200"/>
-          <a:ext cx="10908792" cy="4617720"/>
+          <a:ext cx="10908792" cy="2116836"/>
         </p:xfrm>
         <a:graphic>
           <a:graphicData uri="http://schemas.openxmlformats.org/drawingml/2006/table">
@@ -17018,16 +16423,12 @@
               </a:tblPr>
               <a:tblGrid>
                 <a:gridCol w="2011680"/>
-                <a:gridCol w="1112139"/>
-                <a:gridCol w="1112139"/>
-                <a:gridCol w="1112139"/>
-                <a:gridCol w="1112139"/>
-                <a:gridCol w="1112139"/>
-                <a:gridCol w="1112139"/>
-                <a:gridCol w="1112139"/>
-                <a:gridCol w="1112139"/>
+                <a:gridCol w="2224278"/>
+                <a:gridCol w="2224278"/>
+                <a:gridCol w="2224278"/>
+                <a:gridCol w="2224278"/>
               </a:tblGrid>
-              <a:tr h="769620">
+              <a:tr h="352806">
                 <a:tc>
                   <a:txBody>
                     <a:bodyPr/>
@@ -17099,7 +16500,7 @@
                         <a:rPr>
                           <a:latin typeface="Inter"/>
                         </a:rPr>
-                        <a:t>Basis</a:t>
+                        <a:t>Source</a:t>
                       </a:r>
                     </a:p>
                   </a:txBody>
@@ -17126,7 +16527,7 @@
                         <a:rPr>
                           <a:latin typeface="Inter"/>
                         </a:rPr>
-                        <a:t>Tool / view</a:t>
+                        <a:t>As of</a:t>
                       </a:r>
                     </a:p>
                   </a:txBody>
@@ -17153,7 +16554,7 @@
                         <a:rPr>
                           <a:latin typeface="Inter"/>
                         </a:rPr>
-                        <a:t>Key parameters</a:t>
+                        <a:t>Check</a:t>
                       </a:r>
                     </a:p>
                   </a:txBody>
@@ -17163,123 +16564,15 @@
                     </a:solidFill>
                   </a:tcPr>
                 </a:tc>
-                <a:tc>
-                  <a:txBody>
-                    <a:bodyPr/>
-                    <a:lstStyle/>
-                    <a:p>
-                      <a:pPr>
-                        <a:defRPr sz="750" b="1">
-                          <a:solidFill>
-                            <a:srgbClr val="FFFFFF"/>
-                          </a:solidFill>
-                          <a:latin typeface="Inter"/>
-                        </a:defRPr>
-                      </a:pPr>
-                      <a:r>
-                        <a:rPr>
-                          <a:latin typeface="Inter"/>
-                        </a:rPr>
-                        <a:t>As of</a:t>
-                      </a:r>
-                    </a:p>
-                  </a:txBody>
-                  <a:tcPr marL="54864" marR="54864" marT="27432" marB="27432" anchor="ctr">
-                    <a:solidFill>
-                      <a:srgbClr val="0D1117"/>
-                    </a:solidFill>
-                  </a:tcPr>
-                </a:tc>
-                <a:tc>
-                  <a:txBody>
-                    <a:bodyPr/>
-                    <a:lstStyle/>
-                    <a:p>
-                      <a:pPr>
-                        <a:defRPr sz="750" b="1">
-                          <a:solidFill>
-                            <a:srgbClr val="FFFFFF"/>
-                          </a:solidFill>
-                          <a:latin typeface="Inter"/>
-                        </a:defRPr>
-                      </a:pPr>
-                      <a:r>
-                        <a:rPr>
-                          <a:latin typeface="Inter"/>
-                        </a:rPr>
-                        <a:t>Data scope</a:t>
-                      </a:r>
-                    </a:p>
-                  </a:txBody>
-                  <a:tcPr marL="54864" marR="54864" marT="27432" marB="27432" anchor="ctr">
-                    <a:solidFill>
-                      <a:srgbClr val="0D1117"/>
-                    </a:solidFill>
-                  </a:tcPr>
-                </a:tc>
-                <a:tc>
-                  <a:txBody>
-                    <a:bodyPr/>
-                    <a:lstStyle/>
-                    <a:p>
-                      <a:pPr>
-                        <a:defRPr sz="750" b="1">
-                          <a:solidFill>
-                            <a:srgbClr val="FFFFFF"/>
-                          </a:solidFill>
-                          <a:latin typeface="Inter"/>
-                        </a:defRPr>
-                      </a:pPr>
-                      <a:r>
-                        <a:rPr>
-                          <a:latin typeface="Inter"/>
-                        </a:rPr>
-                        <a:t>Validation</a:t>
-                      </a:r>
-                    </a:p>
-                  </a:txBody>
-                  <a:tcPr marL="54864" marR="54864" marT="27432" marB="27432" anchor="ctr">
-                    <a:solidFill>
-                      <a:srgbClr val="0D1117"/>
-                    </a:solidFill>
-                  </a:tcPr>
-                </a:tc>
-                <a:tc>
-                  <a:txBody>
-                    <a:bodyPr/>
-                    <a:lstStyle/>
-                    <a:p>
-                      <a:pPr>
-                        <a:defRPr sz="750" b="1">
-                          <a:solidFill>
-                            <a:srgbClr val="FFFFFF"/>
-                          </a:solidFill>
-                          <a:latin typeface="Inter"/>
-                        </a:defRPr>
-                      </a:pPr>
-                      <a:r>
-                        <a:rPr>
-                          <a:latin typeface="Inter"/>
-                        </a:rPr>
-                        <a:t>Digest</a:t>
-                      </a:r>
-                    </a:p>
-                  </a:txBody>
-                  <a:tcPr marL="54864" marR="54864" marT="27432" marB="27432" anchor="ctr">
-                    <a:solidFill>
-                      <a:srgbClr val="0D1117"/>
-                    </a:solidFill>
-                  </a:tcPr>
-                </a:tc>
               </a:tr>
-              <a:tr h="769620">
-                <a:tc>
-                  <a:txBody>
-                    <a:bodyPr/>
-                    <a:lstStyle/>
-                    <a:p>
-                      <a:pPr>
-                        <a:defRPr sz="650" b="1">
+              <a:tr h="352806">
+                <a:tc>
+                  <a:txBody>
+                    <a:bodyPr/>
+                    <a:lstStyle/>
+                    <a:p>
+                      <a:pPr>
+                        <a:defRPr sz="720" b="1">
                           <a:solidFill>
                             <a:srgbClr val="0D1117"/>
                           </a:solidFill>
@@ -17306,7 +16599,7 @@
                     <a:lstStyle/>
                     <a:p>
                       <a:pPr>
-                        <a:defRPr sz="650" b="0">
+                        <a:defRPr sz="720" b="0">
                           <a:solidFill>
                             <a:srgbClr val="0D1117"/>
                           </a:solidFill>
@@ -17333,7 +16626,7 @@
                     <a:lstStyle/>
                     <a:p>
                       <a:pPr>
-                        <a:defRPr sz="650" b="0">
+                        <a:defRPr sz="720" b="0">
                           <a:solidFill>
                             <a:srgbClr val="0D1117"/>
                           </a:solidFill>
@@ -17344,7 +16637,7 @@
                         <a:rPr>
                           <a:latin typeface="Inter"/>
                         </a:rPr>
-                        <a:t>gradient_tool</a:t>
+                        <a:t>analyze_strategy_lab_compare</a:t>
                       </a:r>
                     </a:p>
                   </a:txBody>
@@ -17360,7 +16653,7 @@
                     <a:lstStyle/>
                     <a:p>
                       <a:pPr>
-                        <a:defRPr sz="650" b="0">
+                        <a:defRPr sz="720" b="0">
                           <a:solidFill>
                             <a:srgbClr val="0D1117"/>
                           </a:solidFill>
@@ -17371,6 +16664,527 @@
                         <a:rPr>
                           <a:latin typeface="Inter"/>
                         </a:rPr>
+                        <a:t>2025-12-31</a:t>
+                      </a:r>
+                    </a:p>
+                  </a:txBody>
+                  <a:tcPr marL="54864" marR="54864" marT="27432" marB="27432" anchor="ctr">
+                    <a:solidFill>
+                      <a:srgbClr val="FFFFFF"/>
+                    </a:solidFill>
+                  </a:tcPr>
+                </a:tc>
+                <a:tc>
+                  <a:txBody>
+                    <a:bodyPr/>
+                    <a:lstStyle/>
+                    <a:p>
+                      <a:pPr>
+                        <a:defRPr sz="720" b="1">
+                          <a:solidFill>
+                            <a:srgbClr val="C6F432"/>
+                          </a:solidFill>
+                          <a:latin typeface="Inter"/>
+                        </a:defRPr>
+                      </a:pPr>
+                      <a:r>
+                        <a:rPr>
+                          <a:latin typeface="Inter"/>
+                        </a:rPr>
+                        <a:t>● Passed</a:t>
+                      </a:r>
+                    </a:p>
+                  </a:txBody>
+                  <a:tcPr marL="54864" marR="54864" marT="27432" marB="27432" anchor="ctr">
+                    <a:solidFill>
+                      <a:srgbClr val="F5F7F9"/>
+                    </a:solidFill>
+                  </a:tcPr>
+                </a:tc>
+              </a:tr>
+              <a:tr h="352806">
+                <a:tc>
+                  <a:txBody>
+                    <a:bodyPr/>
+                    <a:lstStyle/>
+                    <a:p>
+                      <a:pPr>
+                        <a:defRPr sz="720" b="1">
+                          <a:solidFill>
+                            <a:srgbClr val="0D1117"/>
+                          </a:solidFill>
+                          <a:latin typeface="Inter"/>
+                        </a:defRPr>
+                      </a:pPr>
+                      <a:r>
+                        <a:rPr>
+                          <a:latin typeface="Inter"/>
+                        </a:rPr>
+                        <a:t>S2</a:t>
+                      </a:r>
+                    </a:p>
+                  </a:txBody>
+                  <a:tcPr marL="54864" marR="54864" marT="27432" marB="27432" anchor="ctr">
+                    <a:solidFill>
+                      <a:srgbClr val="F5F7F9"/>
+                    </a:solidFill>
+                  </a:tcPr>
+                </a:tc>
+                <a:tc>
+                  <a:txBody>
+                    <a:bodyPr/>
+                    <a:lstStyle/>
+                    <a:p>
+                      <a:pPr>
+                        <a:defRPr sz="720" b="0">
+                          <a:solidFill>
+                            <a:srgbClr val="0D1117"/>
+                          </a:solidFill>
+                          <a:latin typeface="Inter"/>
+                        </a:defRPr>
+                      </a:pPr>
+                      <a:r>
+                        <a:rPr>
+                          <a:latin typeface="Inter"/>
+                        </a:rPr>
+                        <a:t>Realized paths, rolling statistics, relative metrics, capture, and distribution</a:t>
+                      </a:r>
+                    </a:p>
+                  </a:txBody>
+                  <a:tcPr marL="54864" marR="54864" marT="27432" marB="27432" anchor="ctr">
+                    <a:solidFill>
+                      <a:srgbClr val="F5F7F9"/>
+                    </a:solidFill>
+                  </a:tcPr>
+                </a:tc>
+                <a:tc>
+                  <a:txBody>
+                    <a:bodyPr/>
+                    <a:lstStyle/>
+                    <a:p>
+                      <a:pPr>
+                        <a:defRPr sz="720" b="0">
+                          <a:solidFill>
+                            <a:srgbClr val="0D1117"/>
+                          </a:solidFill>
+                          <a:latin typeface="Inter"/>
+                        </a:defRPr>
+                      </a:pPr>
+                      <a:r>
+                        <a:rPr>
+                          <a:latin typeface="Inter"/>
+                        </a:rPr>
+                        <a:t>run_strategy_lab_relative_return</a:t>
+                      </a:r>
+                    </a:p>
+                  </a:txBody>
+                  <a:tcPr marL="54864" marR="54864" marT="27432" marB="27432" anchor="ctr">
+                    <a:solidFill>
+                      <a:srgbClr val="F5F7F9"/>
+                    </a:solidFill>
+                  </a:tcPr>
+                </a:tc>
+                <a:tc>
+                  <a:txBody>
+                    <a:bodyPr/>
+                    <a:lstStyle/>
+                    <a:p>
+                      <a:pPr>
+                        <a:defRPr sz="720" b="0">
+                          <a:solidFill>
+                            <a:srgbClr val="0D1117"/>
+                          </a:solidFill>
+                          <a:latin typeface="Inter"/>
+                        </a:defRPr>
+                      </a:pPr>
+                      <a:r>
+                        <a:rPr>
+                          <a:latin typeface="Inter"/>
+                        </a:rPr>
+                        <a:t>2025-12-31</a:t>
+                      </a:r>
+                    </a:p>
+                  </a:txBody>
+                  <a:tcPr marL="54864" marR="54864" marT="27432" marB="27432" anchor="ctr">
+                    <a:solidFill>
+                      <a:srgbClr val="F5F7F9"/>
+                    </a:solidFill>
+                  </a:tcPr>
+                </a:tc>
+                <a:tc>
+                  <a:txBody>
+                    <a:bodyPr/>
+                    <a:lstStyle/>
+                    <a:p>
+                      <a:pPr>
+                        <a:defRPr sz="720" b="1">
+                          <a:solidFill>
+                            <a:srgbClr val="C6F432"/>
+                          </a:solidFill>
+                          <a:latin typeface="Inter"/>
+                        </a:defRPr>
+                      </a:pPr>
+                      <a:r>
+                        <a:rPr>
+                          <a:latin typeface="Inter"/>
+                        </a:rPr>
+                        <a:t>● Passed</a:t>
+                      </a:r>
+                    </a:p>
+                  </a:txBody>
+                  <a:tcPr marL="54864" marR="54864" marT="27432" marB="27432" anchor="ctr">
+                    <a:solidFill>
+                      <a:srgbClr val="F5F7F9"/>
+                    </a:solidFill>
+                  </a:tcPr>
+                </a:tc>
+              </a:tr>
+              <a:tr h="352806">
+                <a:tc>
+                  <a:txBody>
+                    <a:bodyPr/>
+                    <a:lstStyle/>
+                    <a:p>
+                      <a:pPr>
+                        <a:defRPr sz="720" b="1">
+                          <a:solidFill>
+                            <a:srgbClr val="0D1117"/>
+                          </a:solidFill>
+                          <a:latin typeface="Inter"/>
+                        </a:defRPr>
+                      </a:pPr>
+                      <a:r>
+                        <a:rPr>
+                          <a:latin typeface="Inter"/>
+                        </a:rPr>
+                        <a:t>S3</a:t>
+                      </a:r>
+                    </a:p>
+                  </a:txBody>
+                  <a:tcPr marL="54864" marR="54864" marT="27432" marB="27432" anchor="ctr">
+                    <a:solidFill>
+                      <a:srgbClr val="FFFFFF"/>
+                    </a:solidFill>
+                  </a:tcPr>
+                </a:tc>
+                <a:tc>
+                  <a:txBody>
+                    <a:bodyPr/>
+                    <a:lstStyle/>
+                    <a:p>
+                      <a:pPr>
+                        <a:defRPr sz="720" b="0">
+                          <a:solidFill>
+                            <a:srgbClr val="0D1117"/>
+                          </a:solidFill>
+                          <a:latin typeface="Inter"/>
+                        </a:defRPr>
+                      </a:pPr>
+                      <a:r>
+                        <a:rPr>
+                          <a:latin typeface="Inter"/>
+                        </a:rPr>
+                        <a:t>Date-window robustness</a:t>
+                      </a:r>
+                    </a:p>
+                  </a:txBody>
+                  <a:tcPr marL="54864" marR="54864" marT="27432" marB="27432" anchor="ctr">
+                    <a:solidFill>
+                      <a:srgbClr val="FFFFFF"/>
+                    </a:solidFill>
+                  </a:tcPr>
+                </a:tc>
+                <a:tc>
+                  <a:txBody>
+                    <a:bodyPr/>
+                    <a:lstStyle/>
+                    <a:p>
+                      <a:pPr>
+                        <a:defRPr sz="720" b="0">
+                          <a:solidFill>
+                            <a:srgbClr val="0D1117"/>
+                          </a:solidFill>
+                          <a:latin typeface="Inter"/>
+                        </a:defRPr>
+                      </a:pPr>
+                      <a:r>
+                        <a:rPr>
+                          <a:latin typeface="Inter"/>
+                        </a:rPr>
+                        <a:t>run_strategy_lab_date_window_robustness</a:t>
+                      </a:r>
+                    </a:p>
+                  </a:txBody>
+                  <a:tcPr marL="54864" marR="54864" marT="27432" marB="27432" anchor="ctr">
+                    <a:solidFill>
+                      <a:srgbClr val="FFFFFF"/>
+                    </a:solidFill>
+                  </a:tcPr>
+                </a:tc>
+                <a:tc>
+                  <a:txBody>
+                    <a:bodyPr/>
+                    <a:lstStyle/>
+                    <a:p>
+                      <a:pPr>
+                        <a:defRPr sz="720" b="0">
+                          <a:solidFill>
+                            <a:srgbClr val="0D1117"/>
+                          </a:solidFill>
+                          <a:latin typeface="Inter"/>
+                        </a:defRPr>
+                      </a:pPr>
+                      <a:r>
+                        <a:rPr>
+                          <a:latin typeface="Inter"/>
+                        </a:rPr>
+                        <a:t>2025-12-31</a:t>
+                      </a:r>
+                    </a:p>
+                  </a:txBody>
+                  <a:tcPr marL="54864" marR="54864" marT="27432" marB="27432" anchor="ctr">
+                    <a:solidFill>
+                      <a:srgbClr val="FFFFFF"/>
+                    </a:solidFill>
+                  </a:tcPr>
+                </a:tc>
+                <a:tc>
+                  <a:txBody>
+                    <a:bodyPr/>
+                    <a:lstStyle/>
+                    <a:p>
+                      <a:pPr>
+                        <a:defRPr sz="720" b="1">
+                          <a:solidFill>
+                            <a:srgbClr val="C6F432"/>
+                          </a:solidFill>
+                          <a:latin typeface="Inter"/>
+                        </a:defRPr>
+                      </a:pPr>
+                      <a:r>
+                        <a:rPr>
+                          <a:latin typeface="Inter"/>
+                        </a:rPr>
+                        <a:t>● Passed</a:t>
+                      </a:r>
+                    </a:p>
+                  </a:txBody>
+                  <a:tcPr marL="54864" marR="54864" marT="27432" marB="27432" anchor="ctr">
+                    <a:solidFill>
+                      <a:srgbClr val="F5F7F9"/>
+                    </a:solidFill>
+                  </a:tcPr>
+                </a:tc>
+              </a:tr>
+              <a:tr h="352806">
+                <a:tc>
+                  <a:txBody>
+                    <a:bodyPr/>
+                    <a:lstStyle/>
+                    <a:p>
+                      <a:pPr>
+                        <a:defRPr sz="720" b="1">
+                          <a:solidFill>
+                            <a:srgbClr val="0D1117"/>
+                          </a:solidFill>
+                          <a:latin typeface="Inter"/>
+                        </a:defRPr>
+                      </a:pPr>
+                      <a:r>
+                        <a:rPr>
+                          <a:latin typeface="Inter"/>
+                        </a:rPr>
+                        <a:t>S4</a:t>
+                      </a:r>
+                    </a:p>
+                  </a:txBody>
+                  <a:tcPr marL="54864" marR="54864" marT="27432" marB="27432" anchor="ctr">
+                    <a:solidFill>
+                      <a:srgbClr val="F5F7F9"/>
+                    </a:solidFill>
+                  </a:tcPr>
+                </a:tc>
+                <a:tc>
+                  <a:txBody>
+                    <a:bodyPr/>
+                    <a:lstStyle/>
+                    <a:p>
+                      <a:pPr>
+                        <a:defRPr sz="720" b="0">
+                          <a:solidFill>
+                            <a:srgbClr val="0D1117"/>
+                          </a:solidFill>
+                          <a:latin typeface="Inter"/>
+                        </a:defRPr>
+                      </a:pPr>
+                      <a:r>
+                        <a:rPr>
+                          <a:latin typeface="Inter"/>
+                        </a:rPr>
+                        <a:t>10-year simulated expected-statistics outputs</a:t>
+                      </a:r>
+                    </a:p>
+                  </a:txBody>
+                  <a:tcPr marL="54864" marR="54864" marT="27432" marB="27432" anchor="ctr">
+                    <a:solidFill>
+                      <a:srgbClr val="F5F7F9"/>
+                    </a:solidFill>
+                  </a:tcPr>
+                </a:tc>
+                <a:tc>
+                  <a:txBody>
+                    <a:bodyPr/>
+                    <a:lstStyle/>
+                    <a:p>
+                      <a:pPr>
+                        <a:defRPr sz="720" b="0">
+                          <a:solidFill>
+                            <a:srgbClr val="0D1117"/>
+                          </a:solidFill>
+                          <a:latin typeface="Inter"/>
+                        </a:defRPr>
+                      </a:pPr>
+                      <a:r>
+                        <a:rPr>
+                          <a:latin typeface="Inter"/>
+                        </a:rPr>
+                        <a:t>run_strategy_lab_expected_statistics</a:t>
+                      </a:r>
+                    </a:p>
+                  </a:txBody>
+                  <a:tcPr marL="54864" marR="54864" marT="27432" marB="27432" anchor="ctr">
+                    <a:solidFill>
+                      <a:srgbClr val="F5F7F9"/>
+                    </a:solidFill>
+                  </a:tcPr>
+                </a:tc>
+                <a:tc>
+                  <a:txBody>
+                    <a:bodyPr/>
+                    <a:lstStyle/>
+                    <a:p>
+                      <a:pPr>
+                        <a:defRPr sz="720" b="0">
+                          <a:solidFill>
+                            <a:srgbClr val="0D1117"/>
+                          </a:solidFill>
+                          <a:latin typeface="Inter"/>
+                        </a:defRPr>
+                      </a:pPr>
+                      <a:r>
+                        <a:rPr>
+                          <a:latin typeface="Inter"/>
+                        </a:rPr>
+                        <a:t>2025-12-31</a:t>
+                      </a:r>
+                    </a:p>
+                  </a:txBody>
+                  <a:tcPr marL="54864" marR="54864" marT="27432" marB="27432" anchor="ctr">
+                    <a:solidFill>
+                      <a:srgbClr val="F5F7F9"/>
+                    </a:solidFill>
+                  </a:tcPr>
+                </a:tc>
+                <a:tc>
+                  <a:txBody>
+                    <a:bodyPr/>
+                    <a:lstStyle/>
+                    <a:p>
+                      <a:pPr>
+                        <a:defRPr sz="720" b="1">
+                          <a:solidFill>
+                            <a:srgbClr val="C6F432"/>
+                          </a:solidFill>
+                          <a:latin typeface="Inter"/>
+                        </a:defRPr>
+                      </a:pPr>
+                      <a:r>
+                        <a:rPr>
+                          <a:latin typeface="Inter"/>
+                        </a:rPr>
+                        <a:t>● Passed</a:t>
+                      </a:r>
+                    </a:p>
+                  </a:txBody>
+                  <a:tcPr marL="54864" marR="54864" marT="27432" marB="27432" anchor="ctr">
+                    <a:solidFill>
+                      <a:srgbClr val="F5F7F9"/>
+                    </a:solidFill>
+                  </a:tcPr>
+                </a:tc>
+              </a:tr>
+              <a:tr h="352806">
+                <a:tc>
+                  <a:txBody>
+                    <a:bodyPr/>
+                    <a:lstStyle/>
+                    <a:p>
+                      <a:pPr>
+                        <a:defRPr sz="720" b="1">
+                          <a:solidFill>
+                            <a:srgbClr val="0D1117"/>
+                          </a:solidFill>
+                          <a:latin typeface="Inter"/>
+                        </a:defRPr>
+                      </a:pPr>
+                      <a:r>
+                        <a:rPr>
+                          <a:latin typeface="Inter"/>
+                        </a:rPr>
+                        <a:t>S5</a:t>
+                      </a:r>
+                    </a:p>
+                  </a:txBody>
+                  <a:tcPr marL="54864" marR="54864" marT="27432" marB="27432" anchor="ctr">
+                    <a:solidFill>
+                      <a:srgbClr val="FFFFFF"/>
+                    </a:solidFill>
+                  </a:tcPr>
+                </a:tc>
+                <a:tc>
+                  <a:txBody>
+                    <a:bodyPr/>
+                    <a:lstStyle/>
+                    <a:p>
+                      <a:pPr>
+                        <a:defRPr sz="720" b="0">
+                          <a:solidFill>
+                            <a:srgbClr val="0D1117"/>
+                          </a:solidFill>
+                          <a:latin typeface="Inter"/>
+                        </a:defRPr>
+                      </a:pPr>
+                      <a:r>
+                        <a:rPr>
+                          <a:latin typeface="Inter"/>
+                        </a:rPr>
+                        <a:t>Alternative-benchmark sensitivity</a:t>
+                      </a:r>
+                    </a:p>
+                  </a:txBody>
+                  <a:tcPr marL="54864" marR="54864" marT="27432" marB="27432" anchor="ctr">
+                    <a:solidFill>
+                      <a:srgbClr val="FFFFFF"/>
+                    </a:solidFill>
+                  </a:tcPr>
+                </a:tc>
+                <a:tc>
+                  <a:txBody>
+                    <a:bodyPr/>
+                    <a:lstStyle/>
+                    <a:p>
+                      <a:pPr>
+                        <a:defRPr sz="720" b="0">
+                          <a:solidFill>
+                            <a:srgbClr val="0D1117"/>
+                          </a:solidFill>
+                          <a:latin typeface="Inter"/>
+                        </a:defRPr>
+                      </a:pPr>
+                      <a:r>
+                        <a:rPr>
+                          <a:latin typeface="Inter"/>
+                        </a:rPr>
                         <a:t>analyze_strategy_lab_compare</a:t>
                       </a:r>
                     </a:p>
@@ -17387,7 +17201,7 @@
                     <a:lstStyle/>
                     <a:p>
                       <a:pPr>
-                        <a:defRPr sz="650" b="0">
+                        <a:defRPr sz="720" b="0">
                           <a:solidFill>
                             <a:srgbClr val="0D1117"/>
                           </a:solidFill>
@@ -17398,7 +17212,7 @@
                         <a:rPr>
                           <a:latin typeface="Inter"/>
                         </a:rPr>
-                        <a:t>manager=returns-test-northstar-select; benchmark=benchmark-test-northstar-core-equity; start=2020-01-31; end=2025-12-31</a:t>
+                        <a:t>2025-12-31</a:t>
                       </a:r>
                     </a:p>
                   </a:txBody>
@@ -17414,1085 +17228,24 @@
                     <a:lstStyle/>
                     <a:p>
                       <a:pPr>
-                        <a:defRPr sz="650" b="0">
-                          <a:solidFill>
-                            <a:srgbClr val="0D1117"/>
-                          </a:solidFill>
-                          <a:latin typeface="Inter"/>
-                        </a:defRPr>
-                      </a:pPr>
-                      <a:r>
-                        <a:rPr>
-                          <a:latin typeface="Inter"/>
-                        </a:rPr>
-                        <a:t>2025-12-31</a:t>
-                      </a:r>
-                    </a:p>
-                  </a:txBody>
-                  <a:tcPr marL="54864" marR="54864" marT="27432" marB="27432" anchor="ctr">
-                    <a:solidFill>
-                      <a:srgbClr val="FFFFFF"/>
-                    </a:solidFill>
-                  </a:tcPr>
-                </a:tc>
-                <a:tc>
-                  <a:txBody>
-                    <a:bodyPr/>
-                    <a:lstStyle/>
-                    <a:p>
-                      <a:pPr>
-                        <a:defRPr sz="650" b="0">
-                          <a:solidFill>
-                            <a:srgbClr val="0D1117"/>
-                          </a:solidFill>
-                          <a:latin typeface="Inter"/>
-                        </a:defRPr>
-                      </a:pPr>
-                      <a:r>
-                        <a:rPr>
-                          <a:latin typeface="Inter"/>
-                        </a:rPr>
-                        <a:t>72 monthly observations; USD total return; illustrative sample data</a:t>
-                      </a:r>
-                    </a:p>
-                  </a:txBody>
-                  <a:tcPr marL="54864" marR="54864" marT="27432" marB="27432" anchor="ctr">
-                    <a:solidFill>
-                      <a:srgbClr val="FFFFFF"/>
-                    </a:solidFill>
-                  </a:tcPr>
-                </a:tc>
-                <a:tc>
-                  <a:txBody>
-                    <a:bodyPr/>
-                    <a:lstStyle/>
-                    <a:p>
-                      <a:pPr>
-                        <a:defRPr sz="650" b="0">
-                          <a:solidFill>
-                            <a:srgbClr val="0D1117"/>
-                          </a:solidFill>
-                          <a:latin typeface="Inter"/>
-                        </a:defRPr>
-                      </a:pPr>
-                      <a:r>
-                        <a:rPr>
-                          <a:latin typeface="Inter"/>
-                        </a:rPr>
-                        <a:t>passed</a:t>
-                      </a:r>
-                    </a:p>
-                  </a:txBody>
-                  <a:tcPr marL="54864" marR="54864" marT="27432" marB="27432" anchor="ctr">
-                    <a:solidFill>
-                      <a:srgbClr val="FFFFFF"/>
-                    </a:solidFill>
-                  </a:tcPr>
-                </a:tc>
-                <a:tc>
-                  <a:txBody>
-                    <a:bodyPr/>
-                    <a:lstStyle/>
-                    <a:p>
-                      <a:pPr>
-                        <a:defRPr sz="650" b="0">
-                          <a:solidFill>
-                            <a:srgbClr val="0D1117"/>
-                          </a:solidFill>
-                          <a:latin typeface="Inter"/>
-                        </a:defRPr>
-                      </a:pPr>
-                      <a:r>
-                        <a:rPr>
-                          <a:latin typeface="Inter"/>
-                        </a:rPr>
-                        <a:t>sha256:aaaaaaaaaaaaaaaaaaaaaaaaaaaaaaaaaaaaaaaaaaaaaaaaaaaaaaaaaaaaaaaa</a:t>
-                      </a:r>
-                    </a:p>
-                  </a:txBody>
-                  <a:tcPr marL="54864" marR="54864" marT="27432" marB="27432" anchor="ctr">
-                    <a:solidFill>
-                      <a:srgbClr val="FFFFFF"/>
-                    </a:solidFill>
-                  </a:tcPr>
-                </a:tc>
-              </a:tr>
-              <a:tr h="769620">
-                <a:tc>
-                  <a:txBody>
-                    <a:bodyPr/>
-                    <a:lstStyle/>
-                    <a:p>
-                      <a:pPr>
-                        <a:defRPr sz="650" b="1">
-                          <a:solidFill>
-                            <a:srgbClr val="0D1117"/>
-                          </a:solidFill>
-                          <a:latin typeface="Inter"/>
-                        </a:defRPr>
-                      </a:pPr>
-                      <a:r>
-                        <a:rPr>
-                          <a:latin typeface="Inter"/>
-                        </a:rPr>
-                        <a:t>S2</a:t>
+                        <a:defRPr sz="720" b="1">
+                          <a:solidFill>
+                            <a:srgbClr val="C6F432"/>
+                          </a:solidFill>
+                          <a:latin typeface="Inter"/>
+                        </a:defRPr>
+                      </a:pPr>
+                      <a:r>
+                        <a:rPr>
+                          <a:latin typeface="Inter"/>
+                        </a:rPr>
+                        <a:t>● Passed</a:t>
                       </a:r>
                     </a:p>
                   </a:txBody>
                   <a:tcPr marL="54864" marR="54864" marT="27432" marB="27432" anchor="ctr">
                     <a:solidFill>
                       <a:srgbClr val="F5F7F9"/>
-                    </a:solidFill>
-                  </a:tcPr>
-                </a:tc>
-                <a:tc>
-                  <a:txBody>
-                    <a:bodyPr/>
-                    <a:lstStyle/>
-                    <a:p>
-                      <a:pPr>
-                        <a:defRPr sz="650" b="0">
-                          <a:solidFill>
-                            <a:srgbClr val="0D1117"/>
-                          </a:solidFill>
-                          <a:latin typeface="Inter"/>
-                        </a:defRPr>
-                      </a:pPr>
-                      <a:r>
-                        <a:rPr>
-                          <a:latin typeface="Inter"/>
-                        </a:rPr>
-                        <a:t>Realized paths, rolling statistics, relative metrics, capture, and distribution</a:t>
-                      </a:r>
-                    </a:p>
-                  </a:txBody>
-                  <a:tcPr marL="54864" marR="54864" marT="27432" marB="27432" anchor="ctr">
-                    <a:solidFill>
-                      <a:srgbClr val="F5F7F9"/>
-                    </a:solidFill>
-                  </a:tcPr>
-                </a:tc>
-                <a:tc>
-                  <a:txBody>
-                    <a:bodyPr/>
-                    <a:lstStyle/>
-                    <a:p>
-                      <a:pPr>
-                        <a:defRPr sz="650" b="0">
-                          <a:solidFill>
-                            <a:srgbClr val="0D1117"/>
-                          </a:solidFill>
-                          <a:latin typeface="Inter"/>
-                        </a:defRPr>
-                      </a:pPr>
-                      <a:r>
-                        <a:rPr>
-                          <a:latin typeface="Inter"/>
-                        </a:rPr>
-                        <a:t>gradient_tool</a:t>
-                      </a:r>
-                    </a:p>
-                  </a:txBody>
-                  <a:tcPr marL="54864" marR="54864" marT="27432" marB="27432" anchor="ctr">
-                    <a:solidFill>
-                      <a:srgbClr val="F5F7F9"/>
-                    </a:solidFill>
-                  </a:tcPr>
-                </a:tc>
-                <a:tc>
-                  <a:txBody>
-                    <a:bodyPr/>
-                    <a:lstStyle/>
-                    <a:p>
-                      <a:pPr>
-                        <a:defRPr sz="650" b="0">
-                          <a:solidFill>
-                            <a:srgbClr val="0D1117"/>
-                          </a:solidFill>
-                          <a:latin typeface="Inter"/>
-                        </a:defRPr>
-                      </a:pPr>
-                      <a:r>
-                        <a:rPr>
-                          <a:latin typeface="Inter"/>
-                        </a:rPr>
-                        <a:t>run_strategy_lab_relative_return</a:t>
-                      </a:r>
-                    </a:p>
-                  </a:txBody>
-                  <a:tcPr marL="54864" marR="54864" marT="27432" marB="27432" anchor="ctr">
-                    <a:solidFill>
-                      <a:srgbClr val="F5F7F9"/>
-                    </a:solidFill>
-                  </a:tcPr>
-                </a:tc>
-                <a:tc>
-                  <a:txBody>
-                    <a:bodyPr/>
-                    <a:lstStyle/>
-                    <a:p>
-                      <a:pPr>
-                        <a:defRPr sz="650" b="0">
-                          <a:solidFill>
-                            <a:srgbClr val="0D1117"/>
-                          </a:solidFill>
-                          <a:latin typeface="Inter"/>
-                        </a:defRPr>
-                      </a:pPr>
-                      <a:r>
-                        <a:rPr>
-                          <a:latin typeface="Inter"/>
-                        </a:rPr>
-                        <a:t>manager=returns-test-northstar-select; benchmark=benchmark-test-northstar-core-equity; rolling_months=12,36</a:t>
-                      </a:r>
-                    </a:p>
-                  </a:txBody>
-                  <a:tcPr marL="54864" marR="54864" marT="27432" marB="27432" anchor="ctr">
-                    <a:solidFill>
-                      <a:srgbClr val="F5F7F9"/>
-                    </a:solidFill>
-                  </a:tcPr>
-                </a:tc>
-                <a:tc>
-                  <a:txBody>
-                    <a:bodyPr/>
-                    <a:lstStyle/>
-                    <a:p>
-                      <a:pPr>
-                        <a:defRPr sz="650" b="0">
-                          <a:solidFill>
-                            <a:srgbClr val="0D1117"/>
-                          </a:solidFill>
-                          <a:latin typeface="Inter"/>
-                        </a:defRPr>
-                      </a:pPr>
-                      <a:r>
-                        <a:rPr>
-                          <a:latin typeface="Inter"/>
-                        </a:rPr>
-                        <a:t>2025-12-31</a:t>
-                      </a:r>
-                    </a:p>
-                  </a:txBody>
-                  <a:tcPr marL="54864" marR="54864" marT="27432" marB="27432" anchor="ctr">
-                    <a:solidFill>
-                      <a:srgbClr val="F5F7F9"/>
-                    </a:solidFill>
-                  </a:tcPr>
-                </a:tc>
-                <a:tc>
-                  <a:txBody>
-                    <a:bodyPr/>
-                    <a:lstStyle/>
-                    <a:p>
-                      <a:pPr>
-                        <a:defRPr sz="650" b="0">
-                          <a:solidFill>
-                            <a:srgbClr val="0D1117"/>
-                          </a:solidFill>
-                          <a:latin typeface="Inter"/>
-                        </a:defRPr>
-                      </a:pPr>
-                      <a:r>
-                        <a:rPr>
-                          <a:latin typeface="Inter"/>
-                        </a:rPr>
-                        <a:t>Common 72-month manager/benchmark window; illustrative sample data</a:t>
-                      </a:r>
-                    </a:p>
-                  </a:txBody>
-                  <a:tcPr marL="54864" marR="54864" marT="27432" marB="27432" anchor="ctr">
-                    <a:solidFill>
-                      <a:srgbClr val="F5F7F9"/>
-                    </a:solidFill>
-                  </a:tcPr>
-                </a:tc>
-                <a:tc>
-                  <a:txBody>
-                    <a:bodyPr/>
-                    <a:lstStyle/>
-                    <a:p>
-                      <a:pPr>
-                        <a:defRPr sz="650" b="0">
-                          <a:solidFill>
-                            <a:srgbClr val="0D1117"/>
-                          </a:solidFill>
-                          <a:latin typeface="Inter"/>
-                        </a:defRPr>
-                      </a:pPr>
-                      <a:r>
-                        <a:rPr>
-                          <a:latin typeface="Inter"/>
-                        </a:rPr>
-                        <a:t>passed</a:t>
-                      </a:r>
-                    </a:p>
-                  </a:txBody>
-                  <a:tcPr marL="54864" marR="54864" marT="27432" marB="27432" anchor="ctr">
-                    <a:solidFill>
-                      <a:srgbClr val="F5F7F9"/>
-                    </a:solidFill>
-                  </a:tcPr>
-                </a:tc>
-                <a:tc>
-                  <a:txBody>
-                    <a:bodyPr/>
-                    <a:lstStyle/>
-                    <a:p>
-                      <a:pPr>
-                        <a:defRPr sz="650" b="0">
-                          <a:solidFill>
-                            <a:srgbClr val="0D1117"/>
-                          </a:solidFill>
-                          <a:latin typeface="Inter"/>
-                        </a:defRPr>
-                      </a:pPr>
-                      <a:r>
-                        <a:rPr>
-                          <a:latin typeface="Inter"/>
-                        </a:rPr>
-                        <a:t>sha256:bbbbbbbbbbbbbbbbbbbbbbbbbbbbbbbbbbbbbbbbbbbbbbbbbbbbbbbbbbbbbbbb</a:t>
-                      </a:r>
-                    </a:p>
-                  </a:txBody>
-                  <a:tcPr marL="54864" marR="54864" marT="27432" marB="27432" anchor="ctr">
-                    <a:solidFill>
-                      <a:srgbClr val="F5F7F9"/>
-                    </a:solidFill>
-                  </a:tcPr>
-                </a:tc>
-              </a:tr>
-              <a:tr h="769620">
-                <a:tc>
-                  <a:txBody>
-                    <a:bodyPr/>
-                    <a:lstStyle/>
-                    <a:p>
-                      <a:pPr>
-                        <a:defRPr sz="650" b="1">
-                          <a:solidFill>
-                            <a:srgbClr val="0D1117"/>
-                          </a:solidFill>
-                          <a:latin typeface="Inter"/>
-                        </a:defRPr>
-                      </a:pPr>
-                      <a:r>
-                        <a:rPr>
-                          <a:latin typeface="Inter"/>
-                        </a:rPr>
-                        <a:t>S3</a:t>
-                      </a:r>
-                    </a:p>
-                  </a:txBody>
-                  <a:tcPr marL="54864" marR="54864" marT="27432" marB="27432" anchor="ctr">
-                    <a:solidFill>
-                      <a:srgbClr val="FFFFFF"/>
-                    </a:solidFill>
-                  </a:tcPr>
-                </a:tc>
-                <a:tc>
-                  <a:txBody>
-                    <a:bodyPr/>
-                    <a:lstStyle/>
-                    <a:p>
-                      <a:pPr>
-                        <a:defRPr sz="650" b="0">
-                          <a:solidFill>
-                            <a:srgbClr val="0D1117"/>
-                          </a:solidFill>
-                          <a:latin typeface="Inter"/>
-                        </a:defRPr>
-                      </a:pPr>
-                      <a:r>
-                        <a:rPr>
-                          <a:latin typeface="Inter"/>
-                        </a:rPr>
-                        <a:t>Date-window robustness</a:t>
-                      </a:r>
-                    </a:p>
-                  </a:txBody>
-                  <a:tcPr marL="54864" marR="54864" marT="27432" marB="27432" anchor="ctr">
-                    <a:solidFill>
-                      <a:srgbClr val="FFFFFF"/>
-                    </a:solidFill>
-                  </a:tcPr>
-                </a:tc>
-                <a:tc>
-                  <a:txBody>
-                    <a:bodyPr/>
-                    <a:lstStyle/>
-                    <a:p>
-                      <a:pPr>
-                        <a:defRPr sz="650" b="0">
-                          <a:solidFill>
-                            <a:srgbClr val="0D1117"/>
-                          </a:solidFill>
-                          <a:latin typeface="Inter"/>
-                        </a:defRPr>
-                      </a:pPr>
-                      <a:r>
-                        <a:rPr>
-                          <a:latin typeface="Inter"/>
-                        </a:rPr>
-                        <a:t>gradient_tool</a:t>
-                      </a:r>
-                    </a:p>
-                  </a:txBody>
-                  <a:tcPr marL="54864" marR="54864" marT="27432" marB="27432" anchor="ctr">
-                    <a:solidFill>
-                      <a:srgbClr val="FFFFFF"/>
-                    </a:solidFill>
-                  </a:tcPr>
-                </a:tc>
-                <a:tc>
-                  <a:txBody>
-                    <a:bodyPr/>
-                    <a:lstStyle/>
-                    <a:p>
-                      <a:pPr>
-                        <a:defRPr sz="650" b="0">
-                          <a:solidFill>
-                            <a:srgbClr val="0D1117"/>
-                          </a:solidFill>
-                          <a:latin typeface="Inter"/>
-                        </a:defRPr>
-                      </a:pPr>
-                      <a:r>
-                        <a:rPr>
-                          <a:latin typeface="Inter"/>
-                        </a:rPr>
-                        <a:t>run_strategy_lab_date_window_robustness</a:t>
-                      </a:r>
-                    </a:p>
-                  </a:txBody>
-                  <a:tcPr marL="54864" marR="54864" marT="27432" marB="27432" anchor="ctr">
-                    <a:solidFill>
-                      <a:srgbClr val="FFFFFF"/>
-                    </a:solidFill>
-                  </a:tcPr>
-                </a:tc>
-                <a:tc>
-                  <a:txBody>
-                    <a:bodyPr/>
-                    <a:lstStyle/>
-                    <a:p>
-                      <a:pPr>
-                        <a:defRPr sz="650" b="0">
-                          <a:solidFill>
-                            <a:srgbClr val="0D1117"/>
-                          </a:solidFill>
-                          <a:latin typeface="Inter"/>
-                        </a:defRPr>
-                      </a:pPr>
-                      <a:r>
-                        <a:rPr>
-                          <a:latin typeface="Inter"/>
-                        </a:rPr>
-                        <a:t>starts=2020-01-31,2021-01-31,2022-01-31,2023-01-31; end=2025-12-31</a:t>
-                      </a:r>
-                    </a:p>
-                  </a:txBody>
-                  <a:tcPr marL="54864" marR="54864" marT="27432" marB="27432" anchor="ctr">
-                    <a:solidFill>
-                      <a:srgbClr val="FFFFFF"/>
-                    </a:solidFill>
-                  </a:tcPr>
-                </a:tc>
-                <a:tc>
-                  <a:txBody>
-                    <a:bodyPr/>
-                    <a:lstStyle/>
-                    <a:p>
-                      <a:pPr>
-                        <a:defRPr sz="650" b="0">
-                          <a:solidFill>
-                            <a:srgbClr val="0D1117"/>
-                          </a:solidFill>
-                          <a:latin typeface="Inter"/>
-                        </a:defRPr>
-                      </a:pPr>
-                      <a:r>
-                        <a:rPr>
-                          <a:latin typeface="Inter"/>
-                        </a:rPr>
-                        <a:t>2025-12-31</a:t>
-                      </a:r>
-                    </a:p>
-                  </a:txBody>
-                  <a:tcPr marL="54864" marR="54864" marT="27432" marB="27432" anchor="ctr">
-                    <a:solidFill>
-                      <a:srgbClr val="FFFFFF"/>
-                    </a:solidFill>
-                  </a:tcPr>
-                </a:tc>
-                <a:tc>
-                  <a:txBody>
-                    <a:bodyPr/>
-                    <a:lstStyle/>
-                    <a:p>
-                      <a:pPr>
-                        <a:defRPr sz="650" b="0">
-                          <a:solidFill>
-                            <a:srgbClr val="0D1117"/>
-                          </a:solidFill>
-                          <a:latin typeface="Inter"/>
-                        </a:defRPr>
-                      </a:pPr>
-                      <a:r>
-                        <a:rPr>
-                          <a:latin typeface="Inter"/>
-                        </a:rPr>
-                        <a:t>Four returned start-date windows; illustrative sample data</a:t>
-                      </a:r>
-                    </a:p>
-                  </a:txBody>
-                  <a:tcPr marL="54864" marR="54864" marT="27432" marB="27432" anchor="ctr">
-                    <a:solidFill>
-                      <a:srgbClr val="FFFFFF"/>
-                    </a:solidFill>
-                  </a:tcPr>
-                </a:tc>
-                <a:tc>
-                  <a:txBody>
-                    <a:bodyPr/>
-                    <a:lstStyle/>
-                    <a:p>
-                      <a:pPr>
-                        <a:defRPr sz="650" b="0">
-                          <a:solidFill>
-                            <a:srgbClr val="0D1117"/>
-                          </a:solidFill>
-                          <a:latin typeface="Inter"/>
-                        </a:defRPr>
-                      </a:pPr>
-                      <a:r>
-                        <a:rPr>
-                          <a:latin typeface="Inter"/>
-                        </a:rPr>
-                        <a:t>passed</a:t>
-                      </a:r>
-                    </a:p>
-                  </a:txBody>
-                  <a:tcPr marL="54864" marR="54864" marT="27432" marB="27432" anchor="ctr">
-                    <a:solidFill>
-                      <a:srgbClr val="FFFFFF"/>
-                    </a:solidFill>
-                  </a:tcPr>
-                </a:tc>
-                <a:tc>
-                  <a:txBody>
-                    <a:bodyPr/>
-                    <a:lstStyle/>
-                    <a:p>
-                      <a:pPr>
-                        <a:defRPr sz="650" b="0">
-                          <a:solidFill>
-                            <a:srgbClr val="0D1117"/>
-                          </a:solidFill>
-                          <a:latin typeface="Inter"/>
-                        </a:defRPr>
-                      </a:pPr>
-                      <a:r>
-                        <a:rPr>
-                          <a:latin typeface="Inter"/>
-                        </a:rPr>
-                        <a:t>sha256:cccccccccccccccccccccccccccccccccccccccccccccccccccccccccccccccc</a:t>
-                      </a:r>
-                    </a:p>
-                  </a:txBody>
-                  <a:tcPr marL="54864" marR="54864" marT="27432" marB="27432" anchor="ctr">
-                    <a:solidFill>
-                      <a:srgbClr val="FFFFFF"/>
-                    </a:solidFill>
-                  </a:tcPr>
-                </a:tc>
-              </a:tr>
-              <a:tr h="769620">
-                <a:tc>
-                  <a:txBody>
-                    <a:bodyPr/>
-                    <a:lstStyle/>
-                    <a:p>
-                      <a:pPr>
-                        <a:defRPr sz="650" b="1">
-                          <a:solidFill>
-                            <a:srgbClr val="0D1117"/>
-                          </a:solidFill>
-                          <a:latin typeface="Inter"/>
-                        </a:defRPr>
-                      </a:pPr>
-                      <a:r>
-                        <a:rPr>
-                          <a:latin typeface="Inter"/>
-                        </a:rPr>
-                        <a:t>S4</a:t>
-                      </a:r>
-                    </a:p>
-                  </a:txBody>
-                  <a:tcPr marL="54864" marR="54864" marT="27432" marB="27432" anchor="ctr">
-                    <a:solidFill>
-                      <a:srgbClr val="F5F7F9"/>
-                    </a:solidFill>
-                  </a:tcPr>
-                </a:tc>
-                <a:tc>
-                  <a:txBody>
-                    <a:bodyPr/>
-                    <a:lstStyle/>
-                    <a:p>
-                      <a:pPr>
-                        <a:defRPr sz="650" b="0">
-                          <a:solidFill>
-                            <a:srgbClr val="0D1117"/>
-                          </a:solidFill>
-                          <a:latin typeface="Inter"/>
-                        </a:defRPr>
-                      </a:pPr>
-                      <a:r>
-                        <a:rPr>
-                          <a:latin typeface="Inter"/>
-                        </a:rPr>
-                        <a:t>10-year simulated expected-statistics outputs</a:t>
-                      </a:r>
-                    </a:p>
-                  </a:txBody>
-                  <a:tcPr marL="54864" marR="54864" marT="27432" marB="27432" anchor="ctr">
-                    <a:solidFill>
-                      <a:srgbClr val="F5F7F9"/>
-                    </a:solidFill>
-                  </a:tcPr>
-                </a:tc>
-                <a:tc>
-                  <a:txBody>
-                    <a:bodyPr/>
-                    <a:lstStyle/>
-                    <a:p>
-                      <a:pPr>
-                        <a:defRPr sz="650" b="0">
-                          <a:solidFill>
-                            <a:srgbClr val="0D1117"/>
-                          </a:solidFill>
-                          <a:latin typeface="Inter"/>
-                        </a:defRPr>
-                      </a:pPr>
-                      <a:r>
-                        <a:rPr>
-                          <a:latin typeface="Inter"/>
-                        </a:rPr>
-                        <a:t>gradient_tool</a:t>
-                      </a:r>
-                    </a:p>
-                  </a:txBody>
-                  <a:tcPr marL="54864" marR="54864" marT="27432" marB="27432" anchor="ctr">
-                    <a:solidFill>
-                      <a:srgbClr val="F5F7F9"/>
-                    </a:solidFill>
-                  </a:tcPr>
-                </a:tc>
-                <a:tc>
-                  <a:txBody>
-                    <a:bodyPr/>
-                    <a:lstStyle/>
-                    <a:p>
-                      <a:pPr>
-                        <a:defRPr sz="650" b="0">
-                          <a:solidFill>
-                            <a:srgbClr val="0D1117"/>
-                          </a:solidFill>
-                          <a:latin typeface="Inter"/>
-                        </a:defRPr>
-                      </a:pPr>
-                      <a:r>
-                        <a:rPr>
-                          <a:latin typeface="Inter"/>
-                        </a:rPr>
-                        <a:t>run_strategy_lab_expected_statistics</a:t>
-                      </a:r>
-                    </a:p>
-                  </a:txBody>
-                  <a:tcPr marL="54864" marR="54864" marT="27432" marB="27432" anchor="ctr">
-                    <a:solidFill>
-                      <a:srgbClr val="F5F7F9"/>
-                    </a:solidFill>
-                  </a:tcPr>
-                </a:tc>
-                <a:tc>
-                  <a:txBody>
-                    <a:bodyPr/>
-                    <a:lstStyle/>
-                    <a:p>
-                      <a:pPr>
-                        <a:defRPr sz="650" b="0">
-                          <a:solidFill>
-                            <a:srgbClr val="0D1117"/>
-                          </a:solidFill>
-                          <a:latin typeface="Inter"/>
-                        </a:defRPr>
-                      </a:pPr>
-                      <a:r>
-                        <a:rPr>
-                          <a:latin typeface="Inter"/>
-                        </a:rPr>
-                        <a:t>horizon=10y; outputs=annualized_return,annualized_volatility,terminal_wealth_median</a:t>
-                      </a:r>
-                    </a:p>
-                  </a:txBody>
-                  <a:tcPr marL="54864" marR="54864" marT="27432" marB="27432" anchor="ctr">
-                    <a:solidFill>
-                      <a:srgbClr val="F5F7F9"/>
-                    </a:solidFill>
-                  </a:tcPr>
-                </a:tc>
-                <a:tc>
-                  <a:txBody>
-                    <a:bodyPr/>
-                    <a:lstStyle/>
-                    <a:p>
-                      <a:pPr>
-                        <a:defRPr sz="650" b="0">
-                          <a:solidFill>
-                            <a:srgbClr val="0D1117"/>
-                          </a:solidFill>
-                          <a:latin typeface="Inter"/>
-                        </a:defRPr>
-                      </a:pPr>
-                      <a:r>
-                        <a:rPr>
-                          <a:latin typeface="Inter"/>
-                        </a:rPr>
-                        <a:t>2025-12-31</a:t>
-                      </a:r>
-                    </a:p>
-                  </a:txBody>
-                  <a:tcPr marL="54864" marR="54864" marT="27432" marB="27432" anchor="ctr">
-                    <a:solidFill>
-                      <a:srgbClr val="F5F7F9"/>
-                    </a:solidFill>
-                  </a:tcPr>
-                </a:tc>
-                <a:tc>
-                  <a:txBody>
-                    <a:bodyPr/>
-                    <a:lstStyle/>
-                    <a:p>
-                      <a:pPr>
-                        <a:defRPr sz="650" b="0">
-                          <a:solidFill>
-                            <a:srgbClr val="0D1117"/>
-                          </a:solidFill>
-                          <a:latin typeface="Inter"/>
-                        </a:defRPr>
-                      </a:pPr>
-                      <a:r>
-                        <a:rPr>
-                          <a:latin typeface="Inter"/>
-                        </a:rPr>
-                        <a:t>Server-returned model outputs; illustrative sample data</a:t>
-                      </a:r>
-                    </a:p>
-                  </a:txBody>
-                  <a:tcPr marL="54864" marR="54864" marT="27432" marB="27432" anchor="ctr">
-                    <a:solidFill>
-                      <a:srgbClr val="F5F7F9"/>
-                    </a:solidFill>
-                  </a:tcPr>
-                </a:tc>
-                <a:tc>
-                  <a:txBody>
-                    <a:bodyPr/>
-                    <a:lstStyle/>
-                    <a:p>
-                      <a:pPr>
-                        <a:defRPr sz="650" b="0">
-                          <a:solidFill>
-                            <a:srgbClr val="0D1117"/>
-                          </a:solidFill>
-                          <a:latin typeface="Inter"/>
-                        </a:defRPr>
-                      </a:pPr>
-                      <a:r>
-                        <a:rPr>
-                          <a:latin typeface="Inter"/>
-                        </a:rPr>
-                        <a:t>passed</a:t>
-                      </a:r>
-                    </a:p>
-                  </a:txBody>
-                  <a:tcPr marL="54864" marR="54864" marT="27432" marB="27432" anchor="ctr">
-                    <a:solidFill>
-                      <a:srgbClr val="F5F7F9"/>
-                    </a:solidFill>
-                  </a:tcPr>
-                </a:tc>
-                <a:tc>
-                  <a:txBody>
-                    <a:bodyPr/>
-                    <a:lstStyle/>
-                    <a:p>
-                      <a:pPr>
-                        <a:defRPr sz="650" b="0">
-                          <a:solidFill>
-                            <a:srgbClr val="0D1117"/>
-                          </a:solidFill>
-                          <a:latin typeface="Inter"/>
-                        </a:defRPr>
-                      </a:pPr>
-                      <a:r>
-                        <a:rPr>
-                          <a:latin typeface="Inter"/>
-                        </a:rPr>
-                        <a:t>sha256:dddddddddddddddddddddddddddddddddddddddddddddddddddddddddddddddd</a:t>
-                      </a:r>
-                    </a:p>
-                  </a:txBody>
-                  <a:tcPr marL="54864" marR="54864" marT="27432" marB="27432" anchor="ctr">
-                    <a:solidFill>
-                      <a:srgbClr val="F5F7F9"/>
-                    </a:solidFill>
-                  </a:tcPr>
-                </a:tc>
-              </a:tr>
-              <a:tr h="769620">
-                <a:tc>
-                  <a:txBody>
-                    <a:bodyPr/>
-                    <a:lstStyle/>
-                    <a:p>
-                      <a:pPr>
-                        <a:defRPr sz="650" b="1">
-                          <a:solidFill>
-                            <a:srgbClr val="0D1117"/>
-                          </a:solidFill>
-                          <a:latin typeface="Inter"/>
-                        </a:defRPr>
-                      </a:pPr>
-                      <a:r>
-                        <a:rPr>
-                          <a:latin typeface="Inter"/>
-                        </a:rPr>
-                        <a:t>S5</a:t>
-                      </a:r>
-                    </a:p>
-                  </a:txBody>
-                  <a:tcPr marL="54864" marR="54864" marT="27432" marB="27432" anchor="ctr">
-                    <a:solidFill>
-                      <a:srgbClr val="FFFFFF"/>
-                    </a:solidFill>
-                  </a:tcPr>
-                </a:tc>
-                <a:tc>
-                  <a:txBody>
-                    <a:bodyPr/>
-                    <a:lstStyle/>
-                    <a:p>
-                      <a:pPr>
-                        <a:defRPr sz="650" b="0">
-                          <a:solidFill>
-                            <a:srgbClr val="0D1117"/>
-                          </a:solidFill>
-                          <a:latin typeface="Inter"/>
-                        </a:defRPr>
-                      </a:pPr>
-                      <a:r>
-                        <a:rPr>
-                          <a:latin typeface="Inter"/>
-                        </a:rPr>
-                        <a:t>Alternative-benchmark sensitivity</a:t>
-                      </a:r>
-                    </a:p>
-                  </a:txBody>
-                  <a:tcPr marL="54864" marR="54864" marT="27432" marB="27432" anchor="ctr">
-                    <a:solidFill>
-                      <a:srgbClr val="FFFFFF"/>
-                    </a:solidFill>
-                  </a:tcPr>
-                </a:tc>
-                <a:tc>
-                  <a:txBody>
-                    <a:bodyPr/>
-                    <a:lstStyle/>
-                    <a:p>
-                      <a:pPr>
-                        <a:defRPr sz="650" b="0">
-                          <a:solidFill>
-                            <a:srgbClr val="0D1117"/>
-                          </a:solidFill>
-                          <a:latin typeface="Inter"/>
-                        </a:defRPr>
-                      </a:pPr>
-                      <a:r>
-                        <a:rPr>
-                          <a:latin typeface="Inter"/>
-                        </a:rPr>
-                        <a:t>gradient_tool</a:t>
-                      </a:r>
-                    </a:p>
-                  </a:txBody>
-                  <a:tcPr marL="54864" marR="54864" marT="27432" marB="27432" anchor="ctr">
-                    <a:solidFill>
-                      <a:srgbClr val="FFFFFF"/>
-                    </a:solidFill>
-                  </a:tcPr>
-                </a:tc>
-                <a:tc>
-                  <a:txBody>
-                    <a:bodyPr/>
-                    <a:lstStyle/>
-                    <a:p>
-                      <a:pPr>
-                        <a:defRPr sz="650" b="0">
-                          <a:solidFill>
-                            <a:srgbClr val="0D1117"/>
-                          </a:solidFill>
-                          <a:latin typeface="Inter"/>
-                        </a:defRPr>
-                      </a:pPr>
-                      <a:r>
-                        <a:rPr>
-                          <a:latin typeface="Inter"/>
-                        </a:rPr>
-                        <a:t>analyze_strategy_lab_compare</a:t>
-                      </a:r>
-                    </a:p>
-                  </a:txBody>
-                  <a:tcPr marL="54864" marR="54864" marT="27432" marB="27432" anchor="ctr">
-                    <a:solidFill>
-                      <a:srgbClr val="FFFFFF"/>
-                    </a:solidFill>
-                  </a:tcPr>
-                </a:tc>
-                <a:tc>
-                  <a:txBody>
-                    <a:bodyPr/>
-                    <a:lstStyle/>
-                    <a:p>
-                      <a:pPr>
-                        <a:defRPr sz="650" b="0">
-                          <a:solidFill>
-                            <a:srgbClr val="0D1117"/>
-                          </a:solidFill>
-                          <a:latin typeface="Inter"/>
-                        </a:defRPr>
-                      </a:pPr>
-                      <a:r>
-                        <a:rPr>
-                          <a:latin typeface="Inter"/>
-                        </a:rPr>
-                        <a:t>manager=returns-test-northstar-select; benchmark=benchmark-test-northstar-broad-equity; status=advisory</a:t>
-                      </a:r>
-                    </a:p>
-                  </a:txBody>
-                  <a:tcPr marL="54864" marR="54864" marT="27432" marB="27432" anchor="ctr">
-                    <a:solidFill>
-                      <a:srgbClr val="FFFFFF"/>
-                    </a:solidFill>
-                  </a:tcPr>
-                </a:tc>
-                <a:tc>
-                  <a:txBody>
-                    <a:bodyPr/>
-                    <a:lstStyle/>
-                    <a:p>
-                      <a:pPr>
-                        <a:defRPr sz="650" b="0">
-                          <a:solidFill>
-                            <a:srgbClr val="0D1117"/>
-                          </a:solidFill>
-                          <a:latin typeface="Inter"/>
-                        </a:defRPr>
-                      </a:pPr>
-                      <a:r>
-                        <a:rPr>
-                          <a:latin typeface="Inter"/>
-                        </a:rPr>
-                        <a:t>2025-12-31</a:t>
-                      </a:r>
-                    </a:p>
-                  </a:txBody>
-                  <a:tcPr marL="54864" marR="54864" marT="27432" marB="27432" anchor="ctr">
-                    <a:solidFill>
-                      <a:srgbClr val="FFFFFF"/>
-                    </a:solidFill>
-                  </a:tcPr>
-                </a:tc>
-                <a:tc>
-                  <a:txBody>
-                    <a:bodyPr/>
-                    <a:lstStyle/>
-                    <a:p>
-                      <a:pPr>
-                        <a:defRPr sz="650" b="0">
-                          <a:solidFill>
-                            <a:srgbClr val="0D1117"/>
-                          </a:solidFill>
-                          <a:latin typeface="Inter"/>
-                        </a:defRPr>
-                      </a:pPr>
-                      <a:r>
-                        <a:rPr>
-                          <a:latin typeface="Inter"/>
-                        </a:rPr>
-                        <a:t>Same 72-month window; illustrative sample data</a:t>
-                      </a:r>
-                    </a:p>
-                  </a:txBody>
-                  <a:tcPr marL="54864" marR="54864" marT="27432" marB="27432" anchor="ctr">
-                    <a:solidFill>
-                      <a:srgbClr val="FFFFFF"/>
-                    </a:solidFill>
-                  </a:tcPr>
-                </a:tc>
-                <a:tc>
-                  <a:txBody>
-                    <a:bodyPr/>
-                    <a:lstStyle/>
-                    <a:p>
-                      <a:pPr>
-                        <a:defRPr sz="650" b="0">
-                          <a:solidFill>
-                            <a:srgbClr val="0D1117"/>
-                          </a:solidFill>
-                          <a:latin typeface="Inter"/>
-                        </a:defRPr>
-                      </a:pPr>
-                      <a:r>
-                        <a:rPr>
-                          <a:latin typeface="Inter"/>
-                        </a:rPr>
-                        <a:t>passed</a:t>
-                      </a:r>
-                    </a:p>
-                  </a:txBody>
-                  <a:tcPr marL="54864" marR="54864" marT="27432" marB="27432" anchor="ctr">
-                    <a:solidFill>
-                      <a:srgbClr val="FFFFFF"/>
-                    </a:solidFill>
-                  </a:tcPr>
-                </a:tc>
-                <a:tc>
-                  <a:txBody>
-                    <a:bodyPr/>
-                    <a:lstStyle/>
-                    <a:p>
-                      <a:pPr>
-                        <a:defRPr sz="650" b="0">
-                          <a:solidFill>
-                            <a:srgbClr val="0D1117"/>
-                          </a:solidFill>
-                          <a:latin typeface="Inter"/>
-                        </a:defRPr>
-                      </a:pPr>
-                      <a:r>
-                        <a:rPr>
-                          <a:latin typeface="Inter"/>
-                        </a:rPr>
-                        <a:t>sha256:eeeeeeeeeeeeeeeeeeeeeeeeeeeeeeeeeeeeeeeeeeeeeeeeeeeeeeeeeeeeeeee</a:t>
-                      </a:r>
-                    </a:p>
-                  </a:txBody>
-                  <a:tcPr marL="54864" marR="54864" marT="27432" marB="27432" anchor="ctr">
-                    <a:solidFill>
-                      <a:srgbClr val="FFFFFF"/>
                     </a:solidFill>
                   </a:tcPr>
                 </a:tc>
@@ -18503,7 +17256,779 @@
       </p:graphicFrame>
       <p:sp>
         <p:nvSpPr>
-          <p:cNvPr id="11" name="Rectangle 10"/>
+          <p:cNvPr id="10" name="TextBox 9"/>
+          <p:cNvSpPr txBox="1"/>
+          <p:nvPr/>
+        </p:nvSpPr>
+        <p:spPr>
+          <a:xfrm>
+            <a:off x="640080" y="3826763"/>
+            <a:ext cx="10908792" cy="201168"/>
+          </a:xfrm>
+          <a:prstGeom prst="rect">
+            <a:avLst/>
+          </a:prstGeom>
+          <a:noFill/>
+        </p:spPr>
+        <p:txBody>
+          <a:bodyPr wrap="none" lIns="9144" rIns="9144" tIns="9144" bIns="9144" anchor="t">
+            <a:spAutoFit/>
+          </a:bodyPr>
+          <a:lstStyle/>
+          <a:p>
+            <a:pPr algn="l">
+              <a:spcAft>
+                <a:spcPts val="0"/>
+              </a:spcAft>
+              <a:defRPr sz="720" b="1">
+                <a:solidFill>
+                  <a:srgbClr val="4A5563"/>
+                </a:solidFill>
+                <a:latin typeface="Inter"/>
+              </a:defRPr>
+            </a:pPr>
+            <a:r>
+              <a:rPr>
+                <a:latin typeface="Inter"/>
+              </a:rPr>
+              <a:t>SOURCE AUDIT TRAIL</a:t>
+            </a:r>
+          </a:p>
+        </p:txBody>
+      </p:sp>
+      <p:graphicFrame>
+        <p:nvGraphicFramePr>
+          <p:cNvPr id="11" name="Table 10"/>
+          <p:cNvGraphicFramePr>
+            <a:graphicFrameLocks noGrp="1"/>
+          </p:cNvGraphicFramePr>
+          <p:nvPr/>
+        </p:nvGraphicFramePr>
+        <p:xfrm>
+          <a:off x="640080" y="4101083"/>
+          <a:ext cx="10908792" cy="1915667"/>
+        </p:xfrm>
+        <a:graphic>
+          <a:graphicData uri="http://schemas.openxmlformats.org/drawingml/2006/table">
+            <a:tbl>
+              <a:tblPr firstRow="1" bandRow="1">
+                <a:tableStyleId>{5C22544A-7EE6-4342-B048-85BDC9FD1C3A}</a:tableStyleId>
+              </a:tblPr>
+              <a:tblGrid>
+                <a:gridCol w="2011680"/>
+                <a:gridCol w="2965704"/>
+                <a:gridCol w="2965704"/>
+                <a:gridCol w="2965704"/>
+              </a:tblGrid>
+              <a:tr h="319277">
+                <a:tc>
+                  <a:txBody>
+                    <a:bodyPr/>
+                    <a:lstStyle/>
+                    <a:p>
+                      <a:pPr>
+                        <a:defRPr sz="750" b="1">
+                          <a:solidFill>
+                            <a:srgbClr val="FFFFFF"/>
+                          </a:solidFill>
+                          <a:latin typeface="Inter"/>
+                        </a:defRPr>
+                      </a:pPr>
+                      <a:r>
+                        <a:rPr>
+                          <a:latin typeface="Inter"/>
+                        </a:rPr>
+                        <a:t>Tag</a:t>
+                      </a:r>
+                    </a:p>
+                  </a:txBody>
+                  <a:tcPr marL="54864" marR="54864" marT="27432" marB="27432" anchor="ctr">
+                    <a:solidFill>
+                      <a:srgbClr val="0D1117"/>
+                    </a:solidFill>
+                  </a:tcPr>
+                </a:tc>
+                <a:tc>
+                  <a:txBody>
+                    <a:bodyPr/>
+                    <a:lstStyle/>
+                    <a:p>
+                      <a:pPr>
+                        <a:defRPr sz="750" b="1">
+                          <a:solidFill>
+                            <a:srgbClr val="FFFFFF"/>
+                          </a:solidFill>
+                          <a:latin typeface="Inter"/>
+                        </a:defRPr>
+                      </a:pPr>
+                      <a:r>
+                        <a:rPr>
+                          <a:latin typeface="Inter"/>
+                        </a:rPr>
+                        <a:t>Key parameters</a:t>
+                      </a:r>
+                    </a:p>
+                  </a:txBody>
+                  <a:tcPr marL="54864" marR="54864" marT="27432" marB="27432" anchor="ctr">
+                    <a:solidFill>
+                      <a:srgbClr val="0D1117"/>
+                    </a:solidFill>
+                  </a:tcPr>
+                </a:tc>
+                <a:tc>
+                  <a:txBody>
+                    <a:bodyPr/>
+                    <a:lstStyle/>
+                    <a:p>
+                      <a:pPr>
+                        <a:defRPr sz="750" b="1">
+                          <a:solidFill>
+                            <a:srgbClr val="FFFFFF"/>
+                          </a:solidFill>
+                          <a:latin typeface="Inter"/>
+                        </a:defRPr>
+                      </a:pPr>
+                      <a:r>
+                        <a:rPr>
+                          <a:latin typeface="Inter"/>
+                        </a:rPr>
+                        <a:t>Data scope</a:t>
+                      </a:r>
+                    </a:p>
+                  </a:txBody>
+                  <a:tcPr marL="54864" marR="54864" marT="27432" marB="27432" anchor="ctr">
+                    <a:solidFill>
+                      <a:srgbClr val="0D1117"/>
+                    </a:solidFill>
+                  </a:tcPr>
+                </a:tc>
+                <a:tc>
+                  <a:txBody>
+                    <a:bodyPr/>
+                    <a:lstStyle/>
+                    <a:p>
+                      <a:pPr>
+                        <a:defRPr sz="750" b="1">
+                          <a:solidFill>
+                            <a:srgbClr val="FFFFFF"/>
+                          </a:solidFill>
+                          <a:latin typeface="Inter"/>
+                        </a:defRPr>
+                      </a:pPr>
+                      <a:r>
+                        <a:rPr>
+                          <a:latin typeface="Inter"/>
+                        </a:rPr>
+                        <a:t>Digest</a:t>
+                      </a:r>
+                    </a:p>
+                  </a:txBody>
+                  <a:tcPr marL="54864" marR="54864" marT="27432" marB="27432" anchor="ctr">
+                    <a:solidFill>
+                      <a:srgbClr val="0D1117"/>
+                    </a:solidFill>
+                  </a:tcPr>
+                </a:tc>
+              </a:tr>
+              <a:tr h="319277">
+                <a:tc>
+                  <a:txBody>
+                    <a:bodyPr/>
+                    <a:lstStyle/>
+                    <a:p>
+                      <a:pPr>
+                        <a:defRPr sz="800" b="1">
+                          <a:solidFill>
+                            <a:srgbClr val="0D1117"/>
+                          </a:solidFill>
+                          <a:latin typeface="Inter"/>
+                        </a:defRPr>
+                      </a:pPr>
+                      <a:r>
+                        <a:rPr>
+                          <a:latin typeface="Inter"/>
+                        </a:rPr>
+                        <a:t>S1</a:t>
+                      </a:r>
+                    </a:p>
+                  </a:txBody>
+                  <a:tcPr marL="54864" marR="54864" marT="27432" marB="27432" anchor="ctr">
+                    <a:solidFill>
+                      <a:srgbClr val="FFFFFF"/>
+                    </a:solidFill>
+                  </a:tcPr>
+                </a:tc>
+                <a:tc>
+                  <a:txBody>
+                    <a:bodyPr/>
+                    <a:lstStyle/>
+                    <a:p>
+                      <a:pPr>
+                        <a:defRPr sz="800" b="0">
+                          <a:solidFill>
+                            <a:srgbClr val="0D1117"/>
+                          </a:solidFill>
+                          <a:latin typeface="Inter"/>
+                        </a:defRPr>
+                      </a:pPr>
+                      <a:r>
+                        <a:rPr>
+                          <a:latin typeface="Inter"/>
+                        </a:rPr>
+                        <a:t>manager=returns-test-northstar-select; benchmark=benchmark-test-northstar-core-equity; start=2020-01-31; end=2025-12-31</a:t>
+                      </a:r>
+                    </a:p>
+                  </a:txBody>
+                  <a:tcPr marL="54864" marR="54864" marT="27432" marB="27432" anchor="ctr">
+                    <a:solidFill>
+                      <a:srgbClr val="FFFFFF"/>
+                    </a:solidFill>
+                  </a:tcPr>
+                </a:tc>
+                <a:tc>
+                  <a:txBody>
+                    <a:bodyPr/>
+                    <a:lstStyle/>
+                    <a:p>
+                      <a:pPr>
+                        <a:defRPr sz="800" b="0">
+                          <a:solidFill>
+                            <a:srgbClr val="0D1117"/>
+                          </a:solidFill>
+                          <a:latin typeface="Inter"/>
+                        </a:defRPr>
+                      </a:pPr>
+                      <a:r>
+                        <a:rPr>
+                          <a:latin typeface="Inter"/>
+                        </a:rPr>
+                        <a:t>72 monthly observations; USD total return; illustrative sample data</a:t>
+                      </a:r>
+                    </a:p>
+                  </a:txBody>
+                  <a:tcPr marL="54864" marR="54864" marT="27432" marB="27432" anchor="ctr">
+                    <a:solidFill>
+                      <a:srgbClr val="FFFFFF"/>
+                    </a:solidFill>
+                  </a:tcPr>
+                </a:tc>
+                <a:tc>
+                  <a:txBody>
+                    <a:bodyPr/>
+                    <a:lstStyle/>
+                    <a:p>
+                      <a:pPr>
+                        <a:defRPr sz="800" b="0">
+                          <a:solidFill>
+                            <a:srgbClr val="0D1117"/>
+                          </a:solidFill>
+                          <a:latin typeface="Inter"/>
+                        </a:defRPr>
+                      </a:pPr>
+                      <a:r>
+                        <a:rPr>
+                          <a:latin typeface="Inter"/>
+                        </a:rPr>
+                        <a:t>sha256:aaaaaaaaaaaaaaaaaaaaaaaaaaaaaaaaaaaaaaaaaaaaaaaaaaaaaaaaaaaaaaaa</a:t>
+                      </a:r>
+                    </a:p>
+                  </a:txBody>
+                  <a:tcPr marL="54864" marR="54864" marT="27432" marB="27432" anchor="ctr">
+                    <a:solidFill>
+                      <a:srgbClr val="FFFFFF"/>
+                    </a:solidFill>
+                  </a:tcPr>
+                </a:tc>
+              </a:tr>
+              <a:tr h="319277">
+                <a:tc>
+                  <a:txBody>
+                    <a:bodyPr/>
+                    <a:lstStyle/>
+                    <a:p>
+                      <a:pPr>
+                        <a:defRPr sz="800" b="1">
+                          <a:solidFill>
+                            <a:srgbClr val="0D1117"/>
+                          </a:solidFill>
+                          <a:latin typeface="Inter"/>
+                        </a:defRPr>
+                      </a:pPr>
+                      <a:r>
+                        <a:rPr>
+                          <a:latin typeface="Inter"/>
+                        </a:rPr>
+                        <a:t>S2</a:t>
+                      </a:r>
+                    </a:p>
+                  </a:txBody>
+                  <a:tcPr marL="54864" marR="54864" marT="27432" marB="27432" anchor="ctr">
+                    <a:solidFill>
+                      <a:srgbClr val="F5F7F9"/>
+                    </a:solidFill>
+                  </a:tcPr>
+                </a:tc>
+                <a:tc>
+                  <a:txBody>
+                    <a:bodyPr/>
+                    <a:lstStyle/>
+                    <a:p>
+                      <a:pPr>
+                        <a:defRPr sz="800" b="0">
+                          <a:solidFill>
+                            <a:srgbClr val="0D1117"/>
+                          </a:solidFill>
+                          <a:latin typeface="Inter"/>
+                        </a:defRPr>
+                      </a:pPr>
+                      <a:r>
+                        <a:rPr>
+                          <a:latin typeface="Inter"/>
+                        </a:rPr>
+                        <a:t>manager=returns-test-northstar-select; benchmark=benchmark-test-northstar-core-equity; rolling_months=12,36</a:t>
+                      </a:r>
+                    </a:p>
+                  </a:txBody>
+                  <a:tcPr marL="54864" marR="54864" marT="27432" marB="27432" anchor="ctr">
+                    <a:solidFill>
+                      <a:srgbClr val="F5F7F9"/>
+                    </a:solidFill>
+                  </a:tcPr>
+                </a:tc>
+                <a:tc>
+                  <a:txBody>
+                    <a:bodyPr/>
+                    <a:lstStyle/>
+                    <a:p>
+                      <a:pPr>
+                        <a:defRPr sz="800" b="0">
+                          <a:solidFill>
+                            <a:srgbClr val="0D1117"/>
+                          </a:solidFill>
+                          <a:latin typeface="Inter"/>
+                        </a:defRPr>
+                      </a:pPr>
+                      <a:r>
+                        <a:rPr>
+                          <a:latin typeface="Inter"/>
+                        </a:rPr>
+                        <a:t>Common 72-month manager/benchmark window; illustrative sample data</a:t>
+                      </a:r>
+                    </a:p>
+                  </a:txBody>
+                  <a:tcPr marL="54864" marR="54864" marT="27432" marB="27432" anchor="ctr">
+                    <a:solidFill>
+                      <a:srgbClr val="F5F7F9"/>
+                    </a:solidFill>
+                  </a:tcPr>
+                </a:tc>
+                <a:tc>
+                  <a:txBody>
+                    <a:bodyPr/>
+                    <a:lstStyle/>
+                    <a:p>
+                      <a:pPr>
+                        <a:defRPr sz="800" b="0">
+                          <a:solidFill>
+                            <a:srgbClr val="0D1117"/>
+                          </a:solidFill>
+                          <a:latin typeface="Inter"/>
+                        </a:defRPr>
+                      </a:pPr>
+                      <a:r>
+                        <a:rPr>
+                          <a:latin typeface="Inter"/>
+                        </a:rPr>
+                        <a:t>sha256:bbbbbbbbbbbbbbbbbbbbbbbbbbbbbbbbbbbbbbbbbbbbbbbbbbbbbbbbbbbbbbbb</a:t>
+                      </a:r>
+                    </a:p>
+                  </a:txBody>
+                  <a:tcPr marL="54864" marR="54864" marT="27432" marB="27432" anchor="ctr">
+                    <a:solidFill>
+                      <a:srgbClr val="F5F7F9"/>
+                    </a:solidFill>
+                  </a:tcPr>
+                </a:tc>
+              </a:tr>
+              <a:tr h="319277">
+                <a:tc>
+                  <a:txBody>
+                    <a:bodyPr/>
+                    <a:lstStyle/>
+                    <a:p>
+                      <a:pPr>
+                        <a:defRPr sz="800" b="1">
+                          <a:solidFill>
+                            <a:srgbClr val="0D1117"/>
+                          </a:solidFill>
+                          <a:latin typeface="Inter"/>
+                        </a:defRPr>
+                      </a:pPr>
+                      <a:r>
+                        <a:rPr>
+                          <a:latin typeface="Inter"/>
+                        </a:rPr>
+                        <a:t>S3</a:t>
+                      </a:r>
+                    </a:p>
+                  </a:txBody>
+                  <a:tcPr marL="54864" marR="54864" marT="27432" marB="27432" anchor="ctr">
+                    <a:solidFill>
+                      <a:srgbClr val="FFFFFF"/>
+                    </a:solidFill>
+                  </a:tcPr>
+                </a:tc>
+                <a:tc>
+                  <a:txBody>
+                    <a:bodyPr/>
+                    <a:lstStyle/>
+                    <a:p>
+                      <a:pPr>
+                        <a:defRPr sz="800" b="0">
+                          <a:solidFill>
+                            <a:srgbClr val="0D1117"/>
+                          </a:solidFill>
+                          <a:latin typeface="Inter"/>
+                        </a:defRPr>
+                      </a:pPr>
+                      <a:r>
+                        <a:rPr>
+                          <a:latin typeface="Inter"/>
+                        </a:rPr>
+                        <a:t>starts=2020-01-31,2021-01-31,2022-01-31,2023-01-31; end=2025-12-31</a:t>
+                      </a:r>
+                    </a:p>
+                  </a:txBody>
+                  <a:tcPr marL="54864" marR="54864" marT="27432" marB="27432" anchor="ctr">
+                    <a:solidFill>
+                      <a:srgbClr val="FFFFFF"/>
+                    </a:solidFill>
+                  </a:tcPr>
+                </a:tc>
+                <a:tc>
+                  <a:txBody>
+                    <a:bodyPr/>
+                    <a:lstStyle/>
+                    <a:p>
+                      <a:pPr>
+                        <a:defRPr sz="800" b="0">
+                          <a:solidFill>
+                            <a:srgbClr val="0D1117"/>
+                          </a:solidFill>
+                          <a:latin typeface="Inter"/>
+                        </a:defRPr>
+                      </a:pPr>
+                      <a:r>
+                        <a:rPr>
+                          <a:latin typeface="Inter"/>
+                        </a:rPr>
+                        <a:t>Four returned start-date windows; illustrative sample data</a:t>
+                      </a:r>
+                    </a:p>
+                  </a:txBody>
+                  <a:tcPr marL="54864" marR="54864" marT="27432" marB="27432" anchor="ctr">
+                    <a:solidFill>
+                      <a:srgbClr val="FFFFFF"/>
+                    </a:solidFill>
+                  </a:tcPr>
+                </a:tc>
+                <a:tc>
+                  <a:txBody>
+                    <a:bodyPr/>
+                    <a:lstStyle/>
+                    <a:p>
+                      <a:pPr>
+                        <a:defRPr sz="800" b="0">
+                          <a:solidFill>
+                            <a:srgbClr val="0D1117"/>
+                          </a:solidFill>
+                          <a:latin typeface="Inter"/>
+                        </a:defRPr>
+                      </a:pPr>
+                      <a:r>
+                        <a:rPr>
+                          <a:latin typeface="Inter"/>
+                        </a:rPr>
+                        <a:t>sha256:cccccccccccccccccccccccccccccccccccccccccccccccccccccccccccccccc</a:t>
+                      </a:r>
+                    </a:p>
+                  </a:txBody>
+                  <a:tcPr marL="54864" marR="54864" marT="27432" marB="27432" anchor="ctr">
+                    <a:solidFill>
+                      <a:srgbClr val="FFFFFF"/>
+                    </a:solidFill>
+                  </a:tcPr>
+                </a:tc>
+              </a:tr>
+              <a:tr h="319277">
+                <a:tc>
+                  <a:txBody>
+                    <a:bodyPr/>
+                    <a:lstStyle/>
+                    <a:p>
+                      <a:pPr>
+                        <a:defRPr sz="800" b="1">
+                          <a:solidFill>
+                            <a:srgbClr val="0D1117"/>
+                          </a:solidFill>
+                          <a:latin typeface="Inter"/>
+                        </a:defRPr>
+                      </a:pPr>
+                      <a:r>
+                        <a:rPr>
+                          <a:latin typeface="Inter"/>
+                        </a:rPr>
+                        <a:t>S4</a:t>
+                      </a:r>
+                    </a:p>
+                  </a:txBody>
+                  <a:tcPr marL="54864" marR="54864" marT="27432" marB="27432" anchor="ctr">
+                    <a:solidFill>
+                      <a:srgbClr val="F5F7F9"/>
+                    </a:solidFill>
+                  </a:tcPr>
+                </a:tc>
+                <a:tc>
+                  <a:txBody>
+                    <a:bodyPr/>
+                    <a:lstStyle/>
+                    <a:p>
+                      <a:pPr>
+                        <a:defRPr sz="800" b="0">
+                          <a:solidFill>
+                            <a:srgbClr val="0D1117"/>
+                          </a:solidFill>
+                          <a:latin typeface="Inter"/>
+                        </a:defRPr>
+                      </a:pPr>
+                      <a:r>
+                        <a:rPr>
+                          <a:latin typeface="Inter"/>
+                        </a:rPr>
+                        <a:t>horizon=10y; outputs=annualized_return,annualized_volatility,terminal_wealth_median</a:t>
+                      </a:r>
+                    </a:p>
+                  </a:txBody>
+                  <a:tcPr marL="54864" marR="54864" marT="27432" marB="27432" anchor="ctr">
+                    <a:solidFill>
+                      <a:srgbClr val="F5F7F9"/>
+                    </a:solidFill>
+                  </a:tcPr>
+                </a:tc>
+                <a:tc>
+                  <a:txBody>
+                    <a:bodyPr/>
+                    <a:lstStyle/>
+                    <a:p>
+                      <a:pPr>
+                        <a:defRPr sz="800" b="0">
+                          <a:solidFill>
+                            <a:srgbClr val="0D1117"/>
+                          </a:solidFill>
+                          <a:latin typeface="Inter"/>
+                        </a:defRPr>
+                      </a:pPr>
+                      <a:r>
+                        <a:rPr>
+                          <a:latin typeface="Inter"/>
+                        </a:rPr>
+                        <a:t>Server-returned model outputs; illustrative sample data</a:t>
+                      </a:r>
+                    </a:p>
+                  </a:txBody>
+                  <a:tcPr marL="54864" marR="54864" marT="27432" marB="27432" anchor="ctr">
+                    <a:solidFill>
+                      <a:srgbClr val="F5F7F9"/>
+                    </a:solidFill>
+                  </a:tcPr>
+                </a:tc>
+                <a:tc>
+                  <a:txBody>
+                    <a:bodyPr/>
+                    <a:lstStyle/>
+                    <a:p>
+                      <a:pPr>
+                        <a:defRPr sz="800" b="0">
+                          <a:solidFill>
+                            <a:srgbClr val="0D1117"/>
+                          </a:solidFill>
+                          <a:latin typeface="Inter"/>
+                        </a:defRPr>
+                      </a:pPr>
+                      <a:r>
+                        <a:rPr>
+                          <a:latin typeface="Inter"/>
+                        </a:rPr>
+                        <a:t>sha256:dddddddddddddddddddddddddddddddddddddddddddddddddddddddddddddddd</a:t>
+                      </a:r>
+                    </a:p>
+                  </a:txBody>
+                  <a:tcPr marL="54864" marR="54864" marT="27432" marB="27432" anchor="ctr">
+                    <a:solidFill>
+                      <a:srgbClr val="F5F7F9"/>
+                    </a:solidFill>
+                  </a:tcPr>
+                </a:tc>
+              </a:tr>
+              <a:tr h="319282">
+                <a:tc>
+                  <a:txBody>
+                    <a:bodyPr/>
+                    <a:lstStyle/>
+                    <a:p>
+                      <a:pPr>
+                        <a:defRPr sz="800" b="1">
+                          <a:solidFill>
+                            <a:srgbClr val="0D1117"/>
+                          </a:solidFill>
+                          <a:latin typeface="Inter"/>
+                        </a:defRPr>
+                      </a:pPr>
+                      <a:r>
+                        <a:rPr>
+                          <a:latin typeface="Inter"/>
+                        </a:rPr>
+                        <a:t>S5</a:t>
+                      </a:r>
+                    </a:p>
+                  </a:txBody>
+                  <a:tcPr marL="54864" marR="54864" marT="27432" marB="27432" anchor="ctr">
+                    <a:solidFill>
+                      <a:srgbClr val="FFFFFF"/>
+                    </a:solidFill>
+                  </a:tcPr>
+                </a:tc>
+                <a:tc>
+                  <a:txBody>
+                    <a:bodyPr/>
+                    <a:lstStyle/>
+                    <a:p>
+                      <a:pPr>
+                        <a:defRPr sz="800" b="0">
+                          <a:solidFill>
+                            <a:srgbClr val="0D1117"/>
+                          </a:solidFill>
+                          <a:latin typeface="Inter"/>
+                        </a:defRPr>
+                      </a:pPr>
+                      <a:r>
+                        <a:rPr>
+                          <a:latin typeface="Inter"/>
+                        </a:rPr>
+                        <a:t>manager=returns-test-northstar-select; benchmark=benchmark-test-northstar-broad-equity; status=advisory</a:t>
+                      </a:r>
+                    </a:p>
+                  </a:txBody>
+                  <a:tcPr marL="54864" marR="54864" marT="27432" marB="27432" anchor="ctr">
+                    <a:solidFill>
+                      <a:srgbClr val="FFFFFF"/>
+                    </a:solidFill>
+                  </a:tcPr>
+                </a:tc>
+                <a:tc>
+                  <a:txBody>
+                    <a:bodyPr/>
+                    <a:lstStyle/>
+                    <a:p>
+                      <a:pPr>
+                        <a:defRPr sz="800" b="0">
+                          <a:solidFill>
+                            <a:srgbClr val="0D1117"/>
+                          </a:solidFill>
+                          <a:latin typeface="Inter"/>
+                        </a:defRPr>
+                      </a:pPr>
+                      <a:r>
+                        <a:rPr>
+                          <a:latin typeface="Inter"/>
+                        </a:rPr>
+                        <a:t>Same 72-month window; illustrative sample data</a:t>
+                      </a:r>
+                    </a:p>
+                  </a:txBody>
+                  <a:tcPr marL="54864" marR="54864" marT="27432" marB="27432" anchor="ctr">
+                    <a:solidFill>
+                      <a:srgbClr val="FFFFFF"/>
+                    </a:solidFill>
+                  </a:tcPr>
+                </a:tc>
+                <a:tc>
+                  <a:txBody>
+                    <a:bodyPr/>
+                    <a:lstStyle/>
+                    <a:p>
+                      <a:pPr>
+                        <a:defRPr sz="800" b="0">
+                          <a:solidFill>
+                            <a:srgbClr val="0D1117"/>
+                          </a:solidFill>
+                          <a:latin typeface="Inter"/>
+                        </a:defRPr>
+                      </a:pPr>
+                      <a:r>
+                        <a:rPr>
+                          <a:latin typeface="Inter"/>
+                        </a:rPr>
+                        <a:t>sha256:eeeeeeeeeeeeeeeeeeeeeeeeeeeeeeeeeeeeeeeeeeeeeeeeeeeeeeeeeeeeeeee</a:t>
+                      </a:r>
+                    </a:p>
+                  </a:txBody>
+                  <a:tcPr marL="54864" marR="54864" marT="27432" marB="27432" anchor="ctr">
+                    <a:solidFill>
+                      <a:srgbClr val="FFFFFF"/>
+                    </a:solidFill>
+                  </a:tcPr>
+                </a:tc>
+              </a:tr>
+            </a:tbl>
+          </a:graphicData>
+        </a:graphic>
+      </p:graphicFrame>
+      <p:sp>
+        <p:nvSpPr>
+          <p:cNvPr id="12" name="TextBox 11"/>
+          <p:cNvSpPr txBox="1"/>
+          <p:nvPr/>
+        </p:nvSpPr>
+        <p:spPr>
+          <a:xfrm>
+            <a:off x="640080" y="6035039"/>
+            <a:ext cx="10908792" cy="164592"/>
+          </a:xfrm>
+          <a:prstGeom prst="rect">
+            <a:avLst/>
+          </a:prstGeom>
+          <a:noFill/>
+        </p:spPr>
+        <p:txBody>
+          <a:bodyPr wrap="none" lIns="9144" rIns="9144" tIns="9144" bIns="9144" anchor="t">
+            <a:spAutoFit/>
+          </a:bodyPr>
+          <a:lstStyle/>
+          <a:p>
+            <a:pPr algn="l">
+              <a:spcAft>
+                <a:spcPts val="0"/>
+              </a:spcAft>
+              <a:defRPr sz="680" b="0">
+                <a:solidFill>
+                  <a:srgbClr val="8A94A1"/>
+                </a:solidFill>
+                <a:latin typeface="Inter"/>
+              </a:defRPr>
+            </a:pPr>
+            <a:r>
+              <a:rPr>
+                <a:latin typeface="Inter"/>
+              </a:rPr>
+              <a:t>Each digest is the SHA-256 fingerprint of the exact data the report used.</a:t>
+            </a:r>
+          </a:p>
+        </p:txBody>
+      </p:sp>
+      <p:sp>
+        <p:nvSpPr>
+          <p:cNvPr id="13" name="Rectangle 12"/>
           <p:cNvSpPr/>
           <p:nvPr/>
         </p:nvSpPr>
@@ -18552,7 +18077,7 @@
       </p:sp>
       <p:sp>
         <p:nvSpPr>
-          <p:cNvPr id="12" name="TextBox 11"/>
+          <p:cNvPr id="14" name="TextBox 13"/>
           <p:cNvSpPr txBox="1"/>
           <p:nvPr/>
         </p:nvSpPr>
@@ -18594,7 +18119,7 @@
       </p:sp>
       <p:sp>
         <p:nvSpPr>
-          <p:cNvPr id="13" name="TextBox 12"/>
+          <p:cNvPr id="15" name="TextBox 14"/>
           <p:cNvSpPr txBox="1"/>
           <p:nvPr/>
         </p:nvSpPr>
@@ -18636,7 +18161,7 @@
       </p:sp>
       <p:sp>
         <p:nvSpPr>
-          <p:cNvPr id="14" name="TextBox 13"/>
+          <p:cNvPr id="16" name="TextBox 15"/>
           <p:cNvSpPr txBox="1"/>
           <p:nvPr/>
         </p:nvSpPr>
@@ -18752,7 +18277,7 @@
         <p:spPr>
           <a:xfrm>
             <a:off x="640080" y="329184"/>
-            <a:ext cx="5303520" cy="182880"/>
+            <a:ext cx="9875520" cy="182880"/>
           </a:xfrm>
           <a:prstGeom prst="rect">
             <a:avLst/>
@@ -18793,48 +18318,6 @@
         </p:nvSpPr>
         <p:spPr>
           <a:xfrm>
-            <a:off x="5897880" y="310896"/>
-            <a:ext cx="4800600" cy="256032"/>
-          </a:xfrm>
-          <a:prstGeom prst="rect">
-            <a:avLst/>
-          </a:prstGeom>
-          <a:noFill/>
-        </p:spPr>
-        <p:txBody>
-          <a:bodyPr wrap="none" lIns="9144" rIns="9144" tIns="9144" bIns="9144" anchor="t">
-            <a:spAutoFit/>
-          </a:bodyPr>
-          <a:lstStyle/>
-          <a:p>
-            <a:pPr algn="r">
-              <a:spcAft>
-                <a:spcPts val="0"/>
-              </a:spcAft>
-              <a:defRPr sz="680" b="1">
-                <a:solidFill>
-                  <a:srgbClr val="4F6B00"/>
-                </a:solidFill>
-                <a:latin typeface="Inter"/>
-              </a:defRPr>
-            </a:pPr>
-            <a:r>
-              <a:rPr>
-                <a:latin typeface="Inter"/>
-              </a:rPr>
-              <a:t>Illustrative, Gradient Maintained — demo data, not the client's holdings or managers</a:t>
-            </a:r>
-          </a:p>
-        </p:txBody>
-      </p:sp>
-      <p:sp>
-        <p:nvSpPr>
-          <p:cNvPr id="5" name="TextBox 4"/>
-          <p:cNvSpPr txBox="1"/>
-          <p:nvPr/>
-        </p:nvSpPr>
-        <p:spPr>
-          <a:xfrm>
             <a:off x="640080" y="566928"/>
             <a:ext cx="10058400" cy="530352"/>
           </a:xfrm>
@@ -18871,7 +18354,7 @@
       </p:sp>
       <p:sp>
         <p:nvSpPr>
-          <p:cNvPr id="6" name="Rectangle 5"/>
+          <p:cNvPr id="5" name="Rectangle 4"/>
           <p:cNvSpPr/>
           <p:nvPr/>
         </p:nvSpPr>
@@ -18920,7 +18403,7 @@
       </p:sp>
       <p:sp>
         <p:nvSpPr>
-          <p:cNvPr id="7" name="Rectangle 6"/>
+          <p:cNvPr id="6" name="Rectangle 5"/>
           <p:cNvSpPr/>
           <p:nvPr/>
         </p:nvSpPr>
@@ -18969,7 +18452,7 @@
       </p:sp>
       <p:sp>
         <p:nvSpPr>
-          <p:cNvPr id="8" name="TextBox 7"/>
+          <p:cNvPr id="7" name="TextBox 6"/>
           <p:cNvSpPr txBox="1"/>
           <p:nvPr/>
         </p:nvSpPr>
@@ -19011,7 +18494,7 @@
       </p:sp>
       <p:sp>
         <p:nvSpPr>
-          <p:cNvPr id="9" name="Rectangle 8"/>
+          <p:cNvPr id="8" name="Rectangle 7"/>
           <p:cNvSpPr/>
           <p:nvPr/>
         </p:nvSpPr>
@@ -19060,7 +18543,7 @@
       </p:sp>
       <p:sp>
         <p:nvSpPr>
-          <p:cNvPr id="10" name="Rectangle 9"/>
+          <p:cNvPr id="9" name="Rectangle 8"/>
           <p:cNvSpPr/>
           <p:nvPr/>
         </p:nvSpPr>
@@ -19109,7 +18592,7 @@
       </p:sp>
       <p:sp>
         <p:nvSpPr>
-          <p:cNvPr id="11" name="TextBox 10"/>
+          <p:cNvPr id="10" name="TextBox 9"/>
           <p:cNvSpPr txBox="1"/>
           <p:nvPr/>
         </p:nvSpPr>
@@ -19151,7 +18634,7 @@
       </p:sp>
       <p:sp>
         <p:nvSpPr>
-          <p:cNvPr id="12" name="TextBox 11"/>
+          <p:cNvPr id="11" name="TextBox 10"/>
           <p:cNvSpPr txBox="1"/>
           <p:nvPr/>
         </p:nvSpPr>
@@ -19193,7 +18676,7 @@
       </p:sp>
       <p:sp>
         <p:nvSpPr>
-          <p:cNvPr id="13" name="TextBox 12"/>
+          <p:cNvPr id="12" name="TextBox 11"/>
           <p:cNvSpPr txBox="1"/>
           <p:nvPr/>
         </p:nvSpPr>
@@ -19235,7 +18718,7 @@
       </p:sp>
       <p:sp>
         <p:nvSpPr>
-          <p:cNvPr id="14" name="Rectangle 13"/>
+          <p:cNvPr id="13" name="Rectangle 12"/>
           <p:cNvSpPr/>
           <p:nvPr/>
         </p:nvSpPr>
@@ -19284,7 +18767,7 @@
       </p:sp>
       <p:sp>
         <p:nvSpPr>
-          <p:cNvPr id="15" name="Rectangle 14"/>
+          <p:cNvPr id="14" name="Rectangle 13"/>
           <p:cNvSpPr/>
           <p:nvPr/>
         </p:nvSpPr>
@@ -19333,7 +18816,7 @@
       </p:sp>
       <p:sp>
         <p:nvSpPr>
-          <p:cNvPr id="16" name="TextBox 15"/>
+          <p:cNvPr id="15" name="TextBox 14"/>
           <p:cNvSpPr txBox="1"/>
           <p:nvPr/>
         </p:nvSpPr>
@@ -19375,7 +18858,7 @@
       </p:sp>
       <p:sp>
         <p:nvSpPr>
-          <p:cNvPr id="17" name="TextBox 16"/>
+          <p:cNvPr id="16" name="TextBox 15"/>
           <p:cNvSpPr txBox="1"/>
           <p:nvPr/>
         </p:nvSpPr>
@@ -19417,7 +18900,7 @@
       </p:sp>
       <p:sp>
         <p:nvSpPr>
-          <p:cNvPr id="18" name="TextBox 17"/>
+          <p:cNvPr id="17" name="TextBox 16"/>
           <p:cNvSpPr txBox="1"/>
           <p:nvPr/>
         </p:nvSpPr>
@@ -19459,7 +18942,7 @@
       </p:sp>
       <p:sp>
         <p:nvSpPr>
-          <p:cNvPr id="19" name="Rectangle 18"/>
+          <p:cNvPr id="18" name="Rectangle 17"/>
           <p:cNvSpPr/>
           <p:nvPr/>
         </p:nvSpPr>
@@ -19508,7 +18991,7 @@
       </p:sp>
       <p:sp>
         <p:nvSpPr>
-          <p:cNvPr id="20" name="Rectangle 19"/>
+          <p:cNvPr id="19" name="Rectangle 18"/>
           <p:cNvSpPr/>
           <p:nvPr/>
         </p:nvSpPr>
@@ -19557,7 +19040,7 @@
       </p:sp>
       <p:sp>
         <p:nvSpPr>
-          <p:cNvPr id="21" name="TextBox 20"/>
+          <p:cNvPr id="20" name="TextBox 19"/>
           <p:cNvSpPr txBox="1"/>
           <p:nvPr/>
         </p:nvSpPr>
@@ -19599,7 +19082,7 @@
       </p:sp>
       <p:sp>
         <p:nvSpPr>
-          <p:cNvPr id="22" name="TextBox 21"/>
+          <p:cNvPr id="21" name="TextBox 20"/>
           <p:cNvSpPr txBox="1"/>
           <p:nvPr/>
         </p:nvSpPr>
@@ -19641,7 +19124,7 @@
       </p:sp>
       <p:sp>
         <p:nvSpPr>
-          <p:cNvPr id="23" name="TextBox 22"/>
+          <p:cNvPr id="22" name="TextBox 21"/>
           <p:cNvSpPr txBox="1"/>
           <p:nvPr/>
         </p:nvSpPr>
@@ -19683,7 +19166,7 @@
       </p:sp>
       <p:sp>
         <p:nvSpPr>
-          <p:cNvPr id="24" name="Rectangle 23"/>
+          <p:cNvPr id="23" name="Rectangle 22"/>
           <p:cNvSpPr/>
           <p:nvPr/>
         </p:nvSpPr>
@@ -19732,7 +19215,7 @@
       </p:sp>
       <p:sp>
         <p:nvSpPr>
-          <p:cNvPr id="25" name="Rectangle 24"/>
+          <p:cNvPr id="24" name="Rectangle 23"/>
           <p:cNvSpPr/>
           <p:nvPr/>
         </p:nvSpPr>
@@ -19781,7 +19264,7 @@
       </p:sp>
       <p:sp>
         <p:nvSpPr>
-          <p:cNvPr id="26" name="TextBox 25"/>
+          <p:cNvPr id="25" name="TextBox 24"/>
           <p:cNvSpPr txBox="1"/>
           <p:nvPr/>
         </p:nvSpPr>
@@ -19823,7 +19306,7 @@
       </p:sp>
       <p:sp>
         <p:nvSpPr>
-          <p:cNvPr id="27" name="TextBox 26"/>
+          <p:cNvPr id="26" name="TextBox 25"/>
           <p:cNvSpPr txBox="1"/>
           <p:nvPr/>
         </p:nvSpPr>
@@ -19865,7 +19348,7 @@
       </p:sp>
       <p:sp>
         <p:nvSpPr>
-          <p:cNvPr id="28" name="TextBox 27"/>
+          <p:cNvPr id="27" name="TextBox 26"/>
           <p:cNvSpPr txBox="1"/>
           <p:nvPr/>
         </p:nvSpPr>
@@ -19907,7 +19390,7 @@
       </p:sp>
       <p:sp>
         <p:nvSpPr>
-          <p:cNvPr id="29" name="Rectangle 28"/>
+          <p:cNvPr id="28" name="Rectangle 27"/>
           <p:cNvSpPr/>
           <p:nvPr/>
         </p:nvSpPr>
@@ -19956,7 +19439,7 @@
       </p:sp>
       <p:sp>
         <p:nvSpPr>
-          <p:cNvPr id="30" name="TextBox 29"/>
+          <p:cNvPr id="29" name="TextBox 28"/>
           <p:cNvSpPr txBox="1"/>
           <p:nvPr/>
         </p:nvSpPr>
@@ -19998,7 +19481,7 @@
       </p:sp>
       <p:sp>
         <p:nvSpPr>
-          <p:cNvPr id="31" name="TextBox 30"/>
+          <p:cNvPr id="30" name="TextBox 29"/>
           <p:cNvSpPr txBox="1"/>
           <p:nvPr/>
         </p:nvSpPr>
@@ -20040,7 +19523,7 @@
       </p:sp>
       <p:sp>
         <p:nvSpPr>
-          <p:cNvPr id="32" name="Rectangle 31"/>
+          <p:cNvPr id="31" name="Rectangle 30"/>
           <p:cNvSpPr/>
           <p:nvPr/>
         </p:nvSpPr>
@@ -20089,7 +19572,7 @@
       </p:sp>
       <p:sp>
         <p:nvSpPr>
-          <p:cNvPr id="33" name="Rectangle 32"/>
+          <p:cNvPr id="32" name="Rectangle 31"/>
           <p:cNvSpPr/>
           <p:nvPr/>
         </p:nvSpPr>
@@ -20138,7 +19621,7 @@
       </p:sp>
       <p:sp>
         <p:nvSpPr>
-          <p:cNvPr id="34" name="TextBox 33"/>
+          <p:cNvPr id="33" name="TextBox 32"/>
           <p:cNvSpPr txBox="1"/>
           <p:nvPr/>
         </p:nvSpPr>
@@ -20180,7 +19663,7 @@
       </p:sp>
       <p:sp>
         <p:nvSpPr>
-          <p:cNvPr id="35" name="TextBox 34"/>
+          <p:cNvPr id="34" name="TextBox 33"/>
           <p:cNvSpPr txBox="1"/>
           <p:nvPr/>
         </p:nvSpPr>
@@ -20222,7 +19705,7 @@
       </p:sp>
       <p:sp>
         <p:nvSpPr>
-          <p:cNvPr id="36" name="Rectangle 35"/>
+          <p:cNvPr id="35" name="Rectangle 34"/>
           <p:cNvSpPr/>
           <p:nvPr/>
         </p:nvSpPr>
@@ -20271,7 +19754,7 @@
       </p:sp>
       <p:sp>
         <p:nvSpPr>
-          <p:cNvPr id="37" name="Rectangle 36"/>
+          <p:cNvPr id="36" name="Rectangle 35"/>
           <p:cNvSpPr/>
           <p:nvPr/>
         </p:nvSpPr>
@@ -20320,7 +19803,7 @@
       </p:sp>
       <p:sp>
         <p:nvSpPr>
-          <p:cNvPr id="38" name="TextBox 37"/>
+          <p:cNvPr id="37" name="TextBox 36"/>
           <p:cNvSpPr txBox="1"/>
           <p:nvPr/>
         </p:nvSpPr>
@@ -20362,7 +19845,7 @@
       </p:sp>
       <p:sp>
         <p:nvSpPr>
-          <p:cNvPr id="39" name="TextBox 38"/>
+          <p:cNvPr id="38" name="TextBox 37"/>
           <p:cNvSpPr txBox="1"/>
           <p:nvPr/>
         </p:nvSpPr>
@@ -20404,7 +19887,7 @@
       </p:sp>
       <p:sp>
         <p:nvSpPr>
-          <p:cNvPr id="40" name="Rectangle 39"/>
+          <p:cNvPr id="39" name="Rectangle 38"/>
           <p:cNvSpPr/>
           <p:nvPr/>
         </p:nvSpPr>
@@ -20453,7 +19936,7 @@
       </p:sp>
       <p:sp>
         <p:nvSpPr>
-          <p:cNvPr id="41" name="TextBox 40"/>
+          <p:cNvPr id="40" name="TextBox 39"/>
           <p:cNvSpPr txBox="1"/>
           <p:nvPr/>
         </p:nvSpPr>
@@ -20495,7 +19978,7 @@
       </p:sp>
       <p:sp>
         <p:nvSpPr>
-          <p:cNvPr id="42" name="TextBox 41"/>
+          <p:cNvPr id="41" name="TextBox 40"/>
           <p:cNvSpPr txBox="1"/>
           <p:nvPr/>
         </p:nvSpPr>
@@ -20537,7 +20020,7 @@
       </p:sp>
       <p:sp>
         <p:nvSpPr>
-          <p:cNvPr id="43" name="TextBox 42"/>
+          <p:cNvPr id="42" name="TextBox 41"/>
           <p:cNvSpPr txBox="1"/>
           <p:nvPr/>
         </p:nvSpPr>
@@ -20653,7 +20136,7 @@
         <p:spPr>
           <a:xfrm>
             <a:off x="640080" y="329184"/>
-            <a:ext cx="5303520" cy="182880"/>
+            <a:ext cx="9875520" cy="182880"/>
           </a:xfrm>
           <a:prstGeom prst="rect">
             <a:avLst/>
@@ -20694,48 +20177,6 @@
         </p:nvSpPr>
         <p:spPr>
           <a:xfrm>
-            <a:off x="5897880" y="310896"/>
-            <a:ext cx="4800600" cy="256032"/>
-          </a:xfrm>
-          <a:prstGeom prst="rect">
-            <a:avLst/>
-          </a:prstGeom>
-          <a:noFill/>
-        </p:spPr>
-        <p:txBody>
-          <a:bodyPr wrap="none" lIns="9144" rIns="9144" tIns="9144" bIns="9144" anchor="t">
-            <a:spAutoFit/>
-          </a:bodyPr>
-          <a:lstStyle/>
-          <a:p>
-            <a:pPr algn="r">
-              <a:spcAft>
-                <a:spcPts val="0"/>
-              </a:spcAft>
-              <a:defRPr sz="680" b="1">
-                <a:solidFill>
-                  <a:srgbClr val="4F6B00"/>
-                </a:solidFill>
-                <a:latin typeface="Inter"/>
-              </a:defRPr>
-            </a:pPr>
-            <a:r>
-              <a:rPr>
-                <a:latin typeface="Inter"/>
-              </a:rPr>
-              <a:t>Illustrative, Gradient Maintained — demo data, not the client's holdings or managers</a:t>
-            </a:r>
-          </a:p>
-        </p:txBody>
-      </p:sp>
-      <p:sp>
-        <p:nvSpPr>
-          <p:cNvPr id="5" name="TextBox 4"/>
-          <p:cNvSpPr txBox="1"/>
-          <p:nvPr/>
-        </p:nvSpPr>
-        <p:spPr>
-          <a:xfrm>
             <a:off x="640080" y="566928"/>
             <a:ext cx="10058400" cy="530352"/>
           </a:xfrm>
@@ -20772,7 +20213,7 @@
       </p:sp>
       <p:sp>
         <p:nvSpPr>
-          <p:cNvPr id="6" name="Rectangle 5"/>
+          <p:cNvPr id="5" name="Rectangle 4"/>
           <p:cNvSpPr/>
           <p:nvPr/>
         </p:nvSpPr>
@@ -20821,7 +20262,7 @@
       </p:sp>
       <p:sp>
         <p:nvSpPr>
-          <p:cNvPr id="7" name="Rectangle 6"/>
+          <p:cNvPr id="6" name="Rectangle 5"/>
           <p:cNvSpPr/>
           <p:nvPr/>
         </p:nvSpPr>
@@ -20870,7 +20311,7 @@
       </p:sp>
       <p:sp>
         <p:nvSpPr>
-          <p:cNvPr id="8" name="TextBox 7"/>
+          <p:cNvPr id="7" name="TextBox 6"/>
           <p:cNvSpPr txBox="1"/>
           <p:nvPr/>
         </p:nvSpPr>
@@ -20912,7 +20353,7 @@
       </p:sp>
       <p:sp>
         <p:nvSpPr>
-          <p:cNvPr id="9" name="Rectangle 8"/>
+          <p:cNvPr id="8" name="Rectangle 7"/>
           <p:cNvSpPr/>
           <p:nvPr/>
         </p:nvSpPr>
@@ -20961,7 +20402,7 @@
       </p:sp>
       <p:sp>
         <p:nvSpPr>
-          <p:cNvPr id="10" name="Rectangle 9"/>
+          <p:cNvPr id="9" name="Rectangle 8"/>
           <p:cNvSpPr/>
           <p:nvPr/>
         </p:nvSpPr>
@@ -21010,7 +20451,7 @@
       </p:sp>
       <p:sp>
         <p:nvSpPr>
-          <p:cNvPr id="11" name="TextBox 10"/>
+          <p:cNvPr id="10" name="TextBox 9"/>
           <p:cNvSpPr txBox="1"/>
           <p:nvPr/>
         </p:nvSpPr>
@@ -21052,7 +20493,7 @@
       </p:sp>
       <p:sp>
         <p:nvSpPr>
-          <p:cNvPr id="12" name="TextBox 11"/>
+          <p:cNvPr id="11" name="TextBox 10"/>
           <p:cNvSpPr txBox="1"/>
           <p:nvPr/>
         </p:nvSpPr>
@@ -21094,7 +20535,7 @@
       </p:sp>
       <p:sp>
         <p:nvSpPr>
-          <p:cNvPr id="13" name="Rectangle 12"/>
+          <p:cNvPr id="12" name="Rectangle 11"/>
           <p:cNvSpPr/>
           <p:nvPr/>
         </p:nvSpPr>
@@ -21143,7 +20584,7 @@
       </p:sp>
       <p:sp>
         <p:nvSpPr>
-          <p:cNvPr id="14" name="TextBox 13"/>
+          <p:cNvPr id="13" name="TextBox 12"/>
           <p:cNvSpPr txBox="1"/>
           <p:nvPr/>
         </p:nvSpPr>
@@ -21185,7 +20626,7 @@
       </p:sp>
       <p:sp>
         <p:nvSpPr>
-          <p:cNvPr id="15" name="TextBox 14"/>
+          <p:cNvPr id="14" name="TextBox 13"/>
           <p:cNvSpPr txBox="1"/>
           <p:nvPr/>
         </p:nvSpPr>
@@ -21227,7 +20668,7 @@
       </p:sp>
       <p:sp>
         <p:nvSpPr>
-          <p:cNvPr id="16" name="TextBox 15"/>
+          <p:cNvPr id="15" name="TextBox 14"/>
           <p:cNvSpPr txBox="1"/>
           <p:nvPr/>
         </p:nvSpPr>
@@ -21343,7 +20784,7 @@
         <p:spPr>
           <a:xfrm>
             <a:off x="640080" y="329184"/>
-            <a:ext cx="5303520" cy="182880"/>
+            <a:ext cx="9875520" cy="182880"/>
           </a:xfrm>
           <a:prstGeom prst="rect">
             <a:avLst/>
@@ -21384,48 +20825,6 @@
         </p:nvSpPr>
         <p:spPr>
           <a:xfrm>
-            <a:off x="5897880" y="310896"/>
-            <a:ext cx="4800600" cy="256032"/>
-          </a:xfrm>
-          <a:prstGeom prst="rect">
-            <a:avLst/>
-          </a:prstGeom>
-          <a:noFill/>
-        </p:spPr>
-        <p:txBody>
-          <a:bodyPr wrap="none" lIns="9144" rIns="9144" tIns="9144" bIns="9144" anchor="t">
-            <a:spAutoFit/>
-          </a:bodyPr>
-          <a:lstStyle/>
-          <a:p>
-            <a:pPr algn="r">
-              <a:spcAft>
-                <a:spcPts val="0"/>
-              </a:spcAft>
-              <a:defRPr sz="680" b="1">
-                <a:solidFill>
-                  <a:srgbClr val="4F6B00"/>
-                </a:solidFill>
-                <a:latin typeface="Inter"/>
-              </a:defRPr>
-            </a:pPr>
-            <a:r>
-              <a:rPr>
-                <a:latin typeface="Inter"/>
-              </a:rPr>
-              <a:t>Illustrative, Gradient Maintained — demo data, not the client's holdings or managers</a:t>
-            </a:r>
-          </a:p>
-        </p:txBody>
-      </p:sp>
-      <p:sp>
-        <p:nvSpPr>
-          <p:cNvPr id="5" name="TextBox 4"/>
-          <p:cNvSpPr txBox="1"/>
-          <p:nvPr/>
-        </p:nvSpPr>
-        <p:spPr>
-          <a:xfrm>
             <a:off x="640080" y="566928"/>
             <a:ext cx="10058400" cy="530352"/>
           </a:xfrm>
@@ -21462,7 +20861,7 @@
       </p:sp>
       <p:sp>
         <p:nvSpPr>
-          <p:cNvPr id="6" name="Rectangle 5"/>
+          <p:cNvPr id="5" name="Rectangle 4"/>
           <p:cNvSpPr/>
           <p:nvPr/>
         </p:nvSpPr>
@@ -21511,7 +20910,7 @@
       </p:sp>
       <p:sp>
         <p:nvSpPr>
-          <p:cNvPr id="7" name="Rectangle 6"/>
+          <p:cNvPr id="6" name="Rectangle 5"/>
           <p:cNvSpPr/>
           <p:nvPr/>
         </p:nvSpPr>
@@ -21560,7 +20959,7 @@
       </p:sp>
       <p:sp>
         <p:nvSpPr>
-          <p:cNvPr id="8" name="TextBox 7"/>
+          <p:cNvPr id="7" name="TextBox 6"/>
           <p:cNvSpPr txBox="1"/>
           <p:nvPr/>
         </p:nvSpPr>
@@ -21602,7 +21001,7 @@
       </p:sp>
       <p:sp>
         <p:nvSpPr>
-          <p:cNvPr id="9" name="TextBox 8"/>
+          <p:cNvPr id="8" name="TextBox 7"/>
           <p:cNvSpPr txBox="1"/>
           <p:nvPr/>
         </p:nvSpPr>
@@ -21644,7 +21043,7 @@
       </p:sp>
       <p:graphicFrame>
         <p:nvGraphicFramePr>
-          <p:cNvPr id="10" name="Chart 9"/>
+          <p:cNvPr id="9" name="Chart 8"/>
           <p:cNvGraphicFramePr>
             <a:graphicFrameLocks noGrp="1"/>
           </p:cNvGraphicFramePr>
@@ -21662,7 +21061,7 @@
       </p:graphicFrame>
       <p:sp>
         <p:nvSpPr>
-          <p:cNvPr id="11" name="Rectangle 10"/>
+          <p:cNvPr id="10" name="Rectangle 9"/>
           <p:cNvSpPr/>
           <p:nvPr/>
         </p:nvSpPr>
@@ -21711,7 +21110,7 @@
       </p:sp>
       <p:sp>
         <p:nvSpPr>
-          <p:cNvPr id="12" name="TextBox 11"/>
+          <p:cNvPr id="11" name="TextBox 10"/>
           <p:cNvSpPr txBox="1"/>
           <p:nvPr/>
         </p:nvSpPr>
@@ -21753,7 +21152,7 @@
       </p:sp>
       <p:graphicFrame>
         <p:nvGraphicFramePr>
-          <p:cNvPr id="13" name="Chart 12"/>
+          <p:cNvPr id="12" name="Chart 11"/>
           <p:cNvGraphicFramePr>
             <a:graphicFrameLocks noGrp="1"/>
           </p:cNvGraphicFramePr>
@@ -21771,7 +21170,7 @@
       </p:graphicFrame>
       <p:sp>
         <p:nvSpPr>
-          <p:cNvPr id="14" name="Rectangle 13"/>
+          <p:cNvPr id="13" name="Rectangle 12"/>
           <p:cNvSpPr/>
           <p:nvPr/>
         </p:nvSpPr>
@@ -21820,7 +21219,7 @@
       </p:sp>
       <p:sp>
         <p:nvSpPr>
-          <p:cNvPr id="15" name="Rectangle 14"/>
+          <p:cNvPr id="14" name="Rectangle 13"/>
           <p:cNvSpPr/>
           <p:nvPr/>
         </p:nvSpPr>
@@ -21869,7 +21268,7 @@
       </p:sp>
       <p:sp>
         <p:nvSpPr>
-          <p:cNvPr id="16" name="TextBox 15"/>
+          <p:cNvPr id="15" name="TextBox 14"/>
           <p:cNvSpPr txBox="1"/>
           <p:nvPr/>
         </p:nvSpPr>
@@ -21911,7 +21310,7 @@
       </p:sp>
       <p:sp>
         <p:nvSpPr>
-          <p:cNvPr id="17" name="TextBox 16"/>
+          <p:cNvPr id="16" name="TextBox 15"/>
           <p:cNvSpPr txBox="1"/>
           <p:nvPr/>
         </p:nvSpPr>
@@ -21953,7 +21352,7 @@
       </p:sp>
       <p:sp>
         <p:nvSpPr>
-          <p:cNvPr id="18" name="Rectangle 17"/>
+          <p:cNvPr id="17" name="Rectangle 16"/>
           <p:cNvSpPr/>
           <p:nvPr/>
         </p:nvSpPr>
@@ -22002,7 +21401,7 @@
       </p:sp>
       <p:sp>
         <p:nvSpPr>
-          <p:cNvPr id="19" name="TextBox 18"/>
+          <p:cNvPr id="18" name="TextBox 17"/>
           <p:cNvSpPr txBox="1"/>
           <p:nvPr/>
         </p:nvSpPr>
@@ -22044,7 +21443,7 @@
       </p:sp>
       <p:sp>
         <p:nvSpPr>
-          <p:cNvPr id="20" name="TextBox 19"/>
+          <p:cNvPr id="19" name="TextBox 18"/>
           <p:cNvSpPr txBox="1"/>
           <p:nvPr/>
         </p:nvSpPr>
@@ -22086,7 +21485,7 @@
       </p:sp>
       <p:sp>
         <p:nvSpPr>
-          <p:cNvPr id="21" name="TextBox 20"/>
+          <p:cNvPr id="20" name="TextBox 19"/>
           <p:cNvSpPr txBox="1"/>
           <p:nvPr/>
         </p:nvSpPr>
@@ -22202,7 +21601,7 @@
         <p:spPr>
           <a:xfrm>
             <a:off x="640080" y="329184"/>
-            <a:ext cx="5303520" cy="182880"/>
+            <a:ext cx="9875520" cy="182880"/>
           </a:xfrm>
           <a:prstGeom prst="rect">
             <a:avLst/>
@@ -22243,48 +21642,6 @@
         </p:nvSpPr>
         <p:spPr>
           <a:xfrm>
-            <a:off x="5897880" y="310896"/>
-            <a:ext cx="4800600" cy="256032"/>
-          </a:xfrm>
-          <a:prstGeom prst="rect">
-            <a:avLst/>
-          </a:prstGeom>
-          <a:noFill/>
-        </p:spPr>
-        <p:txBody>
-          <a:bodyPr wrap="none" lIns="9144" rIns="9144" tIns="9144" bIns="9144" anchor="t">
-            <a:spAutoFit/>
-          </a:bodyPr>
-          <a:lstStyle/>
-          <a:p>
-            <a:pPr algn="r">
-              <a:spcAft>
-                <a:spcPts val="0"/>
-              </a:spcAft>
-              <a:defRPr sz="680" b="1">
-                <a:solidFill>
-                  <a:srgbClr val="4F6B00"/>
-                </a:solidFill>
-                <a:latin typeface="Inter"/>
-              </a:defRPr>
-            </a:pPr>
-            <a:r>
-              <a:rPr>
-                <a:latin typeface="Inter"/>
-              </a:rPr>
-              <a:t>Illustrative, Gradient Maintained — demo data, not the client's holdings or managers</a:t>
-            </a:r>
-          </a:p>
-        </p:txBody>
-      </p:sp>
-      <p:sp>
-        <p:nvSpPr>
-          <p:cNvPr id="5" name="TextBox 4"/>
-          <p:cNvSpPr txBox="1"/>
-          <p:nvPr/>
-        </p:nvSpPr>
-        <p:spPr>
-          <a:xfrm>
             <a:off x="640080" y="566928"/>
             <a:ext cx="10058400" cy="530352"/>
           </a:xfrm>
@@ -22321,7 +21678,7 @@
       </p:sp>
       <p:sp>
         <p:nvSpPr>
-          <p:cNvPr id="6" name="Rectangle 5"/>
+          <p:cNvPr id="5" name="Rectangle 4"/>
           <p:cNvSpPr/>
           <p:nvPr/>
         </p:nvSpPr>
@@ -22370,7 +21727,7 @@
       </p:sp>
       <p:sp>
         <p:nvSpPr>
-          <p:cNvPr id="7" name="Rectangle 6"/>
+          <p:cNvPr id="6" name="Rectangle 5"/>
           <p:cNvSpPr/>
           <p:nvPr/>
         </p:nvSpPr>
@@ -22419,7 +21776,7 @@
       </p:sp>
       <p:sp>
         <p:nvSpPr>
-          <p:cNvPr id="8" name="TextBox 7"/>
+          <p:cNvPr id="7" name="TextBox 6"/>
           <p:cNvSpPr txBox="1"/>
           <p:nvPr/>
         </p:nvSpPr>
@@ -22461,7 +21818,7 @@
       </p:sp>
       <p:sp>
         <p:nvSpPr>
-          <p:cNvPr id="9" name="TextBox 8"/>
+          <p:cNvPr id="8" name="TextBox 7"/>
           <p:cNvSpPr txBox="1"/>
           <p:nvPr/>
         </p:nvSpPr>
@@ -22503,7 +21860,7 @@
       </p:sp>
       <p:graphicFrame>
         <p:nvGraphicFramePr>
-          <p:cNvPr id="10" name="Table 9"/>
+          <p:cNvPr id="9" name="Table 8"/>
           <p:cNvGraphicFramePr>
             <a:graphicFrameLocks noGrp="1"/>
           </p:cNvGraphicFramePr>
@@ -22652,7 +22009,7 @@
                         <a:rPr>
                           <a:latin typeface="Inter"/>
                         </a:rPr>
-                        <a:t>● complete</a:t>
+                        <a:t>● Complete</a:t>
                       </a:r>
                     </a:p>
                   </a:txBody>
@@ -22735,7 +22092,7 @@
                         <a:rPr>
                           <a:latin typeface="Inter"/>
                         </a:rPr>
-                        <a:t>● complete</a:t>
+                        <a:t>● Complete</a:t>
                       </a:r>
                     </a:p>
                   </a:txBody>
@@ -22818,7 +22175,7 @@
                         <a:rPr>
                           <a:latin typeface="Inter"/>
                         </a:rPr>
-                        <a:t>● complete</a:t>
+                        <a:t>● Complete</a:t>
                       </a:r>
                     </a:p>
                   </a:txBody>
@@ -22901,7 +22258,7 @@
                         <a:rPr>
                           <a:latin typeface="Inter"/>
                         </a:rPr>
-                        <a:t>● complete</a:t>
+                        <a:t>● Complete</a:t>
                       </a:r>
                     </a:p>
                   </a:txBody>
@@ -22984,7 +22341,7 @@
                         <a:rPr>
                           <a:latin typeface="Inter"/>
                         </a:rPr>
-                        <a:t>● partial</a:t>
+                        <a:t>● Partly available</a:t>
                       </a:r>
                     </a:p>
                   </a:txBody>
@@ -23028,7 +22385,7 @@
       </p:graphicFrame>
       <p:sp>
         <p:nvSpPr>
-          <p:cNvPr id="11" name="Rectangle 10"/>
+          <p:cNvPr id="10" name="Rectangle 9"/>
           <p:cNvSpPr/>
           <p:nvPr/>
         </p:nvSpPr>
@@ -23077,7 +22434,7 @@
       </p:sp>
       <p:sp>
         <p:nvSpPr>
-          <p:cNvPr id="12" name="TextBox 11"/>
+          <p:cNvPr id="11" name="TextBox 10"/>
           <p:cNvSpPr txBox="1"/>
           <p:nvPr/>
         </p:nvSpPr>
@@ -23119,7 +22476,7 @@
       </p:sp>
       <p:sp>
         <p:nvSpPr>
-          <p:cNvPr id="13" name="TextBox 12"/>
+          <p:cNvPr id="12" name="TextBox 11"/>
           <p:cNvSpPr txBox="1"/>
           <p:nvPr/>
         </p:nvSpPr>
@@ -23161,7 +22518,7 @@
       </p:sp>
       <p:sp>
         <p:nvSpPr>
-          <p:cNvPr id="14" name="TextBox 13"/>
+          <p:cNvPr id="13" name="TextBox 12"/>
           <p:cNvSpPr txBox="1"/>
           <p:nvPr/>
         </p:nvSpPr>
@@ -23277,7 +22634,7 @@
         <p:spPr>
           <a:xfrm>
             <a:off x="640080" y="329184"/>
-            <a:ext cx="5303520" cy="182880"/>
+            <a:ext cx="9875520" cy="182880"/>
           </a:xfrm>
           <a:prstGeom prst="rect">
             <a:avLst/>
@@ -23318,48 +22675,6 @@
         </p:nvSpPr>
         <p:spPr>
           <a:xfrm>
-            <a:off x="5897880" y="310896"/>
-            <a:ext cx="4800600" cy="256032"/>
-          </a:xfrm>
-          <a:prstGeom prst="rect">
-            <a:avLst/>
-          </a:prstGeom>
-          <a:noFill/>
-        </p:spPr>
-        <p:txBody>
-          <a:bodyPr wrap="none" lIns="9144" rIns="9144" tIns="9144" bIns="9144" anchor="t">
-            <a:spAutoFit/>
-          </a:bodyPr>
-          <a:lstStyle/>
-          <a:p>
-            <a:pPr algn="r">
-              <a:spcAft>
-                <a:spcPts val="0"/>
-              </a:spcAft>
-              <a:defRPr sz="680" b="1">
-                <a:solidFill>
-                  <a:srgbClr val="4F6B00"/>
-                </a:solidFill>
-                <a:latin typeface="Inter"/>
-              </a:defRPr>
-            </a:pPr>
-            <a:r>
-              <a:rPr>
-                <a:latin typeface="Inter"/>
-              </a:rPr>
-              <a:t>Illustrative, Gradient Maintained — demo data, not the client's holdings or managers</a:t>
-            </a:r>
-          </a:p>
-        </p:txBody>
-      </p:sp>
-      <p:sp>
-        <p:nvSpPr>
-          <p:cNvPr id="5" name="TextBox 4"/>
-          <p:cNvSpPr txBox="1"/>
-          <p:nvPr/>
-        </p:nvSpPr>
-        <p:spPr>
-          <a:xfrm>
             <a:off x="640080" y="566928"/>
             <a:ext cx="10058400" cy="530352"/>
           </a:xfrm>
@@ -23396,7 +22711,7 @@
       </p:sp>
       <p:sp>
         <p:nvSpPr>
-          <p:cNvPr id="6" name="Rectangle 5"/>
+          <p:cNvPr id="5" name="Rectangle 4"/>
           <p:cNvSpPr/>
           <p:nvPr/>
         </p:nvSpPr>
@@ -23445,7 +22760,7 @@
       </p:sp>
       <p:sp>
         <p:nvSpPr>
-          <p:cNvPr id="7" name="Rectangle 6"/>
+          <p:cNvPr id="6" name="Rectangle 5"/>
           <p:cNvSpPr/>
           <p:nvPr/>
         </p:nvSpPr>
@@ -23494,7 +22809,7 @@
       </p:sp>
       <p:sp>
         <p:nvSpPr>
-          <p:cNvPr id="8" name="TextBox 7"/>
+          <p:cNvPr id="7" name="TextBox 6"/>
           <p:cNvSpPr txBox="1"/>
           <p:nvPr/>
         </p:nvSpPr>
@@ -23536,7 +22851,7 @@
       </p:sp>
       <p:sp>
         <p:nvSpPr>
-          <p:cNvPr id="9" name="TextBox 8"/>
+          <p:cNvPr id="8" name="TextBox 7"/>
           <p:cNvSpPr txBox="1"/>
           <p:nvPr/>
         </p:nvSpPr>
@@ -23578,7 +22893,7 @@
       </p:sp>
       <p:graphicFrame>
         <p:nvGraphicFramePr>
-          <p:cNvPr id="10" name="Table 9"/>
+          <p:cNvPr id="9" name="Table 8"/>
           <p:cNvGraphicFramePr>
             <a:graphicFrameLocks noGrp="1"/>
           </p:cNvGraphicFramePr>
@@ -23940,7 +23255,7 @@
       </p:graphicFrame>
       <p:sp>
         <p:nvSpPr>
-          <p:cNvPr id="11" name="Rectangle 10"/>
+          <p:cNvPr id="10" name="Rectangle 9"/>
           <p:cNvSpPr/>
           <p:nvPr/>
         </p:nvSpPr>
@@ -23989,7 +23304,7 @@
       </p:sp>
       <p:sp>
         <p:nvSpPr>
-          <p:cNvPr id="12" name="Rectangle 11"/>
+          <p:cNvPr id="11" name="Rectangle 10"/>
           <p:cNvSpPr/>
           <p:nvPr/>
         </p:nvSpPr>
@@ -24038,7 +23353,7 @@
       </p:sp>
       <p:sp>
         <p:nvSpPr>
-          <p:cNvPr id="13" name="TextBox 12"/>
+          <p:cNvPr id="12" name="TextBox 11"/>
           <p:cNvSpPr txBox="1"/>
           <p:nvPr/>
         </p:nvSpPr>
@@ -24080,7 +23395,7 @@
       </p:sp>
       <p:sp>
         <p:nvSpPr>
-          <p:cNvPr id="14" name="TextBox 13"/>
+          <p:cNvPr id="13" name="TextBox 12"/>
           <p:cNvSpPr txBox="1"/>
           <p:nvPr/>
         </p:nvSpPr>
@@ -24122,7 +23437,7 @@
       </p:sp>
       <p:sp>
         <p:nvSpPr>
-          <p:cNvPr id="15" name="Rectangle 14"/>
+          <p:cNvPr id="14" name="Rectangle 13"/>
           <p:cNvSpPr/>
           <p:nvPr/>
         </p:nvSpPr>
@@ -24171,7 +23486,7 @@
       </p:sp>
       <p:sp>
         <p:nvSpPr>
-          <p:cNvPr id="16" name="TextBox 15"/>
+          <p:cNvPr id="15" name="TextBox 14"/>
           <p:cNvSpPr txBox="1"/>
           <p:nvPr/>
         </p:nvSpPr>
@@ -24213,7 +23528,7 @@
       </p:sp>
       <p:sp>
         <p:nvSpPr>
-          <p:cNvPr id="17" name="TextBox 16"/>
+          <p:cNvPr id="16" name="TextBox 15"/>
           <p:cNvSpPr txBox="1"/>
           <p:nvPr/>
         </p:nvSpPr>
@@ -24255,7 +23570,7 @@
       </p:sp>
       <p:sp>
         <p:nvSpPr>
-          <p:cNvPr id="18" name="TextBox 17"/>
+          <p:cNvPr id="17" name="TextBox 16"/>
           <p:cNvSpPr txBox="1"/>
           <p:nvPr/>
         </p:nvSpPr>
@@ -24371,7 +23686,7 @@
         <p:spPr>
           <a:xfrm>
             <a:off x="640080" y="329184"/>
-            <a:ext cx="5303520" cy="182880"/>
+            <a:ext cx="9875520" cy="182880"/>
           </a:xfrm>
           <a:prstGeom prst="rect">
             <a:avLst/>
@@ -24412,48 +23727,6 @@
         </p:nvSpPr>
         <p:spPr>
           <a:xfrm>
-            <a:off x="5897880" y="310896"/>
-            <a:ext cx="4800600" cy="256032"/>
-          </a:xfrm>
-          <a:prstGeom prst="rect">
-            <a:avLst/>
-          </a:prstGeom>
-          <a:noFill/>
-        </p:spPr>
-        <p:txBody>
-          <a:bodyPr wrap="none" lIns="9144" rIns="9144" tIns="9144" bIns="9144" anchor="t">
-            <a:spAutoFit/>
-          </a:bodyPr>
-          <a:lstStyle/>
-          <a:p>
-            <a:pPr algn="r">
-              <a:spcAft>
-                <a:spcPts val="0"/>
-              </a:spcAft>
-              <a:defRPr sz="680" b="1">
-                <a:solidFill>
-                  <a:srgbClr val="4F6B00"/>
-                </a:solidFill>
-                <a:latin typeface="Inter"/>
-              </a:defRPr>
-            </a:pPr>
-            <a:r>
-              <a:rPr>
-                <a:latin typeface="Inter"/>
-              </a:rPr>
-              <a:t>Illustrative, Gradient Maintained — demo data, not the client's holdings or managers</a:t>
-            </a:r>
-          </a:p>
-        </p:txBody>
-      </p:sp>
-      <p:sp>
-        <p:nvSpPr>
-          <p:cNvPr id="5" name="TextBox 4"/>
-          <p:cNvSpPr txBox="1"/>
-          <p:nvPr/>
-        </p:nvSpPr>
-        <p:spPr>
-          <a:xfrm>
             <a:off x="640080" y="566928"/>
             <a:ext cx="10058400" cy="530352"/>
           </a:xfrm>
@@ -24490,7 +23763,7 @@
       </p:sp>
       <p:sp>
         <p:nvSpPr>
-          <p:cNvPr id="6" name="Rectangle 5"/>
+          <p:cNvPr id="5" name="Rectangle 4"/>
           <p:cNvSpPr/>
           <p:nvPr/>
         </p:nvSpPr>
@@ -24539,7 +23812,7 @@
       </p:sp>
       <p:sp>
         <p:nvSpPr>
-          <p:cNvPr id="7" name="Rectangle 6"/>
+          <p:cNvPr id="6" name="Rectangle 5"/>
           <p:cNvSpPr/>
           <p:nvPr/>
         </p:nvSpPr>
@@ -24588,7 +23861,7 @@
       </p:sp>
       <p:sp>
         <p:nvSpPr>
-          <p:cNvPr id="8" name="TextBox 7"/>
+          <p:cNvPr id="7" name="TextBox 6"/>
           <p:cNvSpPr txBox="1"/>
           <p:nvPr/>
         </p:nvSpPr>
@@ -24630,7 +23903,7 @@
       </p:sp>
       <p:sp>
         <p:nvSpPr>
-          <p:cNvPr id="9" name="TextBox 8"/>
+          <p:cNvPr id="8" name="TextBox 7"/>
           <p:cNvSpPr txBox="1"/>
           <p:nvPr/>
         </p:nvSpPr>
@@ -24672,7 +23945,7 @@
       </p:sp>
       <p:graphicFrame>
         <p:nvGraphicFramePr>
-          <p:cNvPr id="10" name="Chart 9"/>
+          <p:cNvPr id="9" name="Chart 8"/>
           <p:cNvGraphicFramePr>
             <a:graphicFrameLocks noGrp="1"/>
           </p:cNvGraphicFramePr>
@@ -24690,7 +23963,7 @@
       </p:graphicFrame>
       <p:sp>
         <p:nvSpPr>
-          <p:cNvPr id="11" name="Rectangle 10"/>
+          <p:cNvPr id="10" name="Rectangle 9"/>
           <p:cNvSpPr/>
           <p:nvPr/>
         </p:nvSpPr>
@@ -24739,7 +24012,7 @@
       </p:sp>
       <p:sp>
         <p:nvSpPr>
-          <p:cNvPr id="12" name="TextBox 11"/>
+          <p:cNvPr id="11" name="TextBox 10"/>
           <p:cNvSpPr txBox="1"/>
           <p:nvPr/>
         </p:nvSpPr>
@@ -24781,7 +24054,7 @@
       </p:sp>
       <p:sp>
         <p:nvSpPr>
-          <p:cNvPr id="13" name="TextBox 12"/>
+          <p:cNvPr id="12" name="TextBox 11"/>
           <p:cNvSpPr txBox="1"/>
           <p:nvPr/>
         </p:nvSpPr>
@@ -24823,7 +24096,7 @@
       </p:sp>
       <p:sp>
         <p:nvSpPr>
-          <p:cNvPr id="14" name="TextBox 13"/>
+          <p:cNvPr id="13" name="TextBox 12"/>
           <p:cNvSpPr txBox="1"/>
           <p:nvPr/>
         </p:nvSpPr>
@@ -24939,7 +24212,7 @@
         <p:spPr>
           <a:xfrm>
             <a:off x="640080" y="329184"/>
-            <a:ext cx="5303520" cy="182880"/>
+            <a:ext cx="9875520" cy="182880"/>
           </a:xfrm>
           <a:prstGeom prst="rect">
             <a:avLst/>
@@ -24980,48 +24253,6 @@
         </p:nvSpPr>
         <p:spPr>
           <a:xfrm>
-            <a:off x="5897880" y="310896"/>
-            <a:ext cx="4800600" cy="256032"/>
-          </a:xfrm>
-          <a:prstGeom prst="rect">
-            <a:avLst/>
-          </a:prstGeom>
-          <a:noFill/>
-        </p:spPr>
-        <p:txBody>
-          <a:bodyPr wrap="none" lIns="9144" rIns="9144" tIns="9144" bIns="9144" anchor="t">
-            <a:spAutoFit/>
-          </a:bodyPr>
-          <a:lstStyle/>
-          <a:p>
-            <a:pPr algn="r">
-              <a:spcAft>
-                <a:spcPts val="0"/>
-              </a:spcAft>
-              <a:defRPr sz="680" b="1">
-                <a:solidFill>
-                  <a:srgbClr val="4F6B00"/>
-                </a:solidFill>
-                <a:latin typeface="Inter"/>
-              </a:defRPr>
-            </a:pPr>
-            <a:r>
-              <a:rPr>
-                <a:latin typeface="Inter"/>
-              </a:rPr>
-              <a:t>Illustrative, Gradient Maintained — demo data, not the client's holdings or managers</a:t>
-            </a:r>
-          </a:p>
-        </p:txBody>
-      </p:sp>
-      <p:sp>
-        <p:nvSpPr>
-          <p:cNvPr id="5" name="TextBox 4"/>
-          <p:cNvSpPr txBox="1"/>
-          <p:nvPr/>
-        </p:nvSpPr>
-        <p:spPr>
-          <a:xfrm>
             <a:off x="640080" y="566928"/>
             <a:ext cx="10058400" cy="530352"/>
           </a:xfrm>
@@ -25058,7 +24289,7 @@
       </p:sp>
       <p:sp>
         <p:nvSpPr>
-          <p:cNvPr id="6" name="Rectangle 5"/>
+          <p:cNvPr id="5" name="Rectangle 4"/>
           <p:cNvSpPr/>
           <p:nvPr/>
         </p:nvSpPr>
@@ -25107,7 +24338,7 @@
       </p:sp>
       <p:sp>
         <p:nvSpPr>
-          <p:cNvPr id="7" name="Rectangle 6"/>
+          <p:cNvPr id="6" name="Rectangle 5"/>
           <p:cNvSpPr/>
           <p:nvPr/>
         </p:nvSpPr>
@@ -25156,7 +24387,7 @@
       </p:sp>
       <p:sp>
         <p:nvSpPr>
-          <p:cNvPr id="8" name="TextBox 7"/>
+          <p:cNvPr id="7" name="TextBox 6"/>
           <p:cNvSpPr txBox="1"/>
           <p:nvPr/>
         </p:nvSpPr>
@@ -25198,7 +24429,7 @@
       </p:sp>
       <p:sp>
         <p:nvSpPr>
-          <p:cNvPr id="9" name="TextBox 8"/>
+          <p:cNvPr id="8" name="TextBox 7"/>
           <p:cNvSpPr txBox="1"/>
           <p:nvPr/>
         </p:nvSpPr>
@@ -25240,7 +24471,7 @@
       </p:sp>
       <p:graphicFrame>
         <p:nvGraphicFramePr>
-          <p:cNvPr id="10" name="Table 9"/>
+          <p:cNvPr id="9" name="Table 8"/>
           <p:cNvGraphicFramePr>
             <a:graphicFrameLocks noGrp="1"/>
           </p:cNvGraphicFramePr>
@@ -26228,7 +25459,7 @@
       </p:graphicFrame>
       <p:sp>
         <p:nvSpPr>
-          <p:cNvPr id="11" name="Rectangle 10"/>
+          <p:cNvPr id="10" name="Rectangle 9"/>
           <p:cNvSpPr/>
           <p:nvPr/>
         </p:nvSpPr>
@@ -26277,7 +25508,7 @@
       </p:sp>
       <p:sp>
         <p:nvSpPr>
-          <p:cNvPr id="12" name="TextBox 11"/>
+          <p:cNvPr id="11" name="TextBox 10"/>
           <p:cNvSpPr txBox="1"/>
           <p:nvPr/>
         </p:nvSpPr>
@@ -26319,7 +25550,7 @@
       </p:sp>
       <p:sp>
         <p:nvSpPr>
-          <p:cNvPr id="13" name="TextBox 12"/>
+          <p:cNvPr id="12" name="TextBox 11"/>
           <p:cNvSpPr txBox="1"/>
           <p:nvPr/>
         </p:nvSpPr>
@@ -26361,7 +25592,7 @@
       </p:sp>
       <p:sp>
         <p:nvSpPr>
-          <p:cNvPr id="14" name="TextBox 13"/>
+          <p:cNvPr id="13" name="TextBox 12"/>
           <p:cNvSpPr txBox="1"/>
           <p:nvPr/>
         </p:nvSpPr>
@@ -26477,7 +25708,7 @@
         <p:spPr>
           <a:xfrm>
             <a:off x="640080" y="329184"/>
-            <a:ext cx="5303520" cy="182880"/>
+            <a:ext cx="9875520" cy="182880"/>
           </a:xfrm>
           <a:prstGeom prst="rect">
             <a:avLst/>
@@ -26518,48 +25749,6 @@
         </p:nvSpPr>
         <p:spPr>
           <a:xfrm>
-            <a:off x="5897880" y="310896"/>
-            <a:ext cx="4800600" cy="256032"/>
-          </a:xfrm>
-          <a:prstGeom prst="rect">
-            <a:avLst/>
-          </a:prstGeom>
-          <a:noFill/>
-        </p:spPr>
-        <p:txBody>
-          <a:bodyPr wrap="none" lIns="9144" rIns="9144" tIns="9144" bIns="9144" anchor="t">
-            <a:spAutoFit/>
-          </a:bodyPr>
-          <a:lstStyle/>
-          <a:p>
-            <a:pPr algn="r">
-              <a:spcAft>
-                <a:spcPts val="0"/>
-              </a:spcAft>
-              <a:defRPr sz="680" b="1">
-                <a:solidFill>
-                  <a:srgbClr val="4F6B00"/>
-                </a:solidFill>
-                <a:latin typeface="Inter"/>
-              </a:defRPr>
-            </a:pPr>
-            <a:r>
-              <a:rPr>
-                <a:latin typeface="Inter"/>
-              </a:rPr>
-              <a:t>Illustrative, Gradient Maintained — demo data, not the client's holdings or managers</a:t>
-            </a:r>
-          </a:p>
-        </p:txBody>
-      </p:sp>
-      <p:sp>
-        <p:nvSpPr>
-          <p:cNvPr id="5" name="TextBox 4"/>
-          <p:cNvSpPr txBox="1"/>
-          <p:nvPr/>
-        </p:nvSpPr>
-        <p:spPr>
-          <a:xfrm>
             <a:off x="640080" y="566928"/>
             <a:ext cx="10058400" cy="530352"/>
           </a:xfrm>
@@ -26596,7 +25785,7 @@
       </p:sp>
       <p:sp>
         <p:nvSpPr>
-          <p:cNvPr id="6" name="Rectangle 5"/>
+          <p:cNvPr id="5" name="Rectangle 4"/>
           <p:cNvSpPr/>
           <p:nvPr/>
         </p:nvSpPr>
@@ -26645,7 +25834,7 @@
       </p:sp>
       <p:sp>
         <p:nvSpPr>
-          <p:cNvPr id="7" name="Rectangle 6"/>
+          <p:cNvPr id="6" name="Rectangle 5"/>
           <p:cNvSpPr/>
           <p:nvPr/>
         </p:nvSpPr>
@@ -26694,7 +25883,7 @@
       </p:sp>
       <p:sp>
         <p:nvSpPr>
-          <p:cNvPr id="8" name="TextBox 7"/>
+          <p:cNvPr id="7" name="TextBox 6"/>
           <p:cNvSpPr txBox="1"/>
           <p:nvPr/>
         </p:nvSpPr>
@@ -26736,7 +25925,7 @@
       </p:sp>
       <p:sp>
         <p:nvSpPr>
-          <p:cNvPr id="9" name="TextBox 8"/>
+          <p:cNvPr id="8" name="TextBox 7"/>
           <p:cNvSpPr txBox="1"/>
           <p:nvPr/>
         </p:nvSpPr>
@@ -26778,7 +25967,7 @@
       </p:sp>
       <p:graphicFrame>
         <p:nvGraphicFramePr>
-          <p:cNvPr id="10" name="Chart 9"/>
+          <p:cNvPr id="9" name="Chart 8"/>
           <p:cNvGraphicFramePr>
             <a:graphicFrameLocks noGrp="1"/>
           </p:cNvGraphicFramePr>
@@ -26796,7 +25985,7 @@
       </p:graphicFrame>
       <p:sp>
         <p:nvSpPr>
-          <p:cNvPr id="11" name="Rectangle 10"/>
+          <p:cNvPr id="10" name="Rectangle 9"/>
           <p:cNvSpPr/>
           <p:nvPr/>
         </p:nvSpPr>
@@ -26845,7 +26034,7 @@
       </p:sp>
       <p:sp>
         <p:nvSpPr>
-          <p:cNvPr id="12" name="TextBox 11"/>
+          <p:cNvPr id="11" name="TextBox 10"/>
           <p:cNvSpPr txBox="1"/>
           <p:nvPr/>
         </p:nvSpPr>
@@ -26887,7 +26076,7 @@
       </p:sp>
       <p:sp>
         <p:nvSpPr>
-          <p:cNvPr id="13" name="TextBox 12"/>
+          <p:cNvPr id="12" name="TextBox 11"/>
           <p:cNvSpPr txBox="1"/>
           <p:nvPr/>
         </p:nvSpPr>
@@ -26929,7 +26118,7 @@
       </p:sp>
       <p:sp>
         <p:nvSpPr>
-          <p:cNvPr id="14" name="TextBox 13"/>
+          <p:cNvPr id="13" name="TextBox 12"/>
           <p:cNvSpPr txBox="1"/>
           <p:nvPr/>
         </p:nvSpPr>
